--- a/keynote-iwbi-2026/pptx/sections/IWBI2026_Trivedi_02b_EraII_2026.pptx
+++ b/keynote-iwbi-2026/pptx/sections/IWBI2026_Trivedi_02b_EraII_2026.pptx
@@ -4936,16 +4936,40 @@
         <p:nvPr/>
       </p:nvGrpSpPr>
       <p:grpSpPr/>
-      <p:sp>
-        <p:nvSpPr>
-          <p:cNvPr id="2" name="Rectangle 1"/>
+      <p:pic>
+        <p:nvPicPr>
+          <p:cNvPr id="2" name="Picture 1" descr="bg_motif.png"/>
+          <p:cNvPicPr>
+            <a:picLocks noChangeAspect="1"/>
+          </p:cNvPicPr>
+          <p:nvPr/>
+        </p:nvPicPr>
+        <p:blipFill>
+          <a:blip r:embed="rId2"/>
+          <a:stretch>
+            <a:fillRect/>
+          </a:stretch>
+        </p:blipFill>
+        <p:spPr>
+          <a:xfrm>
+            <a:off x="0" y="0"/>
+            <a:ext cx="12191695" cy="6858000"/>
+          </a:xfrm>
+          <a:prstGeom prst="rect">
+            <a:avLst/>
+          </a:prstGeom>
+        </p:spPr>
+      </p:pic>
+      <p:sp>
+        <p:nvSpPr>
+          <p:cNvPr id="3" name="Rectangle 2"/>
           <p:cNvSpPr/>
           <p:nvPr/>
         </p:nvSpPr>
         <p:spPr>
           <a:xfrm>
             <a:off x="0" y="0"/>
-            <a:ext cx="12191695" cy="38100"/>
+            <a:ext cx="5486400" cy="38100"/>
           </a:xfrm>
           <a:prstGeom prst="rect">
             <a:avLst/>
@@ -4982,14 +5006,14 @@
       </p:sp>
       <p:sp>
         <p:nvSpPr>
-          <p:cNvPr id="3" name="TextBox 2"/>
+          <p:cNvPr id="4" name="TextBox 3"/>
           <p:cNvSpPr txBox="1"/>
           <p:nvPr/>
         </p:nvSpPr>
         <p:spPr>
           <a:xfrm>
-            <a:off x="777240" y="2756408"/>
-            <a:ext cx="5989320" cy="346456"/>
+            <a:off x="777240" y="566928"/>
+            <a:ext cx="8229600" cy="365760"/>
           </a:xfrm>
           <a:prstGeom prst="rect">
             <a:avLst/>
@@ -4997,41 +5021,38 @@
           <a:noFill/>
         </p:spPr>
         <p:txBody>
-          <a:bodyPr wrap="square" lIns="25400" rIns="25400" tIns="12700" bIns="12700">
-            <a:noAutofit/>
+          <a:bodyPr wrap="square" anchor="t" lIns="0" rIns="0" tIns="0" bIns="0">
+            <a:spAutoFit/>
           </a:bodyPr>
           <a:lstStyle/>
           <a:p>
             <a:pPr algn="l">
               <a:lnSpc>
-                <a:spcPct val="128000"/>
+                <a:spcPct val="100000"/>
               </a:lnSpc>
-              <a:spcAft>
-                <a:spcPts val="400"/>
-              </a:spcAft>
             </a:pPr>
             <a:r>
-              <a:rPr sz="1400" b="0">
-                <a:solidFill>
-                  <a:srgbClr val="9DA9B5"/>
-                </a:solidFill>
-                <a:latin typeface="Arial"/>
-              </a:rPr>
-              <a:t>Era II · 2026</a:t>
-            </a:r>
-          </a:p>
-        </p:txBody>
-      </p:sp>
-      <p:sp>
-        <p:nvSpPr>
-          <p:cNvPr id="4" name="TextBox 3"/>
+              <a:rPr sz="1100" b="1" i="0">
+                <a:solidFill>
+                  <a:srgbClr val="E7AC51"/>
+                </a:solidFill>
+                <a:latin typeface="Consolas"/>
+              </a:rPr>
+              <a:t>ERA II · 2026</a:t>
+            </a:r>
+          </a:p>
+        </p:txBody>
+      </p:sp>
+      <p:sp>
+        <p:nvSpPr>
+          <p:cNvPr id="5" name="TextBox 4"/>
           <p:cNvSpPr txBox="1"/>
           <p:nvPr/>
         </p:nvSpPr>
         <p:spPr>
           <a:xfrm>
-            <a:off x="777240" y="3102864"/>
-            <a:ext cx="5989320" cy="790447"/>
+            <a:off x="777240" y="2286000"/>
+            <a:ext cx="6126480" cy="1463040"/>
           </a:xfrm>
           <a:prstGeom prst="rect">
             <a:avLst/>
@@ -5039,21 +5060,18 @@
           <a:noFill/>
         </p:spPr>
         <p:txBody>
-          <a:bodyPr wrap="square" lIns="25400" rIns="25400" tIns="12700" bIns="12700">
-            <a:noAutofit/>
+          <a:bodyPr wrap="square" anchor="t" lIns="0" rIns="0" tIns="0" bIns="0">
+            <a:spAutoFit/>
           </a:bodyPr>
           <a:lstStyle/>
           <a:p>
             <a:pPr algn="l">
               <a:lnSpc>
-                <a:spcPct val="106000"/>
+                <a:spcPct val="100000"/>
               </a:lnSpc>
-              <a:spcAft>
-                <a:spcPts val="400"/>
-              </a:spcAft>
             </a:pPr>
             <a:r>
-              <a:rPr sz="4400" b="0">
+              <a:rPr sz="5000" b="1" i="0">
                 <a:solidFill>
                   <a:srgbClr val="ECEFF3"/>
                 </a:solidFill>
@@ -5062,7 +5080,7 @@
               <a:t>The year is </a:t>
             </a:r>
             <a:r>
-              <a:rPr sz="4400" b="0">
+              <a:rPr sz="5000" b="1" i="0">
                 <a:solidFill>
                   <a:srgbClr val="E7AC51"/>
                 </a:solidFill>
@@ -5075,14 +5093,14 @@
       </p:sp>
       <p:sp>
         <p:nvSpPr>
-          <p:cNvPr id="5" name="TextBox 4"/>
+          <p:cNvPr id="6" name="TextBox 5"/>
           <p:cNvSpPr txBox="1"/>
           <p:nvPr/>
         </p:nvSpPr>
         <p:spPr>
           <a:xfrm>
-            <a:off x="777240" y="3893312"/>
-            <a:ext cx="5989320" cy="574040"/>
+            <a:off x="777240" y="3977639"/>
+            <a:ext cx="6035040" cy="1463040"/>
           </a:xfrm>
           <a:prstGeom prst="rect">
             <a:avLst/>
@@ -5090,21 +5108,18 @@
           <a:noFill/>
         </p:spPr>
         <p:txBody>
-          <a:bodyPr wrap="square" lIns="25400" rIns="25400" tIns="12700" bIns="12700">
-            <a:noAutofit/>
+          <a:bodyPr wrap="square" anchor="t" lIns="0" rIns="0" tIns="0" bIns="0">
+            <a:spAutoFit/>
           </a:bodyPr>
           <a:lstStyle/>
           <a:p>
             <a:pPr algn="l">
               <a:lnSpc>
-                <a:spcPct val="128000"/>
+                <a:spcPct val="130000"/>
               </a:lnSpc>
-              <a:spcAft>
-                <a:spcPts val="400"/>
-              </a:spcAft>
             </a:pPr>
             <a:r>
-              <a:rPr sz="1400" b="0">
+              <a:rPr sz="1900" b="0" i="0">
                 <a:solidFill>
                   <a:srgbClr val="9DA9B5"/>
                 </a:solidFill>
@@ -5113,7 +5128,7 @@
               <a:t>Ten years on, the early promise has been put to the test — </a:t>
             </a:r>
             <a:r>
-              <a:rPr sz="1400" b="1">
+              <a:rPr sz="1900" b="1" i="0">
                 <a:solidFill>
                   <a:srgbClr val="ECEFF3"/>
                 </a:solidFill>
@@ -5126,22 +5141,22 @@
       </p:sp>
       <p:pic>
         <p:nvPicPr>
-          <p:cNvPr id="6" name="Picture 5" descr="s_fc1c61fe68.png"/>
+          <p:cNvPr id="7" name="Picture 6" descr="svg_fc1c61fe68.png"/>
           <p:cNvPicPr>
             <a:picLocks noChangeAspect="1"/>
           </p:cNvPicPr>
           <p:nvPr/>
         </p:nvPicPr>
         <p:blipFill>
-          <a:blip r:embed="rId3"/>
+          <a:blip r:embed="rId4"/>
           <a:stretch>
             <a:fillRect/>
           </a:stretch>
         </p:blipFill>
         <p:spPr>
           <a:xfrm>
-            <a:off x="6995160" y="2109651"/>
-            <a:ext cx="4617720" cy="2638697"/>
+            <a:off x="7040880" y="2305594"/>
+            <a:ext cx="4572000" cy="2612571"/>
           </a:xfrm>
           <a:prstGeom prst="rect">
             <a:avLst/>
@@ -5174,16 +5189,40 @@
         <p:nvPr/>
       </p:nvGrpSpPr>
       <p:grpSpPr/>
-      <p:sp>
-        <p:nvSpPr>
-          <p:cNvPr id="2" name="Rectangle 1"/>
+      <p:pic>
+        <p:nvPicPr>
+          <p:cNvPr id="2" name="Picture 1" descr="bg_motif.png"/>
+          <p:cNvPicPr>
+            <a:picLocks noChangeAspect="1"/>
+          </p:cNvPicPr>
+          <p:nvPr/>
+        </p:nvPicPr>
+        <p:blipFill>
+          <a:blip r:embed="rId2"/>
+          <a:stretch>
+            <a:fillRect/>
+          </a:stretch>
+        </p:blipFill>
+        <p:spPr>
+          <a:xfrm>
+            <a:off x="0" y="0"/>
+            <a:ext cx="12191695" cy="6858000"/>
+          </a:xfrm>
+          <a:prstGeom prst="rect">
+            <a:avLst/>
+          </a:prstGeom>
+        </p:spPr>
+      </p:pic>
+      <p:sp>
+        <p:nvSpPr>
+          <p:cNvPr id="3" name="Rectangle 2"/>
           <p:cNvSpPr/>
           <p:nvPr/>
         </p:nvSpPr>
         <p:spPr>
           <a:xfrm>
             <a:off x="0" y="0"/>
-            <a:ext cx="12191695" cy="38100"/>
+            <a:ext cx="5486400" cy="38100"/>
           </a:xfrm>
           <a:prstGeom prst="rect">
             <a:avLst/>
@@ -5220,14 +5259,14 @@
       </p:sp>
       <p:sp>
         <p:nvSpPr>
-          <p:cNvPr id="3" name="TextBox 2"/>
+          <p:cNvPr id="4" name="TextBox 3"/>
           <p:cNvSpPr txBox="1"/>
           <p:nvPr/>
         </p:nvSpPr>
         <p:spPr>
           <a:xfrm>
-            <a:off x="777240" y="411480"/>
-            <a:ext cx="8686800" cy="365760"/>
+            <a:off x="777240" y="502920"/>
+            <a:ext cx="8229600" cy="320040"/>
           </a:xfrm>
           <a:prstGeom prst="rect">
             <a:avLst/>
@@ -5235,123 +5274,24 @@
           <a:noFill/>
         </p:spPr>
         <p:txBody>
-          <a:bodyPr wrap="square" lIns="25400" rIns="25400" tIns="12700" bIns="12700">
-            <a:noAutofit/>
+          <a:bodyPr wrap="square" anchor="t" lIns="0" rIns="0" tIns="0" bIns="0">
+            <a:spAutoFit/>
           </a:bodyPr>
           <a:lstStyle/>
           <a:p>
             <a:pPr algn="l">
               <a:lnSpc>
-                <a:spcPct val="128000"/>
+                <a:spcPct val="100000"/>
               </a:lnSpc>
-              <a:spcAft>
-                <a:spcPts val="400"/>
-              </a:spcAft>
             </a:pPr>
             <a:r>
-              <a:rPr sz="1100" b="1">
+              <a:rPr sz="1100" b="1" i="0">
                 <a:solidFill>
                   <a:srgbClr val="E7AC51"/>
                 </a:solidFill>
                 <a:latin typeface="Consolas"/>
               </a:rPr>
               <a:t>ERA III · 2026</a:t>
-            </a:r>
-          </a:p>
-        </p:txBody>
-      </p:sp>
-      <p:sp>
-        <p:nvSpPr>
-          <p:cNvPr id="4" name="TextBox 3"/>
-          <p:cNvSpPr txBox="1"/>
-          <p:nvPr/>
-        </p:nvSpPr>
-        <p:spPr>
-          <a:xfrm>
-            <a:off x="777240" y="2308098"/>
-            <a:ext cx="10607040" cy="574040"/>
-          </a:xfrm>
-          <a:prstGeom prst="rect">
-            <a:avLst/>
-          </a:prstGeom>
-          <a:noFill/>
-        </p:spPr>
-        <p:txBody>
-          <a:bodyPr wrap="square" lIns="25400" rIns="25400" tIns="12700" bIns="12700">
-            <a:noAutofit/>
-          </a:bodyPr>
-          <a:lstStyle/>
-          <a:p>
-            <a:pPr algn="l">
-              <a:lnSpc>
-                <a:spcPct val="128000"/>
-              </a:lnSpc>
-              <a:spcAft>
-                <a:spcPts val="400"/>
-              </a:spcAft>
-            </a:pPr>
-            <a:r>
-              <a:rPr sz="1400" b="0">
-                <a:solidFill>
-                  <a:srgbClr val="9DA9B5"/>
-                </a:solidFill>
-                <a:latin typeface="Arial"/>
-              </a:rPr>
-              <a:t>For 40 years, the only risk signal we could read off the image was </a:t>
-            </a:r>
-            <a:r>
-              <a:rPr sz="1400" b="0">
-                <a:solidFill>
-                  <a:srgbClr val="E7AC51"/>
-                </a:solidFill>
-                <a:latin typeface="Arial"/>
-              </a:rPr>
-              <a:t>density</a:t>
-            </a:r>
-            <a:r>
-              <a:rPr sz="1400" b="0">
-                <a:solidFill>
-                  <a:srgbClr val="9DA9B5"/>
-                </a:solidFill>
-                <a:latin typeface="Arial"/>
-              </a:rPr>
-              <a:t>. The clinical models layered on top — </a:t>
-            </a:r>
-            <a:r>
-              <a:rPr sz="1400" b="0">
-                <a:solidFill>
-                  <a:srgbClr val="E7AC51"/>
-                </a:solidFill>
-                <a:latin typeface="Arial"/>
-              </a:rPr>
-              <a:t>Gail</a:t>
-            </a:r>
-            <a:r>
-              <a:rPr sz="1400" b="0">
-                <a:solidFill>
-                  <a:srgbClr val="9DA9B5"/>
-                </a:solidFill>
-                <a:latin typeface="Arial"/>
-              </a:rPr>
-              <a:t> and </a:t>
-            </a:r>
-            <a:r>
-              <a:rPr sz="1400" b="0">
-                <a:solidFill>
-                  <a:srgbClr val="E7AC51"/>
-                </a:solidFill>
-                <a:latin typeface="Arial"/>
-              </a:rPr>
-              <a:t>Tyrer-Cuzick</a:t>
-            </a:r>
-            <a:r>
-              <a:rPr sz="1400" b="0">
-                <a:solidFill>
-                  <a:srgbClr val="9DA9B5"/>
-                </a:solidFill>
-                <a:latin typeface="Arial"/>
-              </a:rPr>
-              <a:t> — were hardly better than a coin flip.</a:t>
             </a:r>
           </a:p>
         </p:txBody>
@@ -5364,8 +5304,8 @@
         </p:nvSpPr>
         <p:spPr>
           <a:xfrm>
-            <a:off x="777240" y="2882138"/>
-            <a:ext cx="10607040" cy="256540"/>
+            <a:off x="777240" y="1371600"/>
+            <a:ext cx="10424160" cy="2194560"/>
           </a:xfrm>
           <a:prstGeom prst="rect">
             <a:avLst/>
@@ -5373,8 +5313,8 @@
           <a:noFill/>
         </p:spPr>
         <p:txBody>
-          <a:bodyPr wrap="square" lIns="25400" rIns="25400" tIns="12700" bIns="12700">
-            <a:noAutofit/>
+          <a:bodyPr wrap="square" anchor="t" lIns="0" rIns="0" tIns="0" bIns="0">
+            <a:spAutoFit/>
           </a:bodyPr>
           <a:lstStyle/>
           <a:p>
@@ -5382,18 +5322,69 @@
               <a:lnSpc>
                 <a:spcPct val="130000"/>
               </a:lnSpc>
-              <a:spcAft>
-                <a:spcPts val="400"/>
-              </a:spcAft>
             </a:pPr>
             <a:r>
-              <a:rPr sz="1000" b="0">
-                <a:solidFill>
-                  <a:srgbClr val="5C6975"/>
-                </a:solidFill>
-                <a:latin typeface="Consolas"/>
-              </a:rPr>
-              <a:t>Gail · Tyrer-Cuzick · BCSC — questionnaire + density models</a:t>
+              <a:rPr sz="2200" b="0" i="0">
+                <a:solidFill>
+                  <a:srgbClr val="9DA9B5"/>
+                </a:solidFill>
+                <a:latin typeface="Arial"/>
+              </a:rPr>
+              <a:t>For 40 years, the only risk signal we could read off the image was </a:t>
+            </a:r>
+            <a:r>
+              <a:rPr sz="2200" b="1" i="0">
+                <a:solidFill>
+                  <a:srgbClr val="ECEFF3"/>
+                </a:solidFill>
+                <a:latin typeface="Arial"/>
+              </a:rPr>
+              <a:t>density.</a:t>
+            </a:r>
+            <a:r>
+              <a:rPr sz="2200" b="0" i="0">
+                <a:solidFill>
+                  <a:srgbClr val="9DA9B5"/>
+                </a:solidFill>
+                <a:latin typeface="Arial"/>
+              </a:rPr>
+              <a:t> The clinical models layered on top — </a:t>
+            </a:r>
+            <a:r>
+              <a:rPr sz="2200" b="1" i="0">
+                <a:solidFill>
+                  <a:srgbClr val="ECEFF3"/>
+                </a:solidFill>
+                <a:latin typeface="Arial"/>
+              </a:rPr>
+              <a:t>Gail</a:t>
+            </a:r>
+            <a:r>
+              <a:rPr sz="2200" b="0" i="0">
+                <a:solidFill>
+                  <a:srgbClr val="9DA9B5"/>
+                </a:solidFill>
+                <a:latin typeface="Arial"/>
+              </a:rPr>
+              <a:t> and </a:t>
+            </a:r>
+            <a:r>
+              <a:rPr sz="2200" b="1" i="0">
+                <a:solidFill>
+                  <a:srgbClr val="ECEFF3"/>
+                </a:solidFill>
+                <a:latin typeface="Arial"/>
+              </a:rPr>
+              <a:t>Tyrer-Cuzick</a:t>
+            </a:r>
+            <a:r>
+              <a:rPr sz="2200" b="0" i="0">
+                <a:solidFill>
+                  <a:srgbClr val="9DA9B5"/>
+                </a:solidFill>
+                <a:latin typeface="Arial"/>
+              </a:rPr>
+              <a:t> — were hardly better than a coin flip.</a:t>
             </a:r>
           </a:p>
         </p:txBody>
@@ -5406,8 +5397,8 @@
         </p:nvSpPr>
         <p:spPr>
           <a:xfrm>
-            <a:off x="777240" y="3138677"/>
-            <a:ext cx="10607040" cy="346456"/>
+            <a:off x="777240" y="3749039"/>
+            <a:ext cx="4572000" cy="502920"/>
           </a:xfrm>
           <a:prstGeom prst="rect">
             <a:avLst/>
@@ -5415,23 +5406,20 @@
           <a:noFill/>
         </p:spPr>
         <p:txBody>
-          <a:bodyPr wrap="square" lIns="25400" rIns="25400" tIns="12700" bIns="12700">
-            <a:noAutofit/>
+          <a:bodyPr wrap="square" anchor="t" lIns="0" rIns="0" tIns="0" bIns="0">
+            <a:spAutoFit/>
           </a:bodyPr>
           <a:lstStyle/>
           <a:p>
             <a:pPr algn="l">
               <a:lnSpc>
-                <a:spcPct val="128000"/>
+                <a:spcPct val="100000"/>
               </a:lnSpc>
-              <a:spcAft>
-                <a:spcPts val="400"/>
-              </a:spcAft>
             </a:pPr>
             <a:r>
-              <a:rPr sz="1400" b="0">
-                <a:solidFill>
-                  <a:srgbClr val="9DA9B5"/>
+              <a:rPr sz="4400" b="1" i="0">
+                <a:solidFill>
+                  <a:srgbClr val="E7AC51"/>
                 </a:solidFill>
                 <a:latin typeface="Arial"/>
               </a:rPr>
@@ -5448,8 +5436,8 @@
         </p:nvSpPr>
         <p:spPr>
           <a:xfrm>
-            <a:off x="777240" y="3485134"/>
-            <a:ext cx="10607040" cy="346456"/>
+            <a:off x="777240" y="4242816"/>
+            <a:ext cx="4572000" cy="548640"/>
           </a:xfrm>
           <a:prstGeom prst="rect">
             <a:avLst/>
@@ -5457,25 +5445,22 @@
           <a:noFill/>
         </p:spPr>
         <p:txBody>
-          <a:bodyPr wrap="square" lIns="25400" rIns="25400" tIns="12700" bIns="12700">
-            <a:noAutofit/>
+          <a:bodyPr wrap="square" anchor="t" lIns="0" rIns="0" tIns="0" bIns="0">
+            <a:spAutoFit/>
           </a:bodyPr>
           <a:lstStyle/>
           <a:p>
             <a:pPr algn="l">
               <a:lnSpc>
-                <a:spcPct val="128000"/>
+                <a:spcPct val="120000"/>
               </a:lnSpc>
-              <a:spcAft>
-                <a:spcPts val="400"/>
-              </a:spcAft>
             </a:pPr>
             <a:r>
-              <a:rPr sz="1400" b="0">
+              <a:rPr sz="1100" b="0" i="0">
                 <a:solidFill>
                   <a:srgbClr val="9DA9B5"/>
                 </a:solidFill>
-                <a:latin typeface="Arial"/>
+                <a:latin typeface="Consolas"/>
               </a:rPr>
               <a:t>Tyrer-Cuzick v8 · 5-yr AUC</a:t>
             </a:r>
@@ -5490,8 +5475,8 @@
         </p:nvSpPr>
         <p:spPr>
           <a:xfrm>
-            <a:off x="777240" y="3831589"/>
-            <a:ext cx="10607040" cy="346456"/>
+            <a:off x="5943600" y="3749039"/>
+            <a:ext cx="5029200" cy="502920"/>
           </a:xfrm>
           <a:prstGeom prst="rect">
             <a:avLst/>
@@ -5499,23 +5484,20 @@
           <a:noFill/>
         </p:spPr>
         <p:txBody>
-          <a:bodyPr wrap="square" lIns="25400" rIns="25400" tIns="12700" bIns="12700">
-            <a:noAutofit/>
+          <a:bodyPr wrap="square" anchor="t" lIns="0" rIns="0" tIns="0" bIns="0">
+            <a:spAutoFit/>
           </a:bodyPr>
           <a:lstStyle/>
           <a:p>
             <a:pPr algn="l">
               <a:lnSpc>
-                <a:spcPct val="128000"/>
+                <a:spcPct val="100000"/>
               </a:lnSpc>
-              <a:spcAft>
-                <a:spcPts val="400"/>
-              </a:spcAft>
             </a:pPr>
             <a:r>
-              <a:rPr sz="1400" b="0">
-                <a:solidFill>
-                  <a:srgbClr val="9DA9B5"/>
+              <a:rPr sz="4400" b="1" i="0">
+                <a:solidFill>
+                  <a:srgbClr val="E7AC51"/>
                 </a:solidFill>
                 <a:latin typeface="Arial"/>
               </a:rPr>
@@ -5532,8 +5514,8 @@
         </p:nvSpPr>
         <p:spPr>
           <a:xfrm>
-            <a:off x="777240" y="4178045"/>
-            <a:ext cx="10607040" cy="346456"/>
+            <a:off x="5943600" y="4242816"/>
+            <a:ext cx="5029200" cy="548640"/>
           </a:xfrm>
           <a:prstGeom prst="rect">
             <a:avLst/>
@@ -5541,25 +5523,22 @@
           <a:noFill/>
         </p:spPr>
         <p:txBody>
-          <a:bodyPr wrap="square" lIns="25400" rIns="25400" tIns="12700" bIns="12700">
-            <a:noAutofit/>
+          <a:bodyPr wrap="square" anchor="t" lIns="0" rIns="0" tIns="0" bIns="0">
+            <a:spAutoFit/>
           </a:bodyPr>
           <a:lstStyle/>
           <a:p>
             <a:pPr algn="l">
               <a:lnSpc>
-                <a:spcPct val="128000"/>
+                <a:spcPct val="120000"/>
               </a:lnSpc>
-              <a:spcAft>
-                <a:spcPts val="400"/>
-              </a:spcAft>
             </a:pPr>
             <a:r>
-              <a:rPr sz="1400" b="0">
+              <a:rPr sz="1100" b="0" i="0">
                 <a:solidFill>
                   <a:srgbClr val="9DA9B5"/>
                 </a:solidFill>
-                <a:latin typeface="Arial"/>
+                <a:latin typeface="Consolas"/>
               </a:rPr>
               <a:t>Gail model · 5-yr AUC</a:t>
             </a:r>
@@ -5574,8 +5553,8 @@
         </p:nvSpPr>
         <p:spPr>
           <a:xfrm>
-            <a:off x="777240" y="4524501"/>
-            <a:ext cx="10607040" cy="574040"/>
+            <a:off x="777240" y="5303520"/>
+            <a:ext cx="10424160" cy="548640"/>
           </a:xfrm>
           <a:prstGeom prst="rect">
             <a:avLst/>
@@ -5583,40 +5562,27 @@
           <a:noFill/>
         </p:spPr>
         <p:txBody>
-          <a:bodyPr wrap="square" lIns="25400" rIns="25400" tIns="12700" bIns="12700">
-            <a:noAutofit/>
+          <a:bodyPr wrap="square" anchor="t" lIns="0" rIns="0" tIns="0" bIns="0">
+            <a:spAutoFit/>
           </a:bodyPr>
           <a:lstStyle/>
           <a:p>
             <a:pPr algn="l">
               <a:lnSpc>
-                <a:spcPct val="128000"/>
+                <a:spcPct val="140000"/>
               </a:lnSpc>
-              <a:spcAft>
-                <a:spcPts val="400"/>
-              </a:spcAft>
             </a:pPr>
             <a:r>
-              <a:rPr sz="1400" b="0">
-                <a:solidFill>
-                  <a:srgbClr val="9DA9B5"/>
-                </a:solidFill>
-                <a:latin typeface="Arial"/>
-              </a:rPr>
-              <a:t>Coin flip is 0.50.</a:t>
-            </a:r>
-          </a:p>
-          <a:p>
-            <a:pPr algn="l">
-              <a:lnSpc>
-                <a:spcPct val="128000"/>
-              </a:lnSpc>
-              <a:spcAft>
-                <a:spcPts val="400"/>
-              </a:spcAft>
-            </a:pPr>
-            <a:r>
-              <a:rPr sz="1400" b="0">
+              <a:rPr sz="1500" b="1" i="0">
+                <a:solidFill>
+                  <a:srgbClr val="ECEFF3"/>
+                </a:solidFill>
+                <a:latin typeface="Arial"/>
+              </a:rPr>
+              <a:t>Coin flip is 0.50. </a:t>
+            </a:r>
+            <a:r>
+              <a:rPr sz="1500" b="0" i="0">
                 <a:solidFill>
                   <a:srgbClr val="9DA9B5"/>
                 </a:solidFill>
@@ -5653,16 +5619,40 @@
         <p:nvPr/>
       </p:nvGrpSpPr>
       <p:grpSpPr/>
-      <p:sp>
-        <p:nvSpPr>
-          <p:cNvPr id="2" name="Rectangle 1"/>
+      <p:pic>
+        <p:nvPicPr>
+          <p:cNvPr id="2" name="Picture 1" descr="bg_motif.png"/>
+          <p:cNvPicPr>
+            <a:picLocks noChangeAspect="1"/>
+          </p:cNvPicPr>
+          <p:nvPr/>
+        </p:nvPicPr>
+        <p:blipFill>
+          <a:blip r:embed="rId2"/>
+          <a:stretch>
+            <a:fillRect/>
+          </a:stretch>
+        </p:blipFill>
+        <p:spPr>
+          <a:xfrm>
+            <a:off x="0" y="0"/>
+            <a:ext cx="12191695" cy="6858000"/>
+          </a:xfrm>
+          <a:prstGeom prst="rect">
+            <a:avLst/>
+          </a:prstGeom>
+        </p:spPr>
+      </p:pic>
+      <p:sp>
+        <p:nvSpPr>
+          <p:cNvPr id="3" name="Rectangle 2"/>
           <p:cNvSpPr/>
           <p:nvPr/>
         </p:nvSpPr>
         <p:spPr>
           <a:xfrm>
             <a:off x="0" y="0"/>
-            <a:ext cx="12191695" cy="38100"/>
+            <a:ext cx="5486400" cy="38100"/>
           </a:xfrm>
           <a:prstGeom prst="rect">
             <a:avLst/>
@@ -5699,14 +5689,14 @@
       </p:sp>
       <p:sp>
         <p:nvSpPr>
-          <p:cNvPr id="3" name="TextBox 2"/>
+          <p:cNvPr id="4" name="TextBox 3"/>
           <p:cNvSpPr txBox="1"/>
           <p:nvPr/>
         </p:nvSpPr>
         <p:spPr>
           <a:xfrm>
-            <a:off x="777240" y="411480"/>
-            <a:ext cx="8686800" cy="365760"/>
+            <a:off x="777240" y="502920"/>
+            <a:ext cx="8229600" cy="320040"/>
           </a:xfrm>
           <a:prstGeom prst="rect">
             <a:avLst/>
@@ -5714,78 +5704,24 @@
           <a:noFill/>
         </p:spPr>
         <p:txBody>
-          <a:bodyPr wrap="square" lIns="25400" rIns="25400" tIns="12700" bIns="12700">
-            <a:noAutofit/>
+          <a:bodyPr wrap="square" anchor="t" lIns="0" rIns="0" tIns="0" bIns="0">
+            <a:spAutoFit/>
           </a:bodyPr>
           <a:lstStyle/>
           <a:p>
             <a:pPr algn="l">
               <a:lnSpc>
-                <a:spcPct val="128000"/>
+                <a:spcPct val="100000"/>
               </a:lnSpc>
-              <a:spcAft>
-                <a:spcPts val="400"/>
-              </a:spcAft>
             </a:pPr>
             <a:r>
-              <a:rPr sz="1100" b="1">
+              <a:rPr sz="1100" b="1" i="0">
                 <a:solidFill>
                   <a:srgbClr val="E7AC51"/>
                 </a:solidFill>
                 <a:latin typeface="Consolas"/>
               </a:rPr>
               <a:t>ERA III · 2026</a:t>
-            </a:r>
-          </a:p>
-        </p:txBody>
-      </p:sp>
-      <p:sp>
-        <p:nvSpPr>
-          <p:cNvPr id="4" name="TextBox 3"/>
-          <p:cNvSpPr txBox="1"/>
-          <p:nvPr/>
-        </p:nvSpPr>
-        <p:spPr>
-          <a:xfrm>
-            <a:off x="777240" y="2378964"/>
-            <a:ext cx="5989320" cy="904240"/>
-          </a:xfrm>
-          <a:prstGeom prst="rect">
-            <a:avLst/>
-          </a:prstGeom>
-          <a:noFill/>
-        </p:spPr>
-        <p:txBody>
-          <a:bodyPr wrap="square" lIns="25400" rIns="25400" tIns="12700" bIns="12700">
-            <a:noAutofit/>
-          </a:bodyPr>
-          <a:lstStyle/>
-          <a:p>
-            <a:pPr algn="l">
-              <a:lnSpc>
-                <a:spcPct val="106000"/>
-              </a:lnSpc>
-              <a:spcAft>
-                <a:spcPts val="400"/>
-              </a:spcAft>
-            </a:pPr>
-            <a:r>
-              <a:rPr sz="2600" b="0">
-                <a:solidFill>
-                  <a:srgbClr val="E7AC51"/>
-                </a:solidFill>
-                <a:latin typeface="Arial"/>
-              </a:rPr>
-              <a:t>Image-based risk</a:t>
-            </a:r>
-            <a:r>
-              <a:rPr sz="2600" b="0">
-                <a:solidFill>
-                  <a:srgbClr val="ECEFF3"/>
-                </a:solidFill>
-                <a:latin typeface="Arial"/>
-              </a:rPr>
-              <a:t> — Mirai and a de novo FDA clearance.</a:t>
             </a:r>
           </a:p>
         </p:txBody>
@@ -5798,8 +5734,8 @@
         </p:nvSpPr>
         <p:spPr>
           <a:xfrm>
-            <a:off x="777240" y="3283204"/>
-            <a:ext cx="5989320" cy="525780"/>
+            <a:off x="777240" y="1005840"/>
+            <a:ext cx="5852160" cy="1280160"/>
           </a:xfrm>
           <a:prstGeom prst="rect">
             <a:avLst/>
@@ -5807,8 +5743,8 @@
           <a:noFill/>
         </p:spPr>
         <p:txBody>
-          <a:bodyPr wrap="square" lIns="25400" rIns="25400" tIns="12700" bIns="12700">
-            <a:noAutofit/>
+          <a:bodyPr wrap="square" anchor="t" lIns="0" rIns="0" tIns="0" bIns="0">
+            <a:spAutoFit/>
           </a:bodyPr>
           <a:lstStyle/>
           <a:p>
@@ -5816,18 +5752,24 @@
               <a:lnSpc>
                 <a:spcPct val="112000"/>
               </a:lnSpc>
-              <a:spcAft>
-                <a:spcPts val="400"/>
-              </a:spcAft>
             </a:pPr>
             <a:r>
-              <a:rPr sz="3000" b="0">
+              <a:rPr sz="2600" b="1" i="0">
                 <a:solidFill>
                   <a:srgbClr val="E7AC51"/>
                 </a:solidFill>
                 <a:latin typeface="Arial"/>
               </a:rPr>
-              <a:t>0.76–0.81</a:t>
+              <a:t>Image-based risk</a:t>
+            </a:r>
+            <a:r>
+              <a:rPr sz="2600" b="1" i="0">
+                <a:solidFill>
+                  <a:srgbClr val="ECEFF3"/>
+                </a:solidFill>
+                <a:latin typeface="Arial"/>
+              </a:rPr>
+              <a:t> — Mirai and a de novo FDA clearance.</a:t>
             </a:r>
           </a:p>
         </p:txBody>
@@ -5840,8 +5782,8 @@
         </p:nvSpPr>
         <p:spPr>
           <a:xfrm>
-            <a:off x="777240" y="3808984"/>
-            <a:ext cx="5989320" cy="346456"/>
+            <a:off x="777240" y="2743200"/>
+            <a:ext cx="5486400" cy="502920"/>
           </a:xfrm>
           <a:prstGeom prst="rect">
             <a:avLst/>
@@ -5849,27 +5791,24 @@
           <a:noFill/>
         </p:spPr>
         <p:txBody>
-          <a:bodyPr wrap="square" lIns="25400" rIns="25400" tIns="12700" bIns="12700">
-            <a:noAutofit/>
+          <a:bodyPr wrap="square" anchor="t" lIns="0" rIns="0" tIns="0" bIns="0">
+            <a:spAutoFit/>
           </a:bodyPr>
           <a:lstStyle/>
           <a:p>
             <a:pPr algn="l">
               <a:lnSpc>
-                <a:spcPct val="128000"/>
+                <a:spcPct val="100000"/>
               </a:lnSpc>
-              <a:spcAft>
-                <a:spcPts val="400"/>
-              </a:spcAft>
             </a:pPr>
             <a:r>
-              <a:rPr sz="1400" b="0">
-                <a:solidFill>
-                  <a:srgbClr val="9DA9B5"/>
-                </a:solidFill>
-                <a:latin typeface="Arial"/>
-              </a:rPr>
-              <a:t>Mirai C-index · 3 countries</a:t>
+              <a:rPr sz="4000" b="1" i="0">
+                <a:solidFill>
+                  <a:srgbClr val="E7AC51"/>
+                </a:solidFill>
+                <a:latin typeface="Arial"/>
+              </a:rPr>
+              <a:t>0.76–0.81</a:t>
             </a:r>
           </a:p>
         </p:txBody>
@@ -5882,8 +5821,8 @@
         </p:nvSpPr>
         <p:spPr>
           <a:xfrm>
-            <a:off x="777240" y="4155440"/>
-            <a:ext cx="5989320" cy="525780"/>
+            <a:off x="777240" y="3200400"/>
+            <a:ext cx="5486400" cy="548640"/>
           </a:xfrm>
           <a:prstGeom prst="rect">
             <a:avLst/>
@@ -5891,27 +5830,24 @@
           <a:noFill/>
         </p:spPr>
         <p:txBody>
-          <a:bodyPr wrap="square" lIns="25400" rIns="25400" tIns="12700" bIns="12700">
-            <a:noAutofit/>
+          <a:bodyPr wrap="square" anchor="t" lIns="0" rIns="0" tIns="0" bIns="0">
+            <a:spAutoFit/>
           </a:bodyPr>
           <a:lstStyle/>
           <a:p>
             <a:pPr algn="l">
               <a:lnSpc>
-                <a:spcPct val="112000"/>
+                <a:spcPct val="120000"/>
               </a:lnSpc>
-              <a:spcAft>
-                <a:spcPts val="400"/>
-              </a:spcAft>
             </a:pPr>
             <a:r>
-              <a:rPr sz="3000" b="0">
-                <a:solidFill>
-                  <a:srgbClr val="E7AC51"/>
-                </a:solidFill>
-                <a:latin typeface="Arial"/>
-              </a:rPr>
-              <a:t>&lt; 5 yr</a:t>
+              <a:rPr sz="1100" b="0" i="0">
+                <a:solidFill>
+                  <a:srgbClr val="9DA9B5"/>
+                </a:solidFill>
+                <a:latin typeface="Consolas"/>
+              </a:rPr>
+              <a:t>Mirai C-index · 3 countries</a:t>
             </a:r>
           </a:p>
         </p:txBody>
@@ -5924,8 +5860,8 @@
         </p:nvSpPr>
         <p:spPr>
           <a:xfrm>
-            <a:off x="777240" y="4681220"/>
-            <a:ext cx="5989320" cy="346456"/>
+            <a:off x="777240" y="4114800"/>
+            <a:ext cx="5486400" cy="502920"/>
           </a:xfrm>
           <a:prstGeom prst="rect">
             <a:avLst/>
@@ -5933,25 +5869,61 @@
           <a:noFill/>
         </p:spPr>
         <p:txBody>
-          <a:bodyPr wrap="square" lIns="25400" rIns="25400" tIns="12700" bIns="12700">
-            <a:noAutofit/>
+          <a:bodyPr wrap="square" anchor="t" lIns="0" rIns="0" tIns="0" bIns="0">
+            <a:spAutoFit/>
           </a:bodyPr>
           <a:lstStyle/>
           <a:p>
             <a:pPr algn="l">
               <a:lnSpc>
-                <a:spcPct val="128000"/>
+                <a:spcPct val="100000"/>
               </a:lnSpc>
-              <a:spcAft>
-                <a:spcPts val="400"/>
-              </a:spcAft>
             </a:pPr>
             <a:r>
-              <a:rPr sz="1400" b="0">
+              <a:rPr sz="4000" b="1" i="0">
+                <a:solidFill>
+                  <a:srgbClr val="E7AC51"/>
+                </a:solidFill>
+                <a:latin typeface="Arial"/>
+              </a:rPr>
+              <a:t>&lt; 5 yr</a:t>
+            </a:r>
+          </a:p>
+        </p:txBody>
+      </p:sp>
+      <p:sp>
+        <p:nvSpPr>
+          <p:cNvPr id="9" name="TextBox 8"/>
+          <p:cNvSpPr txBox="1"/>
+          <p:nvPr/>
+        </p:nvSpPr>
+        <p:spPr>
+          <a:xfrm>
+            <a:off x="777240" y="4572000"/>
+            <a:ext cx="5486400" cy="548640"/>
+          </a:xfrm>
+          <a:prstGeom prst="rect">
+            <a:avLst/>
+          </a:prstGeom>
+          <a:noFill/>
+        </p:spPr>
+        <p:txBody>
+          <a:bodyPr wrap="square" anchor="t" lIns="0" rIns="0" tIns="0" bIns="0">
+            <a:spAutoFit/>
+          </a:bodyPr>
+          <a:lstStyle/>
+          <a:p>
+            <a:pPr algn="l">
+              <a:lnSpc>
+                <a:spcPct val="120000"/>
+              </a:lnSpc>
+            </a:pPr>
+            <a:r>
+              <a:rPr sz="1100" b="0" i="0">
                 <a:solidFill>
                   <a:srgbClr val="9DA9B5"/>
                 </a:solidFill>
-                <a:latin typeface="Arial"/>
+                <a:latin typeface="Consolas"/>
               </a:rPr>
               <a:t>research → cleared → guideline</a:t>
             </a:r>
@@ -5960,22 +5932,22 @@
       </p:sp>
       <p:pic>
         <p:nvPicPr>
-          <p:cNvPr id="9" name="Picture 8" descr="s_39113bbbe0.png"/>
+          <p:cNvPr id="10" name="Picture 9" descr="svg_39113bbbe0.png"/>
           <p:cNvPicPr>
             <a:picLocks noChangeAspect="1"/>
           </p:cNvPicPr>
           <p:nvPr/>
         </p:nvPicPr>
         <p:blipFill>
-          <a:blip r:embed="rId3"/>
+          <a:blip r:embed="rId4"/>
           <a:stretch>
             <a:fillRect/>
           </a:stretch>
         </p:blipFill>
         <p:spPr>
           <a:xfrm>
-            <a:off x="6995160" y="1697355"/>
-            <a:ext cx="4617720" cy="3463290"/>
+            <a:off x="6400800" y="1577339"/>
+            <a:ext cx="5303520" cy="3977640"/>
           </a:xfrm>
           <a:prstGeom prst="rect">
             <a:avLst/>
@@ -6008,16 +5980,40 @@
         <p:nvPr/>
       </p:nvGrpSpPr>
       <p:grpSpPr/>
-      <p:sp>
-        <p:nvSpPr>
-          <p:cNvPr id="2" name="Rectangle 1"/>
+      <p:pic>
+        <p:nvPicPr>
+          <p:cNvPr id="2" name="Picture 1" descr="bg_motif.png"/>
+          <p:cNvPicPr>
+            <a:picLocks noChangeAspect="1"/>
+          </p:cNvPicPr>
+          <p:nvPr/>
+        </p:nvPicPr>
+        <p:blipFill>
+          <a:blip r:embed="rId2"/>
+          <a:stretch>
+            <a:fillRect/>
+          </a:stretch>
+        </p:blipFill>
+        <p:spPr>
+          <a:xfrm>
+            <a:off x="0" y="0"/>
+            <a:ext cx="12191695" cy="6858000"/>
+          </a:xfrm>
+          <a:prstGeom prst="rect">
+            <a:avLst/>
+          </a:prstGeom>
+        </p:spPr>
+      </p:pic>
+      <p:sp>
+        <p:nvSpPr>
+          <p:cNvPr id="3" name="Rectangle 2"/>
           <p:cNvSpPr/>
           <p:nvPr/>
         </p:nvSpPr>
         <p:spPr>
           <a:xfrm>
             <a:off x="0" y="0"/>
-            <a:ext cx="12191695" cy="38100"/>
+            <a:ext cx="5486400" cy="38100"/>
           </a:xfrm>
           <a:prstGeom prst="rect">
             <a:avLst/>
@@ -6054,14 +6050,14 @@
       </p:sp>
       <p:sp>
         <p:nvSpPr>
-          <p:cNvPr id="3" name="TextBox 2"/>
+          <p:cNvPr id="4" name="TextBox 3"/>
           <p:cNvSpPr txBox="1"/>
           <p:nvPr/>
         </p:nvSpPr>
         <p:spPr>
           <a:xfrm>
-            <a:off x="777240" y="411480"/>
-            <a:ext cx="8686800" cy="365760"/>
+            <a:off x="777240" y="502920"/>
+            <a:ext cx="8229600" cy="320040"/>
           </a:xfrm>
           <a:prstGeom prst="rect">
             <a:avLst/>
@@ -6069,21 +6065,18 @@
           <a:noFill/>
         </p:spPr>
         <p:txBody>
-          <a:bodyPr wrap="square" lIns="25400" rIns="25400" tIns="12700" bIns="12700">
-            <a:noAutofit/>
+          <a:bodyPr wrap="square" anchor="t" lIns="0" rIns="0" tIns="0" bIns="0">
+            <a:spAutoFit/>
           </a:bodyPr>
           <a:lstStyle/>
           <a:p>
             <a:pPr algn="l">
               <a:lnSpc>
-                <a:spcPct val="128000"/>
+                <a:spcPct val="100000"/>
               </a:lnSpc>
-              <a:spcAft>
-                <a:spcPts val="400"/>
-              </a:spcAft>
             </a:pPr>
             <a:r>
-              <a:rPr sz="1100" b="1">
+              <a:rPr sz="1100" b="1" i="0">
                 <a:solidFill>
                   <a:srgbClr val="E7AC51"/>
                 </a:solidFill>
@@ -6096,14 +6089,14 @@
       </p:sp>
       <p:sp>
         <p:nvSpPr>
-          <p:cNvPr id="4" name="TextBox 3"/>
+          <p:cNvPr id="5" name="TextBox 4"/>
           <p:cNvSpPr txBox="1"/>
           <p:nvPr/>
         </p:nvSpPr>
         <p:spPr>
           <a:xfrm>
-            <a:off x="777240" y="3401822"/>
-            <a:ext cx="5989320" cy="346456"/>
+            <a:off x="777240" y="1005840"/>
+            <a:ext cx="5760720" cy="1280160"/>
           </a:xfrm>
           <a:prstGeom prst="rect">
             <a:avLst/>
@@ -6111,50 +6104,47 @@
           <a:noFill/>
         </p:spPr>
         <p:txBody>
-          <a:bodyPr wrap="square" lIns="25400" rIns="25400" tIns="12700" bIns="12700">
-            <a:noAutofit/>
+          <a:bodyPr wrap="square" anchor="t" lIns="0" rIns="0" tIns="0" bIns="0">
+            <a:spAutoFit/>
           </a:bodyPr>
           <a:lstStyle/>
           <a:p>
             <a:pPr algn="l">
               <a:lnSpc>
-                <a:spcPct val="128000"/>
+                <a:spcPct val="112000"/>
               </a:lnSpc>
-              <a:spcAft>
-                <a:spcPts val="400"/>
-              </a:spcAft>
             </a:pPr>
             <a:r>
-              <a:rPr sz="1400" b="0">
-                <a:solidFill>
-                  <a:srgbClr val="9DA9B5"/>
-                </a:solidFill>
-                <a:latin typeface="Arial"/>
-              </a:rPr>
-              <a:t>AsymMirai — </a:t>
-            </a:r>
-            <a:r>
-              <a:rPr sz="1400" b="0">
+              <a:rPr sz="2600" b="1" i="0">
                 <a:solidFill>
                   <a:srgbClr val="E7AC51"/>
                 </a:solidFill>
                 <a:latin typeface="Arial"/>
               </a:rPr>
-              <a:t>an explainable risk model.</a:t>
-            </a:r>
-          </a:p>
-        </p:txBody>
-      </p:sp>
-      <p:sp>
-        <p:nvSpPr>
-          <p:cNvPr id="5" name="TextBox 4"/>
+              <a:t>AsymMirai</a:t>
+            </a:r>
+            <a:r>
+              <a:rPr sz="2600" b="1" i="0">
+                <a:solidFill>
+                  <a:srgbClr val="ECEFF3"/>
+                </a:solidFill>
+                <a:latin typeface="Arial"/>
+              </a:rPr>
+              <a:t> — an explainable risk model.</a:t>
+            </a:r>
+          </a:p>
+        </p:txBody>
+      </p:sp>
+      <p:sp>
+        <p:nvSpPr>
+          <p:cNvPr id="6" name="TextBox 5"/>
           <p:cNvSpPr txBox="1"/>
           <p:nvPr/>
         </p:nvSpPr>
         <p:spPr>
           <a:xfrm>
-            <a:off x="777240" y="3748277"/>
-            <a:ext cx="5989320" cy="256540"/>
+            <a:off x="777240" y="2651760"/>
+            <a:ext cx="5669280" cy="914400"/>
           </a:xfrm>
           <a:prstGeom prst="rect">
             <a:avLst/>
@@ -6162,52 +6152,58 @@
           <a:noFill/>
         </p:spPr>
         <p:txBody>
-          <a:bodyPr wrap="square" lIns="25400" rIns="25400" tIns="12700" bIns="12700">
-            <a:noAutofit/>
+          <a:bodyPr wrap="square" anchor="t" lIns="0" rIns="0" tIns="0" bIns="0">
+            <a:spAutoFit/>
           </a:bodyPr>
           <a:lstStyle/>
           <a:p>
             <a:pPr algn="l">
               <a:lnSpc>
-                <a:spcPct val="130000"/>
+                <a:spcPct val="140000"/>
               </a:lnSpc>
-              <a:spcAft>
-                <a:spcPts val="400"/>
-              </a:spcAft>
             </a:pPr>
             <a:r>
-              <a:rPr sz="1000" b="1">
-                <a:solidFill>
-                  <a:srgbClr val="E7AC51"/>
-                </a:solidFill>
-                <a:latin typeface="Consolas"/>
-              </a:rPr>
-              <a:t>1-yr AUC 0.79</a:t>
-            </a:r>
-            <a:r>
-              <a:rPr sz="1000" b="0">
-                <a:solidFill>
-                  <a:srgbClr val="5C6975"/>
-                </a:solidFill>
-                <a:latin typeface="Consolas"/>
-              </a:rPr>
-              <a:t> vs Mirai 0.84 · </a:t>
-            </a:r>
-            <a:r>
-              <a:rPr sz="1000" b="1">
-                <a:solidFill>
-                  <a:srgbClr val="E7AC51"/>
-                </a:solidFill>
-                <a:latin typeface="Consolas"/>
-              </a:rPr>
-              <a:t>3-yr AUC 0.92</a:t>
-            </a:r>
-            <a:r>
-              <a:rPr sz="1000" b="0">
-                <a:solidFill>
-                  <a:srgbClr val="5C6975"/>
-                </a:solidFill>
-                <a:latin typeface="Consolas"/>
+              <a:rPr sz="1500" b="0" i="0">
+                <a:solidFill>
+                  <a:srgbClr val="9DA9B5"/>
+                </a:solidFill>
+                <a:latin typeface="Arial"/>
+              </a:rPr>
+              <a:t>1-yr AUC </a:t>
+            </a:r>
+            <a:r>
+              <a:rPr sz="1500" b="1" i="0">
+                <a:solidFill>
+                  <a:srgbClr val="ECEFF3"/>
+                </a:solidFill>
+                <a:latin typeface="Arial"/>
+              </a:rPr>
+              <a:t>0.79</a:t>
+            </a:r>
+            <a:r>
+              <a:rPr sz="1500" b="0" i="0">
+                <a:solidFill>
+                  <a:srgbClr val="9DA9B5"/>
+                </a:solidFill>
+                <a:latin typeface="Arial"/>
+              </a:rPr>
+              <a:t> vs Mirai 0.84  ·  3-yr AUC </a:t>
+            </a:r>
+            <a:r>
+              <a:rPr sz="1500" b="1" i="0">
+                <a:solidFill>
+                  <a:srgbClr val="ECEFF3"/>
+                </a:solidFill>
+                <a:latin typeface="Arial"/>
+              </a:rPr>
+              <a:t>0.92</a:t>
+            </a:r>
+            <a:r>
+              <a:rPr sz="1500" b="0" i="0">
+                <a:solidFill>
+                  <a:srgbClr val="9DA9B5"/>
+                </a:solidFill>
+                <a:latin typeface="Arial"/>
               </a:rPr>
               <a:t> (stable tissue)</a:t>
             </a:r>
@@ -6216,14 +6212,14 @@
       </p:sp>
       <p:sp>
         <p:nvSpPr>
-          <p:cNvPr id="6" name="Rounded Rectangle 5"/>
+          <p:cNvPr id="7" name="Rounded Rectangle 6"/>
           <p:cNvSpPr/>
           <p:nvPr/>
         </p:nvSpPr>
         <p:spPr>
           <a:xfrm>
-            <a:off x="6912864" y="2004434"/>
-            <a:ext cx="4782312" cy="2849130"/>
+            <a:off x="6309360" y="1933103"/>
+            <a:ext cx="5486400" cy="3266112"/>
           </a:xfrm>
           <a:prstGeom prst="roundRect">
             <a:avLst/>
@@ -6262,22 +6258,22 @@
       </p:sp>
       <p:pic>
         <p:nvPicPr>
-          <p:cNvPr id="7" name="Picture 6" descr="i_a5bc477317.jpg"/>
+          <p:cNvPr id="8" name="Picture 7" descr="img_a5bc477317.jpg"/>
           <p:cNvPicPr>
             <a:picLocks noChangeAspect="1"/>
           </p:cNvPicPr>
           <p:nvPr/>
         </p:nvPicPr>
         <p:blipFill>
-          <a:blip r:embed="rId3"/>
+          <a:blip r:embed="rId4"/>
           <a:stretch>
             <a:fillRect/>
           </a:stretch>
         </p:blipFill>
         <p:spPr>
           <a:xfrm>
-            <a:off x="6995160" y="2086730"/>
-            <a:ext cx="4617720" cy="2684538"/>
+            <a:off x="6400800" y="2024543"/>
+            <a:ext cx="5303520" cy="3083232"/>
           </a:xfrm>
           <a:prstGeom prst="rect">
             <a:avLst/>
@@ -6310,16 +6306,40 @@
         <p:nvPr/>
       </p:nvGrpSpPr>
       <p:grpSpPr/>
-      <p:sp>
-        <p:nvSpPr>
-          <p:cNvPr id="2" name="Rectangle 1"/>
+      <p:pic>
+        <p:nvPicPr>
+          <p:cNvPr id="2" name="Picture 1" descr="bg_motif.png"/>
+          <p:cNvPicPr>
+            <a:picLocks noChangeAspect="1"/>
+          </p:cNvPicPr>
+          <p:nvPr/>
+        </p:nvPicPr>
+        <p:blipFill>
+          <a:blip r:embed="rId2"/>
+          <a:stretch>
+            <a:fillRect/>
+          </a:stretch>
+        </p:blipFill>
+        <p:spPr>
+          <a:xfrm>
+            <a:off x="0" y="0"/>
+            <a:ext cx="12191695" cy="6858000"/>
+          </a:xfrm>
+          <a:prstGeom prst="rect">
+            <a:avLst/>
+          </a:prstGeom>
+        </p:spPr>
+      </p:pic>
+      <p:sp>
+        <p:nvSpPr>
+          <p:cNvPr id="3" name="Rectangle 2"/>
           <p:cNvSpPr/>
           <p:nvPr/>
         </p:nvSpPr>
         <p:spPr>
           <a:xfrm>
             <a:off x="0" y="0"/>
-            <a:ext cx="12191695" cy="38100"/>
+            <a:ext cx="5486400" cy="38100"/>
           </a:xfrm>
           <a:prstGeom prst="rect">
             <a:avLst/>
@@ -6356,14 +6376,14 @@
       </p:sp>
       <p:sp>
         <p:nvSpPr>
-          <p:cNvPr id="3" name="TextBox 2"/>
+          <p:cNvPr id="4" name="TextBox 3"/>
           <p:cNvSpPr txBox="1"/>
           <p:nvPr/>
         </p:nvSpPr>
         <p:spPr>
           <a:xfrm>
-            <a:off x="777240" y="411480"/>
-            <a:ext cx="8686800" cy="365760"/>
+            <a:off x="777240" y="502920"/>
+            <a:ext cx="8229600" cy="320040"/>
           </a:xfrm>
           <a:prstGeom prst="rect">
             <a:avLst/>
@@ -6371,21 +6391,18 @@
           <a:noFill/>
         </p:spPr>
         <p:txBody>
-          <a:bodyPr wrap="square" lIns="25400" rIns="25400" tIns="12700" bIns="12700">
-            <a:noAutofit/>
+          <a:bodyPr wrap="square" anchor="t" lIns="0" rIns="0" tIns="0" bIns="0">
+            <a:spAutoFit/>
           </a:bodyPr>
           <a:lstStyle/>
           <a:p>
             <a:pPr algn="l">
               <a:lnSpc>
-                <a:spcPct val="128000"/>
+                <a:spcPct val="100000"/>
               </a:lnSpc>
-              <a:spcAft>
-                <a:spcPts val="400"/>
-              </a:spcAft>
             </a:pPr>
             <a:r>
-              <a:rPr sz="1100" b="1">
+              <a:rPr sz="1100" b="1" i="0">
                 <a:solidFill>
                   <a:srgbClr val="E7AC51"/>
                 </a:solidFill>
@@ -6398,14 +6415,14 @@
       </p:sp>
       <p:sp>
         <p:nvSpPr>
-          <p:cNvPr id="4" name="TextBox 3"/>
+          <p:cNvPr id="5" name="TextBox 4"/>
           <p:cNvSpPr txBox="1"/>
           <p:nvPr/>
         </p:nvSpPr>
         <p:spPr>
           <a:xfrm>
-            <a:off x="777240" y="2454656"/>
-            <a:ext cx="5989320" cy="1274064"/>
+            <a:off x="777240" y="1005840"/>
+            <a:ext cx="5852160" cy="1280160"/>
           </a:xfrm>
           <a:prstGeom prst="rect">
             <a:avLst/>
@@ -6413,21 +6430,18 @@
           <a:noFill/>
         </p:spPr>
         <p:txBody>
-          <a:bodyPr wrap="square" lIns="25400" rIns="25400" tIns="12700" bIns="12700">
-            <a:noAutofit/>
+          <a:bodyPr wrap="square" anchor="t" lIns="0" rIns="0" tIns="0" bIns="0">
+            <a:spAutoFit/>
           </a:bodyPr>
           <a:lstStyle/>
           <a:p>
             <a:pPr algn="l">
               <a:lnSpc>
-                <a:spcPct val="106000"/>
+                <a:spcPct val="112000"/>
               </a:lnSpc>
-              <a:spcAft>
-                <a:spcPts val="400"/>
-              </a:spcAft>
             </a:pPr>
             <a:r>
-              <a:rPr sz="2600" b="0">
+              <a:rPr sz="2300" b="1" i="0">
                 <a:solidFill>
                   <a:srgbClr val="ECEFF3"/>
                 </a:solidFill>
@@ -6436,7 +6450,7 @@
               <a:t>Breast Arterial Calcification (BAC) as a </a:t>
             </a:r>
             <a:r>
-              <a:rPr sz="2600" b="0">
+              <a:rPr sz="2300" b="1" i="0">
                 <a:solidFill>
                   <a:srgbClr val="E7AC51"/>
                 </a:solidFill>
@@ -6449,14 +6463,14 @@
       </p:sp>
       <p:sp>
         <p:nvSpPr>
-          <p:cNvPr id="5" name="TextBox 4"/>
+          <p:cNvPr id="6" name="TextBox 5"/>
           <p:cNvSpPr txBox="1"/>
           <p:nvPr/>
         </p:nvSpPr>
         <p:spPr>
           <a:xfrm>
-            <a:off x="777240" y="3728719"/>
-            <a:ext cx="5989320" cy="801623"/>
+            <a:off x="777240" y="2743200"/>
+            <a:ext cx="5852160" cy="2011680"/>
           </a:xfrm>
           <a:prstGeom prst="rect">
             <a:avLst/>
@@ -6464,21 +6478,18 @@
           <a:noFill/>
         </p:spPr>
         <p:txBody>
-          <a:bodyPr wrap="square" lIns="25400" rIns="25400" tIns="12700" bIns="12700">
-            <a:noAutofit/>
+          <a:bodyPr wrap="square" anchor="t" lIns="0" rIns="0" tIns="0" bIns="0">
+            <a:spAutoFit/>
           </a:bodyPr>
           <a:lstStyle/>
           <a:p>
             <a:pPr algn="l">
               <a:lnSpc>
-                <a:spcPct val="128000"/>
+                <a:spcPct val="140000"/>
               </a:lnSpc>
-              <a:spcAft>
-                <a:spcPts val="400"/>
-              </a:spcAft>
             </a:pPr>
             <a:r>
-              <a:rPr sz="1400" b="0">
+              <a:rPr sz="1450" b="0" i="0">
                 <a:solidFill>
                   <a:srgbClr val="9DA9B5"/>
                 </a:solidFill>
@@ -6487,7 +6498,7 @@
               <a:t>A transformer segments breast arterial calcification on the routine mammogram and quantifies its area — turning an incidental finding into a </a:t>
             </a:r>
             <a:r>
-              <a:rPr sz="1400" b="1">
+              <a:rPr sz="1450" b="1" i="0">
                 <a:solidFill>
                   <a:srgbClr val="ECEFF3"/>
                 </a:solidFill>
@@ -6500,14 +6511,14 @@
       </p:sp>
       <p:sp>
         <p:nvSpPr>
-          <p:cNvPr id="6" name="TextBox 5"/>
+          <p:cNvPr id="7" name="TextBox 6"/>
           <p:cNvSpPr txBox="1"/>
           <p:nvPr/>
         </p:nvSpPr>
         <p:spPr>
           <a:xfrm>
-            <a:off x="777240" y="4530344"/>
-            <a:ext cx="5989320" cy="421640"/>
+            <a:off x="777240" y="5943600"/>
+            <a:ext cx="5852160" cy="457200"/>
           </a:xfrm>
           <a:prstGeom prst="rect">
             <a:avLst/>
@@ -6515,8 +6526,8 @@
           <a:noFill/>
         </p:spPr>
         <p:txBody>
-          <a:bodyPr wrap="square" lIns="25400" rIns="25400" tIns="12700" bIns="12700">
-            <a:noAutofit/>
+          <a:bodyPr wrap="square" anchor="t" lIns="0" rIns="0" tIns="0" bIns="0">
+            <a:spAutoFit/>
           </a:bodyPr>
           <a:lstStyle/>
           <a:p>
@@ -6524,12 +6535,9 @@
               <a:lnSpc>
                 <a:spcPct val="130000"/>
               </a:lnSpc>
-              <a:spcAft>
-                <a:spcPts val="400"/>
-              </a:spcAft>
             </a:pPr>
             <a:r>
-              <a:rPr sz="1000" b="0">
+              <a:rPr sz="950" b="0" i="0">
                 <a:solidFill>
                   <a:srgbClr val="5C6975"/>
                 </a:solidFill>
@@ -6542,20 +6550,20 @@
       </p:sp>
       <p:sp>
         <p:nvSpPr>
-          <p:cNvPr id="7" name="Rounded Rectangle 6"/>
+          <p:cNvPr id="8" name="Rounded Rectangle 7"/>
           <p:cNvSpPr/>
           <p:nvPr/>
         </p:nvSpPr>
         <p:spPr>
           <a:xfrm>
-            <a:off x="7819391" y="832104"/>
-            <a:ext cx="2969257" cy="5193792"/>
+            <a:off x="7584284" y="1097280"/>
+            <a:ext cx="2936551" cy="5120640"/>
           </a:xfrm>
           <a:prstGeom prst="roundRect">
             <a:avLst/>
           </a:prstGeom>
           <a:solidFill>
-            <a:srgbClr val="FFFFFF"/>
+            <a:srgbClr val="000000"/>
           </a:solidFill>
           <a:ln w="9525">
             <a:solidFill>
@@ -6588,22 +6596,22 @@
       </p:sp>
       <p:pic>
         <p:nvPicPr>
-          <p:cNvPr id="8" name="Picture 7" descr="i_ebbc2d2c9e.jpg"/>
+          <p:cNvPr id="9" name="Picture 8" descr="img_ebbc2d2c9e.jpg"/>
           <p:cNvPicPr>
             <a:picLocks noChangeAspect="1"/>
           </p:cNvPicPr>
           <p:nvPr/>
         </p:nvPicPr>
         <p:blipFill>
-          <a:blip r:embed="rId3"/>
+          <a:blip r:embed="rId4"/>
           <a:stretch>
             <a:fillRect/>
           </a:stretch>
         </p:blipFill>
         <p:spPr>
           <a:xfrm>
-            <a:off x="7901687" y="914400"/>
-            <a:ext cx="2804665" cy="5029200"/>
+            <a:off x="7675724" y="1188720"/>
+            <a:ext cx="2753671" cy="4937760"/>
           </a:xfrm>
           <a:prstGeom prst="rect">
             <a:avLst/>
@@ -6636,16 +6644,40 @@
         <p:nvPr/>
       </p:nvGrpSpPr>
       <p:grpSpPr/>
-      <p:sp>
-        <p:nvSpPr>
-          <p:cNvPr id="2" name="Rectangle 1"/>
+      <p:pic>
+        <p:nvPicPr>
+          <p:cNvPr id="2" name="Picture 1" descr="bg_motif.png"/>
+          <p:cNvPicPr>
+            <a:picLocks noChangeAspect="1"/>
+          </p:cNvPicPr>
+          <p:nvPr/>
+        </p:nvPicPr>
+        <p:blipFill>
+          <a:blip r:embed="rId2"/>
+          <a:stretch>
+            <a:fillRect/>
+          </a:stretch>
+        </p:blipFill>
+        <p:spPr>
+          <a:xfrm>
+            <a:off x="0" y="0"/>
+            <a:ext cx="12191695" cy="6858000"/>
+          </a:xfrm>
+          <a:prstGeom prst="rect">
+            <a:avLst/>
+          </a:prstGeom>
+        </p:spPr>
+      </p:pic>
+      <p:sp>
+        <p:nvSpPr>
+          <p:cNvPr id="3" name="Rectangle 2"/>
           <p:cNvSpPr/>
           <p:nvPr/>
         </p:nvSpPr>
         <p:spPr>
           <a:xfrm>
             <a:off x="0" y="0"/>
-            <a:ext cx="12191695" cy="38100"/>
+            <a:ext cx="5486400" cy="38100"/>
           </a:xfrm>
           <a:prstGeom prst="rect">
             <a:avLst/>
@@ -6682,14 +6714,14 @@
       </p:sp>
       <p:sp>
         <p:nvSpPr>
-          <p:cNvPr id="3" name="TextBox 2"/>
+          <p:cNvPr id="4" name="TextBox 3"/>
           <p:cNvSpPr txBox="1"/>
           <p:nvPr/>
         </p:nvSpPr>
         <p:spPr>
           <a:xfrm>
-            <a:off x="777240" y="411480"/>
-            <a:ext cx="8686800" cy="365760"/>
+            <a:off x="777240" y="502920"/>
+            <a:ext cx="8229600" cy="320040"/>
           </a:xfrm>
           <a:prstGeom prst="rect">
             <a:avLst/>
@@ -6697,21 +6729,18 @@
           <a:noFill/>
         </p:spPr>
         <p:txBody>
-          <a:bodyPr wrap="square" lIns="25400" rIns="25400" tIns="12700" bIns="12700">
-            <a:noAutofit/>
+          <a:bodyPr wrap="square" anchor="t" lIns="0" rIns="0" tIns="0" bIns="0">
+            <a:spAutoFit/>
           </a:bodyPr>
           <a:lstStyle/>
           <a:p>
             <a:pPr algn="l">
               <a:lnSpc>
-                <a:spcPct val="128000"/>
+                <a:spcPct val="100000"/>
               </a:lnSpc>
-              <a:spcAft>
-                <a:spcPts val="400"/>
-              </a:spcAft>
             </a:pPr>
             <a:r>
-              <a:rPr sz="1100" b="1">
+              <a:rPr sz="1100" b="1" i="0">
                 <a:solidFill>
                   <a:srgbClr val="E7AC51"/>
                 </a:solidFill>
@@ -6724,14 +6753,14 @@
       </p:sp>
       <p:sp>
         <p:nvSpPr>
-          <p:cNvPr id="4" name="TextBox 3"/>
+          <p:cNvPr id="5" name="TextBox 4"/>
           <p:cNvSpPr txBox="1"/>
           <p:nvPr/>
         </p:nvSpPr>
         <p:spPr>
           <a:xfrm>
-            <a:off x="777240" y="3032251"/>
-            <a:ext cx="5989320" cy="346456"/>
+            <a:off x="777240" y="1005840"/>
+            <a:ext cx="5852160" cy="1280160"/>
           </a:xfrm>
           <a:prstGeom prst="rect">
             <a:avLst/>
@@ -6739,30 +6768,27 @@
           <a:noFill/>
         </p:spPr>
         <p:txBody>
-          <a:bodyPr wrap="square" lIns="25400" rIns="25400" tIns="12700" bIns="12700">
-            <a:noAutofit/>
+          <a:bodyPr wrap="square" anchor="t" lIns="0" rIns="0" tIns="0" bIns="0">
+            <a:spAutoFit/>
           </a:bodyPr>
           <a:lstStyle/>
           <a:p>
             <a:pPr algn="l">
               <a:lnSpc>
-                <a:spcPct val="128000"/>
+                <a:spcPct val="112000"/>
               </a:lnSpc>
-              <a:spcAft>
-                <a:spcPts val="400"/>
-              </a:spcAft>
             </a:pPr>
             <a:r>
-              <a:rPr sz="1400" b="0">
-                <a:solidFill>
-                  <a:srgbClr val="9DA9B5"/>
+              <a:rPr sz="2400" b="1" i="0">
+                <a:solidFill>
+                  <a:srgbClr val="ECEFF3"/>
                 </a:solidFill>
                 <a:latin typeface="Arial"/>
               </a:rPr>
               <a:t>BAC predicts MACE — </a:t>
             </a:r>
             <a:r>
-              <a:rPr sz="1400" b="0">
+              <a:rPr sz="2400" b="1" i="0">
                 <a:solidFill>
                   <a:srgbClr val="E7AC51"/>
                 </a:solidFill>
@@ -6775,14 +6801,14 @@
       </p:sp>
       <p:sp>
         <p:nvSpPr>
-          <p:cNvPr id="5" name="TextBox 4"/>
+          <p:cNvPr id="6" name="TextBox 5"/>
           <p:cNvSpPr txBox="1"/>
           <p:nvPr/>
         </p:nvSpPr>
         <p:spPr>
           <a:xfrm>
-            <a:off x="777240" y="3378708"/>
-            <a:ext cx="5989320" cy="574040"/>
+            <a:off x="777240" y="2468880"/>
+            <a:ext cx="5852160" cy="1828800"/>
           </a:xfrm>
           <a:prstGeom prst="rect">
             <a:avLst/>
@@ -6790,21 +6816,18 @@
           <a:noFill/>
         </p:spPr>
         <p:txBody>
-          <a:bodyPr wrap="square" lIns="25400" rIns="25400" tIns="12700" bIns="12700">
-            <a:noAutofit/>
+          <a:bodyPr wrap="square" anchor="t" lIns="0" rIns="0" tIns="0" bIns="0">
+            <a:spAutoFit/>
           </a:bodyPr>
           <a:lstStyle/>
           <a:p>
             <a:pPr algn="l">
               <a:lnSpc>
-                <a:spcPct val="128000"/>
+                <a:spcPct val="140000"/>
               </a:lnSpc>
-              <a:spcAft>
-                <a:spcPts val="400"/>
-              </a:spcAft>
             </a:pPr>
             <a:r>
-              <a:rPr sz="1400" b="1">
+              <a:rPr sz="1450" b="1" i="0">
                 <a:solidFill>
                   <a:srgbClr val="ECEFF3"/>
                 </a:solidFill>
@@ -6813,7 +6836,7 @@
               <a:t>~120,000 women</a:t>
             </a:r>
             <a:r>
-              <a:rPr sz="1400" b="0">
+              <a:rPr sz="1450" b="0" i="0">
                 <a:solidFill>
                   <a:srgbClr val="9DA9B5"/>
                 </a:solidFill>
@@ -6822,36 +6845,27 @@
               <a:t>, two sites, racially diverse. Dose-response: </a:t>
             </a:r>
             <a:r>
-              <a:rPr sz="1400" b="1">
+              <a:rPr sz="1450" b="1" i="0">
                 <a:solidFill>
                   <a:srgbClr val="ECEFF3"/>
                 </a:solidFill>
                 <a:latin typeface="Arial"/>
               </a:rPr>
-              <a:t>mild HR 1.18–1.22 · moderate 1.38–1.47 · severe 2.03–2.22</a:t>
-            </a:r>
-            <a:r>
-              <a:rPr sz="1400" b="0">
-                <a:solidFill>
-                  <a:srgbClr val="9DA9B5"/>
-                </a:solidFill>
-                <a:latin typeface="Arial"/>
-              </a:rPr>
-              <a:t>.</a:t>
-            </a:r>
-          </a:p>
-        </p:txBody>
-      </p:sp>
-      <p:sp>
-        <p:nvSpPr>
-          <p:cNvPr id="6" name="TextBox 5"/>
+              <a:t>mild HR 1.18–1.22 · moderate 1.38–1.47 · severe 2.03–2.22.</a:t>
+            </a:r>
+          </a:p>
+        </p:txBody>
+      </p:sp>
+      <p:sp>
+        <p:nvSpPr>
+          <p:cNvPr id="7" name="TextBox 6"/>
           <p:cNvSpPr txBox="1"/>
           <p:nvPr/>
         </p:nvSpPr>
         <p:spPr>
           <a:xfrm>
-            <a:off x="777240" y="3952748"/>
-            <a:ext cx="5989320" cy="421640"/>
+            <a:off x="777240" y="5943600"/>
+            <a:ext cx="5852160" cy="457200"/>
           </a:xfrm>
           <a:prstGeom prst="rect">
             <a:avLst/>
@@ -6859,8 +6873,8 @@
           <a:noFill/>
         </p:spPr>
         <p:txBody>
-          <a:bodyPr wrap="square" lIns="25400" rIns="25400" tIns="12700" bIns="12700">
-            <a:noAutofit/>
+          <a:bodyPr wrap="square" anchor="t" lIns="0" rIns="0" tIns="0" bIns="0">
+            <a:spAutoFit/>
           </a:bodyPr>
           <a:lstStyle/>
           <a:p>
@@ -6868,41 +6882,29 @@
               <a:lnSpc>
                 <a:spcPct val="130000"/>
               </a:lnSpc>
-              <a:spcAft>
-                <a:spcPts val="400"/>
-              </a:spcAft>
             </a:pPr>
             <a:r>
-              <a:rPr sz="1000" b="0">
+              <a:rPr sz="950" b="0" i="0">
                 <a:solidFill>
                   <a:srgbClr val="5C6975"/>
                 </a:solidFill>
                 <a:latin typeface="Consolas"/>
               </a:rPr>
-              <a:t>Event-free survival by BAC severity — Any MACE, AMI, stroke, HF, death. </a:t>
-            </a:r>
-            <a:r>
-              <a:rPr sz="1000" b="1">
-                <a:solidFill>
-                  <a:srgbClr val="ECEFF3"/>
-                </a:solidFill>
-                <a:latin typeface="Consolas"/>
-              </a:rPr>
-              <a:t>Dapamede et al., Eur Heart J Open 2025.</a:t>
-            </a:r>
-          </a:p>
-        </p:txBody>
-      </p:sp>
-      <p:sp>
-        <p:nvSpPr>
-          <p:cNvPr id="7" name="Rounded Rectangle 6"/>
+              <a:t>Event-free survival by BAC severity — MACE, AMI, stroke, HF, death. Dapamede et al., Eur Heart J Open 2025.</a:t>
+            </a:r>
+          </a:p>
+        </p:txBody>
+      </p:sp>
+      <p:sp>
+        <p:nvSpPr>
+          <p:cNvPr id="8" name="Rounded Rectangle 7"/>
           <p:cNvSpPr/>
           <p:nvPr/>
         </p:nvSpPr>
         <p:spPr>
           <a:xfrm>
-            <a:off x="6912864" y="2931891"/>
-            <a:ext cx="4782312" cy="994216"/>
+            <a:off x="6309360" y="2998302"/>
+            <a:ext cx="5486400" cy="1135715"/>
           </a:xfrm>
           <a:prstGeom prst="roundRect">
             <a:avLst/>
@@ -6941,22 +6943,22 @@
       </p:sp>
       <p:pic>
         <p:nvPicPr>
-          <p:cNvPr id="8" name="Picture 7" descr="i_06d0d2a955.jpg"/>
+          <p:cNvPr id="9" name="Picture 8" descr="img_06d0d2a955.jpg"/>
           <p:cNvPicPr>
             <a:picLocks noChangeAspect="1"/>
           </p:cNvPicPr>
           <p:nvPr/>
         </p:nvPicPr>
         <p:blipFill>
-          <a:blip r:embed="rId3"/>
+          <a:blip r:embed="rId4"/>
           <a:stretch>
             <a:fillRect/>
           </a:stretch>
         </p:blipFill>
         <p:spPr>
           <a:xfrm>
-            <a:off x="6995160" y="3014187"/>
-            <a:ext cx="4617720" cy="829624"/>
+            <a:off x="6400800" y="3089742"/>
+            <a:ext cx="5303520" cy="952835"/>
           </a:xfrm>
           <a:prstGeom prst="rect">
             <a:avLst/>
@@ -6989,16 +6991,40 @@
         <p:nvPr/>
       </p:nvGrpSpPr>
       <p:grpSpPr/>
-      <p:sp>
-        <p:nvSpPr>
-          <p:cNvPr id="2" name="Rectangle 1"/>
+      <p:pic>
+        <p:nvPicPr>
+          <p:cNvPr id="2" name="Picture 1" descr="bg_motif.png"/>
+          <p:cNvPicPr>
+            <a:picLocks noChangeAspect="1"/>
+          </p:cNvPicPr>
+          <p:nvPr/>
+        </p:nvPicPr>
+        <p:blipFill>
+          <a:blip r:embed="rId2"/>
+          <a:stretch>
+            <a:fillRect/>
+          </a:stretch>
+        </p:blipFill>
+        <p:spPr>
+          <a:xfrm>
+            <a:off x="0" y="0"/>
+            <a:ext cx="12191695" cy="6858000"/>
+          </a:xfrm>
+          <a:prstGeom prst="rect">
+            <a:avLst/>
+          </a:prstGeom>
+        </p:spPr>
+      </p:pic>
+      <p:sp>
+        <p:nvSpPr>
+          <p:cNvPr id="3" name="Rectangle 2"/>
           <p:cNvSpPr/>
           <p:nvPr/>
         </p:nvSpPr>
         <p:spPr>
           <a:xfrm>
             <a:off x="0" y="0"/>
-            <a:ext cx="12191695" cy="38100"/>
+            <a:ext cx="5486400" cy="38100"/>
           </a:xfrm>
           <a:prstGeom prst="rect">
             <a:avLst/>
@@ -7035,14 +7061,14 @@
       </p:sp>
       <p:sp>
         <p:nvSpPr>
-          <p:cNvPr id="3" name="TextBox 2"/>
+          <p:cNvPr id="4" name="TextBox 3"/>
           <p:cNvSpPr txBox="1"/>
           <p:nvPr/>
         </p:nvSpPr>
         <p:spPr>
           <a:xfrm>
-            <a:off x="777240" y="411480"/>
-            <a:ext cx="8686800" cy="365760"/>
+            <a:off x="777240" y="502920"/>
+            <a:ext cx="8229600" cy="320040"/>
           </a:xfrm>
           <a:prstGeom prst="rect">
             <a:avLst/>
@@ -7050,21 +7076,18 @@
           <a:noFill/>
         </p:spPr>
         <p:txBody>
-          <a:bodyPr wrap="square" lIns="25400" rIns="25400" tIns="12700" bIns="12700">
-            <a:noAutofit/>
+          <a:bodyPr wrap="square" anchor="t" lIns="0" rIns="0" tIns="0" bIns="0">
+            <a:spAutoFit/>
           </a:bodyPr>
           <a:lstStyle/>
           <a:p>
             <a:pPr algn="l">
               <a:lnSpc>
-                <a:spcPct val="128000"/>
+                <a:spcPct val="100000"/>
               </a:lnSpc>
-              <a:spcAft>
-                <a:spcPts val="400"/>
-              </a:spcAft>
             </a:pPr>
             <a:r>
-              <a:rPr sz="1100" b="1">
+              <a:rPr sz="1100" b="1" i="0">
                 <a:solidFill>
                   <a:srgbClr val="E7AC51"/>
                 </a:solidFill>
@@ -7077,14 +7100,14 @@
       </p:sp>
       <p:sp>
         <p:nvSpPr>
-          <p:cNvPr id="4" name="TextBox 3"/>
+          <p:cNvPr id="5" name="TextBox 4"/>
           <p:cNvSpPr txBox="1"/>
           <p:nvPr/>
         </p:nvSpPr>
         <p:spPr>
           <a:xfrm>
-            <a:off x="777240" y="2620010"/>
-            <a:ext cx="5989320" cy="534416"/>
+            <a:off x="777240" y="1005840"/>
+            <a:ext cx="5486400" cy="1097280"/>
           </a:xfrm>
           <a:prstGeom prst="rect">
             <a:avLst/>
@@ -7092,21 +7115,18 @@
           <a:noFill/>
         </p:spPr>
         <p:txBody>
-          <a:bodyPr wrap="square" lIns="25400" rIns="25400" tIns="12700" bIns="12700">
-            <a:noAutofit/>
+          <a:bodyPr wrap="square" anchor="t" lIns="0" rIns="0" tIns="0" bIns="0">
+            <a:spAutoFit/>
           </a:bodyPr>
           <a:lstStyle/>
           <a:p>
             <a:pPr algn="l">
               <a:lnSpc>
-                <a:spcPct val="106000"/>
+                <a:spcPct val="100000"/>
               </a:lnSpc>
-              <a:spcAft>
-                <a:spcPts val="400"/>
-              </a:spcAft>
             </a:pPr>
             <a:r>
-              <a:rPr sz="2600" b="0">
+              <a:rPr sz="2600" b="1" i="0">
                 <a:solidFill>
                   <a:srgbClr val="ECEFF3"/>
                 </a:solidFill>
@@ -7115,7 +7135,7 @@
               <a:t>BAC and </a:t>
             </a:r>
             <a:r>
-              <a:rPr sz="2600" b="0">
+              <a:rPr sz="2600" b="1" i="0">
                 <a:solidFill>
                   <a:srgbClr val="E7AC51"/>
                 </a:solidFill>
@@ -7128,14 +7148,14 @@
       </p:sp>
       <p:sp>
         <p:nvSpPr>
-          <p:cNvPr id="5" name="TextBox 4"/>
+          <p:cNvPr id="6" name="TextBox 5"/>
           <p:cNvSpPr txBox="1"/>
           <p:nvPr/>
         </p:nvSpPr>
         <p:spPr>
           <a:xfrm>
-            <a:off x="777240" y="3154426"/>
-            <a:ext cx="5989320" cy="1029208"/>
+            <a:off x="777240" y="2103120"/>
+            <a:ext cx="5486400" cy="2194560"/>
           </a:xfrm>
           <a:prstGeom prst="rect">
             <a:avLst/>
@@ -7143,21 +7163,18 @@
           <a:noFill/>
         </p:spPr>
         <p:txBody>
-          <a:bodyPr wrap="square" lIns="25400" rIns="25400" tIns="12700" bIns="12700">
-            <a:noAutofit/>
+          <a:bodyPr wrap="square" anchor="t" lIns="0" rIns="0" tIns="0" bIns="0">
+            <a:spAutoFit/>
           </a:bodyPr>
           <a:lstStyle/>
           <a:p>
             <a:pPr algn="l">
               <a:lnSpc>
-                <a:spcPct val="128000"/>
+                <a:spcPct val="140000"/>
               </a:lnSpc>
-              <a:spcAft>
-                <a:spcPts val="400"/>
-              </a:spcAft>
             </a:pPr>
             <a:r>
-              <a:rPr sz="1400" b="0">
+              <a:rPr sz="1350" b="0" i="0">
                 <a:solidFill>
                   <a:srgbClr val="9DA9B5"/>
                 </a:solidFill>
@@ -7166,7 +7183,7 @@
               <a:t>BAC is </a:t>
             </a:r>
             <a:r>
-              <a:rPr sz="1400" b="1">
+              <a:rPr sz="1350" b="1" i="0">
                 <a:solidFill>
                   <a:srgbClr val="ECEFF3"/>
                 </a:solidFill>
@@ -7175,7 +7192,7 @@
               <a:t>medial</a:t>
             </a:r>
             <a:r>
-              <a:rPr sz="1400" b="0">
+              <a:rPr sz="1350" b="0" i="0">
                 <a:solidFill>
                   <a:srgbClr val="9DA9B5"/>
                 </a:solidFill>
@@ -7184,7 +7201,7 @@
               <a:t> calcification (Mönckeberg's) — the pattern that dominates PAD. In </a:t>
             </a:r>
             <a:r>
-              <a:rPr sz="1400" b="1">
+              <a:rPr sz="1350" b="1" i="0">
                 <a:solidFill>
                   <a:srgbClr val="ECEFF3"/>
                 </a:solidFill>
@@ -7193,7 +7210,7 @@
               <a:t>59,854 women</a:t>
             </a:r>
             <a:r>
-              <a:rPr sz="1400" b="0">
+              <a:rPr sz="1350" b="0" i="0">
                 <a:solidFill>
                   <a:srgbClr val="9DA9B5"/>
                 </a:solidFill>
@@ -7202,7 +7219,7 @@
               <a:t> (~8-yr follow-up), it graded the risk of </a:t>
             </a:r>
             <a:r>
-              <a:rPr sz="1400" b="1">
+              <a:rPr sz="1350" b="1" i="0">
                 <a:solidFill>
                   <a:srgbClr val="ECEFF3"/>
                 </a:solidFill>
@@ -7211,55 +7228,13 @@
               <a:t>vascular intervention</a:t>
             </a:r>
             <a:r>
-              <a:rPr sz="1400" b="0">
+              <a:rPr sz="1350" b="0" i="0">
                 <a:solidFill>
                   <a:srgbClr val="9DA9B5"/>
                 </a:solidFill>
                 <a:latin typeface="Arial"/>
               </a:rPr>
-              <a:t> — overall and within every high-risk subgroup (severe BAC vs zero).</a:t>
-            </a:r>
-          </a:p>
-        </p:txBody>
-      </p:sp>
-      <p:sp>
-        <p:nvSpPr>
-          <p:cNvPr id="6" name="TextBox 5"/>
-          <p:cNvSpPr txBox="1"/>
-          <p:nvPr/>
-        </p:nvSpPr>
-        <p:spPr>
-          <a:xfrm>
-            <a:off x="777240" y="4183634"/>
-            <a:ext cx="5989320" cy="346456"/>
-          </a:xfrm>
-          <a:prstGeom prst="rect">
-            <a:avLst/>
-          </a:prstGeom>
-          <a:noFill/>
-        </p:spPr>
-        <p:txBody>
-          <a:bodyPr wrap="square" lIns="25400" rIns="25400" tIns="12700" bIns="12700">
-            <a:noAutofit/>
-          </a:bodyPr>
-          <a:lstStyle/>
-          <a:p>
-            <a:pPr algn="l">
-              <a:lnSpc>
-                <a:spcPct val="128000"/>
-              </a:lnSpc>
-              <a:spcAft>
-                <a:spcPts val="400"/>
-              </a:spcAft>
-            </a:pPr>
-            <a:r>
-              <a:rPr sz="1400" b="0">
-                <a:solidFill>
-                  <a:srgbClr val="9DA9B5"/>
-                </a:solidFill>
-                <a:latin typeface="Arial"/>
-              </a:rPr>
-              <a:t>[your group], abstract — adj. age, DM, HTN, HLD, CKD, smoking.</a:t>
+              <a:t> overall and within every high-risk subgroup.</a:t>
             </a:r>
           </a:p>
         </p:txBody>
@@ -7272,8 +7247,8 @@
         </p:nvSpPr>
         <p:spPr>
           <a:xfrm>
-            <a:off x="777240" y="4530090"/>
-            <a:ext cx="5989320" cy="256540"/>
+            <a:off x="777240" y="5943600"/>
+            <a:ext cx="5486400" cy="457200"/>
           </a:xfrm>
           <a:prstGeom prst="rect">
             <a:avLst/>
@@ -7281,8 +7256,8 @@
           <a:noFill/>
         </p:spPr>
         <p:txBody>
-          <a:bodyPr wrap="square" lIns="25400" rIns="25400" tIns="12700" bIns="12700">
-            <a:noAutofit/>
+          <a:bodyPr wrap="square" anchor="t" lIns="0" rIns="0" tIns="0" bIns="0">
+            <a:spAutoFit/>
           </a:bodyPr>
           <a:lstStyle/>
           <a:p>
@@ -7290,38 +7265,59 @@
               <a:lnSpc>
                 <a:spcPct val="130000"/>
               </a:lnSpc>
-              <a:spcAft>
-                <a:spcPts val="400"/>
-              </a:spcAft>
             </a:pPr>
             <a:r>
-              <a:rPr sz="1000" b="0">
+              <a:rPr sz="950" b="0" i="0">
                 <a:solidFill>
                   <a:srgbClr val="5C6975"/>
                 </a:solidFill>
                 <a:latin typeface="Consolas"/>
               </a:rPr>
-              <a:t>Peripheral angiogram (PAD). Source: Radiopaedia.org (CC).</a:t>
-            </a:r>
-          </a:p>
-        </p:txBody>
-      </p:sp>
-      <p:sp>
-        <p:nvSpPr>
-          <p:cNvPr id="8" name="Rounded Rectangle 7"/>
+              <a:t>[your group], abstract — adj. age, DM, HTN, HLD, CKD, smoking. Angiogram: Radiopaedia.org (CC).</a:t>
+            </a:r>
+          </a:p>
+        </p:txBody>
+      </p:sp>
+      <p:pic>
+        <p:nvPicPr>
+          <p:cNvPr id="8" name="Picture 7" descr="svg_552f3c5534.png"/>
+          <p:cNvPicPr>
+            <a:picLocks noChangeAspect="1"/>
+          </p:cNvPicPr>
+          <p:nvPr/>
+        </p:nvPicPr>
+        <p:blipFill>
+          <a:blip r:embed="rId4"/>
+          <a:stretch>
+            <a:fillRect/>
+          </a:stretch>
+        </p:blipFill>
+        <p:spPr>
+          <a:xfrm>
+            <a:off x="6263640" y="2564891"/>
+            <a:ext cx="3840480" cy="2002536"/>
+          </a:xfrm>
+          <a:prstGeom prst="rect">
+            <a:avLst/>
+          </a:prstGeom>
+        </p:spPr>
+      </p:pic>
+      <p:sp>
+        <p:nvSpPr>
+          <p:cNvPr id="9" name="Rounded Rectangle 8"/>
           <p:cNvSpPr/>
           <p:nvPr/>
         </p:nvSpPr>
         <p:spPr>
           <a:xfrm>
-            <a:off x="7301774" y="832104"/>
-            <a:ext cx="4004490" cy="5193792"/>
+            <a:off x="10012680" y="2154110"/>
+            <a:ext cx="1920240" cy="2458339"/>
           </a:xfrm>
           <a:prstGeom prst="roundRect">
             <a:avLst/>
           </a:prstGeom>
           <a:solidFill>
-            <a:srgbClr val="FFFFFF"/>
+            <a:srgbClr val="000000"/>
           </a:solidFill>
           <a:ln w="9525">
             <a:solidFill>
@@ -7354,22 +7350,22 @@
       </p:sp>
       <p:pic>
         <p:nvPicPr>
-          <p:cNvPr id="9" name="Picture 8" descr="i_72dc4dd0ee.jpg"/>
+          <p:cNvPr id="10" name="Picture 9" descr="img_72dc4dd0ee.jpg"/>
           <p:cNvPicPr>
             <a:picLocks noChangeAspect="1"/>
           </p:cNvPicPr>
           <p:nvPr/>
         </p:nvPicPr>
         <p:blipFill>
-          <a:blip r:embed="rId3"/>
+          <a:blip r:embed="rId5"/>
           <a:stretch>
             <a:fillRect/>
           </a:stretch>
         </p:blipFill>
         <p:spPr>
           <a:xfrm>
-            <a:off x="7384070" y="914400"/>
-            <a:ext cx="3839898" cy="5029200"/>
+            <a:off x="10104120" y="2245550"/>
+            <a:ext cx="1737360" cy="2275459"/>
           </a:xfrm>
           <a:prstGeom prst="rect">
             <a:avLst/>
@@ -7402,16 +7398,40 @@
         <p:nvPr/>
       </p:nvGrpSpPr>
       <p:grpSpPr/>
-      <p:sp>
-        <p:nvSpPr>
-          <p:cNvPr id="2" name="Rectangle 1"/>
+      <p:pic>
+        <p:nvPicPr>
+          <p:cNvPr id="2" name="Picture 1" descr="bg_motif.png"/>
+          <p:cNvPicPr>
+            <a:picLocks noChangeAspect="1"/>
+          </p:cNvPicPr>
+          <p:nvPr/>
+        </p:nvPicPr>
+        <p:blipFill>
+          <a:blip r:embed="rId2"/>
+          <a:stretch>
+            <a:fillRect/>
+          </a:stretch>
+        </p:blipFill>
+        <p:spPr>
+          <a:xfrm>
+            <a:off x="0" y="0"/>
+            <a:ext cx="12191695" cy="6858000"/>
+          </a:xfrm>
+          <a:prstGeom prst="rect">
+            <a:avLst/>
+          </a:prstGeom>
+        </p:spPr>
+      </p:pic>
+      <p:sp>
+        <p:nvSpPr>
+          <p:cNvPr id="3" name="Rectangle 2"/>
           <p:cNvSpPr/>
           <p:nvPr/>
         </p:nvSpPr>
         <p:spPr>
           <a:xfrm>
             <a:off x="0" y="0"/>
-            <a:ext cx="12191695" cy="38100"/>
+            <a:ext cx="5486400" cy="38100"/>
           </a:xfrm>
           <a:prstGeom prst="rect">
             <a:avLst/>
@@ -7448,14 +7468,14 @@
       </p:sp>
       <p:sp>
         <p:nvSpPr>
-          <p:cNvPr id="3" name="TextBox 2"/>
+          <p:cNvPr id="4" name="TextBox 3"/>
           <p:cNvSpPr txBox="1"/>
           <p:nvPr/>
         </p:nvSpPr>
         <p:spPr>
           <a:xfrm>
-            <a:off x="777240" y="411480"/>
-            <a:ext cx="8686800" cy="365760"/>
+            <a:off x="777240" y="502920"/>
+            <a:ext cx="8229600" cy="320040"/>
           </a:xfrm>
           <a:prstGeom prst="rect">
             <a:avLst/>
@@ -7463,21 +7483,18 @@
           <a:noFill/>
         </p:spPr>
         <p:txBody>
-          <a:bodyPr wrap="square" lIns="25400" rIns="25400" tIns="12700" bIns="12700">
-            <a:noAutofit/>
+          <a:bodyPr wrap="square" anchor="t" lIns="0" rIns="0" tIns="0" bIns="0">
+            <a:spAutoFit/>
           </a:bodyPr>
           <a:lstStyle/>
           <a:p>
             <a:pPr algn="l">
               <a:lnSpc>
-                <a:spcPct val="128000"/>
+                <a:spcPct val="100000"/>
               </a:lnSpc>
-              <a:spcAft>
-                <a:spcPts val="400"/>
-              </a:spcAft>
             </a:pPr>
             <a:r>
-              <a:rPr sz="1100" b="1">
+              <a:rPr sz="1100" b="1" i="0">
                 <a:solidFill>
                   <a:srgbClr val="E7AC51"/>
                 </a:solidFill>
@@ -7490,14 +7507,14 @@
       </p:sp>
       <p:sp>
         <p:nvSpPr>
-          <p:cNvPr id="4" name="TextBox 3"/>
+          <p:cNvPr id="5" name="TextBox 4"/>
           <p:cNvSpPr txBox="1"/>
           <p:nvPr/>
         </p:nvSpPr>
         <p:spPr>
           <a:xfrm>
-            <a:off x="777240" y="2790190"/>
-            <a:ext cx="5989320" cy="346456"/>
+            <a:off x="777240" y="1005840"/>
+            <a:ext cx="5669280" cy="1097280"/>
           </a:xfrm>
           <a:prstGeom prst="rect">
             <a:avLst/>
@@ -7505,30 +7522,27 @@
           <a:noFill/>
         </p:spPr>
         <p:txBody>
-          <a:bodyPr wrap="square" lIns="25400" rIns="25400" tIns="12700" bIns="12700">
-            <a:noAutofit/>
+          <a:bodyPr wrap="square" anchor="t" lIns="0" rIns="0" tIns="0" bIns="0">
+            <a:spAutoFit/>
           </a:bodyPr>
           <a:lstStyle/>
           <a:p>
             <a:pPr algn="l">
               <a:lnSpc>
-                <a:spcPct val="128000"/>
+                <a:spcPct val="100000"/>
               </a:lnSpc>
-              <a:spcAft>
-                <a:spcPts val="400"/>
-              </a:spcAft>
             </a:pPr>
             <a:r>
-              <a:rPr sz="1400" b="0">
-                <a:solidFill>
-                  <a:srgbClr val="9DA9B5"/>
+              <a:rPr sz="2600" b="1" i="0">
+                <a:solidFill>
+                  <a:srgbClr val="ECEFF3"/>
                 </a:solidFill>
                 <a:latin typeface="Arial"/>
               </a:rPr>
               <a:t>BAC and </a:t>
             </a:r>
             <a:r>
-              <a:rPr sz="1400" b="0">
+              <a:rPr sz="2600" b="1" i="0">
                 <a:solidFill>
                   <a:srgbClr val="E7AC51"/>
                 </a:solidFill>
@@ -7541,14 +7555,14 @@
       </p:sp>
       <p:sp>
         <p:nvSpPr>
-          <p:cNvPr id="5" name="TextBox 4"/>
+          <p:cNvPr id="6" name="TextBox 5"/>
           <p:cNvSpPr txBox="1"/>
           <p:nvPr/>
         </p:nvSpPr>
         <p:spPr>
           <a:xfrm>
-            <a:off x="777240" y="3136646"/>
-            <a:ext cx="5989320" cy="801623"/>
+            <a:off x="777240" y="2103120"/>
+            <a:ext cx="5669280" cy="2377440"/>
           </a:xfrm>
           <a:prstGeom prst="rect">
             <a:avLst/>
@@ -7556,21 +7570,18 @@
           <a:noFill/>
         </p:spPr>
         <p:txBody>
-          <a:bodyPr wrap="square" lIns="25400" rIns="25400" tIns="12700" bIns="12700">
-            <a:noAutofit/>
+          <a:bodyPr wrap="square" anchor="t" lIns="0" rIns="0" tIns="0" bIns="0">
+            <a:spAutoFit/>
           </a:bodyPr>
           <a:lstStyle/>
           <a:p>
             <a:pPr algn="l">
               <a:lnSpc>
-                <a:spcPct val="128000"/>
+                <a:spcPct val="140000"/>
               </a:lnSpc>
-              <a:spcAft>
-                <a:spcPts val="400"/>
-              </a:spcAft>
             </a:pPr>
             <a:r>
-              <a:rPr sz="1400" b="1">
+              <a:rPr sz="1400" b="1" i="0">
                 <a:solidFill>
                   <a:srgbClr val="ECEFF3"/>
                 </a:solidFill>
@@ -7579,7 +7590,7 @@
               <a:t>122,011 women.</a:t>
             </a:r>
             <a:r>
-              <a:rPr sz="1400" b="0">
+              <a:rPr sz="1400" b="0" i="0">
                 <a:solidFill>
                   <a:srgbClr val="9DA9B5"/>
                 </a:solidFill>
@@ -7588,7 +7599,7 @@
               <a:t> Severe BAC vs none — </a:t>
             </a:r>
             <a:r>
-              <a:rPr sz="1400" b="1">
+              <a:rPr sz="1400" b="1" i="0">
                 <a:solidFill>
                   <a:srgbClr val="ECEFF3"/>
                 </a:solidFill>
@@ -7597,48 +7608,30 @@
               <a:t>AS 11.4 · AR 3.1 · MR 2.6 · TR 2.3</a:t>
             </a:r>
             <a:r>
-              <a:rPr sz="1400" b="0">
+              <a:rPr sz="1400" b="0" i="0">
                 <a:solidFill>
                   <a:srgbClr val="9DA9B5"/>
                 </a:solidFill>
                 <a:latin typeface="Arial"/>
               </a:rPr>
-              <a:t>; </a:t>
-            </a:r>
-            <a:r>
-              <a:rPr sz="1400" b="1">
-                <a:solidFill>
-                  <a:srgbClr val="ECEFF3"/>
-                </a:solidFill>
-                <a:latin typeface="Arial"/>
-              </a:rPr>
-              <a:t>mitral stenosis null</a:t>
-            </a:r>
-            <a:r>
-              <a:rPr sz="1400" b="0">
+              <a:t>; mitral stenosis null (negative control). 5-yr any-VHD </a:t>
+            </a:r>
+            <a:r>
+              <a:rPr sz="1400" b="1" i="0">
+                <a:solidFill>
+                  <a:srgbClr val="E7AC51"/>
+                </a:solidFill>
+                <a:latin typeface="Arial"/>
+              </a:rPr>
+              <a:t>19.3% vs 4.6%</a:t>
+            </a:r>
+            <a:r>
+              <a:rPr sz="1400" b="0" i="0">
                 <a:solidFill>
                   <a:srgbClr val="9DA9B5"/>
                 </a:solidFill>
                 <a:latin typeface="Arial"/>
               </a:rPr>
-              <a:t> (negative control). 5-yr any-VHD </a:t>
-            </a:r>
-            <a:r>
-              <a:rPr sz="1400" b="1">
-                <a:solidFill>
-                  <a:srgbClr val="ECEFF3"/>
-                </a:solidFill>
-                <a:latin typeface="Arial"/>
-              </a:rPr>
-              <a:t>19.3% vs 4.6%</a:t>
-            </a:r>
-            <a:r>
-              <a:rPr sz="1400" b="0">
-                <a:solidFill>
-                  <a:srgbClr val="9DA9B5"/>
-                </a:solidFill>
-                <a:latin typeface="Arial"/>
-              </a:rPr>
               <a:t> (NNS 7).</a:t>
             </a:r>
           </a:p>
@@ -7646,14 +7639,14 @@
       </p:sp>
       <p:sp>
         <p:nvSpPr>
-          <p:cNvPr id="6" name="TextBox 5"/>
+          <p:cNvPr id="7" name="TextBox 6"/>
           <p:cNvSpPr txBox="1"/>
           <p:nvPr/>
         </p:nvSpPr>
         <p:spPr>
           <a:xfrm>
-            <a:off x="777240" y="3938270"/>
-            <a:ext cx="5989320" cy="256540"/>
+            <a:off x="777240" y="5943600"/>
+            <a:ext cx="5669280" cy="457200"/>
           </a:xfrm>
           <a:prstGeom prst="rect">
             <a:avLst/>
@@ -7661,8 +7654,8 @@
           <a:noFill/>
         </p:spPr>
         <p:txBody>
-          <a:bodyPr wrap="square" lIns="25400" rIns="25400" tIns="12700" bIns="12700">
-            <a:noAutofit/>
+          <a:bodyPr wrap="square" anchor="t" lIns="0" rIns="0" tIns="0" bIns="0">
+            <a:spAutoFit/>
           </a:bodyPr>
           <a:lstStyle/>
           <a:p>
@@ -7670,69 +7663,15 @@
               <a:lnSpc>
                 <a:spcPct val="130000"/>
               </a:lnSpc>
-              <a:spcAft>
-                <a:spcPts val="400"/>
-              </a:spcAft>
             </a:pPr>
             <a:r>
-              <a:rPr sz="1000" b="0">
+              <a:rPr sz="950" b="0" i="0">
                 <a:solidFill>
                   <a:srgbClr val="5C6975"/>
                 </a:solidFill>
                 <a:latin typeface="Consolas"/>
               </a:rPr>
-              <a:t>Any VHD by BAC severity. </a:t>
-            </a:r>
-            <a:r>
-              <a:rPr sz="1000" b="1">
-                <a:solidFill>
-                  <a:srgbClr val="ECEFF3"/>
-                </a:solidFill>
-                <a:latin typeface="Consolas"/>
-              </a:rPr>
-              <a:t>Dapamede et al., Fig. 1.</a:t>
-            </a:r>
-          </a:p>
-        </p:txBody>
-      </p:sp>
-      <p:sp>
-        <p:nvSpPr>
-          <p:cNvPr id="7" name="TextBox 6"/>
-          <p:cNvSpPr txBox="1"/>
-          <p:nvPr/>
-        </p:nvSpPr>
-        <p:spPr>
-          <a:xfrm>
-            <a:off x="777240" y="4194810"/>
-            <a:ext cx="5989320" cy="421640"/>
-          </a:xfrm>
-          <a:prstGeom prst="rect">
-            <a:avLst/>
-          </a:prstGeom>
-          <a:noFill/>
-        </p:spPr>
-        <p:txBody>
-          <a:bodyPr wrap="square" lIns="25400" rIns="25400" tIns="12700" bIns="12700">
-            <a:noAutofit/>
-          </a:bodyPr>
-          <a:lstStyle/>
-          <a:p>
-            <a:pPr algn="l">
-              <a:lnSpc>
-                <a:spcPct val="130000"/>
-              </a:lnSpc>
-              <a:spcAft>
-                <a:spcPts val="400"/>
-              </a:spcAft>
-            </a:pPr>
-            <a:r>
-              <a:rPr sz="1000" b="0">
-                <a:solidFill>
-                  <a:srgbClr val="5C6975"/>
-                </a:solidFill>
-                <a:latin typeface="Consolas"/>
-              </a:rPr>
-              <a:t>Calcific valve disease, cardiac MRI. Source: ECR 2024 EPOS #166904 (used with permission).</a:t>
+              <a:t>Any VHD by BAC severity. Dapamede et al., Fig. 1. Valve MRI: ECR 2024 EPOS #166904 (used w/ permission).</a:t>
             </a:r>
           </a:p>
         </p:txBody>
@@ -7745,8 +7684,8 @@
         </p:nvSpPr>
         <p:spPr>
           <a:xfrm>
-            <a:off x="6912864" y="1654939"/>
-            <a:ext cx="4782312" cy="3548121"/>
+            <a:off x="6885341" y="1188719"/>
+            <a:ext cx="4425877" cy="3291840"/>
           </a:xfrm>
           <a:prstGeom prst="roundRect">
             <a:avLst/>
@@ -7785,22 +7724,92 @@
       </p:sp>
       <p:pic>
         <p:nvPicPr>
-          <p:cNvPr id="9" name="Picture 8" descr="i_748c07e4e3.jpg"/>
+          <p:cNvPr id="9" name="Picture 8" descr="img_748c07e4e3.jpg"/>
           <p:cNvPicPr>
             <a:picLocks noChangeAspect="1"/>
           </p:cNvPicPr>
           <p:nvPr/>
         </p:nvPicPr>
         <p:blipFill>
-          <a:blip r:embed="rId3"/>
+          <a:blip r:embed="rId4"/>
           <a:stretch>
             <a:fillRect/>
           </a:stretch>
         </p:blipFill>
         <p:spPr>
           <a:xfrm>
-            <a:off x="6995160" y="1737235"/>
-            <a:ext cx="4617720" cy="3383529"/>
+            <a:off x="6976781" y="1280160"/>
+            <a:ext cx="4242997" cy="3108960"/>
+          </a:xfrm>
+          <a:prstGeom prst="rect">
+            <a:avLst/>
+          </a:prstGeom>
+        </p:spPr>
+      </p:pic>
+      <p:sp>
+        <p:nvSpPr>
+          <p:cNvPr id="10" name="Rounded Rectangle 9"/>
+          <p:cNvSpPr/>
+          <p:nvPr/>
+        </p:nvSpPr>
+        <p:spPr>
+          <a:xfrm>
+            <a:off x="7909560" y="4434840"/>
+            <a:ext cx="2377440" cy="1828800"/>
+          </a:xfrm>
+          <a:prstGeom prst="roundRect">
+            <a:avLst/>
+          </a:prstGeom>
+          <a:solidFill>
+            <a:srgbClr val="000000"/>
+          </a:solidFill>
+          <a:ln w="9525">
+            <a:solidFill>
+              <a:srgbClr val="C98A2E"/>
+            </a:solidFill>
+          </a:ln>
+          <a:effectLst/>
+        </p:spPr>
+        <p:style>
+          <a:lnRef idx="1">
+            <a:schemeClr val="accent1"/>
+          </a:lnRef>
+          <a:fillRef idx="3">
+            <a:schemeClr val="accent1"/>
+          </a:fillRef>
+          <a:effectRef idx="2">
+            <a:schemeClr val="accent1"/>
+          </a:effectRef>
+          <a:fontRef idx="minor">
+            <a:schemeClr val="lt1"/>
+          </a:fontRef>
+        </p:style>
+        <p:txBody>
+          <a:bodyPr rtlCol="0" anchor="ctr"/>
+          <a:lstStyle/>
+          <a:p>
+            <a:pPr algn="ctr"/>
+          </a:p>
+        </p:txBody>
+      </p:sp>
+      <p:pic>
+        <p:nvPicPr>
+          <p:cNvPr id="11" name="Picture 10" descr="img_0396664eba.jpg"/>
+          <p:cNvPicPr>
+            <a:picLocks noChangeAspect="1"/>
+          </p:cNvPicPr>
+          <p:nvPr/>
+        </p:nvPicPr>
+        <p:blipFill>
+          <a:blip r:embed="rId5"/>
+          <a:stretch>
+            <a:fillRect/>
+          </a:stretch>
+        </p:blipFill>
+        <p:spPr>
+          <a:xfrm>
+            <a:off x="8001000" y="4526280"/>
+            <a:ext cx="2194560" cy="1645920"/>
           </a:xfrm>
           <a:prstGeom prst="rect">
             <a:avLst/>
@@ -7833,16 +7842,40 @@
         <p:nvPr/>
       </p:nvGrpSpPr>
       <p:grpSpPr/>
-      <p:sp>
-        <p:nvSpPr>
-          <p:cNvPr id="2" name="Rectangle 1"/>
+      <p:pic>
+        <p:nvPicPr>
+          <p:cNvPr id="2" name="Picture 1" descr="bg_motif.png"/>
+          <p:cNvPicPr>
+            <a:picLocks noChangeAspect="1"/>
+          </p:cNvPicPr>
+          <p:nvPr/>
+        </p:nvPicPr>
+        <p:blipFill>
+          <a:blip r:embed="rId2"/>
+          <a:stretch>
+            <a:fillRect/>
+          </a:stretch>
+        </p:blipFill>
+        <p:spPr>
+          <a:xfrm>
+            <a:off x="0" y="0"/>
+            <a:ext cx="12191695" cy="6858000"/>
+          </a:xfrm>
+          <a:prstGeom prst="rect">
+            <a:avLst/>
+          </a:prstGeom>
+        </p:spPr>
+      </p:pic>
+      <p:sp>
+        <p:nvSpPr>
+          <p:cNvPr id="3" name="Rectangle 2"/>
           <p:cNvSpPr/>
           <p:nvPr/>
         </p:nvSpPr>
         <p:spPr>
           <a:xfrm>
             <a:off x="0" y="0"/>
-            <a:ext cx="12191695" cy="38100"/>
+            <a:ext cx="5486400" cy="38100"/>
           </a:xfrm>
           <a:prstGeom prst="rect">
             <a:avLst/>
@@ -7879,14 +7912,14 @@
       </p:sp>
       <p:sp>
         <p:nvSpPr>
-          <p:cNvPr id="3" name="TextBox 2"/>
+          <p:cNvPr id="4" name="TextBox 3"/>
           <p:cNvSpPr txBox="1"/>
           <p:nvPr/>
         </p:nvSpPr>
         <p:spPr>
           <a:xfrm>
-            <a:off x="777240" y="411480"/>
-            <a:ext cx="8686800" cy="365760"/>
+            <a:off x="777240" y="502920"/>
+            <a:ext cx="8229600" cy="320040"/>
           </a:xfrm>
           <a:prstGeom prst="rect">
             <a:avLst/>
@@ -7894,21 +7927,18 @@
           <a:noFill/>
         </p:spPr>
         <p:txBody>
-          <a:bodyPr wrap="square" lIns="25400" rIns="25400" tIns="12700" bIns="12700">
-            <a:noAutofit/>
+          <a:bodyPr wrap="square" anchor="t" lIns="0" rIns="0" tIns="0" bIns="0">
+            <a:spAutoFit/>
           </a:bodyPr>
           <a:lstStyle/>
           <a:p>
             <a:pPr algn="l">
               <a:lnSpc>
-                <a:spcPct val="128000"/>
+                <a:spcPct val="100000"/>
               </a:lnSpc>
-              <a:spcAft>
-                <a:spcPts val="400"/>
-              </a:spcAft>
             </a:pPr>
             <a:r>
-              <a:rPr sz="1100" b="1">
+              <a:rPr sz="1100" b="1" i="0">
                 <a:solidFill>
                   <a:srgbClr val="E7AC51"/>
                 </a:solidFill>
@@ -7921,14 +7951,14 @@
       </p:sp>
       <p:sp>
         <p:nvSpPr>
-          <p:cNvPr id="4" name="TextBox 3"/>
+          <p:cNvPr id="5" name="TextBox 4"/>
           <p:cNvSpPr txBox="1"/>
           <p:nvPr/>
         </p:nvSpPr>
         <p:spPr>
           <a:xfrm>
-            <a:off x="777240" y="2560574"/>
-            <a:ext cx="5989320" cy="534416"/>
+            <a:off x="777240" y="1005840"/>
+            <a:ext cx="5669280" cy="1097280"/>
           </a:xfrm>
           <a:prstGeom prst="rect">
             <a:avLst/>
@@ -7936,21 +7966,18 @@
           <a:noFill/>
         </p:spPr>
         <p:txBody>
-          <a:bodyPr wrap="square" lIns="25400" rIns="25400" tIns="12700" bIns="12700">
-            <a:noAutofit/>
+          <a:bodyPr wrap="square" anchor="t" lIns="0" rIns="0" tIns="0" bIns="0">
+            <a:spAutoFit/>
           </a:bodyPr>
           <a:lstStyle/>
           <a:p>
             <a:pPr algn="l">
               <a:lnSpc>
-                <a:spcPct val="106000"/>
+                <a:spcPct val="100000"/>
               </a:lnSpc>
-              <a:spcAft>
-                <a:spcPts val="400"/>
-              </a:spcAft>
             </a:pPr>
             <a:r>
-              <a:rPr sz="2600" b="0">
+              <a:rPr sz="2600" b="1" i="0">
                 <a:solidFill>
                   <a:srgbClr val="ECEFF3"/>
                 </a:solidFill>
@@ -7959,7 +7986,7 @@
               <a:t>BAC and </a:t>
             </a:r>
             <a:r>
-              <a:rPr sz="2600" b="0">
+              <a:rPr sz="2600" b="1" i="0">
                 <a:solidFill>
                   <a:srgbClr val="E7AC51"/>
                 </a:solidFill>
@@ -7972,14 +7999,14 @@
       </p:sp>
       <p:sp>
         <p:nvSpPr>
-          <p:cNvPr id="5" name="TextBox 4"/>
+          <p:cNvPr id="6" name="TextBox 5"/>
           <p:cNvSpPr txBox="1"/>
           <p:nvPr/>
         </p:nvSpPr>
         <p:spPr>
           <a:xfrm>
-            <a:off x="777240" y="3094989"/>
-            <a:ext cx="5989320" cy="801623"/>
+            <a:off x="777240" y="2103120"/>
+            <a:ext cx="5669280" cy="2560320"/>
           </a:xfrm>
           <a:prstGeom prst="rect">
             <a:avLst/>
@@ -7987,21 +8014,18 @@
           <a:noFill/>
         </p:spPr>
         <p:txBody>
-          <a:bodyPr wrap="square" lIns="25400" rIns="25400" tIns="12700" bIns="12700">
-            <a:noAutofit/>
+          <a:bodyPr wrap="square" anchor="t" lIns="0" rIns="0" tIns="0" bIns="0">
+            <a:spAutoFit/>
           </a:bodyPr>
           <a:lstStyle/>
           <a:p>
             <a:pPr algn="l">
               <a:lnSpc>
-                <a:spcPct val="128000"/>
+                <a:spcPct val="140000"/>
               </a:lnSpc>
-              <a:spcAft>
-                <a:spcPts val="400"/>
-              </a:spcAft>
             </a:pPr>
             <a:r>
-              <a:rPr sz="1400" b="0">
+              <a:rPr sz="1400" b="0" i="0">
                 <a:solidFill>
                   <a:srgbClr val="9DA9B5"/>
                 </a:solidFill>
@@ -8010,7 +8034,7 @@
               <a:t>In </a:t>
             </a:r>
             <a:r>
-              <a:rPr sz="1400" b="1">
+              <a:rPr sz="1400" b="1" i="0">
                 <a:solidFill>
                   <a:srgbClr val="ECEFF3"/>
                 </a:solidFill>
@@ -8019,7 +8043,7 @@
               <a:t>2,079 women</a:t>
             </a:r>
             <a:r>
-              <a:rPr sz="1400" b="0">
+              <a:rPr sz="1400" b="0" i="0">
                 <a:solidFill>
                   <a:srgbClr val="9DA9B5"/>
                 </a:solidFill>
@@ -8028,7 +8052,7 @@
               <a:t> who later had a cardiac CT, detectable </a:t>
             </a:r>
             <a:r>
-              <a:rPr sz="1400" b="1">
+              <a:rPr sz="1400" b="1" i="0">
                 <a:solidFill>
                   <a:srgbClr val="ECEFF3"/>
                 </a:solidFill>
@@ -8037,7 +8061,7 @@
               <a:t>coronary calcium rose 38% → 67%</a:t>
             </a:r>
             <a:r>
-              <a:rPr sz="1400" b="0">
+              <a:rPr sz="1400" b="0" i="0">
                 <a:solidFill>
                   <a:srgbClr val="9DA9B5"/>
                 </a:solidFill>
@@ -8046,78 +8070,27 @@
               <a:t> across BAC tiers; CAC&gt;100 up </a:t>
             </a:r>
             <a:r>
-              <a:rPr sz="1400" b="1">
+              <a:rPr sz="1400" b="1" i="0">
+                <a:solidFill>
+                  <a:srgbClr val="E7AC51"/>
+                </a:solidFill>
+                <a:latin typeface="Arial"/>
+              </a:rPr>
+              <a:t>2.5×</a:t>
+            </a:r>
+            <a:r>
+              <a:rPr sz="1400" b="0" i="0">
+                <a:solidFill>
+                  <a:srgbClr val="9DA9B5"/>
+                </a:solidFill>
+                <a:latin typeface="Arial"/>
+              </a:rPr>
+              <a:t>. BAC independently predicted CAC (OR 1.32 / SD). </a:t>
+            </a:r>
+            <a:r>
+              <a:rPr sz="1400" b="1" i="0">
                 <a:solidFill>
                   <a:srgbClr val="ECEFF3"/>
-                </a:solidFill>
-                <a:latin typeface="Arial"/>
-              </a:rPr>
-              <a:t>2.5×</a:t>
-            </a:r>
-            <a:r>
-              <a:rPr sz="1400" b="0">
-                <a:solidFill>
-                  <a:srgbClr val="9DA9B5"/>
-                </a:solidFill>
-                <a:latin typeface="Arial"/>
-              </a:rPr>
-              <a:t>. BAC independently predicted CAC, age-adjusted (</a:t>
-            </a:r>
-            <a:r>
-              <a:rPr sz="1400" b="1">
-                <a:solidFill>
-                  <a:srgbClr val="ECEFF3"/>
-                </a:solidFill>
-                <a:latin typeface="Arial"/>
-              </a:rPr>
-              <a:t>OR 1.32 / SD</a:t>
-            </a:r>
-            <a:r>
-              <a:rPr sz="1400" b="0">
-                <a:solidFill>
-                  <a:srgbClr val="9DA9B5"/>
-                </a:solidFill>
-                <a:latin typeface="Arial"/>
-              </a:rPr>
-              <a:t>).</a:t>
-            </a:r>
-          </a:p>
-        </p:txBody>
-      </p:sp>
-      <p:sp>
-        <p:nvSpPr>
-          <p:cNvPr id="6" name="TextBox 5"/>
-          <p:cNvSpPr txBox="1"/>
-          <p:nvPr/>
-        </p:nvSpPr>
-        <p:spPr>
-          <a:xfrm>
-            <a:off x="777240" y="3896614"/>
-            <a:ext cx="5989320" cy="346456"/>
-          </a:xfrm>
-          <a:prstGeom prst="rect">
-            <a:avLst/>
-          </a:prstGeom>
-          <a:noFill/>
-        </p:spPr>
-        <p:txBody>
-          <a:bodyPr wrap="square" lIns="25400" rIns="25400" tIns="12700" bIns="12700">
-            <a:noAutofit/>
-          </a:bodyPr>
-          <a:lstStyle/>
-          <a:p>
-            <a:pPr algn="l">
-              <a:lnSpc>
-                <a:spcPct val="128000"/>
-              </a:lnSpc>
-              <a:spcAft>
-                <a:spcPts val="400"/>
-              </a:spcAft>
-            </a:pPr>
-            <a:r>
-              <a:rPr sz="1400" b="0">
-                <a:solidFill>
-                  <a:srgbClr val="E7AC51"/>
                 </a:solidFill>
                 <a:latin typeface="Arial"/>
               </a:rPr>
@@ -8134,8 +8107,8 @@
         </p:nvSpPr>
         <p:spPr>
           <a:xfrm>
-            <a:off x="777240" y="4243070"/>
-            <a:ext cx="5989320" cy="346456"/>
+            <a:off x="777240" y="5943600"/>
+            <a:ext cx="5669280" cy="457200"/>
           </a:xfrm>
           <a:prstGeom prst="rect">
             <a:avLst/>
@@ -8143,50 +8116,8 @@
           <a:noFill/>
         </p:spPr>
         <p:txBody>
-          <a:bodyPr wrap="square" lIns="25400" rIns="25400" tIns="12700" bIns="12700">
-            <a:noAutofit/>
-          </a:bodyPr>
-          <a:lstStyle/>
-          <a:p>
-            <a:pPr algn="l">
-              <a:lnSpc>
-                <a:spcPct val="128000"/>
-              </a:lnSpc>
-              <a:spcAft>
-                <a:spcPts val="400"/>
-              </a:spcAft>
-            </a:pPr>
-            <a:r>
-              <a:rPr sz="1400" b="0">
-                <a:solidFill>
-                  <a:srgbClr val="9DA9B5"/>
-                </a:solidFill>
-                <a:latin typeface="Arial"/>
-              </a:rPr>
-              <a:t>[your group], RSNA 2026 abstract (BAC–CAC).</a:t>
-            </a:r>
-          </a:p>
-        </p:txBody>
-      </p:sp>
-      <p:sp>
-        <p:nvSpPr>
-          <p:cNvPr id="8" name="TextBox 7"/>
-          <p:cNvSpPr txBox="1"/>
-          <p:nvPr/>
-        </p:nvSpPr>
-        <p:spPr>
-          <a:xfrm>
-            <a:off x="777240" y="4589525"/>
-            <a:ext cx="5989320" cy="256540"/>
-          </a:xfrm>
-          <a:prstGeom prst="rect">
-            <a:avLst/>
-          </a:prstGeom>
-          <a:noFill/>
-        </p:spPr>
-        <p:txBody>
-          <a:bodyPr wrap="square" lIns="25400" rIns="25400" tIns="12700" bIns="12700">
-            <a:noAutofit/>
+          <a:bodyPr wrap="square" anchor="t" lIns="0" rIns="0" tIns="0" bIns="0">
+            <a:spAutoFit/>
           </a:bodyPr>
           <a:lstStyle/>
           <a:p>
@@ -8194,32 +8125,29 @@
               <a:lnSpc>
                 <a:spcPct val="130000"/>
               </a:lnSpc>
-              <a:spcAft>
-                <a:spcPts val="400"/>
-              </a:spcAft>
             </a:pPr>
             <a:r>
-              <a:rPr sz="1000" b="0">
+              <a:rPr sz="950" b="0" i="0">
                 <a:solidFill>
                   <a:srgbClr val="5C6975"/>
                 </a:solidFill>
                 <a:latin typeface="Consolas"/>
               </a:rPr>
-              <a:t>CAC detection by BAC tier (n=2,079).</a:t>
-            </a:r>
-          </a:p>
-        </p:txBody>
-      </p:sp>
-      <p:sp>
-        <p:nvSpPr>
-          <p:cNvPr id="9" name="Rounded Rectangle 8"/>
+              <a:t>[your group], RSNA 2026 abstract (BAC–CAC). CAC detection by BAC tier (n=2,079).</a:t>
+            </a:r>
+          </a:p>
+        </p:txBody>
+      </p:sp>
+      <p:sp>
+        <p:nvSpPr>
+          <p:cNvPr id="8" name="Rounded Rectangle 7"/>
           <p:cNvSpPr/>
           <p:nvPr/>
         </p:nvSpPr>
         <p:spPr>
           <a:xfrm>
-            <a:off x="6912864" y="1967801"/>
-            <a:ext cx="4782312" cy="2922397"/>
+            <a:off x="6400800" y="1826894"/>
+            <a:ext cx="5394960" cy="3295650"/>
           </a:xfrm>
           <a:prstGeom prst="roundRect">
             <a:avLst/>
@@ -8258,22 +8186,22 @@
       </p:sp>
       <p:pic>
         <p:nvPicPr>
-          <p:cNvPr id="10" name="Picture 9" descr="i_3e559c34cb.jpg"/>
+          <p:cNvPr id="9" name="Picture 8" descr="img_3e559c34cb.jpg"/>
           <p:cNvPicPr>
             <a:picLocks noChangeAspect="1"/>
           </p:cNvPicPr>
           <p:nvPr/>
         </p:nvPicPr>
         <p:blipFill>
-          <a:blip r:embed="rId3"/>
+          <a:blip r:embed="rId4"/>
           <a:stretch>
             <a:fillRect/>
           </a:stretch>
         </p:blipFill>
         <p:spPr>
           <a:xfrm>
-            <a:off x="6995160" y="2050097"/>
-            <a:ext cx="4617720" cy="2757805"/>
+            <a:off x="6492240" y="1918334"/>
+            <a:ext cx="5212080" cy="3112770"/>
           </a:xfrm>
           <a:prstGeom prst="rect">
             <a:avLst/>
@@ -8306,16 +8234,40 @@
         <p:nvPr/>
       </p:nvGrpSpPr>
       <p:grpSpPr/>
-      <p:sp>
-        <p:nvSpPr>
-          <p:cNvPr id="2" name="Rectangle 1"/>
+      <p:pic>
+        <p:nvPicPr>
+          <p:cNvPr id="2" name="Picture 1" descr="bg_motif.png"/>
+          <p:cNvPicPr>
+            <a:picLocks noChangeAspect="1"/>
+          </p:cNvPicPr>
+          <p:nvPr/>
+        </p:nvPicPr>
+        <p:blipFill>
+          <a:blip r:embed="rId2"/>
+          <a:stretch>
+            <a:fillRect/>
+          </a:stretch>
+        </p:blipFill>
+        <p:spPr>
+          <a:xfrm>
+            <a:off x="0" y="0"/>
+            <a:ext cx="12191695" cy="6858000"/>
+          </a:xfrm>
+          <a:prstGeom prst="rect">
+            <a:avLst/>
+          </a:prstGeom>
+        </p:spPr>
+      </p:pic>
+      <p:sp>
+        <p:nvSpPr>
+          <p:cNvPr id="3" name="Rectangle 2"/>
           <p:cNvSpPr/>
           <p:nvPr/>
         </p:nvSpPr>
         <p:spPr>
           <a:xfrm>
             <a:off x="0" y="0"/>
-            <a:ext cx="12191695" cy="38100"/>
+            <a:ext cx="5486400" cy="38100"/>
           </a:xfrm>
           <a:prstGeom prst="rect">
             <a:avLst/>
@@ -8352,14 +8304,14 @@
       </p:sp>
       <p:sp>
         <p:nvSpPr>
-          <p:cNvPr id="3" name="TextBox 2"/>
+          <p:cNvPr id="4" name="TextBox 3"/>
           <p:cNvSpPr txBox="1"/>
           <p:nvPr/>
         </p:nvSpPr>
         <p:spPr>
           <a:xfrm>
-            <a:off x="777240" y="411480"/>
-            <a:ext cx="8686800" cy="365760"/>
+            <a:off x="777240" y="502920"/>
+            <a:ext cx="8229600" cy="320040"/>
           </a:xfrm>
           <a:prstGeom prst="rect">
             <a:avLst/>
@@ -8367,21 +8319,18 @@
           <a:noFill/>
         </p:spPr>
         <p:txBody>
-          <a:bodyPr wrap="square" lIns="25400" rIns="25400" tIns="12700" bIns="12700">
-            <a:noAutofit/>
+          <a:bodyPr wrap="square" anchor="t" lIns="0" rIns="0" tIns="0" bIns="0">
+            <a:spAutoFit/>
           </a:bodyPr>
           <a:lstStyle/>
           <a:p>
             <a:pPr algn="l">
               <a:lnSpc>
-                <a:spcPct val="128000"/>
+                <a:spcPct val="100000"/>
               </a:lnSpc>
-              <a:spcAft>
-                <a:spcPts val="400"/>
-              </a:spcAft>
             </a:pPr>
             <a:r>
-              <a:rPr sz="1100" b="1">
+              <a:rPr sz="1100" b="1" i="0">
                 <a:solidFill>
                   <a:srgbClr val="E7AC51"/>
                 </a:solidFill>
@@ -8394,14 +8343,14 @@
       </p:sp>
       <p:sp>
         <p:nvSpPr>
-          <p:cNvPr id="4" name="TextBox 3"/>
+          <p:cNvPr id="5" name="TextBox 4"/>
           <p:cNvSpPr txBox="1"/>
           <p:nvPr/>
         </p:nvSpPr>
         <p:spPr>
           <a:xfrm>
-            <a:off x="777240" y="1288541"/>
-            <a:ext cx="10607040" cy="534416"/>
+            <a:off x="777240" y="1005840"/>
+            <a:ext cx="8229600" cy="1097280"/>
           </a:xfrm>
           <a:prstGeom prst="rect">
             <a:avLst/>
@@ -8409,21 +8358,18 @@
           <a:noFill/>
         </p:spPr>
         <p:txBody>
-          <a:bodyPr wrap="square" lIns="25400" rIns="25400" tIns="12700" bIns="12700">
-            <a:noAutofit/>
+          <a:bodyPr wrap="square" anchor="t" lIns="0" rIns="0" tIns="0" bIns="0">
+            <a:spAutoFit/>
           </a:bodyPr>
           <a:lstStyle/>
           <a:p>
             <a:pPr algn="l">
               <a:lnSpc>
-                <a:spcPct val="106000"/>
+                <a:spcPct val="100000"/>
               </a:lnSpc>
-              <a:spcAft>
-                <a:spcPts val="400"/>
-              </a:spcAft>
             </a:pPr>
             <a:r>
-              <a:rPr sz="2600" b="0">
+              <a:rPr sz="2600" b="1" i="0">
                 <a:solidFill>
                   <a:srgbClr val="ECEFF3"/>
                 </a:solidFill>
@@ -8432,7 +8378,7 @@
               <a:t>BAC and </a:t>
             </a:r>
             <a:r>
-              <a:rPr sz="2600" b="0">
+              <a:rPr sz="2600" b="1" i="0">
                 <a:solidFill>
                   <a:srgbClr val="E7AC51"/>
                 </a:solidFill>
@@ -8445,14 +8391,14 @@
       </p:sp>
       <p:sp>
         <p:nvSpPr>
-          <p:cNvPr id="5" name="TextBox 4"/>
+          <p:cNvPr id="6" name="TextBox 5"/>
           <p:cNvSpPr txBox="1"/>
           <p:nvPr/>
         </p:nvSpPr>
         <p:spPr>
           <a:xfrm>
-            <a:off x="777240" y="1822958"/>
-            <a:ext cx="10607040" cy="574040"/>
+            <a:off x="777240" y="2194560"/>
+            <a:ext cx="10424160" cy="1097280"/>
           </a:xfrm>
           <a:prstGeom prst="rect">
             <a:avLst/>
@@ -8460,21 +8406,18 @@
           <a:noFill/>
         </p:spPr>
         <p:txBody>
-          <a:bodyPr wrap="square" lIns="25400" rIns="25400" tIns="12700" bIns="12700">
-            <a:noAutofit/>
+          <a:bodyPr wrap="square" anchor="t" lIns="0" rIns="0" tIns="0" bIns="0">
+            <a:spAutoFit/>
           </a:bodyPr>
           <a:lstStyle/>
           <a:p>
             <a:pPr algn="l">
               <a:lnSpc>
-                <a:spcPct val="128000"/>
+                <a:spcPct val="140000"/>
               </a:lnSpc>
-              <a:spcAft>
-                <a:spcPts val="400"/>
-              </a:spcAft>
             </a:pPr>
             <a:r>
-              <a:rPr sz="1400" b="0">
+              <a:rPr sz="1500" b="0" i="0">
                 <a:solidFill>
                   <a:srgbClr val="9DA9B5"/>
                 </a:solidFill>
@@ -8483,7 +8426,7 @@
               <a:t>A </a:t>
             </a:r>
             <a:r>
-              <a:rPr sz="1400" b="1">
+              <a:rPr sz="1500" b="1" i="0">
                 <a:solidFill>
                   <a:srgbClr val="ECEFF3"/>
                 </a:solidFill>
@@ -8492,7 +8435,7 @@
               <a:t>non-vascular</a:t>
             </a:r>
             <a:r>
-              <a:rPr sz="1400" b="0">
+              <a:rPr sz="1500" b="0" i="0">
                 <a:solidFill>
                   <a:srgbClr val="9DA9B5"/>
                 </a:solidFill>
@@ -8501,7 +8444,7 @@
               <a:t> marker — calcification in the costal cartilage on chest CT (</a:t>
             </a:r>
             <a:r>
-              <a:rPr sz="1400" b="1">
+              <a:rPr sz="1500" b="1" i="0">
                 <a:solidFill>
                   <a:srgbClr val="ECEFF3"/>
                 </a:solidFill>
@@ -8510,101 +8453,266 @@
               <a:t>n=1,311</a:t>
             </a:r>
             <a:r>
-              <a:rPr sz="1400" b="0">
+              <a:rPr sz="1500" b="0" i="0">
                 <a:solidFill>
                   <a:srgbClr val="9DA9B5"/>
                 </a:solidFill>
                 <a:latin typeface="Arial"/>
               </a:rPr>
-              <a:t>). Correlated with BAC (ρ=0.089, p=0.001).</a:t>
-            </a:r>
-          </a:p>
-        </p:txBody>
-      </p:sp>
-      <p:sp>
-        <p:nvSpPr>
-          <p:cNvPr id="6" name="TextBox 5"/>
-          <p:cNvSpPr txBox="1"/>
-          <p:nvPr/>
-        </p:nvSpPr>
-        <p:spPr>
-          <a:xfrm>
-            <a:off x="777240" y="2396998"/>
-            <a:ext cx="10607040" cy="346456"/>
-          </a:xfrm>
-          <a:prstGeom prst="rect">
-            <a:avLst/>
-          </a:prstGeom>
-          <a:noFill/>
-        </p:spPr>
-        <p:txBody>
-          <a:bodyPr wrap="square" lIns="25400" rIns="25400" tIns="12700" bIns="12700">
-            <a:noAutofit/>
-          </a:bodyPr>
-          <a:lstStyle/>
-          <a:p>
-            <a:pPr algn="l">
-              <a:lnSpc>
-                <a:spcPct val="128000"/>
-              </a:lnSpc>
-              <a:spcAft>
-                <a:spcPts val="400"/>
-              </a:spcAft>
-            </a:pPr>
-            <a:r>
-              <a:rPr sz="1400" b="0">
-                <a:solidFill>
-                  <a:srgbClr val="9DA9B5"/>
-                </a:solidFill>
-                <a:latin typeface="Arial"/>
-              </a:rPr>
-              <a:t>High BAC vs zero (ΔCCC)</a:t>
-            </a:r>
-          </a:p>
-        </p:txBody>
-      </p:sp>
-      <p:sp>
-        <p:nvSpPr>
-          <p:cNvPr id="7" name="TextBox 6"/>
-          <p:cNvSpPr txBox="1"/>
-          <p:nvPr/>
-        </p:nvSpPr>
-        <p:spPr>
-          <a:xfrm>
-            <a:off x="777240" y="2743454"/>
-            <a:ext cx="10607040" cy="346456"/>
-          </a:xfrm>
-          <a:prstGeom prst="rect">
-            <a:avLst/>
-          </a:prstGeom>
-          <a:noFill/>
-        </p:spPr>
-        <p:txBody>
-          <a:bodyPr wrap="square" lIns="25400" rIns="25400" tIns="12700" bIns="12700">
-            <a:noAutofit/>
-          </a:bodyPr>
-          <a:lstStyle/>
-          <a:p>
-            <a:pPr algn="l">
-              <a:lnSpc>
-                <a:spcPct val="128000"/>
-              </a:lnSpc>
-              <a:spcAft>
-                <a:spcPts val="400"/>
-              </a:spcAft>
-            </a:pPr>
-            <a:r>
-              <a:rPr sz="1400" b="0">
-                <a:solidFill>
-                  <a:srgbClr val="9DA9B5"/>
-                </a:solidFill>
-                <a:latin typeface="Arial"/>
-              </a:rPr>
-              <a:t>adj. p</a:t>
-            </a:r>
-          </a:p>
-        </p:txBody>
-      </p:sp>
+              <a:t>). Correlated with BAC (ρ=0.089, p=0.001). </a:t>
+            </a:r>
+            <a:r>
+              <a:rPr sz="1500" b="1" i="0">
+                <a:solidFill>
+                  <a:srgbClr val="ECEFF3"/>
+                </a:solidFill>
+                <a:latin typeface="Arial"/>
+              </a:rPr>
+              <a:t>Vascular + valvular + skeletal — one free mammographic finding.</a:t>
+            </a:r>
+          </a:p>
+        </p:txBody>
+      </p:sp>
+      <p:graphicFrame>
+        <p:nvGraphicFramePr>
+          <p:cNvPr id="7" name="Table 6"/>
+          <p:cNvGraphicFramePr>
+            <a:graphicFrameLocks noGrp="1"/>
+          </p:cNvGraphicFramePr>
+          <p:nvPr/>
+        </p:nvGraphicFramePr>
+        <p:xfrm>
+          <a:off x="777240" y="3749039"/>
+          <a:ext cx="7772400" cy="987552"/>
+        </p:xfrm>
+        <a:graphic>
+          <a:graphicData uri="http://schemas.openxmlformats.org/drawingml/2006/table">
+            <a:tbl>
+              <a:tblPr firstRow="1" bandRow="1">
+                <a:tableStyleId>{5C22544A-7EE6-4342-B048-85BDC9FD1C3A}</a:tableStyleId>
+              </a:tblPr>
+              <a:tblGrid>
+                <a:gridCol w="3840480"/>
+                <a:gridCol w="1965960"/>
+                <a:gridCol w="1965960"/>
+              </a:tblGrid>
+              <a:tr h="329184">
+                <a:tc>
+                  <a:txBody>
+                    <a:bodyPr/>
+                    <a:lstStyle/>
+                    <a:p>
+                      <a:pPr algn="l"/>
+                      <a:r>
+                        <a:rPr sz="1300" b="1">
+                          <a:solidFill>
+                            <a:srgbClr val="E7AC51"/>
+                          </a:solidFill>
+                          <a:latin typeface="Arial"/>
+                        </a:rPr>
+                        <a:t>High BAC vs zero (ΔCCC)</a:t>
+                      </a:r>
+                    </a:p>
+                  </a:txBody>
+                  <a:tcPr anchor="ctr" marL="73152" marR="73152" marT="25400" marB="25400">
+                    <a:solidFill>
+                      <a:srgbClr val="0F141A"/>
+                    </a:solidFill>
+                  </a:tcPr>
+                </a:tc>
+                <a:tc>
+                  <a:txBody>
+                    <a:bodyPr/>
+                    <a:lstStyle/>
+                    <a:p>
+                      <a:pPr algn="ctr"/>
+                      <a:r>
+                        <a:rPr sz="1300" b="1">
+                          <a:solidFill>
+                            <a:srgbClr val="E7AC51"/>
+                          </a:solidFill>
+                          <a:latin typeface="Arial"/>
+                        </a:rPr>
+                        <a:t>adj. p</a:t>
+                      </a:r>
+                    </a:p>
+                  </a:txBody>
+                  <a:tcPr anchor="ctr" marL="73152" marR="73152" marT="25400" marB="25400">
+                    <a:solidFill>
+                      <a:srgbClr val="0F141A"/>
+                    </a:solidFill>
+                  </a:tcPr>
+                </a:tc>
+                <a:tc>
+                  <a:txBody>
+                    <a:bodyPr/>
+                    <a:lstStyle/>
+                    <a:p>
+                      <a:pPr algn="ctr"/>
+                      <a:r>
+                        <a:rPr sz="1300" b="1">
+                          <a:solidFill>
+                            <a:srgbClr val="E7AC51"/>
+                          </a:solidFill>
+                          <a:latin typeface="Arial"/>
+                        </a:rPr>
+                        <a:t>Δ</a:t>
+                      </a:r>
+                    </a:p>
+                  </a:txBody>
+                  <a:tcPr anchor="ctr" marL="73152" marR="73152" marT="25400" marB="25400">
+                    <a:solidFill>
+                      <a:srgbClr val="0F141A"/>
+                    </a:solidFill>
+                  </a:tcPr>
+                </a:tc>
+              </a:tr>
+              <a:tr h="329184">
+                <a:tc>
+                  <a:txBody>
+                    <a:bodyPr/>
+                    <a:lstStyle/>
+                    <a:p>
+                      <a:pPr algn="l"/>
+                      <a:r>
+                        <a:rPr sz="1300" b="0">
+                          <a:solidFill>
+                            <a:srgbClr val="ECEFF3"/>
+                          </a:solidFill>
+                          <a:latin typeface="Arial"/>
+                        </a:rPr>
+                        <a:t>Median (q0.50)</a:t>
+                      </a:r>
+                    </a:p>
+                  </a:txBody>
+                  <a:tcPr anchor="ctr" marL="73152" marR="73152" marT="25400" marB="25400">
+                    <a:solidFill>
+                      <a:srgbClr val="0F141A"/>
+                    </a:solidFill>
+                  </a:tcPr>
+                </a:tc>
+                <a:tc>
+                  <a:txBody>
+                    <a:bodyPr/>
+                    <a:lstStyle/>
+                    <a:p>
+                      <a:pPr algn="ctr"/>
+                      <a:r>
+                        <a:rPr sz="1300" b="0">
+                          <a:solidFill>
+                            <a:srgbClr val="9DA9B5"/>
+                          </a:solidFill>
+                          <a:latin typeface="Arial"/>
+                        </a:rPr>
+                        <a:t>0.47 (NS)</a:t>
+                      </a:r>
+                    </a:p>
+                  </a:txBody>
+                  <a:tcPr anchor="ctr" marL="73152" marR="73152" marT="25400" marB="25400">
+                    <a:solidFill>
+                      <a:srgbClr val="0F141A"/>
+                    </a:solidFill>
+                  </a:tcPr>
+                </a:tc>
+                <a:tc>
+                  <a:txBody>
+                    <a:bodyPr/>
+                    <a:lstStyle/>
+                    <a:p>
+                      <a:pPr algn="ctr"/>
+                      <a:r>
+                        <a:rPr sz="1300" b="0">
+                          <a:solidFill>
+                            <a:srgbClr val="9DA9B5"/>
+                          </a:solidFill>
+                          <a:latin typeface="Arial"/>
+                        </a:rPr>
+                        <a:t>—</a:t>
+                      </a:r>
+                    </a:p>
+                  </a:txBody>
+                  <a:tcPr anchor="ctr" marL="73152" marR="73152" marT="25400" marB="25400">
+                    <a:solidFill>
+                      <a:srgbClr val="0F141A"/>
+                    </a:solidFill>
+                  </a:tcPr>
+                </a:tc>
+              </a:tr>
+              <a:tr h="329184">
+                <a:tc>
+                  <a:txBody>
+                    <a:bodyPr/>
+                    <a:lstStyle/>
+                    <a:p>
+                      <a:pPr algn="l"/>
+                      <a:r>
+                        <a:rPr sz="1300" b="0">
+                          <a:solidFill>
+                            <a:srgbClr val="ECEFF3"/>
+                          </a:solidFill>
+                          <a:latin typeface="Arial"/>
+                        </a:rPr>
+                        <a:t>75th pct (q0.75)</a:t>
+                      </a:r>
+                    </a:p>
+                  </a:txBody>
+                  <a:tcPr anchor="ctr" marL="73152" marR="73152" marT="25400" marB="25400">
+                    <a:solidFill>
+                      <a:srgbClr val="0F141A"/>
+                    </a:solidFill>
+                  </a:tcPr>
+                </a:tc>
+                <a:tc>
+                  <a:txBody>
+                    <a:bodyPr/>
+                    <a:lstStyle/>
+                    <a:p>
+                      <a:pPr algn="ctr"/>
+                      <a:r>
+                        <a:rPr sz="1300" b="0">
+                          <a:solidFill>
+                            <a:srgbClr val="9DA9B5"/>
+                          </a:solidFill>
+                          <a:latin typeface="Arial"/>
+                        </a:rPr>
+                        <a:t>&lt;0.001</a:t>
+                      </a:r>
+                    </a:p>
+                  </a:txBody>
+                  <a:tcPr anchor="ctr" marL="73152" marR="73152" marT="25400" marB="25400">
+                    <a:solidFill>
+                      <a:srgbClr val="0F141A"/>
+                    </a:solidFill>
+                  </a:tcPr>
+                </a:tc>
+                <a:tc>
+                  <a:txBody>
+                    <a:bodyPr/>
+                    <a:lstStyle/>
+                    <a:p>
+                      <a:pPr algn="ctr"/>
+                      <a:r>
+                        <a:rPr sz="1300" b="0">
+                          <a:solidFill>
+                            <a:srgbClr val="9DA9B5"/>
+                          </a:solidFill>
+                          <a:latin typeface="Arial"/>
+                        </a:rPr>
+                        <a:t>+3,408 mm³</a:t>
+                      </a:r>
+                    </a:p>
+                  </a:txBody>
+                  <a:tcPr anchor="ctr" marL="73152" marR="73152" marT="25400" marB="25400">
+                    <a:solidFill>
+                      <a:srgbClr val="0F141A"/>
+                    </a:solidFill>
+                  </a:tcPr>
+                </a:tc>
+              </a:tr>
+            </a:tbl>
+          </a:graphicData>
+        </a:graphic>
+      </p:graphicFrame>
       <p:sp>
         <p:nvSpPr>
           <p:cNvPr id="8" name="TextBox 7"/>
@@ -8613,8 +8721,8 @@
         </p:nvSpPr>
         <p:spPr>
           <a:xfrm>
-            <a:off x="777240" y="3089910"/>
-            <a:ext cx="10607040" cy="346456"/>
+            <a:off x="777240" y="5486400"/>
+            <a:ext cx="10607040" cy="457200"/>
           </a:xfrm>
           <a:prstGeom prst="rect">
             <a:avLst/>
@@ -8622,362 +8730,8 @@
           <a:noFill/>
         </p:spPr>
         <p:txBody>
-          <a:bodyPr wrap="square" lIns="25400" rIns="25400" tIns="12700" bIns="12700">
-            <a:noAutofit/>
-          </a:bodyPr>
-          <a:lstStyle/>
-          <a:p>
-            <a:pPr algn="l">
-              <a:lnSpc>
-                <a:spcPct val="128000"/>
-              </a:lnSpc>
-              <a:spcAft>
-                <a:spcPts val="400"/>
-              </a:spcAft>
-            </a:pPr>
-            <a:r>
-              <a:rPr sz="1400" b="0">
-                <a:solidFill>
-                  <a:srgbClr val="9DA9B5"/>
-                </a:solidFill>
-                <a:latin typeface="Arial"/>
-              </a:rPr>
-              <a:t>Median (q0.50)</a:t>
-            </a:r>
-          </a:p>
-        </p:txBody>
-      </p:sp>
-      <p:sp>
-        <p:nvSpPr>
-          <p:cNvPr id="9" name="TextBox 8"/>
-          <p:cNvSpPr txBox="1"/>
-          <p:nvPr/>
-        </p:nvSpPr>
-        <p:spPr>
-          <a:xfrm>
-            <a:off x="777240" y="3436366"/>
-            <a:ext cx="10607040" cy="346456"/>
-          </a:xfrm>
-          <a:prstGeom prst="rect">
-            <a:avLst/>
-          </a:prstGeom>
-          <a:noFill/>
-        </p:spPr>
-        <p:txBody>
-          <a:bodyPr wrap="square" lIns="25400" rIns="25400" tIns="12700" bIns="12700">
-            <a:noAutofit/>
-          </a:bodyPr>
-          <a:lstStyle/>
-          <a:p>
-            <a:pPr algn="l">
-              <a:lnSpc>
-                <a:spcPct val="128000"/>
-              </a:lnSpc>
-              <a:spcAft>
-                <a:spcPts val="400"/>
-              </a:spcAft>
-            </a:pPr>
-            <a:r>
-              <a:rPr sz="1400" b="0">
-                <a:solidFill>
-                  <a:srgbClr val="9DA9B5"/>
-                </a:solidFill>
-                <a:latin typeface="Arial"/>
-              </a:rPr>
-              <a:t>NS · 0.47</a:t>
-            </a:r>
-          </a:p>
-        </p:txBody>
-      </p:sp>
-      <p:sp>
-        <p:nvSpPr>
-          <p:cNvPr id="10" name="TextBox 9"/>
-          <p:cNvSpPr txBox="1"/>
-          <p:nvPr/>
-        </p:nvSpPr>
-        <p:spPr>
-          <a:xfrm>
-            <a:off x="777240" y="3782822"/>
-            <a:ext cx="10607040" cy="346456"/>
-          </a:xfrm>
-          <a:prstGeom prst="rect">
-            <a:avLst/>
-          </a:prstGeom>
-          <a:noFill/>
-        </p:spPr>
-        <p:txBody>
-          <a:bodyPr wrap="square" lIns="25400" rIns="25400" tIns="12700" bIns="12700">
-            <a:noAutofit/>
-          </a:bodyPr>
-          <a:lstStyle/>
-          <a:p>
-            <a:pPr algn="l">
-              <a:lnSpc>
-                <a:spcPct val="128000"/>
-              </a:lnSpc>
-              <a:spcAft>
-                <a:spcPts val="400"/>
-              </a:spcAft>
-            </a:pPr>
-            <a:r>
-              <a:rPr sz="1400" b="1">
-                <a:solidFill>
-                  <a:srgbClr val="ECEFF3"/>
-                </a:solidFill>
-                <a:latin typeface="Arial"/>
-              </a:rPr>
-              <a:t>75th pct (q0.75)</a:t>
-            </a:r>
-            <a:r>
-              <a:rPr sz="1400" b="0">
-                <a:solidFill>
-                  <a:srgbClr val="9DA9B5"/>
-                </a:solidFill>
-                <a:latin typeface="Arial"/>
-              </a:rPr>
-              <a:t> </a:t>
-            </a:r>
-            <a:r>
-              <a:rPr sz="1400" b="0">
-                <a:solidFill>
-                  <a:srgbClr val="E7AC51"/>
-                </a:solidFill>
-                <a:latin typeface="Arial"/>
-              </a:rPr>
-              <a:t>+3,408 mm³</a:t>
-            </a:r>
-          </a:p>
-        </p:txBody>
-      </p:sp>
-      <p:sp>
-        <p:nvSpPr>
-          <p:cNvPr id="11" name="TextBox 10"/>
-          <p:cNvSpPr txBox="1"/>
-          <p:nvPr/>
-        </p:nvSpPr>
-        <p:spPr>
-          <a:xfrm>
-            <a:off x="777240" y="4129278"/>
-            <a:ext cx="10607040" cy="346456"/>
-          </a:xfrm>
-          <a:prstGeom prst="rect">
-            <a:avLst/>
-          </a:prstGeom>
-          <a:noFill/>
-        </p:spPr>
-        <p:txBody>
-          <a:bodyPr wrap="square" lIns="25400" rIns="25400" tIns="12700" bIns="12700">
-            <a:noAutofit/>
-          </a:bodyPr>
-          <a:lstStyle/>
-          <a:p>
-            <a:pPr algn="l">
-              <a:lnSpc>
-                <a:spcPct val="128000"/>
-              </a:lnSpc>
-              <a:spcAft>
-                <a:spcPts val="400"/>
-              </a:spcAft>
-            </a:pPr>
-            <a:r>
-              <a:rPr sz="1400" b="1">
-                <a:solidFill>
-                  <a:srgbClr val="ECEFF3"/>
-                </a:solidFill>
-                <a:latin typeface="Arial"/>
-              </a:rPr>
-              <a:t>&lt;0.001</a:t>
-            </a:r>
-          </a:p>
-        </p:txBody>
-      </p:sp>
-      <p:sp>
-        <p:nvSpPr>
-          <p:cNvPr id="12" name="TextBox 11"/>
-          <p:cNvSpPr txBox="1"/>
-          <p:nvPr/>
-        </p:nvSpPr>
-        <p:spPr>
-          <a:xfrm>
-            <a:off x="777240" y="4475734"/>
-            <a:ext cx="10607040" cy="346456"/>
-          </a:xfrm>
-          <a:prstGeom prst="rect">
-            <a:avLst/>
-          </a:prstGeom>
-          <a:noFill/>
-        </p:spPr>
-        <p:txBody>
-          <a:bodyPr wrap="square" lIns="25400" rIns="25400" tIns="12700" bIns="12700">
-            <a:noAutofit/>
-          </a:bodyPr>
-          <a:lstStyle/>
-          <a:p>
-            <a:pPr algn="l">
-              <a:lnSpc>
-                <a:spcPct val="128000"/>
-              </a:lnSpc>
-              <a:spcAft>
-                <a:spcPts val="400"/>
-              </a:spcAft>
-            </a:pPr>
-            <a:r>
-              <a:rPr sz="1400" b="0">
-                <a:solidFill>
-                  <a:srgbClr val="E7AC51"/>
-                </a:solidFill>
-                <a:latin typeface="Arial"/>
-              </a:rPr>
-              <a:t>Vascular + valvular + skeletal — one free mammographic finding.</a:t>
-            </a:r>
-          </a:p>
-        </p:txBody>
-      </p:sp>
-      <p:sp>
-        <p:nvSpPr>
-          <p:cNvPr id="13" name="TextBox 12"/>
-          <p:cNvSpPr txBox="1"/>
-          <p:nvPr/>
-        </p:nvSpPr>
-        <p:spPr>
-          <a:xfrm>
-            <a:off x="777240" y="4822189"/>
-            <a:ext cx="10607040" cy="346456"/>
-          </a:xfrm>
-          <a:prstGeom prst="rect">
-            <a:avLst/>
-          </a:prstGeom>
-          <a:noFill/>
-        </p:spPr>
-        <p:txBody>
-          <a:bodyPr wrap="square" lIns="25400" rIns="25400" tIns="12700" bIns="12700">
-            <a:noAutofit/>
-          </a:bodyPr>
-          <a:lstStyle/>
-          <a:p>
-            <a:pPr algn="l">
-              <a:lnSpc>
-                <a:spcPct val="128000"/>
-              </a:lnSpc>
-              <a:spcAft>
-                <a:spcPts val="400"/>
-              </a:spcAft>
-            </a:pPr>
-            <a:r>
-              <a:rPr sz="1400" b="0">
-                <a:solidFill>
-                  <a:srgbClr val="9DA9B5"/>
-                </a:solidFill>
-                <a:latin typeface="Arial"/>
-              </a:rPr>
-              <a:t>[your group], RSNA 2026 abstract (BAC–CCC) · quantile regression, adj. age + DM.</a:t>
-            </a:r>
-          </a:p>
-        </p:txBody>
-      </p:sp>
-      <p:sp>
-        <p:nvSpPr>
-          <p:cNvPr id="14" name="TextBox 13"/>
-          <p:cNvSpPr txBox="1"/>
-          <p:nvPr/>
-        </p:nvSpPr>
-        <p:spPr>
-          <a:xfrm>
-            <a:off x="777240" y="5168645"/>
-            <a:ext cx="10607040" cy="346456"/>
-          </a:xfrm>
-          <a:prstGeom prst="rect">
-            <a:avLst/>
-          </a:prstGeom>
-          <a:noFill/>
-        </p:spPr>
-        <p:txBody>
-          <a:bodyPr wrap="square" lIns="25400" rIns="25400" tIns="12700" bIns="12700">
-            <a:noAutofit/>
-          </a:bodyPr>
-          <a:lstStyle/>
-          <a:p>
-            <a:pPr algn="l">
-              <a:lnSpc>
-                <a:spcPct val="128000"/>
-              </a:lnSpc>
-              <a:spcAft>
-                <a:spcPts val="400"/>
-              </a:spcAft>
-            </a:pPr>
-            <a:r>
-              <a:rPr sz="1400" b="0">
-                <a:solidFill>
-                  <a:srgbClr val="E7AC51"/>
-                </a:solidFill>
-                <a:latin typeface="Arial"/>
-              </a:rPr>
-              <a:t>Costochondral calcification</a:t>
-            </a:r>
-          </a:p>
-        </p:txBody>
-      </p:sp>
-      <p:sp>
-        <p:nvSpPr>
-          <p:cNvPr id="15" name="TextBox 14"/>
-          <p:cNvSpPr txBox="1"/>
-          <p:nvPr/>
-        </p:nvSpPr>
-        <p:spPr>
-          <a:xfrm>
-            <a:off x="777240" y="5515101"/>
-            <a:ext cx="10607040" cy="346456"/>
-          </a:xfrm>
-          <a:prstGeom prst="rect">
-            <a:avLst/>
-          </a:prstGeom>
-          <a:noFill/>
-        </p:spPr>
-        <p:txBody>
-          <a:bodyPr wrap="square" lIns="25400" rIns="25400" tIns="12700" bIns="12700">
-            <a:noAutofit/>
-          </a:bodyPr>
-          <a:lstStyle/>
-          <a:p>
-            <a:pPr algn="l">
-              <a:lnSpc>
-                <a:spcPct val="128000"/>
-              </a:lnSpc>
-              <a:spcAft>
-                <a:spcPts val="400"/>
-              </a:spcAft>
-            </a:pPr>
-            <a:r>
-              <a:rPr sz="1400" b="0">
-                <a:solidFill>
-                  <a:srgbClr val="9DA9B5"/>
-                </a:solidFill>
-                <a:latin typeface="Arial"/>
-              </a:rPr>
-              <a:t>[ drop in — confirm reuse rights ]</a:t>
-            </a:r>
-          </a:p>
-        </p:txBody>
-      </p:sp>
-      <p:sp>
-        <p:nvSpPr>
-          <p:cNvPr id="16" name="TextBox 15"/>
-          <p:cNvSpPr txBox="1"/>
-          <p:nvPr/>
-        </p:nvSpPr>
-        <p:spPr>
-          <a:xfrm>
-            <a:off x="777240" y="5861557"/>
-            <a:ext cx="10607040" cy="256540"/>
-          </a:xfrm>
-          <a:prstGeom prst="rect">
-            <a:avLst/>
-          </a:prstGeom>
-          <a:noFill/>
-        </p:spPr>
-        <p:txBody>
-          <a:bodyPr wrap="square" lIns="25400" rIns="25400" tIns="12700" bIns="12700">
-            <a:noAutofit/>
+          <a:bodyPr wrap="square" anchor="t" lIns="0" rIns="0" tIns="0" bIns="0">
+            <a:spAutoFit/>
           </a:bodyPr>
           <a:lstStyle/>
           <a:p>
@@ -8985,18 +8739,15 @@
               <a:lnSpc>
                 <a:spcPct val="130000"/>
               </a:lnSpc>
-              <a:spcAft>
-                <a:spcPts val="400"/>
-              </a:spcAft>
             </a:pPr>
             <a:r>
-              <a:rPr sz="1000" b="0">
+              <a:rPr sz="950" b="0" i="0">
                 <a:solidFill>
                   <a:srgbClr val="5C6975"/>
                 </a:solidFill>
                 <a:latin typeface="Consolas"/>
               </a:rPr>
-              <a:t>Illustrative. Source: Sariyıldız et al., via ResearchGate.</a:t>
+              <a:t>[your group], RSNA 2026 abstract (BAC–CCC) · quantile regression, adj. age + DM.</a:t>
             </a:r>
           </a:p>
         </p:txBody>
@@ -9027,16 +8778,40 @@
         <p:nvPr/>
       </p:nvGrpSpPr>
       <p:grpSpPr/>
-      <p:sp>
-        <p:nvSpPr>
-          <p:cNvPr id="2" name="Rectangle 1"/>
+      <p:pic>
+        <p:nvPicPr>
+          <p:cNvPr id="2" name="Picture 1" descr="bg_motif.png"/>
+          <p:cNvPicPr>
+            <a:picLocks noChangeAspect="1"/>
+          </p:cNvPicPr>
+          <p:nvPr/>
+        </p:nvPicPr>
+        <p:blipFill>
+          <a:blip r:embed="rId2"/>
+          <a:stretch>
+            <a:fillRect/>
+          </a:stretch>
+        </p:blipFill>
+        <p:spPr>
+          <a:xfrm>
+            <a:off x="0" y="0"/>
+            <a:ext cx="12191695" cy="6858000"/>
+          </a:xfrm>
+          <a:prstGeom prst="rect">
+            <a:avLst/>
+          </a:prstGeom>
+        </p:spPr>
+      </p:pic>
+      <p:sp>
+        <p:nvSpPr>
+          <p:cNvPr id="3" name="Rectangle 2"/>
           <p:cNvSpPr/>
           <p:nvPr/>
         </p:nvSpPr>
         <p:spPr>
           <a:xfrm>
             <a:off x="0" y="0"/>
-            <a:ext cx="12191695" cy="38100"/>
+            <a:ext cx="5486400" cy="38100"/>
           </a:xfrm>
           <a:prstGeom prst="rect">
             <a:avLst/>
@@ -9073,14 +8848,14 @@
       </p:sp>
       <p:sp>
         <p:nvSpPr>
-          <p:cNvPr id="3" name="TextBox 2"/>
+          <p:cNvPr id="4" name="TextBox 3"/>
           <p:cNvSpPr txBox="1"/>
           <p:nvPr/>
         </p:nvSpPr>
         <p:spPr>
           <a:xfrm>
-            <a:off x="777240" y="411480"/>
-            <a:ext cx="8686800" cy="365760"/>
+            <a:off x="777240" y="502920"/>
+            <a:ext cx="8229600" cy="320040"/>
           </a:xfrm>
           <a:prstGeom prst="rect">
             <a:avLst/>
@@ -9088,21 +8863,18 @@
           <a:noFill/>
         </p:spPr>
         <p:txBody>
-          <a:bodyPr wrap="square" lIns="25400" rIns="25400" tIns="12700" bIns="12700">
-            <a:noAutofit/>
+          <a:bodyPr wrap="square" anchor="t" lIns="0" rIns="0" tIns="0" bIns="0">
+            <a:spAutoFit/>
           </a:bodyPr>
           <a:lstStyle/>
           <a:p>
             <a:pPr algn="l">
               <a:lnSpc>
-                <a:spcPct val="128000"/>
+                <a:spcPct val="100000"/>
               </a:lnSpc>
-              <a:spcAft>
-                <a:spcPts val="400"/>
-              </a:spcAft>
             </a:pPr>
             <a:r>
-              <a:rPr sz="1100" b="1">
+              <a:rPr sz="1100" b="1" i="0">
                 <a:solidFill>
                   <a:srgbClr val="E7AC51"/>
                 </a:solidFill>
@@ -9115,14 +8887,14 @@
       </p:sp>
       <p:sp>
         <p:nvSpPr>
-          <p:cNvPr id="4" name="TextBox 3"/>
+          <p:cNvPr id="5" name="TextBox 4"/>
           <p:cNvSpPr txBox="1"/>
           <p:nvPr/>
         </p:nvSpPr>
         <p:spPr>
           <a:xfrm>
-            <a:off x="777240" y="1928622"/>
-            <a:ext cx="5989320" cy="904240"/>
+            <a:off x="777240" y="1005840"/>
+            <a:ext cx="5852160" cy="1280160"/>
           </a:xfrm>
           <a:prstGeom prst="rect">
             <a:avLst/>
@@ -9130,21 +8902,18 @@
           <a:noFill/>
         </p:spPr>
         <p:txBody>
-          <a:bodyPr wrap="square" lIns="25400" rIns="25400" tIns="12700" bIns="12700">
-            <a:noAutofit/>
+          <a:bodyPr wrap="square" anchor="t" lIns="0" rIns="0" tIns="0" bIns="0">
+            <a:spAutoFit/>
           </a:bodyPr>
           <a:lstStyle/>
           <a:p>
             <a:pPr algn="l">
               <a:lnSpc>
-                <a:spcPct val="106000"/>
+                <a:spcPct val="112000"/>
               </a:lnSpc>
-              <a:spcAft>
-                <a:spcPts val="400"/>
-              </a:spcAft>
             </a:pPr>
             <a:r>
-              <a:rPr sz="2600" b="0">
+              <a:rPr sz="2400" b="1" i="0">
                 <a:solidFill>
                   <a:srgbClr val="ECEFF3"/>
                 </a:solidFill>
@@ -9153,7 +8922,7 @@
               <a:t>Closing the loop: the </a:t>
             </a:r>
             <a:r>
-              <a:rPr sz="2600" b="0">
+              <a:rPr sz="2400" b="1" i="0">
                 <a:solidFill>
                   <a:srgbClr val="E7AC51"/>
                 </a:solidFill>
@@ -9166,14 +8935,14 @@
       </p:sp>
       <p:sp>
         <p:nvSpPr>
-          <p:cNvPr id="5" name="TextBox 4"/>
+          <p:cNvPr id="6" name="TextBox 5"/>
           <p:cNvSpPr txBox="1"/>
           <p:nvPr/>
         </p:nvSpPr>
         <p:spPr>
           <a:xfrm>
-            <a:off x="777240" y="2832862"/>
-            <a:ext cx="5989320" cy="1256792"/>
+            <a:off x="777240" y="2468880"/>
+            <a:ext cx="5852160" cy="2743200"/>
           </a:xfrm>
           <a:prstGeom prst="rect">
             <a:avLst/>
@@ -9181,21 +8950,18 @@
           <a:noFill/>
         </p:spPr>
         <p:txBody>
-          <a:bodyPr wrap="square" lIns="25400" rIns="25400" tIns="12700" bIns="12700">
-            <a:noAutofit/>
+          <a:bodyPr wrap="square" anchor="t" lIns="0" rIns="0" tIns="0" bIns="0">
+            <a:spAutoFit/>
           </a:bodyPr>
           <a:lstStyle/>
           <a:p>
             <a:pPr algn="l">
               <a:lnSpc>
-                <a:spcPct val="128000"/>
+                <a:spcPct val="140000"/>
               </a:lnSpc>
-              <a:spcAft>
-                <a:spcPts val="400"/>
-              </a:spcAft>
             </a:pPr>
             <a:r>
-              <a:rPr sz="1400" b="0">
+              <a:rPr sz="1350" b="0" i="0">
                 <a:solidFill>
                   <a:srgbClr val="9DA9B5"/>
                 </a:solidFill>
@@ -9204,7 +8970,7 @@
               <a:t>The gap: </a:t>
             </a:r>
             <a:r>
-              <a:rPr sz="1400" b="1">
+              <a:rPr sz="1350" b="1" i="0">
                 <a:solidFill>
                   <a:srgbClr val="ECEFF3"/>
                 </a:solidFill>
@@ -9213,45 +8979,54 @@
               <a:t>&lt;7% (Emory) / 15% (Mayo)</a:t>
             </a:r>
             <a:r>
-              <a:rPr sz="1400" b="0">
+              <a:rPr sz="1350" b="0" i="0">
                 <a:solidFill>
                   <a:srgbClr val="9DA9B5"/>
                 </a:solidFill>
                 <a:latin typeface="Arial"/>
               </a:rPr>
-              <a:t> of women had the chart data to even compute a PREVENT/ASCVD score — including women with severe BAC. </a:t>
-            </a:r>
-            <a:r>
-              <a:rPr sz="1400" b="1">
+              <a:t> of women had the chart data to even compute a PREVENT/ASCVD score. </a:t>
+            </a:r>
+            <a:r>
+              <a:rPr sz="1350" b="1" i="0">
+                <a:solidFill>
+                  <a:srgbClr val="E7AC51"/>
+                </a:solidFill>
+                <a:latin typeface="Arial"/>
+              </a:rPr>
+              <a:t>I-BAC</a:t>
+            </a:r>
+            <a:r>
+              <a:rPr sz="1350" b="0" i="0">
+                <a:solidFill>
+                  <a:srgbClr val="9DA9B5"/>
+                </a:solidFill>
+                <a:latin typeface="Arial"/>
+              </a:rPr>
+              <a:t> (R01HL167811) is a Hybrid Type 1 pragmatic RCT across Emory + Mayo AZ. Primary endpoint: 6-mo composite of </a:t>
+            </a:r>
+            <a:r>
+              <a:rPr sz="1350" b="1" i="0">
                 <a:solidFill>
                   <a:srgbClr val="ECEFF3"/>
                 </a:solidFill>
                 <a:latin typeface="Arial"/>
               </a:rPr>
-              <a:t>I-BAC</a:t>
-            </a:r>
-            <a:r>
-              <a:rPr sz="1400" b="0">
-                <a:solidFill>
-                  <a:srgbClr val="9DA9B5"/>
-                </a:solidFill>
-                <a:latin typeface="Arial"/>
-              </a:rPr>
-              <a:t> (R01HL167811) is a Hybrid Type 1 pragmatic RCT across Emory + Mayo AZ (~225,000 mammograms/yr).</a:t>
-            </a:r>
-          </a:p>
-        </p:txBody>
-      </p:sp>
-      <p:sp>
-        <p:nvSpPr>
-          <p:cNvPr id="6" name="TextBox 5"/>
+              <a:t>lipid panel · preventive-med change · CAC testing.</a:t>
+            </a:r>
+          </a:p>
+        </p:txBody>
+      </p:sp>
+      <p:sp>
+        <p:nvSpPr>
+          <p:cNvPr id="7" name="TextBox 6"/>
           <p:cNvSpPr txBox="1"/>
           <p:nvPr/>
         </p:nvSpPr>
         <p:spPr>
           <a:xfrm>
-            <a:off x="777240" y="4089654"/>
-            <a:ext cx="5989320" cy="586740"/>
+            <a:off x="777240" y="5943600"/>
+            <a:ext cx="5852160" cy="457200"/>
           </a:xfrm>
           <a:prstGeom prst="rect">
             <a:avLst/>
@@ -9259,8 +9034,8 @@
           <a:noFill/>
         </p:spPr>
         <p:txBody>
-          <a:bodyPr wrap="square" lIns="25400" rIns="25400" tIns="12700" bIns="12700">
-            <a:noAutofit/>
+          <a:bodyPr wrap="square" anchor="t" lIns="0" rIns="0" tIns="0" bIns="0">
+            <a:spAutoFit/>
           </a:bodyPr>
           <a:lstStyle/>
           <a:p>
@@ -9268,78 +9043,15 @@
               <a:lnSpc>
                 <a:spcPct val="130000"/>
               </a:lnSpc>
-              <a:spcAft>
-                <a:spcPts val="400"/>
-              </a:spcAft>
             </a:pPr>
             <a:r>
-              <a:rPr sz="1000" b="0">
+              <a:rPr sz="950" b="0" i="0">
                 <a:solidFill>
                   <a:srgbClr val="5C6975"/>
                 </a:solidFill>
                 <a:latin typeface="Consolas"/>
               </a:rPr>
-              <a:t>Deployment + pragmatic-trial structure (Aim 2): PACS BAC model → Epic/CareBricks auto-review → randomize → I-BAC notification vs usual care → RE-AIM.</a:t>
-            </a:r>
-          </a:p>
-        </p:txBody>
-      </p:sp>
-      <p:sp>
-        <p:nvSpPr>
-          <p:cNvPr id="7" name="TextBox 6"/>
-          <p:cNvSpPr txBox="1"/>
-          <p:nvPr/>
-        </p:nvSpPr>
-        <p:spPr>
-          <a:xfrm>
-            <a:off x="777240" y="4676394"/>
-            <a:ext cx="5989320" cy="801623"/>
-          </a:xfrm>
-          <a:prstGeom prst="rect">
-            <a:avLst/>
-          </a:prstGeom>
-          <a:noFill/>
-        </p:spPr>
-        <p:txBody>
-          <a:bodyPr wrap="square" lIns="25400" rIns="25400" tIns="12700" bIns="12700">
-            <a:noAutofit/>
-          </a:bodyPr>
-          <a:lstStyle/>
-          <a:p>
-            <a:pPr algn="l">
-              <a:lnSpc>
-                <a:spcPct val="128000"/>
-              </a:lnSpc>
-              <a:spcAft>
-                <a:spcPts val="400"/>
-              </a:spcAft>
-            </a:pPr>
-            <a:r>
-              <a:rPr sz="1400" b="0">
-                <a:solidFill>
-                  <a:srgbClr val="9DA9B5"/>
-                </a:solidFill>
-                <a:latin typeface="Arial"/>
-              </a:rPr>
-              <a:t>Primary endpoint: 6-month composite of </a:t>
-            </a:r>
-            <a:r>
-              <a:rPr sz="1400" b="1">
-                <a:solidFill>
-                  <a:srgbClr val="ECEFF3"/>
-                </a:solidFill>
-                <a:latin typeface="Arial"/>
-              </a:rPr>
-              <a:t>lipid panel · preventive-med change · CAC testing.</a:t>
-            </a:r>
-            <a:r>
-              <a:rPr sz="1400" b="0">
-                <a:solidFill>
-                  <a:srgbClr val="9DA9B5"/>
-                </a:solidFill>
-                <a:latin typeface="Arial"/>
-              </a:rPr>
-              <a:t> Precedent: NOTIFY-PICTURE — but BAC has no management guideline yet.</a:t>
+              <a:t>Deployment + pragmatic-trial structure (Aim 2). Precedent: NOTIFY-PICTURE — BAC has no guideline yet.</a:t>
             </a:r>
           </a:p>
         </p:txBody>
@@ -9352,8 +9064,8 @@
         </p:nvSpPr>
         <p:spPr>
           <a:xfrm>
-            <a:off x="6912864" y="2707327"/>
-            <a:ext cx="4782312" cy="1443345"/>
+            <a:off x="6309360" y="2544845"/>
+            <a:ext cx="5577840" cy="1676868"/>
           </a:xfrm>
           <a:prstGeom prst="roundRect">
             <a:avLst/>
@@ -9392,22 +9104,22 @@
       </p:sp>
       <p:pic>
         <p:nvPicPr>
-          <p:cNvPr id="9" name="Picture 8" descr="i_955cf64bac.jpg"/>
+          <p:cNvPr id="9" name="Picture 8" descr="img_955cf64bac.jpg"/>
           <p:cNvPicPr>
             <a:picLocks noChangeAspect="1"/>
           </p:cNvPicPr>
           <p:nvPr/>
         </p:nvPicPr>
         <p:blipFill>
-          <a:blip r:embed="rId3"/>
+          <a:blip r:embed="rId4"/>
           <a:stretch>
             <a:fillRect/>
           </a:stretch>
         </p:blipFill>
         <p:spPr>
           <a:xfrm>
-            <a:off x="6995160" y="2789623"/>
-            <a:ext cx="4617720" cy="1278753"/>
+            <a:off x="6400800" y="2636285"/>
+            <a:ext cx="5394960" cy="1493988"/>
           </a:xfrm>
           <a:prstGeom prst="rect">
             <a:avLst/>
@@ -9440,16 +9152,40 @@
         <p:nvPr/>
       </p:nvGrpSpPr>
       <p:grpSpPr/>
-      <p:sp>
-        <p:nvSpPr>
-          <p:cNvPr id="2" name="Rectangle 1"/>
+      <p:pic>
+        <p:nvPicPr>
+          <p:cNvPr id="2" name="Picture 1" descr="bg_motif.png"/>
+          <p:cNvPicPr>
+            <a:picLocks noChangeAspect="1"/>
+          </p:cNvPicPr>
+          <p:nvPr/>
+        </p:nvPicPr>
+        <p:blipFill>
+          <a:blip r:embed="rId2"/>
+          <a:stretch>
+            <a:fillRect/>
+          </a:stretch>
+        </p:blipFill>
+        <p:spPr>
+          <a:xfrm>
+            <a:off x="0" y="0"/>
+            <a:ext cx="12191695" cy="6858000"/>
+          </a:xfrm>
+          <a:prstGeom prst="rect">
+            <a:avLst/>
+          </a:prstGeom>
+        </p:spPr>
+      </p:pic>
+      <p:sp>
+        <p:nvSpPr>
+          <p:cNvPr id="3" name="Rectangle 2"/>
           <p:cNvSpPr/>
           <p:nvPr/>
         </p:nvSpPr>
         <p:spPr>
           <a:xfrm>
             <a:off x="0" y="0"/>
-            <a:ext cx="12191695" cy="38100"/>
+            <a:ext cx="5486400" cy="38100"/>
           </a:xfrm>
           <a:prstGeom prst="rect">
             <a:avLst/>
@@ -9486,14 +9222,14 @@
       </p:sp>
       <p:sp>
         <p:nvSpPr>
-          <p:cNvPr id="3" name="TextBox 2"/>
+          <p:cNvPr id="4" name="TextBox 3"/>
           <p:cNvSpPr txBox="1"/>
           <p:nvPr/>
         </p:nvSpPr>
         <p:spPr>
           <a:xfrm>
-            <a:off x="777240" y="411480"/>
-            <a:ext cx="8686800" cy="365760"/>
+            <a:off x="777240" y="502920"/>
+            <a:ext cx="8229600" cy="320040"/>
           </a:xfrm>
           <a:prstGeom prst="rect">
             <a:avLst/>
@@ -9501,21 +9237,18 @@
           <a:noFill/>
         </p:spPr>
         <p:txBody>
-          <a:bodyPr wrap="square" lIns="25400" rIns="25400" tIns="12700" bIns="12700">
-            <a:noAutofit/>
+          <a:bodyPr wrap="square" anchor="t" lIns="0" rIns="0" tIns="0" bIns="0">
+            <a:spAutoFit/>
           </a:bodyPr>
           <a:lstStyle/>
           <a:p>
             <a:pPr algn="l">
               <a:lnSpc>
-                <a:spcPct val="128000"/>
+                <a:spcPct val="100000"/>
               </a:lnSpc>
-              <a:spcAft>
-                <a:spcPts val="400"/>
-              </a:spcAft>
             </a:pPr>
             <a:r>
-              <a:rPr sz="1100" b="1">
+              <a:rPr sz="1100" b="1" i="0">
                 <a:solidFill>
                   <a:srgbClr val="E7AC51"/>
                 </a:solidFill>
@@ -9528,14 +9261,14 @@
       </p:sp>
       <p:sp>
         <p:nvSpPr>
-          <p:cNvPr id="4" name="TextBox 3"/>
+          <p:cNvPr id="5" name="TextBox 4"/>
           <p:cNvSpPr txBox="1"/>
           <p:nvPr/>
         </p:nvSpPr>
         <p:spPr>
           <a:xfrm>
-            <a:off x="777240" y="1164843"/>
-            <a:ext cx="10607040" cy="904240"/>
+            <a:off x="777240" y="1005840"/>
+            <a:ext cx="10607040" cy="1280160"/>
           </a:xfrm>
           <a:prstGeom prst="rect">
             <a:avLst/>
@@ -9543,21 +9276,18 @@
           <a:noFill/>
         </p:spPr>
         <p:txBody>
-          <a:bodyPr wrap="square" lIns="25400" rIns="25400" tIns="12700" bIns="12700">
-            <a:noAutofit/>
+          <a:bodyPr wrap="square" anchor="t" lIns="0" rIns="0" tIns="0" bIns="0">
+            <a:spAutoFit/>
           </a:bodyPr>
           <a:lstStyle/>
           <a:p>
             <a:pPr algn="l">
               <a:lnSpc>
-                <a:spcPct val="106000"/>
+                <a:spcPct val="112000"/>
               </a:lnSpc>
-              <a:spcAft>
-                <a:spcPts val="400"/>
-              </a:spcAft>
             </a:pPr>
             <a:r>
-              <a:rPr sz="2600" b="0">
+              <a:rPr sz="2800" b="1" i="0">
                 <a:solidFill>
                   <a:srgbClr val="ECEFF3"/>
                 </a:solidFill>
@@ -9566,7 +9296,7 @@
               <a:t>2026: two prospective studies show </a:t>
             </a:r>
             <a:r>
-              <a:rPr sz="2600" b="0">
+              <a:rPr sz="2800" b="1" i="0">
                 <a:solidFill>
                   <a:srgbClr val="E7AC51"/>
                 </a:solidFill>
@@ -9579,486 +9309,399 @@
       </p:sp>
       <p:sp>
         <p:nvSpPr>
-          <p:cNvPr id="5" name="TextBox 4"/>
-          <p:cNvSpPr txBox="1"/>
-          <p:nvPr/>
-        </p:nvSpPr>
-        <p:spPr>
-          <a:xfrm>
-            <a:off x="777240" y="2069083"/>
-            <a:ext cx="10607040" cy="346456"/>
-          </a:xfrm>
-          <a:prstGeom prst="rect">
-            <a:avLst/>
-          </a:prstGeom>
-          <a:noFill/>
-        </p:spPr>
-        <p:txBody>
-          <a:bodyPr wrap="square" lIns="25400" rIns="25400" tIns="12700" bIns="12700">
-            <a:noAutofit/>
-          </a:bodyPr>
+          <p:cNvPr id="6" name="Rounded Rectangle 5"/>
+          <p:cNvSpPr/>
+          <p:nvPr/>
+        </p:nvSpPr>
+        <p:spPr>
+          <a:xfrm>
+            <a:off x="777240" y="2148840"/>
+            <a:ext cx="5212080" cy="2743200"/>
+          </a:xfrm>
+          <a:prstGeom prst="roundRect">
+            <a:avLst/>
+          </a:prstGeom>
+          <a:solidFill>
+            <a:srgbClr val="1B232D"/>
+          </a:solidFill>
+          <a:ln w="13970">
+            <a:solidFill>
+              <a:srgbClr val="C98A2E"/>
+            </a:solidFill>
+          </a:ln>
+          <a:effectLst/>
+        </p:spPr>
+        <p:style>
+          <a:lnRef idx="1">
+            <a:schemeClr val="accent1"/>
+          </a:lnRef>
+          <a:fillRef idx="3">
+            <a:schemeClr val="accent1"/>
+          </a:fillRef>
+          <a:effectRef idx="2">
+            <a:schemeClr val="accent1"/>
+          </a:effectRef>
+          <a:fontRef idx="minor">
+            <a:schemeClr val="lt1"/>
+          </a:fontRef>
+        </p:style>
+        <p:txBody>
+          <a:bodyPr rtlCol="0" anchor="ctr" wrap="square" lIns="256032" rIns="219456" tIns="201168"/>
           <a:lstStyle/>
           <a:p>
             <a:pPr algn="l">
               <a:lnSpc>
-                <a:spcPct val="128000"/>
+                <a:spcPct val="100000"/>
               </a:lnSpc>
-              <a:spcAft>
-                <a:spcPts val="400"/>
-              </a:spcAft>
             </a:pPr>
             <a:r>
-              <a:rPr sz="1400" b="0">
+              <a:rPr sz="1200" b="1" i="0">
                 <a:solidFill>
                   <a:srgbClr val="E7AC51"/>
                 </a:solidFill>
-                <a:latin typeface="Arial"/>
-              </a:rPr>
-              <a:t>MASAI · Sweden · RCT (~105,000)</a:t>
-            </a:r>
-          </a:p>
-        </p:txBody>
-      </p:sp>
-      <p:sp>
-        <p:nvSpPr>
-          <p:cNvPr id="6" name="TextBox 5"/>
-          <p:cNvSpPr txBox="1"/>
-          <p:nvPr/>
-        </p:nvSpPr>
-        <p:spPr>
-          <a:xfrm>
-            <a:off x="777240" y="2415539"/>
-            <a:ext cx="10607040" cy="346456"/>
-          </a:xfrm>
-          <a:prstGeom prst="rect">
-            <a:avLst/>
-          </a:prstGeom>
-          <a:noFill/>
-        </p:spPr>
-        <p:txBody>
-          <a:bodyPr wrap="square" lIns="25400" rIns="25400" tIns="12700" bIns="12700">
-            <a:noAutofit/>
-          </a:bodyPr>
-          <a:lstStyle/>
-          <a:p>
-            <a:pPr algn="l">
-              <a:lnSpc>
-                <a:spcPct val="128000"/>
-              </a:lnSpc>
-              <a:spcAft>
-                <a:spcPts val="400"/>
-              </a:spcAft>
-            </a:pPr>
-            <a:r>
-              <a:rPr sz="1400" b="0">
-                <a:solidFill>
-                  <a:srgbClr val="9DA9B5"/>
-                </a:solidFill>
-                <a:latin typeface="Arial"/>
-              </a:rPr>
-              <a:t>Interval cancers non-inferior </a:t>
-            </a:r>
-            <a:r>
-              <a:rPr sz="1400" b="0">
-                <a:solidFill>
-                  <a:srgbClr val="9DA9B5"/>
-                </a:solidFill>
-                <a:latin typeface="Arial"/>
-              </a:rPr>
-              <a:t>(ratio 0.88)</a:t>
-            </a:r>
-          </a:p>
-        </p:txBody>
-      </p:sp>
-      <p:sp>
-        <p:nvSpPr>
-          <p:cNvPr id="7" name="TextBox 6"/>
-          <p:cNvSpPr txBox="1"/>
-          <p:nvPr/>
-        </p:nvSpPr>
-        <p:spPr>
-          <a:xfrm>
-            <a:off x="777240" y="2761995"/>
-            <a:ext cx="10607040" cy="346456"/>
-          </a:xfrm>
-          <a:prstGeom prst="rect">
-            <a:avLst/>
-          </a:prstGeom>
-          <a:noFill/>
-        </p:spPr>
-        <p:txBody>
-          <a:bodyPr wrap="square" lIns="25400" rIns="25400" tIns="12700" bIns="12700">
-            <a:noAutofit/>
-          </a:bodyPr>
-          <a:lstStyle/>
-          <a:p>
-            <a:pPr algn="l">
-              <a:lnSpc>
-                <a:spcPct val="128000"/>
-              </a:lnSpc>
-              <a:spcAft>
-                <a:spcPts val="400"/>
-              </a:spcAft>
-            </a:pPr>
-            <a:r>
-              <a:rPr sz="1400" b="0">
-                <a:solidFill>
-                  <a:srgbClr val="9DA9B5"/>
-                </a:solidFill>
-                <a:latin typeface="Arial"/>
-              </a:rPr>
-              <a:t>Sensitivity </a:t>
-            </a:r>
-            <a:r>
-              <a:rPr sz="1400" b="1">
-                <a:solidFill>
-                  <a:srgbClr val="ECEFF3"/>
-                </a:solidFill>
-                <a:latin typeface="Arial"/>
-              </a:rPr>
-              <a:t>80.5%</a:t>
-            </a:r>
-            <a:r>
-              <a:rPr sz="1400" b="0">
-                <a:solidFill>
-                  <a:srgbClr val="9DA9B5"/>
-                </a:solidFill>
-                <a:latin typeface="Arial"/>
-              </a:rPr>
-              <a:t> vs 73.8% at matched specificity · </a:t>
-            </a:r>
-            <a:r>
-              <a:rPr sz="1400" b="1">
-                <a:solidFill>
-                  <a:srgbClr val="ECEFF3"/>
-                </a:solidFill>
-                <a:latin typeface="Arial"/>
-              </a:rPr>
-              <a:t>~44%</a:t>
-            </a:r>
-            <a:r>
-              <a:rPr sz="1400" b="0">
-                <a:solidFill>
-                  <a:srgbClr val="9DA9B5"/>
-                </a:solidFill>
-                <a:latin typeface="Arial"/>
-              </a:rPr>
-              <a:t> less reading workload.</a:t>
-            </a:r>
-          </a:p>
-        </p:txBody>
-      </p:sp>
-      <p:sp>
-        <p:nvSpPr>
-          <p:cNvPr id="8" name="TextBox 7"/>
-          <p:cNvSpPr txBox="1"/>
-          <p:nvPr/>
-        </p:nvSpPr>
-        <p:spPr>
-          <a:xfrm>
-            <a:off x="777240" y="3108452"/>
-            <a:ext cx="10607040" cy="346456"/>
-          </a:xfrm>
-          <a:prstGeom prst="rect">
-            <a:avLst/>
-          </a:prstGeom>
-          <a:noFill/>
-        </p:spPr>
-        <p:txBody>
-          <a:bodyPr wrap="square" lIns="25400" rIns="25400" tIns="12700" bIns="12700">
-            <a:noAutofit/>
-          </a:bodyPr>
-          <a:lstStyle/>
-          <a:p>
-            <a:pPr algn="l">
-              <a:lnSpc>
-                <a:spcPct val="128000"/>
-              </a:lnSpc>
-              <a:spcAft>
-                <a:spcPts val="400"/>
-              </a:spcAft>
-            </a:pPr>
-            <a:r>
-              <a:rPr sz="1400" b="0">
-                <a:solidFill>
-                  <a:srgbClr val="9DA9B5"/>
-                </a:solidFill>
-                <a:latin typeface="Arial"/>
-              </a:rPr>
-              <a:t>Gommers/Lång et al., Lancet 2026;407:505–514</a:t>
-            </a:r>
-          </a:p>
-        </p:txBody>
-      </p:sp>
-      <p:sp>
-        <p:nvSpPr>
-          <p:cNvPr id="9" name="TextBox 8"/>
-          <p:cNvSpPr txBox="1"/>
-          <p:nvPr/>
-        </p:nvSpPr>
-        <p:spPr>
-          <a:xfrm>
-            <a:off x="777240" y="3454908"/>
-            <a:ext cx="10607040" cy="346456"/>
-          </a:xfrm>
-          <a:prstGeom prst="rect">
-            <a:avLst/>
-          </a:prstGeom>
-          <a:noFill/>
-        </p:spPr>
-        <p:txBody>
-          <a:bodyPr wrap="square" lIns="25400" rIns="25400" tIns="12700" bIns="12700">
-            <a:noAutofit/>
-          </a:bodyPr>
-          <a:lstStyle/>
-          <a:p>
-            <a:pPr algn="l">
-              <a:lnSpc>
-                <a:spcPct val="128000"/>
-              </a:lnSpc>
-              <a:spcAft>
-                <a:spcPts val="400"/>
-              </a:spcAft>
-            </a:pPr>
-            <a:r>
-              <a:rPr sz="1400" b="0">
-                <a:solidFill>
-                  <a:srgbClr val="5FB7C9"/>
-                </a:solidFill>
-                <a:latin typeface="Arial"/>
-              </a:rPr>
-              <a:t>PRAIM · Germany · real-world (463,000)</a:t>
-            </a:r>
-          </a:p>
-        </p:txBody>
-      </p:sp>
-      <p:sp>
-        <p:nvSpPr>
-          <p:cNvPr id="10" name="TextBox 9"/>
-          <p:cNvSpPr txBox="1"/>
-          <p:nvPr/>
-        </p:nvSpPr>
-        <p:spPr>
-          <a:xfrm>
-            <a:off x="777240" y="3801363"/>
-            <a:ext cx="10607040" cy="346456"/>
-          </a:xfrm>
-          <a:prstGeom prst="rect">
-            <a:avLst/>
-          </a:prstGeom>
-          <a:noFill/>
-        </p:spPr>
-        <p:txBody>
-          <a:bodyPr wrap="square" lIns="25400" rIns="25400" tIns="12700" bIns="12700">
-            <a:noAutofit/>
-          </a:bodyPr>
-          <a:lstStyle/>
-          <a:p>
-            <a:pPr algn="l">
-              <a:lnSpc>
-                <a:spcPct val="128000"/>
-              </a:lnSpc>
-              <a:spcAft>
-                <a:spcPts val="400"/>
-              </a:spcAft>
-            </a:pPr>
-            <a:r>
-              <a:rPr sz="1400" b="0">
-                <a:solidFill>
-                  <a:srgbClr val="E7AC51"/>
-                </a:solidFill>
-                <a:latin typeface="Arial"/>
-              </a:rPr>
-              <a:t>+17.6%</a:t>
-            </a:r>
-            <a:r>
-              <a:rPr sz="1400" b="0">
-                <a:solidFill>
-                  <a:srgbClr val="9DA9B5"/>
-                </a:solidFill>
-                <a:latin typeface="Arial"/>
-              </a:rPr>
-              <a:t> cancers detected</a:t>
-            </a:r>
-          </a:p>
-        </p:txBody>
-      </p:sp>
-      <p:sp>
-        <p:nvSpPr>
-          <p:cNvPr id="11" name="TextBox 10"/>
-          <p:cNvSpPr txBox="1"/>
-          <p:nvPr/>
-        </p:nvSpPr>
-        <p:spPr>
-          <a:xfrm>
-            <a:off x="777240" y="4147819"/>
-            <a:ext cx="10607040" cy="346456"/>
-          </a:xfrm>
-          <a:prstGeom prst="rect">
-            <a:avLst/>
-          </a:prstGeom>
-          <a:noFill/>
-        </p:spPr>
-        <p:txBody>
-          <a:bodyPr wrap="square" lIns="25400" rIns="25400" tIns="12700" bIns="12700">
-            <a:noAutofit/>
-          </a:bodyPr>
-          <a:lstStyle/>
-          <a:p>
-            <a:pPr algn="l">
-              <a:lnSpc>
-                <a:spcPct val="128000"/>
-              </a:lnSpc>
-              <a:spcAft>
-                <a:spcPts val="400"/>
-              </a:spcAft>
-            </a:pPr>
-            <a:r>
-              <a:rPr sz="1400" b="0">
-                <a:solidFill>
-                  <a:srgbClr val="9DA9B5"/>
-                </a:solidFill>
-                <a:latin typeface="Arial"/>
-              </a:rPr>
-              <a:t>Recall </a:t>
-            </a:r>
-            <a:r>
-              <a:rPr sz="1400" b="1">
-                <a:solidFill>
-                  <a:srgbClr val="ECEFF3"/>
-                </a:solidFill>
-                <a:latin typeface="Arial"/>
-              </a:rPr>
-              <a:t>non-inferior</a:t>
-            </a:r>
-            <a:r>
-              <a:rPr sz="1400" b="0">
-                <a:solidFill>
-                  <a:srgbClr val="9DA9B5"/>
-                </a:solidFill>
-                <a:latin typeface="Arial"/>
-              </a:rPr>
-              <a:t> · 6.7 vs 5.7 CDR per 1,000 · 12 sites, 119 radiologists.</a:t>
-            </a:r>
-          </a:p>
-        </p:txBody>
-      </p:sp>
-      <p:sp>
-        <p:nvSpPr>
-          <p:cNvPr id="12" name="TextBox 11"/>
-          <p:cNvSpPr txBox="1"/>
-          <p:nvPr/>
-        </p:nvSpPr>
-        <p:spPr>
-          <a:xfrm>
-            <a:off x="777240" y="4494275"/>
-            <a:ext cx="10607040" cy="346456"/>
-          </a:xfrm>
-          <a:prstGeom prst="rect">
-            <a:avLst/>
-          </a:prstGeom>
-          <a:noFill/>
-        </p:spPr>
-        <p:txBody>
-          <a:bodyPr wrap="square" lIns="25400" rIns="25400" tIns="12700" bIns="12700">
-            <a:noAutofit/>
-          </a:bodyPr>
-          <a:lstStyle/>
-          <a:p>
-            <a:pPr algn="l">
-              <a:lnSpc>
-                <a:spcPct val="128000"/>
-              </a:lnSpc>
-              <a:spcAft>
-                <a:spcPts val="400"/>
-              </a:spcAft>
-            </a:pPr>
-            <a:r>
-              <a:rPr sz="1400" b="0">
-                <a:solidFill>
-                  <a:srgbClr val="9DA9B5"/>
-                </a:solidFill>
-                <a:latin typeface="Arial"/>
-              </a:rPr>
-              <a:t>Eisemann et al., Nature Medicine 2025</a:t>
-            </a:r>
-          </a:p>
-        </p:txBody>
-      </p:sp>
-      <p:sp>
-        <p:nvSpPr>
-          <p:cNvPr id="13" name="TextBox 12"/>
-          <p:cNvSpPr txBox="1"/>
-          <p:nvPr/>
-        </p:nvSpPr>
-        <p:spPr>
-          <a:xfrm>
-            <a:off x="777240" y="4840731"/>
-            <a:ext cx="10607040" cy="1401064"/>
-          </a:xfrm>
-          <a:prstGeom prst="rect">
-            <a:avLst/>
-          </a:prstGeom>
-          <a:noFill/>
-        </p:spPr>
-        <p:txBody>
-          <a:bodyPr wrap="square" lIns="25400" rIns="25400" tIns="12700" bIns="12700">
-            <a:noAutofit/>
-          </a:bodyPr>
-          <a:lstStyle/>
+                <a:latin typeface="Consolas"/>
+              </a:rPr>
+              <a:t>MASAI · SWEDEN · RCT (~105,000)</a:t>
+            </a:r>
+          </a:p>
           <a:p>
             <a:pPr algn="l">
               <a:lnSpc>
                 <a:spcPct val="130000"/>
               </a:lnSpc>
-              <a:spcAft>
-                <a:spcPts val="400"/>
-              </a:spcAft>
+              <a:spcBef>
+                <a:spcPts val="800"/>
+              </a:spcBef>
             </a:pPr>
             <a:r>
-              <a:rPr sz="1900" b="0">
+              <a:rPr sz="1400" b="0" i="0">
+                <a:solidFill>
+                  <a:srgbClr val="9DA9B5"/>
+                </a:solidFill>
+                <a:latin typeface="Arial"/>
+              </a:rPr>
+              <a:t>Interval cancers </a:t>
+            </a:r>
+            <a:r>
+              <a:rPr sz="1400" b="1" i="0">
                 <a:solidFill>
                   <a:srgbClr val="ECEFF3"/>
                 </a:solidFill>
                 <a:latin typeface="Arial"/>
               </a:rPr>
+              <a:t>non-inferior</a:t>
+            </a:r>
+            <a:r>
+              <a:rPr sz="1400" b="0" i="0">
+                <a:solidFill>
+                  <a:srgbClr val="9DA9B5"/>
+                </a:solidFill>
+                <a:latin typeface="Arial"/>
+              </a:rPr>
+              <a:t> (ratio 0.88)</a:t>
+            </a:r>
+          </a:p>
+          <a:p>
+            <a:pPr algn="l">
+              <a:lnSpc>
+                <a:spcPct val="130000"/>
+              </a:lnSpc>
+              <a:spcBef>
+                <a:spcPts val="800"/>
+              </a:spcBef>
+            </a:pPr>
+            <a:r>
+              <a:rPr sz="1400" b="0" i="0">
+                <a:solidFill>
+                  <a:srgbClr val="9DA9B5"/>
+                </a:solidFill>
+                <a:latin typeface="Arial"/>
+              </a:rPr>
+              <a:t>Sensitivity </a:t>
+            </a:r>
+            <a:r>
+              <a:rPr sz="1400" b="1" i="0">
+                <a:solidFill>
+                  <a:srgbClr val="E7AC51"/>
+                </a:solidFill>
+                <a:latin typeface="Arial"/>
+              </a:rPr>
+              <a:t>80.5%</a:t>
+            </a:r>
+            <a:r>
+              <a:rPr sz="1400" b="0" i="0">
+                <a:solidFill>
+                  <a:srgbClr val="9DA9B5"/>
+                </a:solidFill>
+                <a:latin typeface="Arial"/>
+              </a:rPr>
+              <a:t> vs 73.8% at matched specificity</a:t>
+            </a:r>
+          </a:p>
+          <a:p>
+            <a:pPr algn="l">
+              <a:lnSpc>
+                <a:spcPct val="130000"/>
+              </a:lnSpc>
+              <a:spcBef>
+                <a:spcPts val="800"/>
+              </a:spcBef>
+            </a:pPr>
+            <a:r>
+              <a:rPr sz="1400" b="1" i="0">
+                <a:solidFill>
+                  <a:srgbClr val="E7AC51"/>
+                </a:solidFill>
+                <a:latin typeface="Arial"/>
+              </a:rPr>
+              <a:t>~44%</a:t>
+            </a:r>
+            <a:r>
+              <a:rPr sz="1400" b="0" i="0">
+                <a:solidFill>
+                  <a:srgbClr val="9DA9B5"/>
+                </a:solidFill>
+                <a:latin typeface="Arial"/>
+              </a:rPr>
+              <a:t> less reading workload</a:t>
+            </a:r>
+          </a:p>
+          <a:p>
+            <a:pPr algn="l">
+              <a:lnSpc>
+                <a:spcPct val="100000"/>
+              </a:lnSpc>
+              <a:spcBef>
+                <a:spcPts val="1000"/>
+              </a:spcBef>
+            </a:pPr>
+            <a:r>
+              <a:rPr sz="950" b="0" i="0">
+                <a:solidFill>
+                  <a:srgbClr val="5C6975"/>
+                </a:solidFill>
+                <a:latin typeface="Consolas"/>
+              </a:rPr>
+              <a:t>Gommers/Lång et al., Lancet 2026;407:505–514</a:t>
+            </a:r>
+          </a:p>
+        </p:txBody>
+      </p:sp>
+      <p:sp>
+        <p:nvSpPr>
+          <p:cNvPr id="7" name="Rounded Rectangle 6"/>
+          <p:cNvSpPr/>
+          <p:nvPr/>
+        </p:nvSpPr>
+        <p:spPr>
+          <a:xfrm>
+            <a:off x="6172200" y="2148840"/>
+            <a:ext cx="5212080" cy="2743200"/>
+          </a:xfrm>
+          <a:prstGeom prst="roundRect">
+            <a:avLst/>
+          </a:prstGeom>
+          <a:solidFill>
+            <a:srgbClr val="1B232D"/>
+          </a:solidFill>
+          <a:ln w="13970">
+            <a:solidFill>
+              <a:srgbClr val="C98A2E"/>
+            </a:solidFill>
+          </a:ln>
+          <a:effectLst/>
+        </p:spPr>
+        <p:style>
+          <a:lnRef idx="1">
+            <a:schemeClr val="accent1"/>
+          </a:lnRef>
+          <a:fillRef idx="3">
+            <a:schemeClr val="accent1"/>
+          </a:fillRef>
+          <a:effectRef idx="2">
+            <a:schemeClr val="accent1"/>
+          </a:effectRef>
+          <a:fontRef idx="minor">
+            <a:schemeClr val="lt1"/>
+          </a:fontRef>
+        </p:style>
+        <p:txBody>
+          <a:bodyPr rtlCol="0" anchor="ctr" wrap="square" lIns="256032" rIns="219456" tIns="201168"/>
+          <a:lstStyle/>
+          <a:p>
+            <a:pPr algn="l">
+              <a:lnSpc>
+                <a:spcPct val="100000"/>
+              </a:lnSpc>
+            </a:pPr>
+            <a:r>
+              <a:rPr sz="1200" b="1" i="0">
+                <a:solidFill>
+                  <a:srgbClr val="E7AC51"/>
+                </a:solidFill>
+                <a:latin typeface="Consolas"/>
+              </a:rPr>
+              <a:t>PRAIM · GERMANY · REAL-WORLD (463,000)</a:t>
+            </a:r>
+          </a:p>
+          <a:p>
+            <a:pPr algn="l">
+              <a:lnSpc>
+                <a:spcPct val="130000"/>
+              </a:lnSpc>
+              <a:spcBef>
+                <a:spcPts val="800"/>
+              </a:spcBef>
+            </a:pPr>
+            <a:r>
+              <a:rPr sz="1400" b="1" i="0">
+                <a:solidFill>
+                  <a:srgbClr val="E7AC51"/>
+                </a:solidFill>
+                <a:latin typeface="Arial"/>
+              </a:rPr>
+              <a:t>+17.6%</a:t>
+            </a:r>
+            <a:r>
+              <a:rPr sz="1400" b="0" i="0">
+                <a:solidFill>
+                  <a:srgbClr val="9DA9B5"/>
+                </a:solidFill>
+                <a:latin typeface="Arial"/>
+              </a:rPr>
+              <a:t> cancers detected</a:t>
+            </a:r>
+          </a:p>
+          <a:p>
+            <a:pPr algn="l">
+              <a:lnSpc>
+                <a:spcPct val="130000"/>
+              </a:lnSpc>
+              <a:spcBef>
+                <a:spcPts val="800"/>
+              </a:spcBef>
+            </a:pPr>
+            <a:r>
+              <a:rPr sz="1400" b="0" i="0">
+                <a:solidFill>
+                  <a:srgbClr val="9DA9B5"/>
+                </a:solidFill>
+                <a:latin typeface="Arial"/>
+              </a:rPr>
+              <a:t>Recall </a:t>
+            </a:r>
+            <a:r>
+              <a:rPr sz="1400" b="1" i="0">
+                <a:solidFill>
+                  <a:srgbClr val="ECEFF3"/>
+                </a:solidFill>
+                <a:latin typeface="Arial"/>
+              </a:rPr>
+              <a:t>non-inferior</a:t>
+            </a:r>
+            <a:r>
+              <a:rPr sz="1400" b="0" i="0">
+                <a:solidFill>
+                  <a:srgbClr val="9DA9B5"/>
+                </a:solidFill>
+                <a:latin typeface="Arial"/>
+              </a:rPr>
+              <a:t> · 6.7 vs 5.7 CDR / 1,000</a:t>
+            </a:r>
+          </a:p>
+          <a:p>
+            <a:pPr algn="l">
+              <a:lnSpc>
+                <a:spcPct val="130000"/>
+              </a:lnSpc>
+              <a:spcBef>
+                <a:spcPts val="800"/>
+              </a:spcBef>
+            </a:pPr>
+            <a:r>
+              <a:rPr sz="1400" b="0" i="0">
+                <a:solidFill>
+                  <a:srgbClr val="9DA9B5"/>
+                </a:solidFill>
+                <a:latin typeface="Arial"/>
+              </a:rPr>
+              <a:t>12 sites · 119 radiologists</a:t>
+            </a:r>
+          </a:p>
+          <a:p>
+            <a:pPr algn="l">
+              <a:lnSpc>
+                <a:spcPct val="100000"/>
+              </a:lnSpc>
+              <a:spcBef>
+                <a:spcPts val="1000"/>
+              </a:spcBef>
+            </a:pPr>
+            <a:r>
+              <a:rPr sz="950" b="0" i="0">
+                <a:solidFill>
+                  <a:srgbClr val="5C6975"/>
+                </a:solidFill>
+                <a:latin typeface="Consolas"/>
+              </a:rPr>
+              <a:t>Eisemann et al., Nature Medicine 2025</a:t>
+            </a:r>
+          </a:p>
+        </p:txBody>
+      </p:sp>
+      <p:sp>
+        <p:nvSpPr>
+          <p:cNvPr id="8" name="TextBox 7"/>
+          <p:cNvSpPr txBox="1"/>
+          <p:nvPr/>
+        </p:nvSpPr>
+        <p:spPr>
+          <a:xfrm>
+            <a:off x="777240" y="5212080"/>
+            <a:ext cx="10607040" cy="1280160"/>
+          </a:xfrm>
+          <a:prstGeom prst="rect">
+            <a:avLst/>
+          </a:prstGeom>
+          <a:noFill/>
+        </p:spPr>
+        <p:txBody>
+          <a:bodyPr wrap="square" anchor="t" lIns="0" rIns="0" tIns="0" bIns="0">
+            <a:spAutoFit/>
+          </a:bodyPr>
+          <a:lstStyle/>
+          <a:p>
+            <a:pPr algn="l">
+              <a:lnSpc>
+                <a:spcPct val="135000"/>
+              </a:lnSpc>
+            </a:pPr>
+            <a:r>
+              <a:rPr sz="1300" b="0" i="0">
+                <a:solidFill>
+                  <a:srgbClr val="9DA9B5"/>
+                </a:solidFill>
+                <a:latin typeface="Arial"/>
+              </a:rPr>
               <a:t>A third is underway: </a:t>
             </a:r>
             <a:r>
-              <a:rPr sz="1900" b="1">
-                <a:solidFill>
-                  <a:srgbClr val="ECEFF3"/>
+              <a:rPr sz="1300" b="1" i="0">
+                <a:solidFill>
+                  <a:srgbClr val="E7AC51"/>
                 </a:solidFill>
                 <a:latin typeface="Arial"/>
               </a:rPr>
               <a:t>PRISM</a:t>
             </a:r>
             <a:r>
-              <a:rPr sz="1900" b="0">
-                <a:solidFill>
-                  <a:srgbClr val="ECEFF3"/>
-                </a:solidFill>
-                <a:latin typeface="Arial"/>
-              </a:rPr>
-              <a:t> — the first large randomized trial of screening AI in the United States (Transpara; $16M PCORI; 7 sites; announced Sept 2025, recruiting). Results are years away, but it tests the </a:t>
-            </a:r>
-            <a:r>
-              <a:rPr sz="1900" b="1">
-                <a:solidFill>
-                  <a:srgbClr val="ECEFF3"/>
-                </a:solidFill>
-                <a:latin typeface="Arial"/>
-              </a:rPr>
-              <a:t>US single-reader workflow</a:t>
-            </a:r>
-            <a:r>
-              <a:rPr sz="1900" b="0">
-                <a:solidFill>
-                  <a:srgbClr val="ECEFF3"/>
-                </a:solidFill>
-                <a:latin typeface="Arial"/>
-              </a:rPr>
-              <a:t> directly.</a:t>
+              <a:rPr sz="1300" b="0" i="0">
+                <a:solidFill>
+                  <a:srgbClr val="9DA9B5"/>
+                </a:solidFill>
+                <a:latin typeface="Arial"/>
+              </a:rPr>
+              <a:t> — the first large randomized trial of screening AI in the US (Transpara; $16M PCORI; 7 sites; recruiting). It tests the US single-reader workflow directly.</a:t>
             </a:r>
           </a:p>
         </p:txBody>
@@ -10089,16 +9732,40 @@
         <p:nvPr/>
       </p:nvGrpSpPr>
       <p:grpSpPr/>
-      <p:sp>
-        <p:nvSpPr>
-          <p:cNvPr id="2" name="Rectangle 1"/>
+      <p:pic>
+        <p:nvPicPr>
+          <p:cNvPr id="2" name="Picture 1" descr="bg_motif.png"/>
+          <p:cNvPicPr>
+            <a:picLocks noChangeAspect="1"/>
+          </p:cNvPicPr>
+          <p:nvPr/>
+        </p:nvPicPr>
+        <p:blipFill>
+          <a:blip r:embed="rId2"/>
+          <a:stretch>
+            <a:fillRect/>
+          </a:stretch>
+        </p:blipFill>
+        <p:spPr>
+          <a:xfrm>
+            <a:off x="0" y="0"/>
+            <a:ext cx="12191695" cy="6858000"/>
+          </a:xfrm>
+          <a:prstGeom prst="rect">
+            <a:avLst/>
+          </a:prstGeom>
+        </p:spPr>
+      </p:pic>
+      <p:sp>
+        <p:nvSpPr>
+          <p:cNvPr id="3" name="Rectangle 2"/>
           <p:cNvSpPr/>
           <p:nvPr/>
         </p:nvSpPr>
         <p:spPr>
           <a:xfrm>
             <a:off x="0" y="0"/>
-            <a:ext cx="12191695" cy="38100"/>
+            <a:ext cx="5486400" cy="38100"/>
           </a:xfrm>
           <a:prstGeom prst="rect">
             <a:avLst/>
@@ -10135,14 +9802,14 @@
       </p:sp>
       <p:sp>
         <p:nvSpPr>
-          <p:cNvPr id="3" name="TextBox 2"/>
+          <p:cNvPr id="4" name="TextBox 3"/>
           <p:cNvSpPr txBox="1"/>
           <p:nvPr/>
         </p:nvSpPr>
         <p:spPr>
           <a:xfrm>
-            <a:off x="777240" y="411480"/>
-            <a:ext cx="8686800" cy="365760"/>
+            <a:off x="777240" y="502920"/>
+            <a:ext cx="8229600" cy="320040"/>
           </a:xfrm>
           <a:prstGeom prst="rect">
             <a:avLst/>
@@ -10150,21 +9817,18 @@
           <a:noFill/>
         </p:spPr>
         <p:txBody>
-          <a:bodyPr wrap="square" lIns="25400" rIns="25400" tIns="12700" bIns="12700">
-            <a:noAutofit/>
+          <a:bodyPr wrap="square" anchor="t" lIns="0" rIns="0" tIns="0" bIns="0">
+            <a:spAutoFit/>
           </a:bodyPr>
           <a:lstStyle/>
           <a:p>
             <a:pPr algn="l">
               <a:lnSpc>
-                <a:spcPct val="128000"/>
+                <a:spcPct val="100000"/>
               </a:lnSpc>
-              <a:spcAft>
-                <a:spcPts val="400"/>
-              </a:spcAft>
             </a:pPr>
             <a:r>
-              <a:rPr sz="1100" b="1">
+              <a:rPr sz="1100" b="1" i="0">
                 <a:solidFill>
                   <a:srgbClr val="E7AC51"/>
                 </a:solidFill>
@@ -10177,14 +9841,14 @@
       </p:sp>
       <p:sp>
         <p:nvSpPr>
-          <p:cNvPr id="4" name="TextBox 3"/>
+          <p:cNvPr id="5" name="TextBox 4"/>
           <p:cNvSpPr txBox="1"/>
           <p:nvPr/>
         </p:nvSpPr>
         <p:spPr>
           <a:xfrm>
-            <a:off x="777240" y="2520442"/>
-            <a:ext cx="10607040" cy="1018032"/>
+            <a:off x="777240" y="1463040"/>
+            <a:ext cx="10607040" cy="1280160"/>
           </a:xfrm>
           <a:prstGeom prst="rect">
             <a:avLst/>
@@ -10192,21 +9856,18 @@
           <a:noFill/>
         </p:spPr>
         <p:txBody>
-          <a:bodyPr wrap="square" lIns="25400" rIns="25400" tIns="12700" bIns="12700">
-            <a:noAutofit/>
+          <a:bodyPr wrap="square" anchor="t" lIns="0" rIns="0" tIns="0" bIns="0">
+            <a:spAutoFit/>
           </a:bodyPr>
           <a:lstStyle/>
           <a:p>
             <a:pPr algn="l">
               <a:lnSpc>
-                <a:spcPct val="106000"/>
+                <a:spcPct val="112000"/>
               </a:lnSpc>
-              <a:spcAft>
-                <a:spcPts val="400"/>
-              </a:spcAft>
             </a:pPr>
             <a:r>
-              <a:rPr sz="3000" b="0">
+              <a:rPr sz="3000" b="1" i="0">
                 <a:solidFill>
                   <a:srgbClr val="ECEFF3"/>
                 </a:solidFill>
@@ -10215,7 +9876,7 @@
               <a:t>And we are on the verge of </a:t>
             </a:r>
             <a:r>
-              <a:rPr sz="3000" b="0">
+              <a:rPr sz="3000" b="1" i="0">
                 <a:solidFill>
                   <a:srgbClr val="E7AC51"/>
                 </a:solidFill>
@@ -10228,14 +9889,14 @@
       </p:sp>
       <p:sp>
         <p:nvSpPr>
-          <p:cNvPr id="5" name="TextBox 4"/>
+          <p:cNvPr id="6" name="TextBox 5"/>
           <p:cNvSpPr txBox="1"/>
           <p:nvPr/>
         </p:nvSpPr>
         <p:spPr>
           <a:xfrm>
-            <a:off x="777240" y="3538474"/>
-            <a:ext cx="10607040" cy="773684"/>
+            <a:off x="777240" y="2926080"/>
+            <a:ext cx="10424160" cy="2560320"/>
           </a:xfrm>
           <a:prstGeom prst="rect">
             <a:avLst/>
@@ -10243,99 +9904,54 @@
           <a:noFill/>
         </p:spPr>
         <p:txBody>
-          <a:bodyPr wrap="square" lIns="25400" rIns="25400" tIns="12700" bIns="12700">
-            <a:noAutofit/>
+          <a:bodyPr wrap="square" anchor="t" lIns="0" rIns="0" tIns="0" bIns="0">
+            <a:spAutoFit/>
           </a:bodyPr>
           <a:lstStyle/>
           <a:p>
             <a:pPr algn="l">
               <a:lnSpc>
-                <a:spcPct val="130000"/>
+                <a:spcPct val="145000"/>
               </a:lnSpc>
-              <a:spcAft>
-                <a:spcPts val="400"/>
-              </a:spcAft>
             </a:pPr>
             <a:r>
-              <a:rPr sz="1900" b="0">
+              <a:rPr sz="1700" b="0" i="0">
+                <a:solidFill>
+                  <a:srgbClr val="9DA9B5"/>
+                </a:solidFill>
+                <a:latin typeface="Arial"/>
+              </a:rPr>
+              <a:t>Everything so far is still </a:t>
+            </a:r>
+            <a:r>
+              <a:rPr sz="1700" b="1" i="0">
                 <a:solidFill>
                   <a:srgbClr val="ECEFF3"/>
                 </a:solidFill>
                 <a:latin typeface="Arial"/>
               </a:rPr>
-              <a:t>Everything so far is still </a:t>
-            </a:r>
-            <a:r>
-              <a:rPr sz="1900" b="1">
-                <a:solidFill>
-                  <a:srgbClr val="ECEFF3"/>
-                </a:solidFill>
-                <a:latin typeface="Arial"/>
-              </a:rPr>
               <a:t>one model, one modality</a:t>
             </a:r>
             <a:r>
-              <a:rPr sz="1900" b="0">
-                <a:solidFill>
-                  <a:srgbClr val="ECEFF3"/>
-                </a:solidFill>
-                <a:latin typeface="Arial"/>
-              </a:rPr>
-              <a:t> — the image, or the calcium, or the tissue, read separately.</a:t>
-            </a:r>
-          </a:p>
-        </p:txBody>
-      </p:sp>
-      <p:sp>
-        <p:nvSpPr>
-          <p:cNvPr id="6" name="TextBox 5"/>
-          <p:cNvSpPr txBox="1"/>
-          <p:nvPr/>
-        </p:nvSpPr>
-        <p:spPr>
-          <a:xfrm>
-            <a:off x="777240" y="4312158"/>
-            <a:ext cx="10607040" cy="574040"/>
-          </a:xfrm>
-          <a:prstGeom prst="rect">
-            <a:avLst/>
-          </a:prstGeom>
-          <a:noFill/>
-        </p:spPr>
-        <p:txBody>
-          <a:bodyPr wrap="square" lIns="25400" rIns="25400" tIns="12700" bIns="12700">
-            <a:noAutofit/>
-          </a:bodyPr>
-          <a:lstStyle/>
-          <a:p>
-            <a:pPr algn="l">
-              <a:lnSpc>
-                <a:spcPct val="128000"/>
-              </a:lnSpc>
-              <a:spcAft>
-                <a:spcPts val="400"/>
-              </a:spcAft>
-            </a:pPr>
-            <a:r>
-              <a:rPr sz="1400" b="0">
+              <a:rPr sz="1700" b="0" i="0">
                 <a:solidFill>
                   <a:srgbClr val="9DA9B5"/>
                 </a:solidFill>
                 <a:latin typeface="Arial"/>
               </a:rPr>
-              <a:t>The frontier is to combine them — </a:t>
-            </a:r>
-            <a:r>
-              <a:rPr sz="1400" b="1">
-                <a:solidFill>
-                  <a:srgbClr val="ECEFF3"/>
+              <a:t> — the image, or the calcium, or the tissue, read separately. The frontier is to combine them — </a:t>
+            </a:r>
+            <a:r>
+              <a:rPr sz="1700" b="1" i="0">
+                <a:solidFill>
+                  <a:srgbClr val="E7AC51"/>
                 </a:solidFill>
                 <a:latin typeface="Arial"/>
               </a:rPr>
               <a:t>imaging + pathology + genomics + the clinical record</a:t>
             </a:r>
             <a:r>
-              <a:rPr sz="1400" b="0">
+              <a:rPr sz="1700" b="0" i="0">
                 <a:solidFill>
                   <a:srgbClr val="9DA9B5"/>
                 </a:solidFill>
@@ -10372,16 +9988,40 @@
         <p:nvPr/>
       </p:nvGrpSpPr>
       <p:grpSpPr/>
-      <p:sp>
-        <p:nvSpPr>
-          <p:cNvPr id="2" name="Rectangle 1"/>
+      <p:pic>
+        <p:nvPicPr>
+          <p:cNvPr id="2" name="Picture 1" descr="bg_motif.png"/>
+          <p:cNvPicPr>
+            <a:picLocks noChangeAspect="1"/>
+          </p:cNvPicPr>
+          <p:nvPr/>
+        </p:nvPicPr>
+        <p:blipFill>
+          <a:blip r:embed="rId2"/>
+          <a:stretch>
+            <a:fillRect/>
+          </a:stretch>
+        </p:blipFill>
+        <p:spPr>
+          <a:xfrm>
+            <a:off x="0" y="0"/>
+            <a:ext cx="12191695" cy="6858000"/>
+          </a:xfrm>
+          <a:prstGeom prst="rect">
+            <a:avLst/>
+          </a:prstGeom>
+        </p:spPr>
+      </p:pic>
+      <p:sp>
+        <p:nvSpPr>
+          <p:cNvPr id="3" name="Rectangle 2"/>
           <p:cNvSpPr/>
           <p:nvPr/>
         </p:nvSpPr>
         <p:spPr>
           <a:xfrm>
             <a:off x="0" y="0"/>
-            <a:ext cx="12191695" cy="38100"/>
+            <a:ext cx="5486400" cy="38100"/>
           </a:xfrm>
           <a:prstGeom prst="rect">
             <a:avLst/>
@@ -10418,14 +10058,14 @@
       </p:sp>
       <p:sp>
         <p:nvSpPr>
-          <p:cNvPr id="3" name="TextBox 2"/>
+          <p:cNvPr id="4" name="TextBox 3"/>
           <p:cNvSpPr txBox="1"/>
           <p:nvPr/>
         </p:nvSpPr>
         <p:spPr>
           <a:xfrm>
-            <a:off x="777240" y="2642616"/>
-            <a:ext cx="5989320" cy="346456"/>
+            <a:off x="777240" y="566928"/>
+            <a:ext cx="8229600" cy="365760"/>
           </a:xfrm>
           <a:prstGeom prst="rect">
             <a:avLst/>
@@ -10433,41 +10073,38 @@
           <a:noFill/>
         </p:spPr>
         <p:txBody>
-          <a:bodyPr wrap="square" lIns="25400" rIns="25400" tIns="12700" bIns="12700">
-            <a:noAutofit/>
+          <a:bodyPr wrap="square" anchor="t" lIns="0" rIns="0" tIns="0" bIns="0">
+            <a:spAutoFit/>
           </a:bodyPr>
           <a:lstStyle/>
           <a:p>
             <a:pPr algn="l">
               <a:lnSpc>
-                <a:spcPct val="128000"/>
+                <a:spcPct val="100000"/>
               </a:lnSpc>
-              <a:spcAft>
-                <a:spcPts val="400"/>
-              </a:spcAft>
             </a:pPr>
             <a:r>
-              <a:rPr sz="1400" b="0">
-                <a:solidFill>
-                  <a:srgbClr val="9DA9B5"/>
-                </a:solidFill>
-                <a:latin typeface="Arial"/>
-              </a:rPr>
-              <a:t>Era III · 2035</a:t>
-            </a:r>
-          </a:p>
-        </p:txBody>
-      </p:sp>
-      <p:sp>
-        <p:nvSpPr>
-          <p:cNvPr id="4" name="TextBox 3"/>
+              <a:rPr sz="1100" b="1" i="0">
+                <a:solidFill>
+                  <a:srgbClr val="E7AC51"/>
+                </a:solidFill>
+                <a:latin typeface="Consolas"/>
+              </a:rPr>
+              <a:t>ERA III · 2035</a:t>
+            </a:r>
+          </a:p>
+        </p:txBody>
+      </p:sp>
+      <p:sp>
+        <p:nvSpPr>
+          <p:cNvPr id="5" name="TextBox 4"/>
           <p:cNvSpPr txBox="1"/>
           <p:nvPr/>
         </p:nvSpPr>
         <p:spPr>
           <a:xfrm>
-            <a:off x="777240" y="2989072"/>
-            <a:ext cx="5989320" cy="790447"/>
+            <a:off x="777240" y="2286000"/>
+            <a:ext cx="6126480" cy="1463040"/>
           </a:xfrm>
           <a:prstGeom prst="rect">
             <a:avLst/>
@@ -10475,21 +10112,18 @@
           <a:noFill/>
         </p:spPr>
         <p:txBody>
-          <a:bodyPr wrap="square" lIns="25400" rIns="25400" tIns="12700" bIns="12700">
-            <a:noAutofit/>
+          <a:bodyPr wrap="square" anchor="t" lIns="0" rIns="0" tIns="0" bIns="0">
+            <a:spAutoFit/>
           </a:bodyPr>
           <a:lstStyle/>
           <a:p>
             <a:pPr algn="l">
               <a:lnSpc>
-                <a:spcPct val="106000"/>
+                <a:spcPct val="100000"/>
               </a:lnSpc>
-              <a:spcAft>
-                <a:spcPts val="400"/>
-              </a:spcAft>
             </a:pPr>
             <a:r>
-              <a:rPr sz="4400" b="0">
+              <a:rPr sz="5000" b="1" i="0">
                 <a:solidFill>
                   <a:srgbClr val="ECEFF3"/>
                 </a:solidFill>
@@ -10498,7 +10132,7 @@
               <a:t>The year is </a:t>
             </a:r>
             <a:r>
-              <a:rPr sz="4400" b="0">
+              <a:rPr sz="5000" b="1" i="0">
                 <a:solidFill>
                   <a:srgbClr val="E7AC51"/>
                 </a:solidFill>
@@ -10511,14 +10145,14 @@
       </p:sp>
       <p:sp>
         <p:nvSpPr>
-          <p:cNvPr id="5" name="TextBox 4"/>
+          <p:cNvPr id="6" name="TextBox 5"/>
           <p:cNvSpPr txBox="1"/>
           <p:nvPr/>
         </p:nvSpPr>
         <p:spPr>
           <a:xfrm>
-            <a:off x="777240" y="3779520"/>
-            <a:ext cx="5989320" cy="801623"/>
+            <a:off x="777240" y="3977639"/>
+            <a:ext cx="6035040" cy="1463040"/>
           </a:xfrm>
           <a:prstGeom prst="rect">
             <a:avLst/>
@@ -10526,21 +10160,18 @@
           <a:noFill/>
         </p:spPr>
         <p:txBody>
-          <a:bodyPr wrap="square" lIns="25400" rIns="25400" tIns="12700" bIns="12700">
-            <a:noAutofit/>
+          <a:bodyPr wrap="square" anchor="t" lIns="0" rIns="0" tIns="0" bIns="0">
+            <a:spAutoFit/>
           </a:bodyPr>
           <a:lstStyle/>
           <a:p>
             <a:pPr algn="l">
               <a:lnSpc>
-                <a:spcPct val="128000"/>
+                <a:spcPct val="130000"/>
               </a:lnSpc>
-              <a:spcAft>
-                <a:spcPts val="400"/>
-              </a:spcAft>
             </a:pPr>
             <a:r>
-              <a:rPr sz="1400" b="0">
+              <a:rPr sz="1900" b="0" i="0">
                 <a:solidFill>
                   <a:srgbClr val="9DA9B5"/>
                 </a:solidFill>
@@ -10549,7 +10180,7 @@
               <a:t>From here, today's models are a decade old. The real question: what happens when imaging, pathology, and omics finally converge — </a:t>
             </a:r>
             <a:r>
-              <a:rPr sz="1400" b="1">
+              <a:rPr sz="1900" b="1" i="0">
                 <a:solidFill>
                   <a:srgbClr val="ECEFF3"/>
                 </a:solidFill>
@@ -10562,22 +10193,22 @@
       </p:sp>
       <p:pic>
         <p:nvPicPr>
-          <p:cNvPr id="6" name="Picture 5" descr="s_49b2a1b734.png"/>
+          <p:cNvPr id="7" name="Picture 6" descr="svg_49b2a1b734.png"/>
           <p:cNvPicPr>
             <a:picLocks noChangeAspect="1"/>
           </p:cNvPicPr>
           <p:nvPr/>
         </p:nvPicPr>
         <p:blipFill>
-          <a:blip r:embed="rId3"/>
+          <a:blip r:embed="rId4"/>
           <a:stretch>
             <a:fillRect/>
           </a:stretch>
         </p:blipFill>
         <p:spPr>
           <a:xfrm>
-            <a:off x="6995160" y="2109651"/>
-            <a:ext cx="4617720" cy="2638697"/>
+            <a:off x="7040880" y="2305594"/>
+            <a:ext cx="4572000" cy="2612571"/>
           </a:xfrm>
           <a:prstGeom prst="rect">
             <a:avLst/>
@@ -10610,16 +10241,40 @@
         <p:nvPr/>
       </p:nvGrpSpPr>
       <p:grpSpPr/>
-      <p:sp>
-        <p:nvSpPr>
-          <p:cNvPr id="2" name="Rectangle 1"/>
+      <p:pic>
+        <p:nvPicPr>
+          <p:cNvPr id="2" name="Picture 1" descr="bg_motif.png"/>
+          <p:cNvPicPr>
+            <a:picLocks noChangeAspect="1"/>
+          </p:cNvPicPr>
+          <p:nvPr/>
+        </p:nvPicPr>
+        <p:blipFill>
+          <a:blip r:embed="rId2"/>
+          <a:stretch>
+            <a:fillRect/>
+          </a:stretch>
+        </p:blipFill>
+        <p:spPr>
+          <a:xfrm>
+            <a:off x="0" y="0"/>
+            <a:ext cx="12191695" cy="6858000"/>
+          </a:xfrm>
+          <a:prstGeom prst="rect">
+            <a:avLst/>
+          </a:prstGeom>
+        </p:spPr>
+      </p:pic>
+      <p:sp>
+        <p:nvSpPr>
+          <p:cNvPr id="3" name="Rectangle 2"/>
           <p:cNvSpPr/>
           <p:nvPr/>
         </p:nvSpPr>
         <p:spPr>
           <a:xfrm>
             <a:off x="0" y="0"/>
-            <a:ext cx="12191695" cy="38100"/>
+            <a:ext cx="5486400" cy="38100"/>
           </a:xfrm>
           <a:prstGeom prst="rect">
             <a:avLst/>
@@ -10656,14 +10311,14 @@
       </p:sp>
       <p:sp>
         <p:nvSpPr>
-          <p:cNvPr id="3" name="TextBox 2"/>
+          <p:cNvPr id="4" name="TextBox 3"/>
           <p:cNvSpPr txBox="1"/>
           <p:nvPr/>
         </p:nvSpPr>
         <p:spPr>
           <a:xfrm>
-            <a:off x="777240" y="411480"/>
-            <a:ext cx="8686800" cy="365760"/>
+            <a:off x="777240" y="502920"/>
+            <a:ext cx="8229600" cy="320040"/>
           </a:xfrm>
           <a:prstGeom prst="rect">
             <a:avLst/>
@@ -10671,21 +10326,18 @@
           <a:noFill/>
         </p:spPr>
         <p:txBody>
-          <a:bodyPr wrap="square" lIns="25400" rIns="25400" tIns="12700" bIns="12700">
-            <a:noAutofit/>
+          <a:bodyPr wrap="square" anchor="t" lIns="0" rIns="0" tIns="0" bIns="0">
+            <a:spAutoFit/>
           </a:bodyPr>
           <a:lstStyle/>
           <a:p>
             <a:pPr algn="l">
               <a:lnSpc>
-                <a:spcPct val="128000"/>
+                <a:spcPct val="100000"/>
               </a:lnSpc>
-              <a:spcAft>
-                <a:spcPts val="400"/>
-              </a:spcAft>
             </a:pPr>
             <a:r>
-              <a:rPr sz="1100" b="1">
+              <a:rPr sz="1100" b="1" i="0">
                 <a:solidFill>
                   <a:srgbClr val="E7AC51"/>
                 </a:solidFill>
@@ -10698,14 +10350,14 @@
       </p:sp>
       <p:sp>
         <p:nvSpPr>
-          <p:cNvPr id="4" name="TextBox 3"/>
+          <p:cNvPr id="5" name="TextBox 4"/>
           <p:cNvSpPr txBox="1"/>
           <p:nvPr/>
         </p:nvSpPr>
         <p:spPr>
           <a:xfrm>
-            <a:off x="777240" y="2563368"/>
-            <a:ext cx="5989320" cy="904240"/>
+            <a:off x="777240" y="1051560"/>
+            <a:ext cx="5760720" cy="1280160"/>
           </a:xfrm>
           <a:prstGeom prst="rect">
             <a:avLst/>
@@ -10713,21 +10365,18 @@
           <a:noFill/>
         </p:spPr>
         <p:txBody>
-          <a:bodyPr wrap="square" lIns="25400" rIns="25400" tIns="12700" bIns="12700">
-            <a:noAutofit/>
+          <a:bodyPr wrap="square" anchor="t" lIns="0" rIns="0" tIns="0" bIns="0">
+            <a:spAutoFit/>
           </a:bodyPr>
           <a:lstStyle/>
           <a:p>
             <a:pPr algn="l">
               <a:lnSpc>
-                <a:spcPct val="106000"/>
+                <a:spcPct val="112000"/>
               </a:lnSpc>
-              <a:spcAft>
-                <a:spcPts val="400"/>
-              </a:spcAft>
             </a:pPr>
             <a:r>
-              <a:rPr sz="2600" b="0">
+              <a:rPr sz="2400" b="1" i="0">
                 <a:solidFill>
                   <a:srgbClr val="ECEFF3"/>
                 </a:solidFill>
@@ -10736,7 +10385,7 @@
               <a:t>The averages look strong — but </a:t>
             </a:r>
             <a:r>
-              <a:rPr sz="2600" b="0">
+              <a:rPr sz="2400" b="1" i="0">
                 <a:solidFill>
                   <a:srgbClr val="E7AC51"/>
                 </a:solidFill>
@@ -10749,14 +10398,14 @@
       </p:sp>
       <p:sp>
         <p:nvSpPr>
-          <p:cNvPr id="5" name="TextBox 4"/>
+          <p:cNvPr id="6" name="TextBox 5"/>
           <p:cNvSpPr txBox="1"/>
           <p:nvPr/>
         </p:nvSpPr>
         <p:spPr>
           <a:xfrm>
-            <a:off x="777240" y="3467608"/>
-            <a:ext cx="5989320" cy="1029208"/>
+            <a:off x="777240" y="2834640"/>
+            <a:ext cx="5852160" cy="2377440"/>
           </a:xfrm>
           <a:prstGeom prst="rect">
             <a:avLst/>
@@ -10764,87 +10413,51 @@
           <a:noFill/>
         </p:spPr>
         <p:txBody>
-          <a:bodyPr wrap="square" lIns="25400" rIns="25400" tIns="12700" bIns="12700">
-            <a:noAutofit/>
+          <a:bodyPr wrap="square" anchor="t" lIns="0" rIns="0" tIns="0" bIns="0">
+            <a:spAutoFit/>
           </a:bodyPr>
           <a:lstStyle/>
           <a:p>
             <a:pPr algn="l">
               <a:lnSpc>
-                <a:spcPct val="128000"/>
+                <a:spcPct val="140000"/>
               </a:lnSpc>
-              <a:spcAft>
-                <a:spcPts val="400"/>
-              </a:spcAft>
             </a:pPr>
             <a:r>
-              <a:rPr sz="1400" b="0">
+              <a:rPr sz="1450" b="0" i="0">
                 <a:solidFill>
                   <a:srgbClr val="9DA9B5"/>
                 </a:solidFill>
                 <a:latin typeface="Arial"/>
               </a:rPr>
-              <a:t>The label is not in the image — it comes from follow-up and pathology. Assigning it is a cascade of judgment calls (~163,000 EMBED exams, AUC 0.91), and it sets the denominator for </a:t>
-            </a:r>
-            <a:r>
-              <a:rPr sz="1400" b="1">
+              <a:t>The label is not in the image — it comes from follow-up and pathology. Assigning it is a cascade of judgment calls (~163,000 EMBED exams, </a:t>
+            </a:r>
+            <a:r>
+              <a:rPr sz="1450" b="1" i="0">
                 <a:solidFill>
                   <a:srgbClr val="ECEFF3"/>
                 </a:solidFill>
                 <a:latin typeface="Arial"/>
               </a:rPr>
+              <a:t>AUC 0.91</a:t>
+            </a:r>
+            <a:r>
+              <a:rPr sz="1450" b="0" i="0">
+                <a:solidFill>
+                  <a:srgbClr val="9DA9B5"/>
+                </a:solidFill>
+                <a:latin typeface="Arial"/>
+              </a:rPr>
+              <a:t>), and it sets the denominator for </a:t>
+            </a:r>
+            <a:r>
+              <a:rPr sz="1450" b="1" i="0">
+                <a:solidFill>
+                  <a:srgbClr val="ECEFF3"/>
+                </a:solidFill>
+                <a:latin typeface="Arial"/>
+              </a:rPr>
               <a:t>every downstream number.</a:t>
-            </a:r>
-          </a:p>
-        </p:txBody>
-      </p:sp>
-      <p:sp>
-        <p:nvSpPr>
-          <p:cNvPr id="6" name="TextBox 5"/>
-          <p:cNvSpPr txBox="1"/>
-          <p:nvPr/>
-        </p:nvSpPr>
-        <p:spPr>
-          <a:xfrm>
-            <a:off x="777240" y="4496816"/>
-            <a:ext cx="5989320" cy="346456"/>
-          </a:xfrm>
-          <a:prstGeom prst="rect">
-            <a:avLst/>
-          </a:prstGeom>
-          <a:noFill/>
-        </p:spPr>
-        <p:txBody>
-          <a:bodyPr wrap="square" lIns="25400" rIns="25400" tIns="12700" bIns="12700">
-            <a:noAutofit/>
-          </a:bodyPr>
-          <a:lstStyle/>
-          <a:p>
-            <a:pPr algn="l">
-              <a:lnSpc>
-                <a:spcPct val="128000"/>
-              </a:lnSpc>
-              <a:spcAft>
-                <a:spcPts val="400"/>
-              </a:spcAft>
-            </a:pPr>
-            <a:r>
-              <a:rPr sz="1400" b="0">
-                <a:solidFill>
-                  <a:srgbClr val="9DA9B5"/>
-                </a:solidFill>
-                <a:latin typeface="Arial"/>
-              </a:rPr>
-              <a:t> </a:t>
-            </a:r>
-            <a:r>
-              <a:rPr sz="1400" b="0">
-                <a:solidFill>
-                  <a:srgbClr val="9DA9B5"/>
-                </a:solidFill>
-                <a:latin typeface="Arial"/>
-              </a:rPr>
-              <a:t> </a:t>
             </a:r>
           </a:p>
         </p:txBody>
@@ -10857,8 +10470,8 @@
         </p:nvSpPr>
         <p:spPr>
           <a:xfrm>
-            <a:off x="7087077" y="832104"/>
-            <a:ext cx="4433885" cy="5193792"/>
+            <a:off x="7061981" y="1005839"/>
+            <a:ext cx="4529796" cy="5303520"/>
           </a:xfrm>
           <a:prstGeom prst="roundRect">
             <a:avLst/>
@@ -10897,22 +10510,22 @@
       </p:sp>
       <p:pic>
         <p:nvPicPr>
-          <p:cNvPr id="8" name="Picture 7" descr="i_bee5b46b67.png"/>
+          <p:cNvPr id="8" name="Picture 7" descr="img_bee5b46b67.png"/>
           <p:cNvPicPr>
             <a:picLocks noChangeAspect="1"/>
           </p:cNvPicPr>
           <p:nvPr/>
         </p:nvPicPr>
         <p:blipFill>
-          <a:blip r:embed="rId3"/>
+          <a:blip r:embed="rId4"/>
           <a:stretch>
             <a:fillRect/>
           </a:stretch>
         </p:blipFill>
         <p:spPr>
           <a:xfrm>
-            <a:off x="7169373" y="914400"/>
-            <a:ext cx="4269293" cy="5029200"/>
+            <a:off x="7153421" y="1097280"/>
+            <a:ext cx="4346916" cy="5120640"/>
           </a:xfrm>
           <a:prstGeom prst="rect">
             <a:avLst/>
@@ -10945,16 +10558,40 @@
         <p:nvPr/>
       </p:nvGrpSpPr>
       <p:grpSpPr/>
-      <p:sp>
-        <p:nvSpPr>
-          <p:cNvPr id="2" name="Rectangle 1"/>
+      <p:pic>
+        <p:nvPicPr>
+          <p:cNvPr id="2" name="Picture 1" descr="bg_motif.png"/>
+          <p:cNvPicPr>
+            <a:picLocks noChangeAspect="1"/>
+          </p:cNvPicPr>
+          <p:nvPr/>
+        </p:nvPicPr>
+        <p:blipFill>
+          <a:blip r:embed="rId2"/>
+          <a:stretch>
+            <a:fillRect/>
+          </a:stretch>
+        </p:blipFill>
+        <p:spPr>
+          <a:xfrm>
+            <a:off x="0" y="0"/>
+            <a:ext cx="12191695" cy="6858000"/>
+          </a:xfrm>
+          <a:prstGeom prst="rect">
+            <a:avLst/>
+          </a:prstGeom>
+        </p:spPr>
+      </p:pic>
+      <p:sp>
+        <p:nvSpPr>
+          <p:cNvPr id="3" name="Rectangle 2"/>
           <p:cNvSpPr/>
           <p:nvPr/>
         </p:nvSpPr>
         <p:spPr>
           <a:xfrm>
             <a:off x="0" y="0"/>
-            <a:ext cx="12191695" cy="38100"/>
+            <a:ext cx="5486400" cy="38100"/>
           </a:xfrm>
           <a:prstGeom prst="rect">
             <a:avLst/>
@@ -10991,14 +10628,14 @@
       </p:sp>
       <p:sp>
         <p:nvSpPr>
-          <p:cNvPr id="3" name="TextBox 2"/>
+          <p:cNvPr id="4" name="TextBox 3"/>
           <p:cNvSpPr txBox="1"/>
           <p:nvPr/>
         </p:nvSpPr>
         <p:spPr>
           <a:xfrm>
-            <a:off x="777240" y="411480"/>
-            <a:ext cx="8686800" cy="365760"/>
+            <a:off x="777240" y="502920"/>
+            <a:ext cx="8229600" cy="320040"/>
           </a:xfrm>
           <a:prstGeom prst="rect">
             <a:avLst/>
@@ -11006,21 +10643,18 @@
           <a:noFill/>
         </p:spPr>
         <p:txBody>
-          <a:bodyPr wrap="square" lIns="25400" rIns="25400" tIns="12700" bIns="12700">
-            <a:noAutofit/>
+          <a:bodyPr wrap="square" anchor="t" lIns="0" rIns="0" tIns="0" bIns="0">
+            <a:spAutoFit/>
           </a:bodyPr>
           <a:lstStyle/>
           <a:p>
             <a:pPr algn="l">
               <a:lnSpc>
-                <a:spcPct val="128000"/>
+                <a:spcPct val="100000"/>
               </a:lnSpc>
-              <a:spcAft>
-                <a:spcPts val="400"/>
-              </a:spcAft>
             </a:pPr>
             <a:r>
-              <a:rPr sz="1100" b="1">
+              <a:rPr sz="1100" b="1" i="0">
                 <a:solidFill>
                   <a:srgbClr val="E7AC51"/>
                 </a:solidFill>
@@ -11033,14 +10667,14 @@
       </p:sp>
       <p:sp>
         <p:nvSpPr>
-          <p:cNvPr id="4" name="TextBox 3"/>
+          <p:cNvPr id="5" name="TextBox 4"/>
           <p:cNvSpPr txBox="1"/>
           <p:nvPr/>
         </p:nvSpPr>
         <p:spPr>
           <a:xfrm>
-            <a:off x="777240" y="2430018"/>
-            <a:ext cx="5989320" cy="904240"/>
+            <a:off x="777240" y="1005840"/>
+            <a:ext cx="10607040" cy="1280160"/>
           </a:xfrm>
           <a:prstGeom prst="rect">
             <a:avLst/>
@@ -11048,21 +10682,18 @@
           <a:noFill/>
         </p:spPr>
         <p:txBody>
-          <a:bodyPr wrap="square" lIns="25400" rIns="25400" tIns="12700" bIns="12700">
-            <a:noAutofit/>
+          <a:bodyPr wrap="square" anchor="t" lIns="0" rIns="0" tIns="0" bIns="0">
+            <a:spAutoFit/>
           </a:bodyPr>
           <a:lstStyle/>
           <a:p>
             <a:pPr algn="l">
               <a:lnSpc>
-                <a:spcPct val="106000"/>
+                <a:spcPct val="112000"/>
               </a:lnSpc>
-              <a:spcAft>
-                <a:spcPts val="400"/>
-              </a:spcAft>
             </a:pPr>
             <a:r>
-              <a:rPr sz="2600" b="0">
+              <a:rPr sz="2600" b="1" i="0">
                 <a:solidFill>
                   <a:srgbClr val="ECEFF3"/>
                 </a:solidFill>
@@ -11071,7 +10702,7 @@
               <a:t>Performance across </a:t>
             </a:r>
             <a:r>
-              <a:rPr sz="2600" b="0">
+              <a:rPr sz="2600" b="1" i="0">
                 <a:solidFill>
                   <a:srgbClr val="E7AC51"/>
                 </a:solidFill>
@@ -11084,242 +10715,14 @@
       </p:sp>
       <p:sp>
         <p:nvSpPr>
-          <p:cNvPr id="5" name="TextBox 4"/>
-          <p:cNvSpPr txBox="1"/>
-          <p:nvPr/>
-        </p:nvSpPr>
-        <p:spPr>
-          <a:xfrm>
-            <a:off x="777240" y="3334258"/>
-            <a:ext cx="5989320" cy="346456"/>
-          </a:xfrm>
-          <a:prstGeom prst="rect">
-            <a:avLst/>
-          </a:prstGeom>
-          <a:noFill/>
-        </p:spPr>
-        <p:txBody>
-          <a:bodyPr wrap="square" lIns="25400" rIns="25400" tIns="12700" bIns="12700">
-            <a:noAutofit/>
-          </a:bodyPr>
-          <a:lstStyle/>
-          <a:p>
-            <a:pPr algn="l">
-              <a:lnSpc>
-                <a:spcPct val="128000"/>
-              </a:lnSpc>
-              <a:spcAft>
-                <a:spcPts val="400"/>
-              </a:spcAft>
-            </a:pPr>
-            <a:r>
-              <a:rPr sz="1400" b="0">
-                <a:solidFill>
-                  <a:srgbClr val="9DA9B5"/>
-                </a:solidFill>
-                <a:latin typeface="Arial"/>
-              </a:rPr>
-              <a:t> </a:t>
-            </a:r>
-            <a:r>
-              <a:rPr sz="1400" b="0">
-                <a:solidFill>
-                  <a:srgbClr val="9DA9B5"/>
-                </a:solidFill>
-                <a:latin typeface="Arial"/>
-              </a:rPr>
-              <a:t> </a:t>
-            </a:r>
-          </a:p>
-        </p:txBody>
-      </p:sp>
-      <p:sp>
-        <p:nvSpPr>
-          <p:cNvPr id="6" name="TextBox 5"/>
-          <p:cNvSpPr txBox="1"/>
-          <p:nvPr/>
-        </p:nvSpPr>
-        <p:spPr>
-          <a:xfrm>
-            <a:off x="777240" y="3680713"/>
-            <a:ext cx="5989320" cy="346456"/>
-          </a:xfrm>
-          <a:prstGeom prst="rect">
-            <a:avLst/>
-          </a:prstGeom>
-          <a:noFill/>
-        </p:spPr>
-        <p:txBody>
-          <a:bodyPr wrap="square" lIns="25400" rIns="25400" tIns="12700" bIns="12700">
-            <a:noAutofit/>
-          </a:bodyPr>
-          <a:lstStyle/>
-          <a:p>
-            <a:pPr algn="l">
-              <a:lnSpc>
-                <a:spcPct val="128000"/>
-              </a:lnSpc>
-              <a:spcAft>
-                <a:spcPts val="400"/>
-              </a:spcAft>
-            </a:pPr>
-            <a:r>
-              <a:rPr sz="1400" b="0">
-                <a:solidFill>
-                  <a:srgbClr val="9DA9B5"/>
-                </a:solidFill>
-                <a:latin typeface="Arial"/>
-              </a:rPr>
-              <a:t>By clinical outcome (Fig. 2)</a:t>
-            </a:r>
-          </a:p>
-        </p:txBody>
-      </p:sp>
-      <p:sp>
-        <p:nvSpPr>
-          <p:cNvPr id="7" name="TextBox 6"/>
-          <p:cNvSpPr txBox="1"/>
-          <p:nvPr/>
-        </p:nvSpPr>
-        <p:spPr>
-          <a:xfrm>
-            <a:off x="777240" y="4027169"/>
-            <a:ext cx="5989320" cy="346456"/>
-          </a:xfrm>
-          <a:prstGeom prst="rect">
-            <a:avLst/>
-          </a:prstGeom>
-          <a:noFill/>
-        </p:spPr>
-        <p:txBody>
-          <a:bodyPr wrap="square" lIns="25400" rIns="25400" tIns="12700" bIns="12700">
-            <a:noAutofit/>
-          </a:bodyPr>
-          <a:lstStyle/>
-          <a:p>
-            <a:pPr algn="l">
-              <a:lnSpc>
-                <a:spcPct val="128000"/>
-              </a:lnSpc>
-              <a:spcAft>
-                <a:spcPts val="400"/>
-              </a:spcAft>
-            </a:pPr>
-            <a:r>
-              <a:rPr sz="1400" b="0">
-                <a:solidFill>
-                  <a:srgbClr val="9DA9B5"/>
-                </a:solidFill>
-                <a:latin typeface="Arial"/>
-              </a:rPr>
-              <a:t> </a:t>
-            </a:r>
-            <a:r>
-              <a:rPr sz="1400" b="0">
-                <a:solidFill>
-                  <a:srgbClr val="9DA9B5"/>
-                </a:solidFill>
-                <a:latin typeface="Arial"/>
-              </a:rPr>
-              <a:t> </a:t>
-            </a:r>
-          </a:p>
-        </p:txBody>
-      </p:sp>
-      <p:sp>
-        <p:nvSpPr>
-          <p:cNvPr id="8" name="TextBox 7"/>
-          <p:cNvSpPr txBox="1"/>
-          <p:nvPr/>
-        </p:nvSpPr>
-        <p:spPr>
-          <a:xfrm>
-            <a:off x="777240" y="4373625"/>
-            <a:ext cx="5989320" cy="346456"/>
-          </a:xfrm>
-          <a:prstGeom prst="rect">
-            <a:avLst/>
-          </a:prstGeom>
-          <a:noFill/>
-        </p:spPr>
-        <p:txBody>
-          <a:bodyPr wrap="square" lIns="25400" rIns="25400" tIns="12700" bIns="12700">
-            <a:noAutofit/>
-          </a:bodyPr>
-          <a:lstStyle/>
-          <a:p>
-            <a:pPr algn="l">
-              <a:lnSpc>
-                <a:spcPct val="128000"/>
-              </a:lnSpc>
-              <a:spcAft>
-                <a:spcPts val="400"/>
-              </a:spcAft>
-            </a:pPr>
-            <a:r>
-              <a:rPr sz="1400" b="0">
-                <a:solidFill>
-                  <a:srgbClr val="9DA9B5"/>
-                </a:solidFill>
-                <a:latin typeface="Arial"/>
-              </a:rPr>
-              <a:t>By pathology (Fig. 3)</a:t>
-            </a:r>
-          </a:p>
-        </p:txBody>
-      </p:sp>
-      <p:sp>
-        <p:nvSpPr>
-          <p:cNvPr id="9" name="TextBox 8"/>
-          <p:cNvSpPr txBox="1"/>
-          <p:nvPr/>
-        </p:nvSpPr>
-        <p:spPr>
-          <a:xfrm>
-            <a:off x="777240" y="4720081"/>
-            <a:ext cx="5989320" cy="256540"/>
-          </a:xfrm>
-          <a:prstGeom prst="rect">
-            <a:avLst/>
-          </a:prstGeom>
-          <a:noFill/>
-        </p:spPr>
-        <p:txBody>
-          <a:bodyPr wrap="square" lIns="25400" rIns="25400" tIns="12700" bIns="12700">
-            <a:noAutofit/>
-          </a:bodyPr>
-          <a:lstStyle/>
-          <a:p>
-            <a:pPr algn="l">
-              <a:lnSpc>
-                <a:spcPct val="130000"/>
-              </a:lnSpc>
-              <a:spcAft>
-                <a:spcPts val="400"/>
-              </a:spcAft>
-            </a:pPr>
-            <a:r>
-              <a:rPr sz="1000" b="0">
-                <a:solidFill>
-                  <a:srgbClr val="5C6975"/>
-                </a:solidFill>
-                <a:latin typeface="Consolas"/>
-              </a:rPr>
-              <a:t>[your group], Nat Commun 2026 (DOI 10.1038/s41467-026-70637-3), Figs. 2–3.</a:t>
-            </a:r>
-          </a:p>
-        </p:txBody>
-      </p:sp>
-      <p:sp>
-        <p:nvSpPr>
-          <p:cNvPr id="10" name="Rounded Rectangle 9"/>
+          <p:cNvPr id="6" name="Rounded Rectangle 5"/>
           <p:cNvSpPr/>
           <p:nvPr/>
         </p:nvSpPr>
         <p:spPr>
           <a:xfrm>
-            <a:off x="6912864" y="925361"/>
-            <a:ext cx="4782312" cy="5007277"/>
+            <a:off x="1591592" y="2057400"/>
+            <a:ext cx="3583374" cy="3749039"/>
           </a:xfrm>
           <a:prstGeom prst="roundRect">
             <a:avLst/>
@@ -11358,28 +10761,215 @@
       </p:sp>
       <p:pic>
         <p:nvPicPr>
-          <p:cNvPr id="11" name="Picture 10" descr="i_f7c7ba6b41.png"/>
+          <p:cNvPr id="7" name="Picture 6" descr="img_f7c7ba6b41.png"/>
           <p:cNvPicPr>
             <a:picLocks noChangeAspect="1"/>
           </p:cNvPicPr>
           <p:nvPr/>
         </p:nvPicPr>
         <p:blipFill>
-          <a:blip r:embed="rId3"/>
+          <a:blip r:embed="rId4"/>
           <a:stretch>
             <a:fillRect/>
           </a:stretch>
         </p:blipFill>
         <p:spPr>
           <a:xfrm>
-            <a:off x="6995160" y="1007657"/>
-            <a:ext cx="4617720" cy="4842685"/>
+            <a:off x="1683032" y="2148840"/>
+            <a:ext cx="3400494" cy="3566160"/>
           </a:xfrm>
           <a:prstGeom prst="rect">
             <a:avLst/>
           </a:prstGeom>
         </p:spPr>
       </p:pic>
+      <p:sp>
+        <p:nvSpPr>
+          <p:cNvPr id="8" name="Rounded Rectangle 7"/>
+          <p:cNvSpPr/>
+          <p:nvPr/>
+        </p:nvSpPr>
+        <p:spPr>
+          <a:xfrm>
+            <a:off x="6980293" y="2057400"/>
+            <a:ext cx="3595892" cy="3749039"/>
+          </a:xfrm>
+          <a:prstGeom prst="roundRect">
+            <a:avLst/>
+          </a:prstGeom>
+          <a:solidFill>
+            <a:srgbClr val="FFFFFF"/>
+          </a:solidFill>
+          <a:ln w="9525">
+            <a:solidFill>
+              <a:srgbClr val="C98A2E"/>
+            </a:solidFill>
+          </a:ln>
+          <a:effectLst/>
+        </p:spPr>
+        <p:style>
+          <a:lnRef idx="1">
+            <a:schemeClr val="accent1"/>
+          </a:lnRef>
+          <a:fillRef idx="3">
+            <a:schemeClr val="accent1"/>
+          </a:fillRef>
+          <a:effectRef idx="2">
+            <a:schemeClr val="accent1"/>
+          </a:effectRef>
+          <a:fontRef idx="minor">
+            <a:schemeClr val="lt1"/>
+          </a:fontRef>
+        </p:style>
+        <p:txBody>
+          <a:bodyPr rtlCol="0" anchor="ctr"/>
+          <a:lstStyle/>
+          <a:p>
+            <a:pPr algn="ctr"/>
+          </a:p>
+        </p:txBody>
+      </p:sp>
+      <p:pic>
+        <p:nvPicPr>
+          <p:cNvPr id="9" name="Picture 8" descr="img_a3661e0c29.png"/>
+          <p:cNvPicPr>
+            <a:picLocks noChangeAspect="1"/>
+          </p:cNvPicPr>
+          <p:nvPr/>
+        </p:nvPicPr>
+        <p:blipFill>
+          <a:blip r:embed="rId5"/>
+          <a:stretch>
+            <a:fillRect/>
+          </a:stretch>
+        </p:blipFill>
+        <p:spPr>
+          <a:xfrm>
+            <a:off x="7071733" y="2148840"/>
+            <a:ext cx="3413012" cy="3566160"/>
+          </a:xfrm>
+          <a:prstGeom prst="rect">
+            <a:avLst/>
+          </a:prstGeom>
+        </p:spPr>
+      </p:pic>
+      <p:sp>
+        <p:nvSpPr>
+          <p:cNvPr id="10" name="TextBox 9"/>
+          <p:cNvSpPr txBox="1"/>
+          <p:nvPr/>
+        </p:nvSpPr>
+        <p:spPr>
+          <a:xfrm>
+            <a:off x="777240" y="5806440"/>
+            <a:ext cx="5212080" cy="274320"/>
+          </a:xfrm>
+          <a:prstGeom prst="rect">
+            <a:avLst/>
+          </a:prstGeom>
+          <a:noFill/>
+        </p:spPr>
+        <p:txBody>
+          <a:bodyPr wrap="square" anchor="t" lIns="0" rIns="0" tIns="0" bIns="0">
+            <a:spAutoFit/>
+          </a:bodyPr>
+          <a:lstStyle/>
+          <a:p>
+            <a:pPr algn="ctr">
+              <a:lnSpc>
+                <a:spcPct val="100000"/>
+              </a:lnSpc>
+            </a:pPr>
+            <a:r>
+              <a:rPr sz="1000" b="0" i="0">
+                <a:solidFill>
+                  <a:srgbClr val="9DA9B5"/>
+                </a:solidFill>
+                <a:latin typeface="Consolas"/>
+              </a:rPr>
+              <a:t>By clinical outcome (Fig. 2)</a:t>
+            </a:r>
+          </a:p>
+        </p:txBody>
+      </p:sp>
+      <p:sp>
+        <p:nvSpPr>
+          <p:cNvPr id="11" name="TextBox 10"/>
+          <p:cNvSpPr txBox="1"/>
+          <p:nvPr/>
+        </p:nvSpPr>
+        <p:spPr>
+          <a:xfrm>
+            <a:off x="6172200" y="5806440"/>
+            <a:ext cx="5212080" cy="274320"/>
+          </a:xfrm>
+          <a:prstGeom prst="rect">
+            <a:avLst/>
+          </a:prstGeom>
+          <a:noFill/>
+        </p:spPr>
+        <p:txBody>
+          <a:bodyPr wrap="square" anchor="t" lIns="0" rIns="0" tIns="0" bIns="0">
+            <a:spAutoFit/>
+          </a:bodyPr>
+          <a:lstStyle/>
+          <a:p>
+            <a:pPr algn="ctr">
+              <a:lnSpc>
+                <a:spcPct val="100000"/>
+              </a:lnSpc>
+            </a:pPr>
+            <a:r>
+              <a:rPr sz="1000" b="0" i="0">
+                <a:solidFill>
+                  <a:srgbClr val="9DA9B5"/>
+                </a:solidFill>
+                <a:latin typeface="Consolas"/>
+              </a:rPr>
+              <a:t>By pathology (Fig. 3)</a:t>
+            </a:r>
+          </a:p>
+        </p:txBody>
+      </p:sp>
+      <p:sp>
+        <p:nvSpPr>
+          <p:cNvPr id="12" name="TextBox 11"/>
+          <p:cNvSpPr txBox="1"/>
+          <p:nvPr/>
+        </p:nvSpPr>
+        <p:spPr>
+          <a:xfrm>
+            <a:off x="777240" y="6199632"/>
+            <a:ext cx="10607040" cy="457200"/>
+          </a:xfrm>
+          <a:prstGeom prst="rect">
+            <a:avLst/>
+          </a:prstGeom>
+          <a:noFill/>
+        </p:spPr>
+        <p:txBody>
+          <a:bodyPr wrap="square" anchor="t" lIns="0" rIns="0" tIns="0" bIns="0">
+            <a:spAutoFit/>
+          </a:bodyPr>
+          <a:lstStyle/>
+          <a:p>
+            <a:pPr algn="l">
+              <a:lnSpc>
+                <a:spcPct val="130000"/>
+              </a:lnSpc>
+            </a:pPr>
+            <a:r>
+              <a:rPr sz="950" b="0" i="0">
+                <a:solidFill>
+                  <a:srgbClr val="5C6975"/>
+                </a:solidFill>
+                <a:latin typeface="Consolas"/>
+              </a:rPr>
+              <a:t>[your group], Nat Commun 2026 (DOI 10.1038/s41467-026-70637-3), Figs. 2–3.</a:t>
+            </a:r>
+          </a:p>
+        </p:txBody>
+      </p:sp>
     </p:spTree>
   </p:cSld>
   <p:clrMapOvr>
@@ -11406,16 +10996,40 @@
         <p:nvPr/>
       </p:nvGrpSpPr>
       <p:grpSpPr/>
-      <p:sp>
-        <p:nvSpPr>
-          <p:cNvPr id="2" name="Rectangle 1"/>
+      <p:pic>
+        <p:nvPicPr>
+          <p:cNvPr id="2" name="Picture 1" descr="bg_motif.png"/>
+          <p:cNvPicPr>
+            <a:picLocks noChangeAspect="1"/>
+          </p:cNvPicPr>
+          <p:nvPr/>
+        </p:nvPicPr>
+        <p:blipFill>
+          <a:blip r:embed="rId2"/>
+          <a:stretch>
+            <a:fillRect/>
+          </a:stretch>
+        </p:blipFill>
+        <p:spPr>
+          <a:xfrm>
+            <a:off x="0" y="0"/>
+            <a:ext cx="12191695" cy="6858000"/>
+          </a:xfrm>
+          <a:prstGeom prst="rect">
+            <a:avLst/>
+          </a:prstGeom>
+        </p:spPr>
+      </p:pic>
+      <p:sp>
+        <p:nvSpPr>
+          <p:cNvPr id="3" name="Rectangle 2"/>
           <p:cNvSpPr/>
           <p:nvPr/>
         </p:nvSpPr>
         <p:spPr>
           <a:xfrm>
             <a:off x="0" y="0"/>
-            <a:ext cx="12191695" cy="38100"/>
+            <a:ext cx="5486400" cy="38100"/>
           </a:xfrm>
           <a:prstGeom prst="rect">
             <a:avLst/>
@@ -11452,14 +11066,14 @@
       </p:sp>
       <p:sp>
         <p:nvSpPr>
-          <p:cNvPr id="3" name="TextBox 2"/>
+          <p:cNvPr id="4" name="TextBox 3"/>
           <p:cNvSpPr txBox="1"/>
           <p:nvPr/>
         </p:nvSpPr>
         <p:spPr>
           <a:xfrm>
-            <a:off x="777240" y="411480"/>
-            <a:ext cx="8686800" cy="365760"/>
+            <a:off x="777240" y="502920"/>
+            <a:ext cx="8229600" cy="320040"/>
           </a:xfrm>
           <a:prstGeom prst="rect">
             <a:avLst/>
@@ -11467,21 +11081,18 @@
           <a:noFill/>
         </p:spPr>
         <p:txBody>
-          <a:bodyPr wrap="square" lIns="25400" rIns="25400" tIns="12700" bIns="12700">
-            <a:noAutofit/>
+          <a:bodyPr wrap="square" anchor="t" lIns="0" rIns="0" tIns="0" bIns="0">
+            <a:spAutoFit/>
           </a:bodyPr>
           <a:lstStyle/>
           <a:p>
             <a:pPr algn="l">
               <a:lnSpc>
-                <a:spcPct val="128000"/>
+                <a:spcPct val="100000"/>
               </a:lnSpc>
-              <a:spcAft>
-                <a:spcPts val="400"/>
-              </a:spcAft>
             </a:pPr>
             <a:r>
-              <a:rPr sz="1100" b="1">
+              <a:rPr sz="1100" b="1" i="0">
                 <a:solidFill>
                   <a:srgbClr val="E7AC51"/>
                 </a:solidFill>
@@ -11494,14 +11105,14 @@
       </p:sp>
       <p:sp>
         <p:nvSpPr>
-          <p:cNvPr id="4" name="TextBox 3"/>
+          <p:cNvPr id="5" name="TextBox 4"/>
           <p:cNvSpPr txBox="1"/>
           <p:nvPr/>
         </p:nvSpPr>
         <p:spPr>
           <a:xfrm>
-            <a:off x="777240" y="2677160"/>
-            <a:ext cx="5989320" cy="904240"/>
+            <a:off x="777240" y="1005840"/>
+            <a:ext cx="10607040" cy="1280160"/>
           </a:xfrm>
           <a:prstGeom prst="rect">
             <a:avLst/>
@@ -11509,21 +11120,18 @@
           <a:noFill/>
         </p:spPr>
         <p:txBody>
-          <a:bodyPr wrap="square" lIns="25400" rIns="25400" tIns="12700" bIns="12700">
-            <a:noAutofit/>
+          <a:bodyPr wrap="square" anchor="t" lIns="0" rIns="0" tIns="0" bIns="0">
+            <a:spAutoFit/>
           </a:bodyPr>
           <a:lstStyle/>
           <a:p>
             <a:pPr algn="l">
               <a:lnSpc>
-                <a:spcPct val="106000"/>
+                <a:spcPct val="112000"/>
               </a:lnSpc>
-              <a:spcAft>
-                <a:spcPts val="400"/>
-              </a:spcAft>
             </a:pPr>
             <a:r>
-              <a:rPr sz="2600" b="0">
+              <a:rPr sz="2600" b="1" i="0">
                 <a:solidFill>
                   <a:srgbClr val="ECEFF3"/>
                 </a:solidFill>
@@ -11532,7 +11140,7 @@
               <a:t>Performance across </a:t>
             </a:r>
             <a:r>
-              <a:rPr sz="2600" b="0">
+              <a:rPr sz="2600" b="1" i="0">
                 <a:solidFill>
                   <a:srgbClr val="E7AC51"/>
                 </a:solidFill>
@@ -11545,14 +11153,14 @@
       </p:sp>
       <p:sp>
         <p:nvSpPr>
-          <p:cNvPr id="5" name="TextBox 4"/>
+          <p:cNvPr id="6" name="TextBox 5"/>
           <p:cNvSpPr txBox="1"/>
           <p:nvPr/>
         </p:nvSpPr>
         <p:spPr>
           <a:xfrm>
-            <a:off x="777240" y="3581400"/>
-            <a:ext cx="5989320" cy="346456"/>
+            <a:off x="777240" y="2148840"/>
+            <a:ext cx="10607040" cy="548640"/>
           </a:xfrm>
           <a:prstGeom prst="rect">
             <a:avLst/>
@@ -11560,87 +11168,24 @@
           <a:noFill/>
         </p:spPr>
         <p:txBody>
-          <a:bodyPr wrap="square" lIns="25400" rIns="25400" tIns="12700" bIns="12700">
-            <a:noAutofit/>
+          <a:bodyPr wrap="square" anchor="t" lIns="0" rIns="0" tIns="0" bIns="0">
+            <a:spAutoFit/>
           </a:bodyPr>
           <a:lstStyle/>
           <a:p>
             <a:pPr algn="l">
               <a:lnSpc>
-                <a:spcPct val="128000"/>
+                <a:spcPct val="140000"/>
               </a:lnSpc>
-              <a:spcAft>
-                <a:spcPts val="400"/>
-              </a:spcAft>
             </a:pPr>
             <a:r>
-              <a:rPr sz="1400" b="0">
+              <a:rPr sz="1400" b="0" i="0">
                 <a:solidFill>
                   <a:srgbClr val="9DA9B5"/>
                 </a:solidFill>
                 <a:latin typeface="Arial"/>
               </a:rPr>
-              <a:t> </a:t>
-            </a:r>
-            <a:r>
-              <a:rPr sz="1400" b="0">
-                <a:solidFill>
-                  <a:srgbClr val="9DA9B5"/>
-                </a:solidFill>
-                <a:latin typeface="Arial"/>
-              </a:rPr>
-              <a:t> </a:t>
-            </a:r>
-          </a:p>
-        </p:txBody>
-      </p:sp>
-      <p:sp>
-        <p:nvSpPr>
-          <p:cNvPr id="6" name="TextBox 5"/>
-          <p:cNvSpPr txBox="1"/>
-          <p:nvPr/>
-        </p:nvSpPr>
-        <p:spPr>
-          <a:xfrm>
-            <a:off x="777240" y="3927856"/>
-            <a:ext cx="5989320" cy="801623"/>
-          </a:xfrm>
-          <a:prstGeom prst="rect">
-            <a:avLst/>
-          </a:prstGeom>
-          <a:noFill/>
-        </p:spPr>
-        <p:txBody>
-          <a:bodyPr wrap="square" lIns="25400" rIns="25400" tIns="12700" bIns="12700">
-            <a:noAutofit/>
-          </a:bodyPr>
-          <a:lstStyle/>
-          <a:p>
-            <a:pPr algn="l">
-              <a:lnSpc>
-                <a:spcPct val="128000"/>
-              </a:lnSpc>
-              <a:spcAft>
-                <a:spcPts val="400"/>
-              </a:spcAft>
-            </a:pPr>
-            <a:r>
-              <a:rPr sz="1400" b="0">
-                <a:solidFill>
-                  <a:srgbClr val="9DA9B5"/>
-                </a:solidFill>
-                <a:latin typeface="Arial"/>
-              </a:rPr>
-              <a:t>Exam-level model-score distributions by imaging feature, across clinical outcome. </a:t>
-            </a:r>
-            <a:r>
-              <a:rPr sz="1400" b="1">
-                <a:solidFill>
-                  <a:srgbClr val="ECEFF3"/>
-                </a:solidFill>
-                <a:latin typeface="Arial"/>
-              </a:rPr>
-              <a:t>[your group], Nat Commun 2026 (DOI 10.1038/s41467-026-70637-3), Fig. 6.</a:t>
+              <a:t>Exam-level model-score distributions by imaging feature, across clinical outcome.</a:t>
             </a:r>
           </a:p>
         </p:txBody>
@@ -11653,8 +11198,8 @@
         </p:nvSpPr>
         <p:spPr>
           <a:xfrm>
-            <a:off x="6912864" y="1769439"/>
-            <a:ext cx="4782312" cy="3319121"/>
+            <a:off x="3780739" y="2651760"/>
+            <a:ext cx="4600040" cy="3200400"/>
           </a:xfrm>
           <a:prstGeom prst="roundRect">
             <a:avLst/>
@@ -11693,28 +11238,67 @@
       </p:sp>
       <p:pic>
         <p:nvPicPr>
-          <p:cNvPr id="8" name="Picture 7" descr="i_59aec28596.png"/>
+          <p:cNvPr id="8" name="Picture 7" descr="img_59aec28596.png"/>
           <p:cNvPicPr>
             <a:picLocks noChangeAspect="1"/>
           </p:cNvPicPr>
           <p:nvPr/>
         </p:nvPicPr>
         <p:blipFill>
-          <a:blip r:embed="rId3"/>
+          <a:blip r:embed="rId4"/>
           <a:stretch>
             <a:fillRect/>
           </a:stretch>
         </p:blipFill>
         <p:spPr>
           <a:xfrm>
-            <a:off x="6995160" y="1851735"/>
-            <a:ext cx="4617720" cy="3154529"/>
+            <a:off x="3872179" y="2743200"/>
+            <a:ext cx="4417160" cy="3017520"/>
           </a:xfrm>
           <a:prstGeom prst="rect">
             <a:avLst/>
           </a:prstGeom>
         </p:spPr>
       </p:pic>
+      <p:sp>
+        <p:nvSpPr>
+          <p:cNvPr id="9" name="TextBox 8"/>
+          <p:cNvSpPr txBox="1"/>
+          <p:nvPr/>
+        </p:nvSpPr>
+        <p:spPr>
+          <a:xfrm>
+            <a:off x="777240" y="5943600"/>
+            <a:ext cx="10607040" cy="457200"/>
+          </a:xfrm>
+          <a:prstGeom prst="rect">
+            <a:avLst/>
+          </a:prstGeom>
+          <a:noFill/>
+        </p:spPr>
+        <p:txBody>
+          <a:bodyPr wrap="square" anchor="t" lIns="0" rIns="0" tIns="0" bIns="0">
+            <a:spAutoFit/>
+          </a:bodyPr>
+          <a:lstStyle/>
+          <a:p>
+            <a:pPr algn="l">
+              <a:lnSpc>
+                <a:spcPct val="130000"/>
+              </a:lnSpc>
+            </a:pPr>
+            <a:r>
+              <a:rPr sz="950" b="0" i="0">
+                <a:solidFill>
+                  <a:srgbClr val="5C6975"/>
+                </a:solidFill>
+                <a:latin typeface="Consolas"/>
+              </a:rPr>
+              <a:t>[your group], Nat Commun 2026 (DOI 10.1038/s41467-026-70637-3), Fig. 6.</a:t>
+            </a:r>
+          </a:p>
+        </p:txBody>
+      </p:sp>
     </p:spTree>
   </p:cSld>
   <p:clrMapOvr>
@@ -11741,16 +11325,40 @@
         <p:nvPr/>
       </p:nvGrpSpPr>
       <p:grpSpPr/>
-      <p:sp>
-        <p:nvSpPr>
-          <p:cNvPr id="2" name="Rectangle 1"/>
+      <p:pic>
+        <p:nvPicPr>
+          <p:cNvPr id="2" name="Picture 1" descr="bg_motif.png"/>
+          <p:cNvPicPr>
+            <a:picLocks noChangeAspect="1"/>
+          </p:cNvPicPr>
+          <p:nvPr/>
+        </p:nvPicPr>
+        <p:blipFill>
+          <a:blip r:embed="rId2"/>
+          <a:stretch>
+            <a:fillRect/>
+          </a:stretch>
+        </p:blipFill>
+        <p:spPr>
+          <a:xfrm>
+            <a:off x="0" y="0"/>
+            <a:ext cx="12191695" cy="6858000"/>
+          </a:xfrm>
+          <a:prstGeom prst="rect">
+            <a:avLst/>
+          </a:prstGeom>
+        </p:spPr>
+      </p:pic>
+      <p:sp>
+        <p:nvSpPr>
+          <p:cNvPr id="3" name="Rectangle 2"/>
           <p:cNvSpPr/>
           <p:nvPr/>
         </p:nvSpPr>
         <p:spPr>
           <a:xfrm>
             <a:off x="0" y="0"/>
-            <a:ext cx="12191695" cy="38100"/>
+            <a:ext cx="5486400" cy="38100"/>
           </a:xfrm>
           <a:prstGeom prst="rect">
             <a:avLst/>
@@ -11787,14 +11395,14 @@
       </p:sp>
       <p:sp>
         <p:nvSpPr>
-          <p:cNvPr id="3" name="TextBox 2"/>
+          <p:cNvPr id="4" name="TextBox 3"/>
           <p:cNvSpPr txBox="1"/>
           <p:nvPr/>
         </p:nvSpPr>
         <p:spPr>
           <a:xfrm>
-            <a:off x="777240" y="411480"/>
-            <a:ext cx="8686800" cy="365760"/>
+            <a:off x="777240" y="502920"/>
+            <a:ext cx="8229600" cy="320040"/>
           </a:xfrm>
           <a:prstGeom prst="rect">
             <a:avLst/>
@@ -11802,78 +11410,24 @@
           <a:noFill/>
         </p:spPr>
         <p:txBody>
-          <a:bodyPr wrap="square" lIns="25400" rIns="25400" tIns="12700" bIns="12700">
-            <a:noAutofit/>
+          <a:bodyPr wrap="square" anchor="t" lIns="0" rIns="0" tIns="0" bIns="0">
+            <a:spAutoFit/>
           </a:bodyPr>
           <a:lstStyle/>
           <a:p>
             <a:pPr algn="l">
               <a:lnSpc>
-                <a:spcPct val="128000"/>
+                <a:spcPct val="100000"/>
               </a:lnSpc>
-              <a:spcAft>
-                <a:spcPts val="400"/>
-              </a:spcAft>
             </a:pPr>
             <a:r>
-              <a:rPr sz="1100" b="1">
+              <a:rPr sz="1100" b="1" i="0">
                 <a:solidFill>
                   <a:srgbClr val="E7AC51"/>
                 </a:solidFill>
                 <a:latin typeface="Consolas"/>
               </a:rPr>
               <a:t>ERA II · 2026 · NOT ONLY BREAST</a:t>
-            </a:r>
-          </a:p>
-        </p:txBody>
-      </p:sp>
-      <p:sp>
-        <p:nvSpPr>
-          <p:cNvPr id="4" name="TextBox 3"/>
-          <p:cNvSpPr txBox="1"/>
-          <p:nvPr/>
-        </p:nvSpPr>
-        <p:spPr>
-          <a:xfrm>
-            <a:off x="777240" y="1078992"/>
-            <a:ext cx="10607040" cy="534416"/>
-          </a:xfrm>
-          <a:prstGeom prst="rect">
-            <a:avLst/>
-          </a:prstGeom>
-          <a:noFill/>
-        </p:spPr>
-        <p:txBody>
-          <a:bodyPr wrap="square" lIns="25400" rIns="25400" tIns="12700" bIns="12700">
-            <a:noAutofit/>
-          </a:bodyPr>
-          <a:lstStyle/>
-          <a:p>
-            <a:pPr algn="l">
-              <a:lnSpc>
-                <a:spcPct val="106000"/>
-              </a:lnSpc>
-              <a:spcAft>
-                <a:spcPts val="400"/>
-              </a:spcAft>
-            </a:pPr>
-            <a:r>
-              <a:rPr sz="2600" b="0">
-                <a:solidFill>
-                  <a:srgbClr val="ECEFF3"/>
-                </a:solidFill>
-                <a:latin typeface="Arial"/>
-              </a:rPr>
-              <a:t>Head CT: </a:t>
-            </a:r>
-            <a:r>
-              <a:rPr sz="2600" b="0">
-                <a:solidFill>
-                  <a:srgbClr val="E7AC51"/>
-                </a:solidFill>
-                <a:latin typeface="Arial"/>
-              </a:rPr>
-              <a:t>intracranial hemorrhage.</a:t>
             </a:r>
           </a:p>
         </p:txBody>
@@ -11886,8 +11440,8 @@
         </p:nvSpPr>
         <p:spPr>
           <a:xfrm>
-            <a:off x="777240" y="1613408"/>
-            <a:ext cx="10607040" cy="574040"/>
+            <a:off x="777240" y="1005840"/>
+            <a:ext cx="10607040" cy="1280160"/>
           </a:xfrm>
           <a:prstGeom prst="rect">
             <a:avLst/>
@@ -11895,86 +11449,8 @@
           <a:noFill/>
         </p:spPr>
         <p:txBody>
-          <a:bodyPr wrap="square" lIns="25400" rIns="25400" tIns="12700" bIns="12700">
-            <a:noAutofit/>
-          </a:bodyPr>
-          <a:lstStyle/>
-          <a:p>
-            <a:pPr algn="l">
-              <a:lnSpc>
-                <a:spcPct val="128000"/>
-              </a:lnSpc>
-              <a:spcAft>
-                <a:spcPts val="400"/>
-              </a:spcAft>
-            </a:pPr>
-            <a:r>
-              <a:rPr sz="1400" b="0">
-                <a:solidFill>
-                  <a:srgbClr val="9DA9B5"/>
-                </a:solidFill>
-                <a:latin typeface="Arial"/>
-              </a:rPr>
-              <a:t>A commercial ICH detector looked strong overall — but sensitivity </a:t>
-            </a:r>
-            <a:r>
-              <a:rPr sz="1400" b="1">
-                <a:solidFill>
-                  <a:srgbClr val="ECEFF3"/>
-                </a:solidFill>
-                <a:latin typeface="Arial"/>
-              </a:rPr>
-              <a:t>collapsed for subacute and chronic</a:t>
-            </a:r>
-            <a:r>
-              <a:rPr sz="1400" b="0">
-                <a:solidFill>
-                  <a:srgbClr val="9DA9B5"/>
-                </a:solidFill>
-                <a:latin typeface="Arial"/>
-              </a:rPr>
-              <a:t> bleeds, and fell in the </a:t>
-            </a:r>
-            <a:r>
-              <a:rPr sz="1400" b="1">
-                <a:solidFill>
-                  <a:srgbClr val="ECEFF3"/>
-                </a:solidFill>
-                <a:latin typeface="Arial"/>
-              </a:rPr>
-              <a:t>outpatient</a:t>
-            </a:r>
-            <a:r>
-              <a:rPr sz="1400" b="0">
-                <a:solidFill>
-                  <a:srgbClr val="9DA9B5"/>
-                </a:solidFill>
-                <a:latin typeface="Arial"/>
-              </a:rPr>
-              <a:t> setting.</a:t>
-            </a:r>
-          </a:p>
-        </p:txBody>
-      </p:sp>
-      <p:sp>
-        <p:nvSpPr>
-          <p:cNvPr id="6" name="TextBox 5"/>
-          <p:cNvSpPr txBox="1"/>
-          <p:nvPr/>
-        </p:nvSpPr>
-        <p:spPr>
-          <a:xfrm>
-            <a:off x="777240" y="2187448"/>
-            <a:ext cx="10607040" cy="525780"/>
-          </a:xfrm>
-          <a:prstGeom prst="rect">
-            <a:avLst/>
-          </a:prstGeom>
-          <a:noFill/>
-        </p:spPr>
-        <p:txBody>
-          <a:bodyPr wrap="square" lIns="25400" rIns="25400" tIns="12700" bIns="12700">
-            <a:noAutofit/>
+          <a:bodyPr wrap="square" anchor="t" lIns="0" rIns="0" tIns="0" bIns="0">
+            <a:spAutoFit/>
           </a:bodyPr>
           <a:lstStyle/>
           <a:p>
@@ -11982,18 +11458,99 @@
               <a:lnSpc>
                 <a:spcPct val="112000"/>
               </a:lnSpc>
-              <a:spcAft>
-                <a:spcPts val="400"/>
-              </a:spcAft>
             </a:pPr>
             <a:r>
-              <a:rPr sz="3000" b="0">
+              <a:rPr sz="2600" b="1" i="0">
+                <a:solidFill>
+                  <a:srgbClr val="ECEFF3"/>
+                </a:solidFill>
+                <a:latin typeface="Arial"/>
+              </a:rPr>
+              <a:t>Head CT: </a:t>
+            </a:r>
+            <a:r>
+              <a:rPr sz="2600" b="1" i="0">
                 <a:solidFill>
                   <a:srgbClr val="E7AC51"/>
                 </a:solidFill>
                 <a:latin typeface="Arial"/>
               </a:rPr>
-              <a:t>82.2%</a:t>
+              <a:t>intracranial hemorrhage.</a:t>
+            </a:r>
+          </a:p>
+        </p:txBody>
+      </p:sp>
+      <p:sp>
+        <p:nvSpPr>
+          <p:cNvPr id="6" name="TextBox 5"/>
+          <p:cNvSpPr txBox="1"/>
+          <p:nvPr/>
+        </p:nvSpPr>
+        <p:spPr>
+          <a:xfrm>
+            <a:off x="777240" y="2103120"/>
+            <a:ext cx="10241280" cy="822960"/>
+          </a:xfrm>
+          <a:prstGeom prst="rect">
+            <a:avLst/>
+          </a:prstGeom>
+          <a:noFill/>
+        </p:spPr>
+        <p:txBody>
+          <a:bodyPr wrap="square" anchor="t" lIns="0" rIns="0" tIns="0" bIns="0">
+            <a:spAutoFit/>
+          </a:bodyPr>
+          <a:lstStyle/>
+          <a:p>
+            <a:pPr algn="l">
+              <a:lnSpc>
+                <a:spcPct val="140000"/>
+              </a:lnSpc>
+            </a:pPr>
+            <a:r>
+              <a:rPr sz="1500" b="0" i="0">
+                <a:solidFill>
+                  <a:srgbClr val="9DA9B5"/>
+                </a:solidFill>
+                <a:latin typeface="Arial"/>
+              </a:rPr>
+              <a:t>A commercial ICH detector looked strong overall — but sensitivity </a:t>
+            </a:r>
+            <a:r>
+              <a:rPr sz="1500" b="1" i="0">
+                <a:solidFill>
+                  <a:srgbClr val="ECEFF3"/>
+                </a:solidFill>
+                <a:latin typeface="Arial"/>
+              </a:rPr>
+              <a:t>collapsed for subacute and chronic</a:t>
+            </a:r>
+            <a:r>
+              <a:rPr sz="1500" b="0" i="0">
+                <a:solidFill>
+                  <a:srgbClr val="9DA9B5"/>
+                </a:solidFill>
+                <a:latin typeface="Arial"/>
+              </a:rPr>
+              <a:t> bleeds, and fell in the </a:t>
+            </a:r>
+            <a:r>
+              <a:rPr sz="1500" b="1" i="0">
+                <a:solidFill>
+                  <a:srgbClr val="ECEFF3"/>
+                </a:solidFill>
+                <a:latin typeface="Arial"/>
+              </a:rPr>
+              <a:t>outpatient</a:t>
+            </a:r>
+            <a:r>
+              <a:rPr sz="1500" b="0" i="0">
+                <a:solidFill>
+                  <a:srgbClr val="9DA9B5"/>
+                </a:solidFill>
+                <a:latin typeface="Arial"/>
+              </a:rPr>
+              <a:t> setting.</a:t>
             </a:r>
           </a:p>
         </p:txBody>
@@ -12006,8 +11563,8 @@
         </p:nvSpPr>
         <p:spPr>
           <a:xfrm>
-            <a:off x="777240" y="2713228"/>
-            <a:ext cx="10607040" cy="346456"/>
+            <a:off x="777240" y="3383280"/>
+            <a:ext cx="2651760" cy="640080"/>
           </a:xfrm>
           <a:prstGeom prst="rect">
             <a:avLst/>
@@ -12015,27 +11572,24 @@
           <a:noFill/>
         </p:spPr>
         <p:txBody>
-          <a:bodyPr wrap="square" lIns="25400" rIns="25400" tIns="12700" bIns="12700">
-            <a:noAutofit/>
+          <a:bodyPr wrap="square" anchor="t" lIns="0" rIns="0" tIns="0" bIns="0">
+            <a:spAutoFit/>
           </a:bodyPr>
           <a:lstStyle/>
           <a:p>
             <a:pPr algn="l">
               <a:lnSpc>
-                <a:spcPct val="128000"/>
+                <a:spcPct val="100000"/>
               </a:lnSpc>
-              <a:spcAft>
-                <a:spcPts val="400"/>
-              </a:spcAft>
             </a:pPr>
             <a:r>
-              <a:rPr sz="1400" b="0">
-                <a:solidFill>
-                  <a:srgbClr val="9DA9B5"/>
-                </a:solidFill>
-                <a:latin typeface="Arial"/>
-              </a:rPr>
-              <a:t>Overall sensitivity</a:t>
+              <a:rPr sz="4000" b="1" i="0">
+                <a:solidFill>
+                  <a:srgbClr val="E7AC51"/>
+                </a:solidFill>
+                <a:latin typeface="Arial"/>
+              </a:rPr>
+              <a:t>82.2%</a:t>
             </a:r>
           </a:p>
         </p:txBody>
@@ -12048,8 +11602,8 @@
         </p:nvSpPr>
         <p:spPr>
           <a:xfrm>
-            <a:off x="777240" y="3059684"/>
-            <a:ext cx="10607040" cy="525780"/>
+            <a:off x="777240" y="4206240"/>
+            <a:ext cx="2651760" cy="548640"/>
           </a:xfrm>
           <a:prstGeom prst="rect">
             <a:avLst/>
@@ -12057,27 +11611,24 @@
           <a:noFill/>
         </p:spPr>
         <p:txBody>
-          <a:bodyPr wrap="square" lIns="25400" rIns="25400" tIns="12700" bIns="12700">
-            <a:noAutofit/>
+          <a:bodyPr wrap="square" anchor="t" lIns="0" rIns="0" tIns="0" bIns="0">
+            <a:spAutoFit/>
           </a:bodyPr>
           <a:lstStyle/>
           <a:p>
             <a:pPr algn="l">
               <a:lnSpc>
-                <a:spcPct val="112000"/>
+                <a:spcPct val="120000"/>
               </a:lnSpc>
-              <a:spcAft>
-                <a:spcPts val="400"/>
-              </a:spcAft>
             </a:pPr>
             <a:r>
-              <a:rPr sz="3000" b="0">
-                <a:solidFill>
-                  <a:srgbClr val="D9785B"/>
-                </a:solidFill>
-                <a:latin typeface="Arial"/>
-              </a:rPr>
-              <a:t>45.5%</a:t>
+              <a:rPr sz="1150" b="0" i="0">
+                <a:solidFill>
+                  <a:srgbClr val="9DA9B5"/>
+                </a:solidFill>
+                <a:latin typeface="Consolas"/>
+              </a:rPr>
+              <a:t>Overall sensitivity</a:t>
             </a:r>
           </a:p>
         </p:txBody>
@@ -12090,8 +11641,8 @@
         </p:nvSpPr>
         <p:spPr>
           <a:xfrm>
-            <a:off x="777240" y="3585464"/>
-            <a:ext cx="10607040" cy="346456"/>
+            <a:off x="3520440" y="3383280"/>
+            <a:ext cx="2651760" cy="640080"/>
           </a:xfrm>
           <a:prstGeom prst="rect">
             <a:avLst/>
@@ -12099,27 +11650,24 @@
           <a:noFill/>
         </p:spPr>
         <p:txBody>
-          <a:bodyPr wrap="square" lIns="25400" rIns="25400" tIns="12700" bIns="12700">
-            <a:noAutofit/>
+          <a:bodyPr wrap="square" anchor="t" lIns="0" rIns="0" tIns="0" bIns="0">
+            <a:spAutoFit/>
           </a:bodyPr>
           <a:lstStyle/>
           <a:p>
             <a:pPr algn="l">
               <a:lnSpc>
-                <a:spcPct val="128000"/>
+                <a:spcPct val="100000"/>
               </a:lnSpc>
-              <a:spcAft>
-                <a:spcPts val="400"/>
-              </a:spcAft>
             </a:pPr>
             <a:r>
-              <a:rPr sz="1400" b="0">
-                <a:solidFill>
-                  <a:srgbClr val="9DA9B5"/>
-                </a:solidFill>
-                <a:latin typeface="Arial"/>
-              </a:rPr>
-              <a:t>Subacute bleeds</a:t>
+              <a:rPr sz="4000" b="1" i="0">
+                <a:solidFill>
+                  <a:srgbClr val="D9785B"/>
+                </a:solidFill>
+                <a:latin typeface="Arial"/>
+              </a:rPr>
+              <a:t>45.5%</a:t>
             </a:r>
           </a:p>
         </p:txBody>
@@ -12132,8 +11680,8 @@
         </p:nvSpPr>
         <p:spPr>
           <a:xfrm>
-            <a:off x="777240" y="3931920"/>
-            <a:ext cx="10607040" cy="525780"/>
+            <a:off x="3520440" y="4206240"/>
+            <a:ext cx="2651760" cy="548640"/>
           </a:xfrm>
           <a:prstGeom prst="rect">
             <a:avLst/>
@@ -12141,27 +11689,24 @@
           <a:noFill/>
         </p:spPr>
         <p:txBody>
-          <a:bodyPr wrap="square" lIns="25400" rIns="25400" tIns="12700" bIns="12700">
-            <a:noAutofit/>
+          <a:bodyPr wrap="square" anchor="t" lIns="0" rIns="0" tIns="0" bIns="0">
+            <a:spAutoFit/>
           </a:bodyPr>
           <a:lstStyle/>
           <a:p>
             <a:pPr algn="l">
               <a:lnSpc>
-                <a:spcPct val="112000"/>
+                <a:spcPct val="120000"/>
               </a:lnSpc>
-              <a:spcAft>
-                <a:spcPts val="400"/>
-              </a:spcAft>
             </a:pPr>
             <a:r>
-              <a:rPr sz="3000" b="0">
-                <a:solidFill>
-                  <a:srgbClr val="D9785B"/>
-                </a:solidFill>
-                <a:latin typeface="Arial"/>
-              </a:rPr>
-              <a:t>54.8%</a:t>
+              <a:rPr sz="1150" b="0" i="0">
+                <a:solidFill>
+                  <a:srgbClr val="9DA9B5"/>
+                </a:solidFill>
+                <a:latin typeface="Consolas"/>
+              </a:rPr>
+              <a:t>Subacute bleeds</a:t>
             </a:r>
           </a:p>
         </p:txBody>
@@ -12174,8 +11719,8 @@
         </p:nvSpPr>
         <p:spPr>
           <a:xfrm>
-            <a:off x="777240" y="4457700"/>
-            <a:ext cx="10607040" cy="346456"/>
+            <a:off x="6263640" y="3383280"/>
+            <a:ext cx="2651760" cy="640080"/>
           </a:xfrm>
           <a:prstGeom prst="rect">
             <a:avLst/>
@@ -12183,27 +11728,24 @@
           <a:noFill/>
         </p:spPr>
         <p:txBody>
-          <a:bodyPr wrap="square" lIns="25400" rIns="25400" tIns="12700" bIns="12700">
-            <a:noAutofit/>
+          <a:bodyPr wrap="square" anchor="t" lIns="0" rIns="0" tIns="0" bIns="0">
+            <a:spAutoFit/>
           </a:bodyPr>
           <a:lstStyle/>
           <a:p>
             <a:pPr algn="l">
               <a:lnSpc>
-                <a:spcPct val="128000"/>
+                <a:spcPct val="100000"/>
               </a:lnSpc>
-              <a:spcAft>
-                <a:spcPts val="400"/>
-              </a:spcAft>
             </a:pPr>
             <a:r>
-              <a:rPr sz="1400" b="0">
-                <a:solidFill>
-                  <a:srgbClr val="9DA9B5"/>
-                </a:solidFill>
-                <a:latin typeface="Arial"/>
-              </a:rPr>
-              <a:t>Chronic bleeds</a:t>
+              <a:rPr sz="4000" b="1" i="0">
+                <a:solidFill>
+                  <a:srgbClr val="D9785B"/>
+                </a:solidFill>
+                <a:latin typeface="Arial"/>
+              </a:rPr>
+              <a:t>54.8%</a:t>
             </a:r>
           </a:p>
         </p:txBody>
@@ -12216,8 +11758,8 @@
         </p:nvSpPr>
         <p:spPr>
           <a:xfrm>
-            <a:off x="777240" y="4804156"/>
-            <a:ext cx="10607040" cy="525780"/>
+            <a:off x="6263640" y="4206240"/>
+            <a:ext cx="2651760" cy="548640"/>
           </a:xfrm>
           <a:prstGeom prst="rect">
             <a:avLst/>
@@ -12225,27 +11767,24 @@
           <a:noFill/>
         </p:spPr>
         <p:txBody>
-          <a:bodyPr wrap="square" lIns="25400" rIns="25400" tIns="12700" bIns="12700">
-            <a:noAutofit/>
+          <a:bodyPr wrap="square" anchor="t" lIns="0" rIns="0" tIns="0" bIns="0">
+            <a:spAutoFit/>
           </a:bodyPr>
           <a:lstStyle/>
           <a:p>
             <a:pPr algn="l">
               <a:lnSpc>
-                <a:spcPct val="112000"/>
+                <a:spcPct val="120000"/>
               </a:lnSpc>
-              <a:spcAft>
-                <a:spcPts val="400"/>
-              </a:spcAft>
             </a:pPr>
             <a:r>
-              <a:rPr sz="3000" b="0">
-                <a:solidFill>
-                  <a:srgbClr val="5FB7C9"/>
-                </a:solidFill>
-                <a:latin typeface="Arial"/>
-              </a:rPr>
-              <a:t>72.2%</a:t>
+              <a:rPr sz="1150" b="0" i="0">
+                <a:solidFill>
+                  <a:srgbClr val="9DA9B5"/>
+                </a:solidFill>
+                <a:latin typeface="Consolas"/>
+              </a:rPr>
+              <a:t>Chronic bleeds</a:t>
             </a:r>
           </a:p>
         </p:txBody>
@@ -12258,8 +11797,8 @@
         </p:nvSpPr>
         <p:spPr>
           <a:xfrm>
-            <a:off x="777240" y="5329936"/>
-            <a:ext cx="10607040" cy="346456"/>
+            <a:off x="9006840" y="3383280"/>
+            <a:ext cx="2651760" cy="640080"/>
           </a:xfrm>
           <a:prstGeom prst="rect">
             <a:avLst/>
@@ -12267,27 +11806,24 @@
           <a:noFill/>
         </p:spPr>
         <p:txBody>
-          <a:bodyPr wrap="square" lIns="25400" rIns="25400" tIns="12700" bIns="12700">
-            <a:noAutofit/>
+          <a:bodyPr wrap="square" anchor="t" lIns="0" rIns="0" tIns="0" bIns="0">
+            <a:spAutoFit/>
           </a:bodyPr>
           <a:lstStyle/>
           <a:p>
             <a:pPr algn="l">
               <a:lnSpc>
-                <a:spcPct val="128000"/>
+                <a:spcPct val="100000"/>
               </a:lnSpc>
-              <a:spcAft>
-                <a:spcPts val="400"/>
-              </a:spcAft>
             </a:pPr>
             <a:r>
-              <a:rPr sz="1400" b="0">
-                <a:solidFill>
-                  <a:srgbClr val="9DA9B5"/>
-                </a:solidFill>
-                <a:latin typeface="Arial"/>
-              </a:rPr>
-              <a:t>Outpatient setting</a:t>
+              <a:rPr sz="4000" b="1" i="0">
+                <a:solidFill>
+                  <a:srgbClr val="E7AC51"/>
+                </a:solidFill>
+                <a:latin typeface="Arial"/>
+              </a:rPr>
+              <a:t>72.2%</a:t>
             </a:r>
           </a:p>
         </p:txBody>
@@ -12300,8 +11836,8 @@
         </p:nvSpPr>
         <p:spPr>
           <a:xfrm>
-            <a:off x="777240" y="5676392"/>
-            <a:ext cx="10607040" cy="346456"/>
+            <a:off x="9006840" y="4206240"/>
+            <a:ext cx="2651760" cy="548640"/>
           </a:xfrm>
           <a:prstGeom prst="rect">
             <a:avLst/>
@@ -12309,27 +11845,24 @@
           <a:noFill/>
         </p:spPr>
         <p:txBody>
-          <a:bodyPr wrap="square" lIns="25400" rIns="25400" tIns="12700" bIns="12700">
-            <a:noAutofit/>
+          <a:bodyPr wrap="square" anchor="t" lIns="0" rIns="0" tIns="0" bIns="0">
+            <a:spAutoFit/>
           </a:bodyPr>
           <a:lstStyle/>
           <a:p>
             <a:pPr algn="l">
               <a:lnSpc>
-                <a:spcPct val="128000"/>
+                <a:spcPct val="120000"/>
               </a:lnSpc>
-              <a:spcAft>
-                <a:spcPts val="400"/>
-              </a:spcAft>
             </a:pPr>
             <a:r>
-              <a:rPr sz="1400" b="0">
+              <a:rPr sz="1150" b="0" i="0">
                 <a:solidFill>
                   <a:srgbClr val="9DA9B5"/>
                 </a:solidFill>
-                <a:latin typeface="Arial"/>
-              </a:rPr>
-              <a:t>[your group], npj Digital Medicine 2025.</a:t>
+                <a:latin typeface="Consolas"/>
+              </a:rPr>
+              <a:t>Outpatient setting</a:t>
             </a:r>
           </a:p>
         </p:txBody>
@@ -12342,8 +11875,8 @@
         </p:nvSpPr>
         <p:spPr>
           <a:xfrm>
-            <a:off x="777240" y="6022847"/>
-            <a:ext cx="10607040" cy="346456"/>
+            <a:off x="777240" y="5394960"/>
+            <a:ext cx="10607040" cy="457200"/>
           </a:xfrm>
           <a:prstGeom prst="rect">
             <a:avLst/>
@@ -12351,69 +11884,24 @@
           <a:noFill/>
         </p:spPr>
         <p:txBody>
-          <a:bodyPr wrap="square" lIns="25400" rIns="25400" tIns="12700" bIns="12700">
-            <a:noAutofit/>
+          <a:bodyPr wrap="square" anchor="t" lIns="0" rIns="0" tIns="0" bIns="0">
+            <a:spAutoFit/>
           </a:bodyPr>
           <a:lstStyle/>
           <a:p>
             <a:pPr algn="l">
               <a:lnSpc>
-                <a:spcPct val="128000"/>
+                <a:spcPct val="130000"/>
               </a:lnSpc>
-              <a:spcAft>
-                <a:spcPts val="400"/>
-              </a:spcAft>
             </a:pPr>
             <a:r>
-              <a:rPr sz="1400" b="0">
-                <a:solidFill>
-                  <a:srgbClr val="E7AC51"/>
-                </a:solidFill>
-                <a:latin typeface="Arial"/>
-              </a:rPr>
-              <a:t>GIF</a:t>
-            </a:r>
-          </a:p>
-        </p:txBody>
-      </p:sp>
-      <p:sp>
-        <p:nvSpPr>
-          <p:cNvPr id="16" name="TextBox 15"/>
-          <p:cNvSpPr txBox="1"/>
-          <p:nvPr/>
-        </p:nvSpPr>
-        <p:spPr>
-          <a:xfrm>
-            <a:off x="777240" y="6369303"/>
-            <a:ext cx="10607040" cy="346456"/>
-          </a:xfrm>
-          <a:prstGeom prst="rect">
-            <a:avLst/>
-          </a:prstGeom>
-          <a:noFill/>
-        </p:spPr>
-        <p:txBody>
-          <a:bodyPr wrap="square" lIns="25400" rIns="25400" tIns="12700" bIns="12700">
-            <a:noAutofit/>
-          </a:bodyPr>
-          <a:lstStyle/>
-          <a:p>
-            <a:pPr algn="l">
-              <a:lnSpc>
-                <a:spcPct val="128000"/>
-              </a:lnSpc>
-              <a:spcAft>
-                <a:spcPts val="400"/>
-              </a:spcAft>
-            </a:pPr>
-            <a:r>
-              <a:rPr sz="1400" b="0">
-                <a:solidFill>
-                  <a:srgbClr val="9DA9B5"/>
-                </a:solidFill>
-                <a:latin typeface="Arial"/>
-              </a:rPr>
-              <a:t>[ to be added ]</a:t>
+              <a:rPr sz="950" b="0" i="0">
+                <a:solidFill>
+                  <a:srgbClr val="5C6975"/>
+                </a:solidFill>
+                <a:latin typeface="Consolas"/>
+              </a:rPr>
+              <a:t>[your group], npj Digital Medicine 2025.</a:t>
             </a:r>
           </a:p>
         </p:txBody>
@@ -12444,16 +11932,40 @@
         <p:nvPr/>
       </p:nvGrpSpPr>
       <p:grpSpPr/>
-      <p:sp>
-        <p:nvSpPr>
-          <p:cNvPr id="2" name="Rectangle 1"/>
+      <p:pic>
+        <p:nvPicPr>
+          <p:cNvPr id="2" name="Picture 1" descr="bg_motif.png"/>
+          <p:cNvPicPr>
+            <a:picLocks noChangeAspect="1"/>
+          </p:cNvPicPr>
+          <p:nvPr/>
+        </p:nvPicPr>
+        <p:blipFill>
+          <a:blip r:embed="rId2"/>
+          <a:stretch>
+            <a:fillRect/>
+          </a:stretch>
+        </p:blipFill>
+        <p:spPr>
+          <a:xfrm>
+            <a:off x="0" y="0"/>
+            <a:ext cx="12191695" cy="6858000"/>
+          </a:xfrm>
+          <a:prstGeom prst="rect">
+            <a:avLst/>
+          </a:prstGeom>
+        </p:spPr>
+      </p:pic>
+      <p:sp>
+        <p:nvSpPr>
+          <p:cNvPr id="3" name="Rectangle 2"/>
           <p:cNvSpPr/>
           <p:nvPr/>
         </p:nvSpPr>
         <p:spPr>
           <a:xfrm>
             <a:off x="0" y="0"/>
-            <a:ext cx="12191695" cy="38100"/>
+            <a:ext cx="5486400" cy="38100"/>
           </a:xfrm>
           <a:prstGeom prst="rect">
             <a:avLst/>
@@ -12490,14 +12002,14 @@
       </p:sp>
       <p:sp>
         <p:nvSpPr>
-          <p:cNvPr id="3" name="TextBox 2"/>
+          <p:cNvPr id="4" name="TextBox 3"/>
           <p:cNvSpPr txBox="1"/>
           <p:nvPr/>
         </p:nvSpPr>
         <p:spPr>
           <a:xfrm>
-            <a:off x="777240" y="411480"/>
-            <a:ext cx="8686800" cy="365760"/>
+            <a:off x="777240" y="502920"/>
+            <a:ext cx="8229600" cy="320040"/>
           </a:xfrm>
           <a:prstGeom prst="rect">
             <a:avLst/>
@@ -12505,21 +12017,18 @@
           <a:noFill/>
         </p:spPr>
         <p:txBody>
-          <a:bodyPr wrap="square" lIns="25400" rIns="25400" tIns="12700" bIns="12700">
-            <a:noAutofit/>
+          <a:bodyPr wrap="square" anchor="t" lIns="0" rIns="0" tIns="0" bIns="0">
+            <a:spAutoFit/>
           </a:bodyPr>
           <a:lstStyle/>
           <a:p>
             <a:pPr algn="l">
               <a:lnSpc>
-                <a:spcPct val="128000"/>
+                <a:spcPct val="100000"/>
               </a:lnSpc>
-              <a:spcAft>
-                <a:spcPts val="400"/>
-              </a:spcAft>
             </a:pPr>
             <a:r>
-              <a:rPr sz="1100" b="1">
+              <a:rPr sz="1100" b="1" i="0">
                 <a:solidFill>
                   <a:srgbClr val="E7AC51"/>
                 </a:solidFill>
@@ -12532,14 +12041,14 @@
       </p:sp>
       <p:sp>
         <p:nvSpPr>
-          <p:cNvPr id="4" name="TextBox 3"/>
+          <p:cNvPr id="5" name="TextBox 4"/>
           <p:cNvSpPr txBox="1"/>
           <p:nvPr/>
         </p:nvSpPr>
         <p:spPr>
           <a:xfrm>
-            <a:off x="777240" y="2639568"/>
-            <a:ext cx="5989320" cy="904240"/>
+            <a:off x="777240" y="1005840"/>
+            <a:ext cx="5852160" cy="1280160"/>
           </a:xfrm>
           <a:prstGeom prst="rect">
             <a:avLst/>
@@ -12547,21 +12056,18 @@
           <a:noFill/>
         </p:spPr>
         <p:txBody>
-          <a:bodyPr wrap="square" lIns="25400" rIns="25400" tIns="12700" bIns="12700">
-            <a:noAutofit/>
+          <a:bodyPr wrap="square" anchor="t" lIns="0" rIns="0" tIns="0" bIns="0">
+            <a:spAutoFit/>
           </a:bodyPr>
           <a:lstStyle/>
           <a:p>
             <a:pPr algn="l">
               <a:lnSpc>
-                <a:spcPct val="106000"/>
+                <a:spcPct val="112000"/>
               </a:lnSpc>
-              <a:spcAft>
-                <a:spcPts val="400"/>
-              </a:spcAft>
             </a:pPr>
             <a:r>
-              <a:rPr sz="2600" b="0">
+              <a:rPr sz="2600" b="1" i="0">
                 <a:solidFill>
                   <a:srgbClr val="ECEFF3"/>
                 </a:solidFill>
@@ -12570,7 +12076,7 @@
               <a:t>Chest CT: </a:t>
             </a:r>
             <a:r>
-              <a:rPr sz="2600" b="0">
+              <a:rPr sz="2600" b="1" i="0">
                 <a:solidFill>
                   <a:srgbClr val="E7AC51"/>
                 </a:solidFill>
@@ -12583,14 +12089,14 @@
       </p:sp>
       <p:sp>
         <p:nvSpPr>
-          <p:cNvPr id="5" name="TextBox 4"/>
+          <p:cNvPr id="6" name="TextBox 5"/>
           <p:cNvSpPr txBox="1"/>
           <p:nvPr/>
         </p:nvSpPr>
         <p:spPr>
           <a:xfrm>
-            <a:off x="777240" y="3543808"/>
-            <a:ext cx="5989320" cy="801623"/>
+            <a:off x="777240" y="2377440"/>
+            <a:ext cx="5852160" cy="2194560"/>
           </a:xfrm>
           <a:prstGeom prst="rect">
             <a:avLst/>
@@ -12598,21 +12104,18 @@
           <a:noFill/>
         </p:spPr>
         <p:txBody>
-          <a:bodyPr wrap="square" lIns="25400" rIns="25400" tIns="12700" bIns="12700">
-            <a:noAutofit/>
+          <a:bodyPr wrap="square" anchor="t" lIns="0" rIns="0" tIns="0" bIns="0">
+            <a:spAutoFit/>
           </a:bodyPr>
           <a:lstStyle/>
           <a:p>
             <a:pPr algn="l">
               <a:lnSpc>
-                <a:spcPct val="128000"/>
+                <a:spcPct val="140000"/>
               </a:lnSpc>
-              <a:spcAft>
-                <a:spcPts val="400"/>
-              </a:spcAft>
             </a:pPr>
             <a:r>
-              <a:rPr sz="1400" b="0">
+              <a:rPr sz="1450" b="0" i="0">
                 <a:solidFill>
                   <a:srgbClr val="9DA9B5"/>
                 </a:solidFill>
@@ -12621,7 +12124,7 @@
               <a:t>An FDA-cleared model (</a:t>
             </a:r>
             <a:r>
-              <a:rPr sz="1400" b="1">
+              <a:rPr sz="1450" b="1" i="0">
                 <a:solidFill>
                   <a:srgbClr val="ECEFF3"/>
                 </a:solidFill>
@@ -12630,7 +12133,7 @@
               <a:t>510(k): 94.9% sens</a:t>
             </a:r>
             <a:r>
-              <a:rPr sz="1400" b="0">
+              <a:rPr sz="1450" b="0" i="0">
                 <a:solidFill>
                   <a:srgbClr val="9DA9B5"/>
                 </a:solidFill>
@@ -12639,39 +12142,39 @@
               <a:t>) on two years of real-world CTPA: </a:t>
             </a:r>
             <a:r>
-              <a:rPr sz="1400" b="1">
+              <a:rPr sz="1450" b="1" i="0">
+                <a:solidFill>
+                  <a:srgbClr val="E7AC51"/>
+                </a:solidFill>
+                <a:latin typeface="Arial"/>
+              </a:rPr>
+              <a:t>86.8%</a:t>
+            </a:r>
+            <a:r>
+              <a:rPr sz="1450" b="0" i="0">
+                <a:solidFill>
+                  <a:srgbClr val="9DA9B5"/>
+                </a:solidFill>
+                <a:latin typeface="Arial"/>
+              </a:rPr>
+              <a:t> overall — but far lower for non-acute, small (subsegmental), left-sided, and </a:t>
+            </a:r>
+            <a:r>
+              <a:rPr sz="1450" b="1" i="0">
                 <a:solidFill>
                   <a:srgbClr val="ECEFF3"/>
                 </a:solidFill>
                 <a:latin typeface="Arial"/>
               </a:rPr>
-              <a:t>86.8%</a:t>
-            </a:r>
-            <a:r>
-              <a:rPr sz="1400" b="0">
+              <a:t>incidental</a:t>
+            </a:r>
+            <a:r>
+              <a:rPr sz="1450" b="0" i="0">
                 <a:solidFill>
                   <a:srgbClr val="9DA9B5"/>
                 </a:solidFill>
                 <a:latin typeface="Arial"/>
               </a:rPr>
-              <a:t> overall — but far lower for non-acute, small (subsegmental), left-sided, and </a:t>
-            </a:r>
-            <a:r>
-              <a:rPr sz="1400" b="1">
-                <a:solidFill>
-                  <a:srgbClr val="ECEFF3"/>
-                </a:solidFill>
-                <a:latin typeface="Arial"/>
-              </a:rPr>
-              <a:t>incidental</a:t>
-            </a:r>
-            <a:r>
-              <a:rPr sz="1400" b="0">
-                <a:solidFill>
-                  <a:srgbClr val="9DA9B5"/>
-                </a:solidFill>
-                <a:latin typeface="Arial"/>
-              </a:rPr>
               <a:t> clots.</a:t>
             </a:r>
           </a:p>
@@ -12679,14 +12182,14 @@
       </p:sp>
       <p:sp>
         <p:nvSpPr>
-          <p:cNvPr id="6" name="TextBox 5"/>
+          <p:cNvPr id="7" name="TextBox 6"/>
           <p:cNvSpPr txBox="1"/>
           <p:nvPr/>
         </p:nvSpPr>
         <p:spPr>
           <a:xfrm>
-            <a:off x="777240" y="4345432"/>
-            <a:ext cx="5989320" cy="421640"/>
+            <a:off x="777240" y="5943600"/>
+            <a:ext cx="5852160" cy="457200"/>
           </a:xfrm>
           <a:prstGeom prst="rect">
             <a:avLst/>
@@ -12694,8 +12197,8 @@
           <a:noFill/>
         </p:spPr>
         <p:txBody>
-          <a:bodyPr wrap="square" lIns="25400" rIns="25400" tIns="12700" bIns="12700">
-            <a:noAutofit/>
+          <a:bodyPr wrap="square" anchor="t" lIns="0" rIns="0" tIns="0" bIns="0">
+            <a:spAutoFit/>
           </a:bodyPr>
           <a:lstStyle/>
           <a:p>
@@ -12703,40 +12206,37 @@
               <a:lnSpc>
                 <a:spcPct val="130000"/>
               </a:lnSpc>
-              <a:spcAft>
-                <a:spcPts val="400"/>
-              </a:spcAft>
             </a:pPr>
             <a:r>
-              <a:rPr sz="1000" b="0">
+              <a:rPr sz="950" b="0" i="0">
                 <a:solidFill>
                   <a:srgbClr val="5C6975"/>
                 </a:solidFill>
                 <a:latin typeface="Consolas"/>
               </a:rPr>
-              <a:t>Sensitivity vs FDA 510(k) clearance. [your group], unpublished — Aidoc PE / iPE triage evaluation, 30,678 CTPA + 37,272 routine CT (2023–2025).</a:t>
+              <a:t>[your group], unpublished — Aidoc PE / iPE triage, 30,678 CTPA + 37,272 routine CT (2023–2025).</a:t>
             </a:r>
           </a:p>
         </p:txBody>
       </p:sp>
       <p:pic>
         <p:nvPicPr>
-          <p:cNvPr id="7" name="Picture 6" descr="s_f751375401.png"/>
+          <p:cNvPr id="8" name="Picture 7" descr="svg_f751375401.png"/>
           <p:cNvPicPr>
             <a:picLocks noChangeAspect="1"/>
           </p:cNvPicPr>
           <p:nvPr/>
         </p:nvPicPr>
         <p:blipFill>
-          <a:blip r:embed="rId3"/>
+          <a:blip r:embed="rId4"/>
           <a:stretch>
             <a:fillRect/>
           </a:stretch>
         </p:blipFill>
         <p:spPr>
           <a:xfrm>
-            <a:off x="6995160" y="2498008"/>
-            <a:ext cx="4617720" cy="1861983"/>
+            <a:off x="6400800" y="2405461"/>
+            <a:ext cx="5303520" cy="2138516"/>
           </a:xfrm>
           <a:prstGeom prst="rect">
             <a:avLst/>
@@ -12769,16 +12269,40 @@
         <p:nvPr/>
       </p:nvGrpSpPr>
       <p:grpSpPr/>
-      <p:sp>
-        <p:nvSpPr>
-          <p:cNvPr id="2" name="Rectangle 1"/>
+      <p:pic>
+        <p:nvPicPr>
+          <p:cNvPr id="2" name="Picture 1" descr="bg_motif.png"/>
+          <p:cNvPicPr>
+            <a:picLocks noChangeAspect="1"/>
+          </p:cNvPicPr>
+          <p:nvPr/>
+        </p:nvPicPr>
+        <p:blipFill>
+          <a:blip r:embed="rId2"/>
+          <a:stretch>
+            <a:fillRect/>
+          </a:stretch>
+        </p:blipFill>
+        <p:spPr>
+          <a:xfrm>
+            <a:off x="0" y="0"/>
+            <a:ext cx="12191695" cy="6858000"/>
+          </a:xfrm>
+          <a:prstGeom prst="rect">
+            <a:avLst/>
+          </a:prstGeom>
+        </p:spPr>
+      </p:pic>
+      <p:sp>
+        <p:nvSpPr>
+          <p:cNvPr id="3" name="Rectangle 2"/>
           <p:cNvSpPr/>
           <p:nvPr/>
         </p:nvSpPr>
         <p:spPr>
           <a:xfrm>
             <a:off x="0" y="0"/>
-            <a:ext cx="12191695" cy="38100"/>
+            <a:ext cx="5486400" cy="38100"/>
           </a:xfrm>
           <a:prstGeom prst="rect">
             <a:avLst/>
@@ -12815,14 +12339,14 @@
       </p:sp>
       <p:sp>
         <p:nvSpPr>
-          <p:cNvPr id="3" name="TextBox 2"/>
+          <p:cNvPr id="4" name="TextBox 3"/>
           <p:cNvSpPr txBox="1"/>
           <p:nvPr/>
         </p:nvSpPr>
         <p:spPr>
           <a:xfrm>
-            <a:off x="777240" y="411480"/>
-            <a:ext cx="8686800" cy="365760"/>
+            <a:off x="777240" y="502920"/>
+            <a:ext cx="8229600" cy="320040"/>
           </a:xfrm>
           <a:prstGeom prst="rect">
             <a:avLst/>
@@ -12830,21 +12354,18 @@
           <a:noFill/>
         </p:spPr>
         <p:txBody>
-          <a:bodyPr wrap="square" lIns="25400" rIns="25400" tIns="12700" bIns="12700">
-            <a:noAutofit/>
+          <a:bodyPr wrap="square" anchor="t" lIns="0" rIns="0" tIns="0" bIns="0">
+            <a:spAutoFit/>
           </a:bodyPr>
           <a:lstStyle/>
           <a:p>
             <a:pPr algn="l">
               <a:lnSpc>
-                <a:spcPct val="128000"/>
+                <a:spcPct val="100000"/>
               </a:lnSpc>
-              <a:spcAft>
-                <a:spcPts val="400"/>
-              </a:spcAft>
             </a:pPr>
             <a:r>
-              <a:rPr sz="1100" b="1">
+              <a:rPr sz="1100" b="1" i="0">
                 <a:solidFill>
                   <a:srgbClr val="E7AC51"/>
                 </a:solidFill>
@@ -12857,14 +12378,14 @@
       </p:sp>
       <p:sp>
         <p:nvSpPr>
-          <p:cNvPr id="4" name="TextBox 3"/>
+          <p:cNvPr id="5" name="TextBox 4"/>
           <p:cNvSpPr txBox="1"/>
           <p:nvPr/>
         </p:nvSpPr>
         <p:spPr>
           <a:xfrm>
-            <a:off x="777240" y="2030221"/>
-            <a:ext cx="10607040" cy="534416"/>
+            <a:off x="777240" y="1005840"/>
+            <a:ext cx="10607040" cy="1280160"/>
           </a:xfrm>
           <a:prstGeom prst="rect">
             <a:avLst/>
@@ -12872,21 +12393,18 @@
           <a:noFill/>
         </p:spPr>
         <p:txBody>
-          <a:bodyPr wrap="square" lIns="25400" rIns="25400" tIns="12700" bIns="12700">
-            <a:noAutofit/>
+          <a:bodyPr wrap="square" anchor="t" lIns="0" rIns="0" tIns="0" bIns="0">
+            <a:spAutoFit/>
           </a:bodyPr>
           <a:lstStyle/>
           <a:p>
             <a:pPr algn="l">
               <a:lnSpc>
-                <a:spcPct val="106000"/>
+                <a:spcPct val="112000"/>
               </a:lnSpc>
-              <a:spcAft>
-                <a:spcPts val="400"/>
-              </a:spcAft>
             </a:pPr>
             <a:r>
-              <a:rPr sz="2600" b="0">
+              <a:rPr sz="2600" b="1" i="0">
                 <a:solidFill>
                   <a:srgbClr val="ECEFF3"/>
                 </a:solidFill>
@@ -12895,7 +12413,7 @@
               <a:t>Emory Breast Imaging Dataset </a:t>
             </a:r>
             <a:r>
-              <a:rPr sz="2600" b="0">
+              <a:rPr sz="2600" b="1" i="0">
                 <a:solidFill>
                   <a:srgbClr val="E7AC51"/>
                 </a:solidFill>
@@ -12908,14 +12426,14 @@
       </p:sp>
       <p:sp>
         <p:nvSpPr>
-          <p:cNvPr id="5" name="TextBox 4"/>
+          <p:cNvPr id="6" name="TextBox 5"/>
           <p:cNvSpPr txBox="1"/>
           <p:nvPr/>
         </p:nvSpPr>
         <p:spPr>
           <a:xfrm>
-            <a:off x="777240" y="2564637"/>
-            <a:ext cx="10607040" cy="346456"/>
+            <a:off x="777240" y="2194560"/>
+            <a:ext cx="10058400" cy="640080"/>
           </a:xfrm>
           <a:prstGeom prst="rect">
             <a:avLst/>
@@ -12923,21 +12441,18 @@
           <a:noFill/>
         </p:spPr>
         <p:txBody>
-          <a:bodyPr wrap="square" lIns="25400" rIns="25400" tIns="12700" bIns="12700">
-            <a:noAutofit/>
+          <a:bodyPr wrap="square" anchor="t" lIns="0" rIns="0" tIns="0" bIns="0">
+            <a:spAutoFit/>
           </a:bodyPr>
           <a:lstStyle/>
           <a:p>
             <a:pPr algn="l">
               <a:lnSpc>
-                <a:spcPct val="128000"/>
+                <a:spcPct val="140000"/>
               </a:lnSpc>
-              <a:spcAft>
-                <a:spcPts val="400"/>
-              </a:spcAft>
             </a:pPr>
             <a:r>
-              <a:rPr sz="1400" b="0">
+              <a:rPr sz="1500" b="0" i="0">
                 <a:solidFill>
                   <a:srgbClr val="9DA9B5"/>
                 </a:solidFill>
@@ -12946,7 +12461,7 @@
               <a:t>Free to researchers through the </a:t>
             </a:r>
             <a:r>
-              <a:rPr sz="1400" b="1">
+              <a:rPr sz="1500" b="1" i="0">
                 <a:solidFill>
                   <a:srgbClr val="ECEFF3"/>
                 </a:solidFill>
@@ -12954,47 +12469,14 @@
               </a:rPr>
               <a:t>AWS Open Data Program.</a:t>
             </a:r>
-          </a:p>
-        </p:txBody>
-      </p:sp>
-      <p:sp>
-        <p:nvSpPr>
-          <p:cNvPr id="6" name="TextBox 5"/>
-          <p:cNvSpPr txBox="1"/>
-          <p:nvPr/>
-        </p:nvSpPr>
-        <p:spPr>
-          <a:xfrm>
-            <a:off x="777240" y="2911094"/>
-            <a:ext cx="10607040" cy="346456"/>
-          </a:xfrm>
-          <a:prstGeom prst="rect">
-            <a:avLst/>
-          </a:prstGeom>
-          <a:noFill/>
-        </p:spPr>
-        <p:txBody>
-          <a:bodyPr wrap="square" lIns="25400" rIns="25400" tIns="12700" bIns="12700">
-            <a:noAutofit/>
-          </a:bodyPr>
-          <a:lstStyle/>
-          <a:p>
-            <a:pPr algn="l">
-              <a:lnSpc>
-                <a:spcPct val="128000"/>
-              </a:lnSpc>
-              <a:spcAft>
-                <a:spcPts val="400"/>
-              </a:spcAft>
-            </a:pPr>
-            <a:r>
-              <a:rPr sz="1400" b="0">
-                <a:solidFill>
-                  <a:srgbClr val="E7AC51"/>
-                </a:solidFill>
-                <a:latin typeface="Arial"/>
-              </a:rPr>
-              <a:t>EMBED v2 — in progress</a:t>
+            <a:r>
+              <a:rPr sz="1500" b="0" i="0">
+                <a:solidFill>
+                  <a:srgbClr val="9DA9B5"/>
+                </a:solidFill>
+                <a:latin typeface="Arial"/>
+              </a:rPr>
+              <a:t>  EMBED v2 is in progress.</a:t>
             </a:r>
           </a:p>
         </p:txBody>
@@ -13007,8 +12489,8 @@
         </p:nvSpPr>
         <p:spPr>
           <a:xfrm>
-            <a:off x="777240" y="3257550"/>
-            <a:ext cx="1741233" cy="365760"/>
+            <a:off x="777240" y="3200400"/>
+            <a:ext cx="1704441" cy="384048"/>
           </a:xfrm>
           <a:prstGeom prst="roundRect">
             <a:avLst/>
@@ -13018,7 +12500,7 @@
           </a:solidFill>
           <a:ln w="9525">
             <a:solidFill>
-              <a:srgbClr val="2A333E"/>
+              <a:srgbClr val="2A333D"/>
             </a:solidFill>
           </a:ln>
           <a:effectLst/>
@@ -13038,27 +12520,22 @@
           </a:fontRef>
         </p:style>
         <p:txBody>
-          <a:bodyPr rtlCol="0" anchor="ctr" wrap="none" lIns="109728" rIns="73152" tIns="0" bIns="0"/>
-          <a:lstStyle/>
-          <a:p>
-            <a:pPr algn="ctr"/>
-            <a:r>
-              <a:rPr sz="1100">
+          <a:bodyPr rtlCol="0" anchor="ctr" wrap="square" lIns="128016"/>
+          <a:lstStyle/>
+          <a:p>
+            <a:pPr algn="l">
+              <a:lnSpc>
+                <a:spcPct val="100000"/>
+              </a:lnSpc>
+            </a:pPr>
+            <a:r>
+              <a:rPr sz="1100" b="0" i="0">
                 <a:solidFill>
                   <a:srgbClr val="ECEFF3"/>
                 </a:solidFill>
                 <a:latin typeface="Consolas"/>
               </a:rPr>
-              <a:t>~300,000 </a:t>
-            </a:r>
-            <a:r>
-              <a:rPr sz="1100">
-                <a:solidFill>
-                  <a:srgbClr val="ECEFF3"/>
-                </a:solidFill>
-                <a:latin typeface="Consolas"/>
-              </a:rPr>
-              <a:t>patients</a:t>
+              <a:t>~300,000 patients</a:t>
             </a:r>
           </a:p>
         </p:txBody>
@@ -13071,8 +12548,8 @@
         </p:nvSpPr>
         <p:spPr>
           <a:xfrm>
-            <a:off x="777240" y="3257550"/>
-            <a:ext cx="36576" cy="365760"/>
+            <a:off x="777240" y="3200400"/>
+            <a:ext cx="36576" cy="384048"/>
           </a:xfrm>
           <a:prstGeom prst="rect">
             <a:avLst/>
@@ -13115,8 +12592,8 @@
         </p:nvSpPr>
         <p:spPr>
           <a:xfrm>
-            <a:off x="2609913" y="3257550"/>
-            <a:ext cx="2919158" cy="365760"/>
+            <a:off x="2618841" y="3200400"/>
+            <a:ext cx="2882188" cy="384048"/>
           </a:xfrm>
           <a:prstGeom prst="roundRect">
             <a:avLst/>
@@ -13126,7 +12603,7 @@
           </a:solidFill>
           <a:ln w="9525">
             <a:solidFill>
-              <a:srgbClr val="2A333E"/>
+              <a:srgbClr val="2A333D"/>
             </a:solidFill>
           </a:ln>
           <a:effectLst/>
@@ -13146,36 +12623,22 @@
           </a:fontRef>
         </p:style>
         <p:txBody>
-          <a:bodyPr rtlCol="0" anchor="ctr" wrap="none" lIns="109728" rIns="73152" tIns="0" bIns="0"/>
-          <a:lstStyle/>
-          <a:p>
-            <a:pPr algn="ctr"/>
-            <a:r>
-              <a:rPr sz="1100">
+          <a:bodyPr rtlCol="0" anchor="ctr" wrap="square" lIns="128016"/>
+          <a:lstStyle/>
+          <a:p>
+            <a:pPr algn="l">
+              <a:lnSpc>
+                <a:spcPct val="100000"/>
+              </a:lnSpc>
+            </a:pPr>
+            <a:r>
+              <a:rPr sz="1100" b="0" i="0">
                 <a:solidFill>
                   <a:srgbClr val="ECEFF3"/>
                 </a:solidFill>
                 <a:latin typeface="Consolas"/>
               </a:rPr>
-              <a:t>~1M </a:t>
-            </a:r>
-            <a:r>
-              <a:rPr sz="1100">
-                <a:solidFill>
-                  <a:srgbClr val="ECEFF3"/>
-                </a:solidFill>
-                <a:latin typeface="Consolas"/>
-              </a:rPr>
-              <a:t>exams</a:t>
-            </a:r>
-            <a:r>
-              <a:rPr sz="1100">
-                <a:solidFill>
-                  <a:srgbClr val="ECEFF3"/>
-                </a:solidFill>
-                <a:latin typeface="Consolas"/>
-              </a:rPr>
-              <a:t> (2D · DBT · US · MRI)</a:t>
+              <a:t>~1M exams (2D · DBT · US · MRI)</a:t>
             </a:r>
           </a:p>
         </p:txBody>
@@ -13188,8 +12651,8 @@
         </p:nvSpPr>
         <p:spPr>
           <a:xfrm>
-            <a:off x="2609913" y="3257550"/>
-            <a:ext cx="36576" cy="365760"/>
+            <a:off x="2618841" y="3200400"/>
+            <a:ext cx="36576" cy="384048"/>
           </a:xfrm>
           <a:prstGeom prst="rect">
             <a:avLst/>
@@ -13232,8 +12695,8 @@
         </p:nvSpPr>
         <p:spPr>
           <a:xfrm>
-            <a:off x="5620512" y="3257550"/>
-            <a:ext cx="1741233" cy="365760"/>
+            <a:off x="5638190" y="3200400"/>
+            <a:ext cx="1704441" cy="384048"/>
           </a:xfrm>
           <a:prstGeom prst="roundRect">
             <a:avLst/>
@@ -13243,7 +12706,7 @@
           </a:solidFill>
           <a:ln w="9525">
             <a:solidFill>
-              <a:srgbClr val="2A333E"/>
+              <a:srgbClr val="2A333D"/>
             </a:solidFill>
           </a:ln>
           <a:effectLst/>
@@ -13263,27 +12726,22 @@
           </a:fontRef>
         </p:style>
         <p:txBody>
-          <a:bodyPr rtlCol="0" anchor="ctr" wrap="none" lIns="109728" rIns="73152" tIns="0" bIns="0"/>
-          <a:lstStyle/>
-          <a:p>
-            <a:pPr algn="ctr"/>
-            <a:r>
-              <a:rPr sz="1100">
+          <a:bodyPr rtlCol="0" anchor="ctr" wrap="square" lIns="128016"/>
+          <a:lstStyle/>
+          <a:p>
+            <a:pPr algn="l">
+              <a:lnSpc>
+                <a:spcPct val="100000"/>
+              </a:lnSpc>
+            </a:pPr>
+            <a:r>
+              <a:rPr sz="1100" b="0" i="0">
                 <a:solidFill>
                   <a:srgbClr val="ECEFF3"/>
                 </a:solidFill>
                 <a:latin typeface="Consolas"/>
               </a:rPr>
-              <a:t>Free-text </a:t>
-            </a:r>
-            <a:r>
-              <a:rPr sz="1100">
-                <a:solidFill>
-                  <a:srgbClr val="ECEFF3"/>
-                </a:solidFill>
-                <a:latin typeface="Consolas"/>
-              </a:rPr>
-              <a:t>reports</a:t>
+              <a:t>Free-text reports</a:t>
             </a:r>
           </a:p>
         </p:txBody>
@@ -13296,8 +12754,8 @@
         </p:nvSpPr>
         <p:spPr>
           <a:xfrm>
-            <a:off x="5620512" y="3257550"/>
-            <a:ext cx="36576" cy="365760"/>
+            <a:off x="5638190" y="3200400"/>
+            <a:ext cx="36576" cy="384048"/>
           </a:xfrm>
           <a:prstGeom prst="rect">
             <a:avLst/>
@@ -13340,8 +12798,8 @@
         </p:nvSpPr>
         <p:spPr>
           <a:xfrm>
-            <a:off x="7453185" y="3257550"/>
-            <a:ext cx="1741233" cy="365760"/>
+            <a:off x="7479792" y="3200400"/>
+            <a:ext cx="1704441" cy="384048"/>
           </a:xfrm>
           <a:prstGeom prst="roundRect">
             <a:avLst/>
@@ -13351,7 +12809,7 @@
           </a:solidFill>
           <a:ln w="9525">
             <a:solidFill>
-              <a:srgbClr val="2A333E"/>
+              <a:srgbClr val="2A333D"/>
             </a:solidFill>
           </a:ln>
           <a:effectLst/>
@@ -13371,27 +12829,22 @@
           </a:fontRef>
         </p:style>
         <p:txBody>
-          <a:bodyPr rtlCol="0" anchor="ctr" wrap="none" lIns="109728" rIns="73152" tIns="0" bIns="0"/>
-          <a:lstStyle/>
-          <a:p>
-            <a:pPr algn="ctr"/>
-            <a:r>
-              <a:rPr sz="1100">
+          <a:bodyPr rtlCol="0" anchor="ctr" wrap="square" lIns="128016"/>
+          <a:lstStyle/>
+          <a:p>
+            <a:pPr algn="l">
+              <a:lnSpc>
+                <a:spcPct val="100000"/>
+              </a:lnSpc>
+            </a:pPr>
+            <a:r>
+              <a:rPr sz="1100" b="0" i="0">
                 <a:solidFill>
                   <a:srgbClr val="ECEFF3"/>
                 </a:solidFill>
                 <a:latin typeface="Consolas"/>
               </a:rPr>
-              <a:t>Patient </a:t>
-            </a:r>
-            <a:r>
-              <a:rPr sz="1100">
-                <a:solidFill>
-                  <a:srgbClr val="ECEFF3"/>
-                </a:solidFill>
-                <a:latin typeface="Consolas"/>
-              </a:rPr>
-              <a:t>risk data</a:t>
+              <a:t>Patient risk data</a:t>
             </a:r>
           </a:p>
         </p:txBody>
@@ -13404,8 +12857,8 @@
         </p:nvSpPr>
         <p:spPr>
           <a:xfrm>
-            <a:off x="7453185" y="3257550"/>
-            <a:ext cx="36576" cy="365760"/>
+            <a:off x="7479792" y="3200400"/>
+            <a:ext cx="36576" cy="384048"/>
           </a:xfrm>
           <a:prstGeom prst="rect">
             <a:avLst/>
@@ -13448,8 +12901,8 @@
         </p:nvSpPr>
         <p:spPr>
           <a:xfrm>
-            <a:off x="777240" y="3696462"/>
-            <a:ext cx="2666746" cy="365760"/>
+            <a:off x="777240" y="3703320"/>
+            <a:ext cx="2629814" cy="384048"/>
           </a:xfrm>
           <a:prstGeom prst="roundRect">
             <a:avLst/>
@@ -13459,7 +12912,7 @@
           </a:solidFill>
           <a:ln w="9525">
             <a:solidFill>
-              <a:srgbClr val="2A333E"/>
+              <a:srgbClr val="2A333D"/>
             </a:solidFill>
           </a:ln>
           <a:effectLst/>
@@ -13479,27 +12932,22 @@
           </a:fontRef>
         </p:style>
         <p:txBody>
-          <a:bodyPr rtlCol="0" anchor="ctr" wrap="none" lIns="109728" rIns="73152" tIns="0" bIns="0"/>
-          <a:lstStyle/>
-          <a:p>
-            <a:pPr algn="ctr"/>
-            <a:r>
-              <a:rPr sz="1100">
+          <a:bodyPr rtlCol="0" anchor="ctr" wrap="square" lIns="128016"/>
+          <a:lstStyle/>
+          <a:p>
+            <a:pPr algn="l">
+              <a:lnSpc>
+                <a:spcPct val="100000"/>
+              </a:lnSpc>
+            </a:pPr>
+            <a:r>
+              <a:rPr sz="1100" b="0" i="0">
                 <a:solidFill>
                   <a:srgbClr val="ECEFF3"/>
                 </a:solidFill>
                 <a:latin typeface="Consolas"/>
               </a:rPr>
-              <a:t>Outcomes </a:t>
-            </a:r>
-            <a:r>
-              <a:rPr sz="1100">
-                <a:solidFill>
-                  <a:srgbClr val="ECEFF3"/>
-                </a:solidFill>
-                <a:latin typeface="Consolas"/>
-              </a:rPr>
-              <a:t>registry-harmonized</a:t>
+              <a:t>Outcomes registry-harmonized</a:t>
             </a:r>
           </a:p>
         </p:txBody>
@@ -13512,8 +12960,8 @@
         </p:nvSpPr>
         <p:spPr>
           <a:xfrm>
-            <a:off x="777240" y="3696462"/>
-            <a:ext cx="36576" cy="365760"/>
+            <a:off x="777240" y="3703320"/>
+            <a:ext cx="36576" cy="384048"/>
           </a:xfrm>
           <a:prstGeom prst="rect">
             <a:avLst/>
@@ -13556,8 +13004,8 @@
         </p:nvSpPr>
         <p:spPr>
           <a:xfrm>
-            <a:off x="777240" y="4190238"/>
-            <a:ext cx="10607040" cy="256540"/>
+            <a:off x="777240" y="5852160"/>
+            <a:ext cx="10607040" cy="457200"/>
           </a:xfrm>
           <a:prstGeom prst="rect">
             <a:avLst/>
@@ -13565,8 +13013,8 @@
           <a:noFill/>
         </p:spPr>
         <p:txBody>
-          <a:bodyPr wrap="square" lIns="25400" rIns="25400" tIns="12700" bIns="12700">
-            <a:noAutofit/>
+          <a:bodyPr wrap="square" anchor="t" lIns="0" rIns="0" tIns="0" bIns="0">
+            <a:spAutoFit/>
           </a:bodyPr>
           <a:lstStyle/>
           <a:p>
@@ -13574,144 +13022,15 @@
               <a:lnSpc>
                 <a:spcPct val="130000"/>
               </a:lnSpc>
-              <a:spcAft>
-                <a:spcPts val="400"/>
-              </a:spcAft>
             </a:pPr>
             <a:r>
-              <a:rPr sz="1000" b="0">
+              <a:rPr sz="950" b="0" i="0">
                 <a:solidFill>
                   <a:srgbClr val="5C6975"/>
                 </a:solidFill>
                 <a:latin typeface="Consolas"/>
               </a:rPr>
-              <a:t>v1: [your group], Radiology: Artificial Intelligence 2023 (Fig. 1). — aws.amazon.com/opendata</a:t>
-            </a:r>
-          </a:p>
-        </p:txBody>
-      </p:sp>
-      <p:sp>
-        <p:nvSpPr>
-          <p:cNvPr id="18" name="TextBox 17"/>
-          <p:cNvSpPr txBox="1"/>
-          <p:nvPr/>
-        </p:nvSpPr>
-        <p:spPr>
-          <a:xfrm>
-            <a:off x="777240" y="4446778"/>
-            <a:ext cx="10607040" cy="346456"/>
-          </a:xfrm>
-          <a:prstGeom prst="rect">
-            <a:avLst/>
-          </a:prstGeom>
-          <a:noFill/>
-        </p:spPr>
-        <p:txBody>
-          <a:bodyPr wrap="square" lIns="25400" rIns="25400" tIns="12700" bIns="12700">
-            <a:noAutofit/>
-          </a:bodyPr>
-          <a:lstStyle/>
-          <a:p>
-            <a:pPr algn="l">
-              <a:lnSpc>
-                <a:spcPct val="128000"/>
-              </a:lnSpc>
-              <a:spcAft>
-                <a:spcPts val="400"/>
-              </a:spcAft>
-            </a:pPr>
-            <a:r>
-              <a:rPr sz="1400" b="0">
-                <a:solidFill>
-                  <a:srgbClr val="E7AC51"/>
-                </a:solidFill>
-                <a:latin typeface="Arial"/>
-              </a:rPr>
-              <a:t>Map — EMBED users by country</a:t>
-            </a:r>
-          </a:p>
-        </p:txBody>
-      </p:sp>
-      <p:sp>
-        <p:nvSpPr>
-          <p:cNvPr id="19" name="TextBox 18"/>
-          <p:cNvSpPr txBox="1"/>
-          <p:nvPr/>
-        </p:nvSpPr>
-        <p:spPr>
-          <a:xfrm>
-            <a:off x="777240" y="4793234"/>
-            <a:ext cx="10607040" cy="346456"/>
-          </a:xfrm>
-          <a:prstGeom prst="rect">
-            <a:avLst/>
-          </a:prstGeom>
-          <a:noFill/>
-        </p:spPr>
-        <p:txBody>
-          <a:bodyPr wrap="square" lIns="25400" rIns="25400" tIns="12700" bIns="12700">
-            <a:noAutofit/>
-          </a:bodyPr>
-          <a:lstStyle/>
-          <a:p>
-            <a:pPr algn="l">
-              <a:lnSpc>
-                <a:spcPct val="128000"/>
-              </a:lnSpc>
-              <a:spcAft>
-                <a:spcPts val="400"/>
-              </a:spcAft>
-            </a:pPr>
-            <a:r>
-              <a:rPr sz="1400" b="0">
-                <a:solidFill>
-                  <a:srgbClr val="9DA9B5"/>
-                </a:solidFill>
-                <a:latin typeface="Arial"/>
-              </a:rPr>
-              <a:t>[ drop in PNG ]</a:t>
-            </a:r>
-          </a:p>
-        </p:txBody>
-      </p:sp>
-      <p:sp>
-        <p:nvSpPr>
-          <p:cNvPr id="20" name="TextBox 19"/>
-          <p:cNvSpPr txBox="1"/>
-          <p:nvPr/>
-        </p:nvSpPr>
-        <p:spPr>
-          <a:xfrm>
-            <a:off x="777240" y="5139690"/>
-            <a:ext cx="10607040" cy="346456"/>
-          </a:xfrm>
-          <a:prstGeom prst="rect">
-            <a:avLst/>
-          </a:prstGeom>
-          <a:noFill/>
-        </p:spPr>
-        <p:txBody>
-          <a:bodyPr wrap="square" lIns="25400" rIns="25400" tIns="12700" bIns="12700">
-            <a:noAutofit/>
-          </a:bodyPr>
-          <a:lstStyle/>
-          <a:p>
-            <a:pPr algn="l">
-              <a:lnSpc>
-                <a:spcPct val="128000"/>
-              </a:lnSpc>
-              <a:spcAft>
-                <a:spcPts val="400"/>
-              </a:spcAft>
-            </a:pPr>
-            <a:r>
-              <a:rPr sz="1400" b="0">
-                <a:solidFill>
-                  <a:srgbClr val="9DA9B5"/>
-                </a:solidFill>
-                <a:latin typeface="Arial"/>
-              </a:rPr>
-              <a:t>opt: EMBED v1 schematic — Radiology: AI, Fig. 1</a:t>
+              <a:t>v1: [your group], Radiology: Artificial Intelligence 2023 (Fig. 1) · aws.amazon.com/opendata</a:t>
             </a:r>
           </a:p>
         </p:txBody>
@@ -13742,16 +13061,40 @@
         <p:nvPr/>
       </p:nvGrpSpPr>
       <p:grpSpPr/>
-      <p:sp>
-        <p:nvSpPr>
-          <p:cNvPr id="2" name="Rectangle 1"/>
+      <p:pic>
+        <p:nvPicPr>
+          <p:cNvPr id="2" name="Picture 1" descr="bg_motif.png"/>
+          <p:cNvPicPr>
+            <a:picLocks noChangeAspect="1"/>
+          </p:cNvPicPr>
+          <p:nvPr/>
+        </p:nvPicPr>
+        <p:blipFill>
+          <a:blip r:embed="rId2"/>
+          <a:stretch>
+            <a:fillRect/>
+          </a:stretch>
+        </p:blipFill>
+        <p:spPr>
+          <a:xfrm>
+            <a:off x="0" y="0"/>
+            <a:ext cx="12191695" cy="6858000"/>
+          </a:xfrm>
+          <a:prstGeom prst="rect">
+            <a:avLst/>
+          </a:prstGeom>
+        </p:spPr>
+      </p:pic>
+      <p:sp>
+        <p:nvSpPr>
+          <p:cNvPr id="3" name="Rectangle 2"/>
           <p:cNvSpPr/>
           <p:nvPr/>
         </p:nvSpPr>
         <p:spPr>
           <a:xfrm>
             <a:off x="0" y="0"/>
-            <a:ext cx="12191695" cy="38100"/>
+            <a:ext cx="5486400" cy="38100"/>
           </a:xfrm>
           <a:prstGeom prst="rect">
             <a:avLst/>
@@ -13788,14 +13131,14 @@
       </p:sp>
       <p:sp>
         <p:nvSpPr>
-          <p:cNvPr id="3" name="TextBox 2"/>
+          <p:cNvPr id="4" name="TextBox 3"/>
           <p:cNvSpPr txBox="1"/>
           <p:nvPr/>
         </p:nvSpPr>
         <p:spPr>
           <a:xfrm>
-            <a:off x="777240" y="411480"/>
-            <a:ext cx="8686800" cy="365760"/>
+            <a:off x="777240" y="502920"/>
+            <a:ext cx="8229600" cy="320040"/>
           </a:xfrm>
           <a:prstGeom prst="rect">
             <a:avLst/>
@@ -13803,21 +13146,18 @@
           <a:noFill/>
         </p:spPr>
         <p:txBody>
-          <a:bodyPr wrap="square" lIns="25400" rIns="25400" tIns="12700" bIns="12700">
-            <a:noAutofit/>
+          <a:bodyPr wrap="square" anchor="t" lIns="0" rIns="0" tIns="0" bIns="0">
+            <a:spAutoFit/>
           </a:bodyPr>
           <a:lstStyle/>
           <a:p>
             <a:pPr algn="l">
               <a:lnSpc>
-                <a:spcPct val="128000"/>
+                <a:spcPct val="100000"/>
               </a:lnSpc>
-              <a:spcAft>
-                <a:spcPts val="400"/>
-              </a:spcAft>
             </a:pPr>
             <a:r>
-              <a:rPr sz="1100" b="1">
+              <a:rPr sz="1100" b="1" i="0">
                 <a:solidFill>
                   <a:srgbClr val="E7AC51"/>
                 </a:solidFill>
@@ -13830,14 +13170,14 @@
       </p:sp>
       <p:sp>
         <p:nvSpPr>
-          <p:cNvPr id="4" name="TextBox 3"/>
+          <p:cNvPr id="5" name="TextBox 4"/>
           <p:cNvSpPr txBox="1"/>
           <p:nvPr/>
         </p:nvSpPr>
         <p:spPr>
           <a:xfrm>
-            <a:off x="777240" y="2733802"/>
-            <a:ext cx="10607040" cy="591312"/>
+            <a:off x="777240" y="1463040"/>
+            <a:ext cx="10607040" cy="1280160"/>
           </a:xfrm>
           <a:prstGeom prst="rect">
             <a:avLst/>
@@ -13845,21 +13185,18 @@
           <a:noFill/>
         </p:spPr>
         <p:txBody>
-          <a:bodyPr wrap="square" lIns="25400" rIns="25400" tIns="12700" bIns="12700">
-            <a:noAutofit/>
+          <a:bodyPr wrap="square" anchor="t" lIns="0" rIns="0" tIns="0" bIns="0">
+            <a:spAutoFit/>
           </a:bodyPr>
           <a:lstStyle/>
           <a:p>
             <a:pPr algn="l">
               <a:lnSpc>
-                <a:spcPct val="106000"/>
+                <a:spcPct val="112000"/>
               </a:lnSpc>
-              <a:spcAft>
-                <a:spcPts val="400"/>
-              </a:spcAft>
             </a:pPr>
             <a:r>
-              <a:rPr sz="3000" b="0">
+              <a:rPr sz="3200" b="1" i="0">
                 <a:solidFill>
                   <a:srgbClr val="ECEFF3"/>
                 </a:solidFill>
@@ -13868,7 +13205,7 @@
               <a:t>We are at the </a:t>
             </a:r>
             <a:r>
-              <a:rPr sz="3000" b="0">
+              <a:rPr sz="3200" b="1" i="0">
                 <a:solidFill>
                   <a:srgbClr val="E7AC51"/>
                 </a:solidFill>
@@ -13881,14 +13218,14 @@
       </p:sp>
       <p:sp>
         <p:nvSpPr>
-          <p:cNvPr id="5" name="TextBox 4"/>
+          <p:cNvPr id="6" name="TextBox 5"/>
           <p:cNvSpPr txBox="1"/>
           <p:nvPr/>
         </p:nvSpPr>
         <p:spPr>
           <a:xfrm>
-            <a:off x="777240" y="3325114"/>
-            <a:ext cx="10607040" cy="773684"/>
+            <a:off x="777240" y="2926080"/>
+            <a:ext cx="10424160" cy="2743200"/>
           </a:xfrm>
           <a:prstGeom prst="rect">
             <a:avLst/>
@@ -13896,150 +13233,105 @@
           <a:noFill/>
         </p:spPr>
         <p:txBody>
-          <a:bodyPr wrap="square" lIns="25400" rIns="25400" tIns="12700" bIns="12700">
-            <a:noAutofit/>
+          <a:bodyPr wrap="square" anchor="t" lIns="0" rIns="0" tIns="0" bIns="0">
+            <a:spAutoFit/>
           </a:bodyPr>
           <a:lstStyle/>
           <a:p>
             <a:pPr algn="l">
               <a:lnSpc>
-                <a:spcPct val="130000"/>
+                <a:spcPct val="145000"/>
               </a:lnSpc>
-              <a:spcAft>
-                <a:spcPts val="400"/>
-              </a:spcAft>
             </a:pPr>
             <a:r>
-              <a:rPr sz="1900" b="0">
+              <a:rPr sz="1700" b="0" i="0">
+                <a:solidFill>
+                  <a:srgbClr val="9DA9B5"/>
+                </a:solidFill>
+                <a:latin typeface="Arial"/>
+              </a:rPr>
+              <a:t>Detection is proven. But the same 2026 image — and the tissue that follows it — already tells us more than </a:t>
+            </a:r>
+            <a:r>
+              <a:rPr sz="1700" b="1" i="0">
                 <a:solidFill>
                   <a:srgbClr val="ECEFF3"/>
                 </a:solidFill>
                 <a:latin typeface="Arial"/>
               </a:rPr>
-              <a:t>Detection is proven. But the same 2026 image — and the tissue that follows it — already tells us more than </a:t>
-            </a:r>
-            <a:r>
-              <a:rPr sz="1900" b="1">
+              <a:t>“is there cancer today?”</a:t>
+            </a:r>
+            <a:r>
+              <a:rPr sz="1700" b="0" i="0">
+                <a:solidFill>
+                  <a:srgbClr val="9DA9B5"/>
+                </a:solidFill>
+                <a:latin typeface="Arial"/>
+              </a:rPr>
+              <a:t> From one screening mammogram and its biopsy: a </a:t>
+            </a:r>
+            <a:r>
+              <a:rPr sz="1700" b="1" i="0">
+                <a:solidFill>
+                  <a:srgbClr val="E7AC51"/>
+                </a:solidFill>
+                <a:latin typeface="Arial"/>
+              </a:rPr>
+              <a:t>future-risk</a:t>
+            </a:r>
+            <a:r>
+              <a:rPr sz="1700" b="0" i="0">
+                <a:solidFill>
+                  <a:srgbClr val="9DA9B5"/>
+                </a:solidFill>
+                <a:latin typeface="Arial"/>
+              </a:rPr>
+              <a:t> estimate, a </a:t>
+            </a:r>
+            <a:r>
+              <a:rPr sz="1700" b="1" i="0">
+                <a:solidFill>
+                  <a:srgbClr val="E7AC51"/>
+                </a:solidFill>
+                <a:latin typeface="Arial"/>
+              </a:rPr>
+              <a:t>cardiovascular</a:t>
+            </a:r>
+            <a:r>
+              <a:rPr sz="1700" b="0" i="0">
+                <a:solidFill>
+                  <a:srgbClr val="9DA9B5"/>
+                </a:solidFill>
+                <a:latin typeface="Arial"/>
+              </a:rPr>
+              <a:t> signal, and a </a:t>
+            </a:r>
+            <a:r>
+              <a:rPr sz="1700" b="1" i="0">
+                <a:solidFill>
+                  <a:srgbClr val="E7AC51"/>
+                </a:solidFill>
+                <a:latin typeface="Arial"/>
+              </a:rPr>
+              <a:t>molecular recurrence</a:t>
+            </a:r>
+            <a:r>
+              <a:rPr sz="1700" b="0" i="0">
+                <a:solidFill>
+                  <a:srgbClr val="9DA9B5"/>
+                </a:solidFill>
+                <a:latin typeface="Arial"/>
+              </a:rPr>
+              <a:t> score — the shift from finding the lesion to </a:t>
+            </a:r>
+            <a:r>
+              <a:rPr sz="1700" b="1" i="0">
                 <a:solidFill>
                   <a:srgbClr val="ECEFF3"/>
                 </a:solidFill>
                 <a:latin typeface="Arial"/>
               </a:rPr>
-              <a:t>"is there cancer today?"</a:t>
-            </a:r>
-          </a:p>
-        </p:txBody>
-      </p:sp>
-      <p:sp>
-        <p:nvSpPr>
-          <p:cNvPr id="6" name="TextBox 5"/>
-          <p:cNvSpPr txBox="1"/>
-          <p:nvPr/>
-        </p:nvSpPr>
-        <p:spPr>
-          <a:xfrm>
-            <a:off x="777240" y="4098798"/>
-            <a:ext cx="10607040" cy="574040"/>
-          </a:xfrm>
-          <a:prstGeom prst="rect">
-            <a:avLst/>
-          </a:prstGeom>
-          <a:noFill/>
-        </p:spPr>
-        <p:txBody>
-          <a:bodyPr wrap="square" lIns="25400" rIns="25400" tIns="12700" bIns="12700">
-            <a:noAutofit/>
-          </a:bodyPr>
-          <a:lstStyle/>
-          <a:p>
-            <a:pPr algn="l">
-              <a:lnSpc>
-                <a:spcPct val="128000"/>
-              </a:lnSpc>
-              <a:spcAft>
-                <a:spcPts val="400"/>
-              </a:spcAft>
-            </a:pPr>
-            <a:r>
-              <a:rPr sz="1400" b="0">
-                <a:solidFill>
-                  <a:srgbClr val="9DA9B5"/>
-                </a:solidFill>
-                <a:latin typeface="Arial"/>
-              </a:rPr>
-              <a:t>From one screening mammogram and its biopsy: a </a:t>
-            </a:r>
-            <a:r>
-              <a:rPr sz="1400" b="1">
-                <a:solidFill>
-                  <a:srgbClr val="ECEFF3"/>
-                </a:solidFill>
-                <a:latin typeface="Arial"/>
-              </a:rPr>
-              <a:t>future-risk</a:t>
-            </a:r>
-            <a:r>
-              <a:rPr sz="1400" b="0">
-                <a:solidFill>
-                  <a:srgbClr val="9DA9B5"/>
-                </a:solidFill>
-                <a:latin typeface="Arial"/>
-              </a:rPr>
-              <a:t> estimate, a </a:t>
-            </a:r>
-            <a:r>
-              <a:rPr sz="1400" b="1">
-                <a:solidFill>
-                  <a:srgbClr val="ECEFF3"/>
-                </a:solidFill>
-                <a:latin typeface="Arial"/>
-              </a:rPr>
-              <a:t>cardiovascular</a:t>
-            </a:r>
-            <a:r>
-              <a:rPr sz="1400" b="0">
-                <a:solidFill>
-                  <a:srgbClr val="9DA9B5"/>
-                </a:solidFill>
-                <a:latin typeface="Arial"/>
-              </a:rPr>
-              <a:t> signal, and a </a:t>
-            </a:r>
-            <a:r>
-              <a:rPr sz="1400" b="1">
-                <a:solidFill>
-                  <a:srgbClr val="ECEFF3"/>
-                </a:solidFill>
-                <a:latin typeface="Arial"/>
-              </a:rPr>
-              <a:t>molecular recurrence</a:t>
-            </a:r>
-            <a:r>
-              <a:rPr sz="1400" b="0">
-                <a:solidFill>
-                  <a:srgbClr val="9DA9B5"/>
-                </a:solidFill>
-                <a:latin typeface="Arial"/>
-              </a:rPr>
-              <a:t> score. The shift from finding the lesion to </a:t>
-            </a:r>
-            <a:r>
-              <a:rPr sz="1400" b="1">
-                <a:solidFill>
-                  <a:srgbClr val="ECEFF3"/>
-                </a:solidFill>
-                <a:latin typeface="Arial"/>
-              </a:rPr>
-              <a:t>characterizing the patient</a:t>
-            </a:r>
-            <a:r>
-              <a:rPr sz="1400" b="0">
-                <a:solidFill>
-                  <a:srgbClr val="9DA9B5"/>
-                </a:solidFill>
-                <a:latin typeface="Arial"/>
-              </a:rPr>
-              <a:t> — and much of it is available now.</a:t>
+              <a:t>characterizing the patient.</a:t>
             </a:r>
           </a:p>
         </p:txBody>

--- a/keynote-iwbi-2026/pptx/sections/IWBI2026_Trivedi_02b_EraII_2026.pptx
+++ b/keynote-iwbi-2026/pptx/sections/IWBI2026_Trivedi_02b_EraII_2026.pptx
@@ -5304,8 +5304,101 @@
         </p:nvSpPr>
         <p:spPr>
           <a:xfrm>
-            <a:off x="777240" y="1371600"/>
-            <a:ext cx="10424160" cy="2194560"/>
+            <a:off x="777240" y="1828800"/>
+            <a:ext cx="6126480" cy="2926080"/>
+          </a:xfrm>
+          <a:prstGeom prst="rect">
+            <a:avLst/>
+          </a:prstGeom>
+          <a:noFill/>
+        </p:spPr>
+        <p:txBody>
+          <a:bodyPr wrap="square" anchor="t" lIns="0" rIns="0" tIns="0" bIns="0">
+            <a:spAutoFit/>
+          </a:bodyPr>
+          <a:lstStyle/>
+          <a:p>
+            <a:pPr algn="l">
+              <a:lnSpc>
+                <a:spcPct val="132000"/>
+              </a:lnSpc>
+            </a:pPr>
+            <a:r>
+              <a:rPr sz="2400" b="0" i="0">
+                <a:solidFill>
+                  <a:srgbClr val="9DA9B5"/>
+                </a:solidFill>
+                <a:latin typeface="Arial"/>
+              </a:rPr>
+              <a:t>For 40 years, the only risk signal we could read off the image was </a:t>
+            </a:r>
+            <a:r>
+              <a:rPr sz="2400" b="0" i="0">
+                <a:solidFill>
+                  <a:srgbClr val="E7AC51"/>
+                </a:solidFill>
+                <a:latin typeface="Arial"/>
+              </a:rPr>
+              <a:t>density</a:t>
+            </a:r>
+            <a:r>
+              <a:rPr sz="2400" b="0" i="0">
+                <a:solidFill>
+                  <a:srgbClr val="9DA9B5"/>
+                </a:solidFill>
+                <a:latin typeface="Arial"/>
+              </a:rPr>
+              <a:t>. The clinical models layered on top — </a:t>
+            </a:r>
+            <a:r>
+              <a:rPr sz="2400" b="0" i="0">
+                <a:solidFill>
+                  <a:srgbClr val="E7AC51"/>
+                </a:solidFill>
+                <a:latin typeface="Arial"/>
+              </a:rPr>
+              <a:t>Gail</a:t>
+            </a:r>
+            <a:r>
+              <a:rPr sz="2400" b="0" i="0">
+                <a:solidFill>
+                  <a:srgbClr val="9DA9B5"/>
+                </a:solidFill>
+                <a:latin typeface="Arial"/>
+              </a:rPr>
+              <a:t> and </a:t>
+            </a:r>
+            <a:r>
+              <a:rPr sz="2400" b="0" i="0">
+                <a:solidFill>
+                  <a:srgbClr val="E7AC51"/>
+                </a:solidFill>
+                <a:latin typeface="Arial"/>
+              </a:rPr>
+              <a:t>Tyrer-Cuzick</a:t>
+            </a:r>
+            <a:r>
+              <a:rPr sz="2400" b="0" i="0">
+                <a:solidFill>
+                  <a:srgbClr val="9DA9B5"/>
+                </a:solidFill>
+                <a:latin typeface="Arial"/>
+              </a:rPr>
+              <a:t> — were hardly better than a coin flip.</a:t>
+            </a:r>
+          </a:p>
+        </p:txBody>
+      </p:sp>
+      <p:sp>
+        <p:nvSpPr>
+          <p:cNvPr id="6" name="TextBox 5"/>
+          <p:cNvSpPr txBox="1"/>
+          <p:nvPr/>
+        </p:nvSpPr>
+        <p:spPr>
+          <a:xfrm>
+            <a:off x="777240" y="5120640"/>
+            <a:ext cx="6126480" cy="457200"/>
           </a:xfrm>
           <a:prstGeom prst="rect">
             <a:avLst/>
@@ -5324,81 +5417,71 @@
               </a:lnSpc>
             </a:pPr>
             <a:r>
-              <a:rPr sz="2200" b="0" i="0">
-                <a:solidFill>
-                  <a:srgbClr val="9DA9B5"/>
-                </a:solidFill>
-                <a:latin typeface="Arial"/>
-              </a:rPr>
-              <a:t>For 40 years, the only risk signal we could read off the image was </a:t>
-            </a:r>
-            <a:r>
-              <a:rPr sz="2200" b="1" i="0">
-                <a:solidFill>
-                  <a:srgbClr val="ECEFF3"/>
-                </a:solidFill>
-                <a:latin typeface="Arial"/>
-              </a:rPr>
-              <a:t>density.</a:t>
-            </a:r>
-            <a:r>
-              <a:rPr sz="2200" b="0" i="0">
-                <a:solidFill>
-                  <a:srgbClr val="9DA9B5"/>
-                </a:solidFill>
-                <a:latin typeface="Arial"/>
-              </a:rPr>
-              <a:t> The clinical models layered on top — </a:t>
-            </a:r>
-            <a:r>
-              <a:rPr sz="2200" b="1" i="0">
-                <a:solidFill>
-                  <a:srgbClr val="ECEFF3"/>
-                </a:solidFill>
-                <a:latin typeface="Arial"/>
-              </a:rPr>
-              <a:t>Gail</a:t>
-            </a:r>
-            <a:r>
-              <a:rPr sz="2200" b="0" i="0">
-                <a:solidFill>
-                  <a:srgbClr val="9DA9B5"/>
-                </a:solidFill>
-                <a:latin typeface="Arial"/>
-              </a:rPr>
-              <a:t> and </a:t>
-            </a:r>
-            <a:r>
-              <a:rPr sz="2200" b="1" i="0">
-                <a:solidFill>
-                  <a:srgbClr val="ECEFF3"/>
-                </a:solidFill>
-                <a:latin typeface="Arial"/>
-              </a:rPr>
-              <a:t>Tyrer-Cuzick</a:t>
-            </a:r>
-            <a:r>
-              <a:rPr sz="2200" b="0" i="0">
-                <a:solidFill>
-                  <a:srgbClr val="9DA9B5"/>
-                </a:solidFill>
-                <a:latin typeface="Arial"/>
-              </a:rPr>
-              <a:t> — were hardly better than a coin flip.</a:t>
-            </a:r>
-          </a:p>
-        </p:txBody>
-      </p:sp>
-      <p:sp>
-        <p:nvSpPr>
-          <p:cNvPr id="6" name="TextBox 5"/>
+              <a:rPr sz="950" b="0" i="0">
+                <a:solidFill>
+                  <a:srgbClr val="5C6975"/>
+                </a:solidFill>
+                <a:latin typeface="Consolas"/>
+              </a:rPr>
+              <a:t>Gail · Tyrer-Cuzick · BCSC — questionnaire + density models</a:t>
+            </a:r>
+          </a:p>
+        </p:txBody>
+      </p:sp>
+      <p:sp>
+        <p:nvSpPr>
+          <p:cNvPr id="7" name="Rectangle 6"/>
+          <p:cNvSpPr/>
+          <p:nvPr/>
+        </p:nvSpPr>
+        <p:spPr>
+          <a:xfrm>
+            <a:off x="7315200" y="2011680"/>
+            <a:ext cx="12700" cy="2194560"/>
+          </a:xfrm>
+          <a:prstGeom prst="rect">
+            <a:avLst/>
+          </a:prstGeom>
+          <a:solidFill>
+            <a:srgbClr val="2A333D"/>
+          </a:solidFill>
+          <a:ln>
+            <a:noFill/>
+          </a:ln>
+          <a:effectLst/>
+        </p:spPr>
+        <p:style>
+          <a:lnRef idx="1">
+            <a:schemeClr val="accent1"/>
+          </a:lnRef>
+          <a:fillRef idx="3">
+            <a:schemeClr val="accent1"/>
+          </a:fillRef>
+          <a:effectRef idx="2">
+            <a:schemeClr val="accent1"/>
+          </a:effectRef>
+          <a:fontRef idx="minor">
+            <a:schemeClr val="lt1"/>
+          </a:fontRef>
+        </p:style>
+        <p:txBody>
+          <a:bodyPr rtlCol="0" anchor="ctr"/>
+          <a:lstStyle/>
+          <a:p>
+            <a:pPr algn="ctr"/>
+          </a:p>
+        </p:txBody>
+      </p:sp>
+      <p:sp>
+        <p:nvSpPr>
+          <p:cNvPr id="8" name="TextBox 7"/>
           <p:cNvSpPr txBox="1"/>
           <p:nvPr/>
         </p:nvSpPr>
         <p:spPr>
           <a:xfrm>
-            <a:off x="777240" y="3749039"/>
-            <a:ext cx="4572000" cy="502920"/>
+            <a:off x="7680960" y="2148840"/>
+            <a:ext cx="4206240" cy="502920"/>
           </a:xfrm>
           <a:prstGeom prst="rect">
             <a:avLst/>
@@ -5417,9 +5500,9 @@
               </a:lnSpc>
             </a:pPr>
             <a:r>
-              <a:rPr sz="4400" b="1" i="0">
-                <a:solidFill>
-                  <a:srgbClr val="E7AC51"/>
+              <a:rPr sz="2200" b="1" i="0">
+                <a:solidFill>
+                  <a:srgbClr val="ECEFF3"/>
                 </a:solidFill>
                 <a:latin typeface="Arial"/>
               </a:rPr>
@@ -5430,14 +5513,14 @@
       </p:sp>
       <p:sp>
         <p:nvSpPr>
-          <p:cNvPr id="7" name="TextBox 6"/>
+          <p:cNvPr id="9" name="TextBox 8"/>
           <p:cNvSpPr txBox="1"/>
           <p:nvPr/>
         </p:nvSpPr>
         <p:spPr>
           <a:xfrm>
-            <a:off x="777240" y="4242816"/>
-            <a:ext cx="4572000" cy="548640"/>
+            <a:off x="7680960" y="2441448"/>
+            <a:ext cx="4206240" cy="548640"/>
           </a:xfrm>
           <a:prstGeom prst="rect">
             <a:avLst/>
@@ -5469,14 +5552,14 @@
       </p:sp>
       <p:sp>
         <p:nvSpPr>
-          <p:cNvPr id="8" name="TextBox 7"/>
+          <p:cNvPr id="10" name="TextBox 9"/>
           <p:cNvSpPr txBox="1"/>
           <p:nvPr/>
         </p:nvSpPr>
         <p:spPr>
           <a:xfrm>
-            <a:off x="5943600" y="3749039"/>
-            <a:ext cx="5029200" cy="502920"/>
+            <a:off x="7680960" y="2971800"/>
+            <a:ext cx="4206240" cy="502920"/>
           </a:xfrm>
           <a:prstGeom prst="rect">
             <a:avLst/>
@@ -5495,9 +5578,9 @@
               </a:lnSpc>
             </a:pPr>
             <a:r>
-              <a:rPr sz="4400" b="1" i="0">
-                <a:solidFill>
-                  <a:srgbClr val="E7AC51"/>
+              <a:rPr sz="2200" b="1" i="0">
+                <a:solidFill>
+                  <a:srgbClr val="ECEFF3"/>
                 </a:solidFill>
                 <a:latin typeface="Arial"/>
               </a:rPr>
@@ -5508,14 +5591,14 @@
       </p:sp>
       <p:sp>
         <p:nvSpPr>
-          <p:cNvPr id="9" name="TextBox 8"/>
+          <p:cNvPr id="11" name="TextBox 10"/>
           <p:cNvSpPr txBox="1"/>
           <p:nvPr/>
         </p:nvSpPr>
         <p:spPr>
           <a:xfrm>
-            <a:off x="5943600" y="4242816"/>
-            <a:ext cx="5029200" cy="548640"/>
+            <a:off x="7680960" y="3264408"/>
+            <a:ext cx="4206240" cy="548640"/>
           </a:xfrm>
           <a:prstGeom prst="rect">
             <a:avLst/>
@@ -5547,14 +5630,14 @@
       </p:sp>
       <p:sp>
         <p:nvSpPr>
-          <p:cNvPr id="10" name="TextBox 9"/>
+          <p:cNvPr id="12" name="TextBox 11"/>
           <p:cNvSpPr txBox="1"/>
           <p:nvPr/>
         </p:nvSpPr>
         <p:spPr>
           <a:xfrm>
-            <a:off x="777240" y="5303520"/>
-            <a:ext cx="10424160" cy="548640"/>
+            <a:off x="7680960" y="3886200"/>
+            <a:ext cx="4206240" cy="822960"/>
           </a:xfrm>
           <a:prstGeom prst="rect">
             <a:avLst/>
@@ -5569,11 +5652,11 @@
           <a:p>
             <a:pPr algn="l">
               <a:lnSpc>
-                <a:spcPct val="140000"/>
+                <a:spcPct val="135000"/>
               </a:lnSpc>
             </a:pPr>
             <a:r>
-              <a:rPr sz="1500" b="1" i="0">
+              <a:rPr sz="1300" b="0" i="0">
                 <a:solidFill>
                   <a:srgbClr val="ECEFF3"/>
                 </a:solidFill>
@@ -5582,7 +5665,7 @@
               <a:t>Coin flip is 0.50. </a:t>
             </a:r>
             <a:r>
-              <a:rPr sz="1500" b="0" i="0">
+              <a:rPr sz="1300" b="0" i="0">
                 <a:solidFill>
                   <a:srgbClr val="9DA9B5"/>
                 </a:solidFill>
@@ -8350,7 +8433,7 @@
         <p:spPr>
           <a:xfrm>
             <a:off x="777240" y="1005840"/>
-            <a:ext cx="8229600" cy="1097280"/>
+            <a:ext cx="5852160" cy="1097280"/>
           </a:xfrm>
           <a:prstGeom prst="rect">
             <a:avLst/>
@@ -8397,8 +8480,8 @@
         </p:nvSpPr>
         <p:spPr>
           <a:xfrm>
-            <a:off x="777240" y="2194560"/>
-            <a:ext cx="10424160" cy="1097280"/>
+            <a:off x="777240" y="2148840"/>
+            <a:ext cx="5669280" cy="1280160"/>
           </a:xfrm>
           <a:prstGeom prst="rect">
             <a:avLst/>
@@ -8417,7 +8500,7 @@
               </a:lnSpc>
             </a:pPr>
             <a:r>
-              <a:rPr sz="1500" b="0" i="0">
+              <a:rPr sz="1400" b="0" i="0">
                 <a:solidFill>
                   <a:srgbClr val="9DA9B5"/>
                 </a:solidFill>
@@ -8426,7 +8509,7 @@
               <a:t>A </a:t>
             </a:r>
             <a:r>
-              <a:rPr sz="1500" b="1" i="0">
+              <a:rPr sz="1400" b="1" i="0">
                 <a:solidFill>
                   <a:srgbClr val="ECEFF3"/>
                 </a:solidFill>
@@ -8435,7 +8518,7 @@
               <a:t>non-vascular</a:t>
             </a:r>
             <a:r>
-              <a:rPr sz="1500" b="0" i="0">
+              <a:rPr sz="1400" b="0" i="0">
                 <a:solidFill>
                   <a:srgbClr val="9DA9B5"/>
                 </a:solidFill>
@@ -8444,7 +8527,7 @@
               <a:t> marker — calcification in the costal cartilage on chest CT (</a:t>
             </a:r>
             <a:r>
-              <a:rPr sz="1500" b="1" i="0">
+              <a:rPr sz="1400" b="1" i="0">
                 <a:solidFill>
                   <a:srgbClr val="ECEFF3"/>
                 </a:solidFill>
@@ -8453,266 +8536,61 @@
               <a:t>n=1,311</a:t>
             </a:r>
             <a:r>
-              <a:rPr sz="1500" b="0" i="0">
+              <a:rPr sz="1400" b="0" i="0">
                 <a:solidFill>
                   <a:srgbClr val="9DA9B5"/>
                 </a:solidFill>
                 <a:latin typeface="Arial"/>
               </a:rPr>
-              <a:t>). Correlated with BAC (ρ=0.089, p=0.001). </a:t>
-            </a:r>
-            <a:r>
-              <a:rPr sz="1500" b="1" i="0">
-                <a:solidFill>
-                  <a:srgbClr val="ECEFF3"/>
-                </a:solidFill>
-                <a:latin typeface="Arial"/>
-              </a:rPr>
-              <a:t>Vascular + valvular + skeletal — one free mammographic finding.</a:t>
-            </a:r>
-          </a:p>
-        </p:txBody>
-      </p:sp>
-      <p:graphicFrame>
-        <p:nvGraphicFramePr>
-          <p:cNvPr id="7" name="Table 6"/>
-          <p:cNvGraphicFramePr>
-            <a:graphicFrameLocks noGrp="1"/>
-          </p:cNvGraphicFramePr>
-          <p:nvPr/>
-        </p:nvGraphicFramePr>
-        <p:xfrm>
-          <a:off x="777240" y="3749039"/>
-          <a:ext cx="7772400" cy="987552"/>
-        </p:xfrm>
-        <a:graphic>
-          <a:graphicData uri="http://schemas.openxmlformats.org/drawingml/2006/table">
-            <a:tbl>
-              <a:tblPr firstRow="1" bandRow="1">
-                <a:tableStyleId>{5C22544A-7EE6-4342-B048-85BDC9FD1C3A}</a:tableStyleId>
-              </a:tblPr>
-              <a:tblGrid>
-                <a:gridCol w="3840480"/>
-                <a:gridCol w="1965960"/>
-                <a:gridCol w="1965960"/>
-              </a:tblGrid>
-              <a:tr h="329184">
-                <a:tc>
-                  <a:txBody>
-                    <a:bodyPr/>
-                    <a:lstStyle/>
-                    <a:p>
-                      <a:pPr algn="l"/>
-                      <a:r>
-                        <a:rPr sz="1300" b="1">
-                          <a:solidFill>
-                            <a:srgbClr val="E7AC51"/>
-                          </a:solidFill>
-                          <a:latin typeface="Arial"/>
-                        </a:rPr>
-                        <a:t>High BAC vs zero (ΔCCC)</a:t>
-                      </a:r>
-                    </a:p>
-                  </a:txBody>
-                  <a:tcPr anchor="ctr" marL="73152" marR="73152" marT="25400" marB="25400">
-                    <a:solidFill>
-                      <a:srgbClr val="0F141A"/>
-                    </a:solidFill>
-                  </a:tcPr>
-                </a:tc>
-                <a:tc>
-                  <a:txBody>
-                    <a:bodyPr/>
-                    <a:lstStyle/>
-                    <a:p>
-                      <a:pPr algn="ctr"/>
-                      <a:r>
-                        <a:rPr sz="1300" b="1">
-                          <a:solidFill>
-                            <a:srgbClr val="E7AC51"/>
-                          </a:solidFill>
-                          <a:latin typeface="Arial"/>
-                        </a:rPr>
-                        <a:t>adj. p</a:t>
-                      </a:r>
-                    </a:p>
-                  </a:txBody>
-                  <a:tcPr anchor="ctr" marL="73152" marR="73152" marT="25400" marB="25400">
-                    <a:solidFill>
-                      <a:srgbClr val="0F141A"/>
-                    </a:solidFill>
-                  </a:tcPr>
-                </a:tc>
-                <a:tc>
-                  <a:txBody>
-                    <a:bodyPr/>
-                    <a:lstStyle/>
-                    <a:p>
-                      <a:pPr algn="ctr"/>
-                      <a:r>
-                        <a:rPr sz="1300" b="1">
-                          <a:solidFill>
-                            <a:srgbClr val="E7AC51"/>
-                          </a:solidFill>
-                          <a:latin typeface="Arial"/>
-                        </a:rPr>
-                        <a:t>Δ</a:t>
-                      </a:r>
-                    </a:p>
-                  </a:txBody>
-                  <a:tcPr anchor="ctr" marL="73152" marR="73152" marT="25400" marB="25400">
-                    <a:solidFill>
-                      <a:srgbClr val="0F141A"/>
-                    </a:solidFill>
-                  </a:tcPr>
-                </a:tc>
-              </a:tr>
-              <a:tr h="329184">
-                <a:tc>
-                  <a:txBody>
-                    <a:bodyPr/>
-                    <a:lstStyle/>
-                    <a:p>
-                      <a:pPr algn="l"/>
-                      <a:r>
-                        <a:rPr sz="1300" b="0">
-                          <a:solidFill>
-                            <a:srgbClr val="ECEFF3"/>
-                          </a:solidFill>
-                          <a:latin typeface="Arial"/>
-                        </a:rPr>
-                        <a:t>Median (q0.50)</a:t>
-                      </a:r>
-                    </a:p>
-                  </a:txBody>
-                  <a:tcPr anchor="ctr" marL="73152" marR="73152" marT="25400" marB="25400">
-                    <a:solidFill>
-                      <a:srgbClr val="0F141A"/>
-                    </a:solidFill>
-                  </a:tcPr>
-                </a:tc>
-                <a:tc>
-                  <a:txBody>
-                    <a:bodyPr/>
-                    <a:lstStyle/>
-                    <a:p>
-                      <a:pPr algn="ctr"/>
-                      <a:r>
-                        <a:rPr sz="1300" b="0">
-                          <a:solidFill>
-                            <a:srgbClr val="9DA9B5"/>
-                          </a:solidFill>
-                          <a:latin typeface="Arial"/>
-                        </a:rPr>
-                        <a:t>0.47 (NS)</a:t>
-                      </a:r>
-                    </a:p>
-                  </a:txBody>
-                  <a:tcPr anchor="ctr" marL="73152" marR="73152" marT="25400" marB="25400">
-                    <a:solidFill>
-                      <a:srgbClr val="0F141A"/>
-                    </a:solidFill>
-                  </a:tcPr>
-                </a:tc>
-                <a:tc>
-                  <a:txBody>
-                    <a:bodyPr/>
-                    <a:lstStyle/>
-                    <a:p>
-                      <a:pPr algn="ctr"/>
-                      <a:r>
-                        <a:rPr sz="1300" b="0">
-                          <a:solidFill>
-                            <a:srgbClr val="9DA9B5"/>
-                          </a:solidFill>
-                          <a:latin typeface="Arial"/>
-                        </a:rPr>
-                        <a:t>—</a:t>
-                      </a:r>
-                    </a:p>
-                  </a:txBody>
-                  <a:tcPr anchor="ctr" marL="73152" marR="73152" marT="25400" marB="25400">
-                    <a:solidFill>
-                      <a:srgbClr val="0F141A"/>
-                    </a:solidFill>
-                  </a:tcPr>
-                </a:tc>
-              </a:tr>
-              <a:tr h="329184">
-                <a:tc>
-                  <a:txBody>
-                    <a:bodyPr/>
-                    <a:lstStyle/>
-                    <a:p>
-                      <a:pPr algn="l"/>
-                      <a:r>
-                        <a:rPr sz="1300" b="0">
-                          <a:solidFill>
-                            <a:srgbClr val="ECEFF3"/>
-                          </a:solidFill>
-                          <a:latin typeface="Arial"/>
-                        </a:rPr>
-                        <a:t>75th pct (q0.75)</a:t>
-                      </a:r>
-                    </a:p>
-                  </a:txBody>
-                  <a:tcPr anchor="ctr" marL="73152" marR="73152" marT="25400" marB="25400">
-                    <a:solidFill>
-                      <a:srgbClr val="0F141A"/>
-                    </a:solidFill>
-                  </a:tcPr>
-                </a:tc>
-                <a:tc>
-                  <a:txBody>
-                    <a:bodyPr/>
-                    <a:lstStyle/>
-                    <a:p>
-                      <a:pPr algn="ctr"/>
-                      <a:r>
-                        <a:rPr sz="1300" b="0">
-                          <a:solidFill>
-                            <a:srgbClr val="9DA9B5"/>
-                          </a:solidFill>
-                          <a:latin typeface="Arial"/>
-                        </a:rPr>
-                        <a:t>&lt;0.001</a:t>
-                      </a:r>
-                    </a:p>
-                  </a:txBody>
-                  <a:tcPr anchor="ctr" marL="73152" marR="73152" marT="25400" marB="25400">
-                    <a:solidFill>
-                      <a:srgbClr val="0F141A"/>
-                    </a:solidFill>
-                  </a:tcPr>
-                </a:tc>
-                <a:tc>
-                  <a:txBody>
-                    <a:bodyPr/>
-                    <a:lstStyle/>
-                    <a:p>
-                      <a:pPr algn="ctr"/>
-                      <a:r>
-                        <a:rPr sz="1300" b="0">
-                          <a:solidFill>
-                            <a:srgbClr val="9DA9B5"/>
-                          </a:solidFill>
-                          <a:latin typeface="Arial"/>
-                        </a:rPr>
-                        <a:t>+3,408 mm³</a:t>
-                      </a:r>
-                    </a:p>
-                  </a:txBody>
-                  <a:tcPr anchor="ctr" marL="73152" marR="73152" marT="25400" marB="25400">
-                    <a:solidFill>
-                      <a:srgbClr val="0F141A"/>
-                    </a:solidFill>
-                  </a:tcPr>
-                </a:tc>
-              </a:tr>
-            </a:tbl>
-          </a:graphicData>
-        </a:graphic>
-      </p:graphicFrame>
+              <a:t>). Correlated with BAC (ρ=0.089, p=0.001).</a:t>
+            </a:r>
+          </a:p>
+        </p:txBody>
+      </p:sp>
+      <p:sp>
+        <p:nvSpPr>
+          <p:cNvPr id="7" name="Rectangle 6"/>
+          <p:cNvSpPr/>
+          <p:nvPr/>
+        </p:nvSpPr>
+        <p:spPr>
+          <a:xfrm>
+            <a:off x="777240" y="3611880"/>
+            <a:ext cx="5120640" cy="457200"/>
+          </a:xfrm>
+          <a:prstGeom prst="rect">
+            <a:avLst/>
+          </a:prstGeom>
+          <a:solidFill>
+            <a:srgbClr val="1B232D"/>
+          </a:solidFill>
+          <a:ln>
+            <a:noFill/>
+          </a:ln>
+          <a:effectLst/>
+        </p:spPr>
+        <p:style>
+          <a:lnRef idx="1">
+            <a:schemeClr val="accent1"/>
+          </a:lnRef>
+          <a:fillRef idx="3">
+            <a:schemeClr val="accent1"/>
+          </a:fillRef>
+          <a:effectRef idx="2">
+            <a:schemeClr val="accent1"/>
+          </a:effectRef>
+          <a:fontRef idx="minor">
+            <a:schemeClr val="lt1"/>
+          </a:fontRef>
+        </p:style>
+        <p:txBody>
+          <a:bodyPr rtlCol="0" anchor="ctr"/>
+          <a:lstStyle/>
+          <a:p>
+            <a:pPr algn="ctr"/>
+          </a:p>
+        </p:txBody>
+      </p:sp>
       <p:sp>
         <p:nvSpPr>
           <p:cNvPr id="8" name="TextBox 7"/>
@@ -8721,8 +8599,378 @@
         </p:nvSpPr>
         <p:spPr>
           <a:xfrm>
-            <a:off x="777240" y="5486400"/>
-            <a:ext cx="10607040" cy="457200"/>
+            <a:off x="886968" y="3611880"/>
+            <a:ext cx="3566160" cy="457200"/>
+          </a:xfrm>
+          <a:prstGeom prst="rect">
+            <a:avLst/>
+          </a:prstGeom>
+          <a:noFill/>
+        </p:spPr>
+        <p:txBody>
+          <a:bodyPr wrap="square" anchor="ctr" lIns="0" rIns="0" tIns="0" bIns="0">
+            <a:spAutoFit/>
+          </a:bodyPr>
+          <a:lstStyle/>
+          <a:p>
+            <a:pPr algn="l">
+              <a:lnSpc>
+                <a:spcPct val="100000"/>
+              </a:lnSpc>
+            </a:pPr>
+            <a:r>
+              <a:rPr sz="1000" b="0" i="0">
+                <a:solidFill>
+                  <a:srgbClr val="9DA9B5"/>
+                </a:solidFill>
+                <a:latin typeface="Consolas"/>
+              </a:rPr>
+              <a:t>HIGH BAC VS ZERO (ΔCCC)</a:t>
+            </a:r>
+          </a:p>
+        </p:txBody>
+      </p:sp>
+      <p:sp>
+        <p:nvSpPr>
+          <p:cNvPr id="9" name="TextBox 8"/>
+          <p:cNvSpPr txBox="1"/>
+          <p:nvPr/>
+        </p:nvSpPr>
+        <p:spPr>
+          <a:xfrm>
+            <a:off x="4343400" y="3611880"/>
+            <a:ext cx="1444751" cy="457200"/>
+          </a:xfrm>
+          <a:prstGeom prst="rect">
+            <a:avLst/>
+          </a:prstGeom>
+          <a:noFill/>
+        </p:spPr>
+        <p:txBody>
+          <a:bodyPr wrap="square" anchor="ctr" lIns="0" rIns="0" tIns="0" bIns="0">
+            <a:spAutoFit/>
+          </a:bodyPr>
+          <a:lstStyle/>
+          <a:p>
+            <a:pPr algn="r">
+              <a:lnSpc>
+                <a:spcPct val="100000"/>
+              </a:lnSpc>
+            </a:pPr>
+            <a:r>
+              <a:rPr sz="1000" b="0" i="0">
+                <a:solidFill>
+                  <a:srgbClr val="9DA9B5"/>
+                </a:solidFill>
+                <a:latin typeface="Consolas"/>
+              </a:rPr>
+              <a:t>ADJ. P</a:t>
+            </a:r>
+          </a:p>
+        </p:txBody>
+      </p:sp>
+      <p:sp>
+        <p:nvSpPr>
+          <p:cNvPr id="10" name="TextBox 9"/>
+          <p:cNvSpPr txBox="1"/>
+          <p:nvPr/>
+        </p:nvSpPr>
+        <p:spPr>
+          <a:xfrm>
+            <a:off x="886968" y="4069080"/>
+            <a:ext cx="3566160" cy="457200"/>
+          </a:xfrm>
+          <a:prstGeom prst="rect">
+            <a:avLst/>
+          </a:prstGeom>
+          <a:noFill/>
+        </p:spPr>
+        <p:txBody>
+          <a:bodyPr wrap="square" anchor="ctr" lIns="0" rIns="0" tIns="0" bIns="0">
+            <a:spAutoFit/>
+          </a:bodyPr>
+          <a:lstStyle/>
+          <a:p>
+            <a:pPr algn="l">
+              <a:lnSpc>
+                <a:spcPct val="100000"/>
+              </a:lnSpc>
+            </a:pPr>
+            <a:r>
+              <a:rPr sz="1300" b="0" i="0">
+                <a:solidFill>
+                  <a:srgbClr val="9DA9B5"/>
+                </a:solidFill>
+                <a:latin typeface="Arial"/>
+              </a:rPr>
+              <a:t>Median (q0.50)</a:t>
+            </a:r>
+          </a:p>
+        </p:txBody>
+      </p:sp>
+      <p:sp>
+        <p:nvSpPr>
+          <p:cNvPr id="11" name="TextBox 10"/>
+          <p:cNvSpPr txBox="1"/>
+          <p:nvPr/>
+        </p:nvSpPr>
+        <p:spPr>
+          <a:xfrm>
+            <a:off x="4343400" y="4069080"/>
+            <a:ext cx="1444751" cy="457200"/>
+          </a:xfrm>
+          <a:prstGeom prst="rect">
+            <a:avLst/>
+          </a:prstGeom>
+          <a:noFill/>
+        </p:spPr>
+        <p:txBody>
+          <a:bodyPr wrap="square" anchor="ctr" lIns="0" rIns="0" tIns="0" bIns="0">
+            <a:spAutoFit/>
+          </a:bodyPr>
+          <a:lstStyle/>
+          <a:p>
+            <a:pPr algn="r">
+              <a:lnSpc>
+                <a:spcPct val="100000"/>
+              </a:lnSpc>
+            </a:pPr>
+            <a:r>
+              <a:rPr sz="1300" b="0" i="0">
+                <a:solidFill>
+                  <a:srgbClr val="9DA9B5"/>
+                </a:solidFill>
+                <a:latin typeface="Arial"/>
+              </a:rPr>
+              <a:t>NS · 0.47</a:t>
+            </a:r>
+          </a:p>
+        </p:txBody>
+      </p:sp>
+      <p:sp>
+        <p:nvSpPr>
+          <p:cNvPr id="12" name="Rectangle 11"/>
+          <p:cNvSpPr/>
+          <p:nvPr/>
+        </p:nvSpPr>
+        <p:spPr>
+          <a:xfrm>
+            <a:off x="777240" y="4526280"/>
+            <a:ext cx="5120640" cy="457200"/>
+          </a:xfrm>
+          <a:prstGeom prst="rect">
+            <a:avLst/>
+          </a:prstGeom>
+          <a:solidFill>
+            <a:srgbClr val="222C37"/>
+          </a:solidFill>
+          <a:ln>
+            <a:noFill/>
+          </a:ln>
+          <a:effectLst/>
+        </p:spPr>
+        <p:style>
+          <a:lnRef idx="1">
+            <a:schemeClr val="accent1"/>
+          </a:lnRef>
+          <a:fillRef idx="3">
+            <a:schemeClr val="accent1"/>
+          </a:fillRef>
+          <a:effectRef idx="2">
+            <a:schemeClr val="accent1"/>
+          </a:effectRef>
+          <a:fontRef idx="minor">
+            <a:schemeClr val="lt1"/>
+          </a:fontRef>
+        </p:style>
+        <p:txBody>
+          <a:bodyPr rtlCol="0" anchor="ctr"/>
+          <a:lstStyle/>
+          <a:p>
+            <a:pPr algn="ctr"/>
+          </a:p>
+        </p:txBody>
+      </p:sp>
+      <p:sp>
+        <p:nvSpPr>
+          <p:cNvPr id="13" name="TextBox 12"/>
+          <p:cNvSpPr txBox="1"/>
+          <p:nvPr/>
+        </p:nvSpPr>
+        <p:spPr>
+          <a:xfrm>
+            <a:off x="886968" y="4526280"/>
+            <a:ext cx="3566160" cy="457200"/>
+          </a:xfrm>
+          <a:prstGeom prst="rect">
+            <a:avLst/>
+          </a:prstGeom>
+          <a:noFill/>
+        </p:spPr>
+        <p:txBody>
+          <a:bodyPr wrap="square" anchor="ctr" lIns="0" rIns="0" tIns="0" bIns="0">
+            <a:spAutoFit/>
+          </a:bodyPr>
+          <a:lstStyle/>
+          <a:p>
+            <a:pPr algn="l">
+              <a:lnSpc>
+                <a:spcPct val="100000"/>
+              </a:lnSpc>
+            </a:pPr>
+            <a:r>
+              <a:rPr sz="1300" b="1" i="0">
+                <a:solidFill>
+                  <a:srgbClr val="ECEFF3"/>
+                </a:solidFill>
+                <a:latin typeface="Arial"/>
+              </a:rPr>
+              <a:t>75th pct (q0.75)  </a:t>
+            </a:r>
+            <a:r>
+              <a:rPr sz="1300" b="1" i="0">
+                <a:solidFill>
+                  <a:srgbClr val="E7AC51"/>
+                </a:solidFill>
+                <a:latin typeface="Arial"/>
+              </a:rPr>
+              <a:t>+3,408 mm³</a:t>
+            </a:r>
+          </a:p>
+        </p:txBody>
+      </p:sp>
+      <p:sp>
+        <p:nvSpPr>
+          <p:cNvPr id="14" name="TextBox 13"/>
+          <p:cNvSpPr txBox="1"/>
+          <p:nvPr/>
+        </p:nvSpPr>
+        <p:spPr>
+          <a:xfrm>
+            <a:off x="4343400" y="4526280"/>
+            <a:ext cx="1444751" cy="457200"/>
+          </a:xfrm>
+          <a:prstGeom prst="rect">
+            <a:avLst/>
+          </a:prstGeom>
+          <a:noFill/>
+        </p:spPr>
+        <p:txBody>
+          <a:bodyPr wrap="square" anchor="ctr" lIns="0" rIns="0" tIns="0" bIns="0">
+            <a:spAutoFit/>
+          </a:bodyPr>
+          <a:lstStyle/>
+          <a:p>
+            <a:pPr algn="r">
+              <a:lnSpc>
+                <a:spcPct val="100000"/>
+              </a:lnSpc>
+            </a:pPr>
+            <a:r>
+              <a:rPr sz="1300" b="1" i="0">
+                <a:solidFill>
+                  <a:srgbClr val="ECEFF3"/>
+                </a:solidFill>
+                <a:latin typeface="Arial"/>
+              </a:rPr>
+              <a:t>&lt;0.001</a:t>
+            </a:r>
+          </a:p>
+        </p:txBody>
+      </p:sp>
+      <p:sp>
+        <p:nvSpPr>
+          <p:cNvPr id="15" name="Rectangle 14"/>
+          <p:cNvSpPr/>
+          <p:nvPr/>
+        </p:nvSpPr>
+        <p:spPr>
+          <a:xfrm>
+            <a:off x="777240" y="5212080"/>
+            <a:ext cx="27432" cy="640080"/>
+          </a:xfrm>
+          <a:prstGeom prst="rect">
+            <a:avLst/>
+          </a:prstGeom>
+          <a:solidFill>
+            <a:srgbClr val="E7AC51"/>
+          </a:solidFill>
+          <a:ln>
+            <a:noFill/>
+          </a:ln>
+          <a:effectLst/>
+        </p:spPr>
+        <p:style>
+          <a:lnRef idx="1">
+            <a:schemeClr val="accent1"/>
+          </a:lnRef>
+          <a:fillRef idx="3">
+            <a:schemeClr val="accent1"/>
+          </a:fillRef>
+          <a:effectRef idx="2">
+            <a:schemeClr val="accent1"/>
+          </a:effectRef>
+          <a:fontRef idx="minor">
+            <a:schemeClr val="lt1"/>
+          </a:fontRef>
+        </p:style>
+        <p:txBody>
+          <a:bodyPr rtlCol="0" anchor="ctr"/>
+          <a:lstStyle/>
+          <a:p>
+            <a:pPr algn="ctr"/>
+          </a:p>
+        </p:txBody>
+      </p:sp>
+      <p:sp>
+        <p:nvSpPr>
+          <p:cNvPr id="16" name="TextBox 15"/>
+          <p:cNvSpPr txBox="1"/>
+          <p:nvPr/>
+        </p:nvSpPr>
+        <p:spPr>
+          <a:xfrm>
+            <a:off x="960120" y="5212080"/>
+            <a:ext cx="5486400" cy="640080"/>
+          </a:xfrm>
+          <a:prstGeom prst="rect">
+            <a:avLst/>
+          </a:prstGeom>
+          <a:noFill/>
+        </p:spPr>
+        <p:txBody>
+          <a:bodyPr wrap="square" anchor="t" lIns="0" rIns="0" tIns="0" bIns="0">
+            <a:spAutoFit/>
+          </a:bodyPr>
+          <a:lstStyle/>
+          <a:p>
+            <a:pPr algn="l">
+              <a:lnSpc>
+                <a:spcPct val="135000"/>
+              </a:lnSpc>
+            </a:pPr>
+            <a:r>
+              <a:rPr sz="1350" b="0" i="0">
+                <a:solidFill>
+                  <a:srgbClr val="ECEFF3"/>
+                </a:solidFill>
+                <a:latin typeface="Arial"/>
+              </a:rPr>
+              <a:t>Vascular + valvular + skeletal — one free mammographic finding.</a:t>
+            </a:r>
+          </a:p>
+        </p:txBody>
+      </p:sp>
+      <p:sp>
+        <p:nvSpPr>
+          <p:cNvPr id="17" name="TextBox 16"/>
+          <p:cNvSpPr txBox="1"/>
+          <p:nvPr/>
+        </p:nvSpPr>
+        <p:spPr>
+          <a:xfrm>
+            <a:off x="777240" y="5989320"/>
+            <a:ext cx="5852160" cy="457200"/>
           </a:xfrm>
           <a:prstGeom prst="rect">
             <a:avLst/>
@@ -8748,6 +8996,122 @@
                 <a:latin typeface="Consolas"/>
               </a:rPr>
               <a:t>[your group], RSNA 2026 abstract (BAC–CCC) · quantile regression, adj. age + DM.</a:t>
+            </a:r>
+          </a:p>
+        </p:txBody>
+      </p:sp>
+      <p:sp>
+        <p:nvSpPr>
+          <p:cNvPr id="18" name="Rounded Rectangle 17"/>
+          <p:cNvSpPr/>
+          <p:nvPr/>
+        </p:nvSpPr>
+        <p:spPr>
+          <a:xfrm>
+            <a:off x="6858000" y="1188720"/>
+            <a:ext cx="4846320" cy="4572000"/>
+          </a:xfrm>
+          <a:prstGeom prst="roundRect">
+            <a:avLst/>
+          </a:prstGeom>
+          <a:noFill/>
+          <a:ln w="12700">
+            <a:solidFill>
+              <a:srgbClr val="C98A2E"/>
+            </a:solidFill>
+            <a:prstDash val="dash"/>
+          </a:ln>
+          <a:effectLst/>
+        </p:spPr>
+        <p:style>
+          <a:lnRef idx="1">
+            <a:schemeClr val="accent1"/>
+          </a:lnRef>
+          <a:fillRef idx="3">
+            <a:schemeClr val="accent1"/>
+          </a:fillRef>
+          <a:effectRef idx="2">
+            <a:schemeClr val="accent1"/>
+          </a:effectRef>
+          <a:fontRef idx="minor">
+            <a:schemeClr val="lt1"/>
+          </a:fontRef>
+        </p:style>
+        <p:txBody>
+          <a:bodyPr rtlCol="0" anchor="ctr" wrap="square"/>
+          <a:lstStyle/>
+          <a:p>
+            <a:pPr algn="ctr">
+              <a:lnSpc>
+                <a:spcPct val="100000"/>
+              </a:lnSpc>
+            </a:pPr>
+            <a:r>
+              <a:rPr sz="1100" b="0" i="0">
+                <a:solidFill>
+                  <a:srgbClr val="E7AC51"/>
+                </a:solidFill>
+                <a:latin typeface="Consolas"/>
+              </a:rPr>
+              <a:t>COSTOCHONDRAL CALCIFICATION</a:t>
+            </a:r>
+          </a:p>
+          <a:p>
+            <a:pPr algn="ctr">
+              <a:lnSpc>
+                <a:spcPct val="100000"/>
+              </a:lnSpc>
+              <a:spcBef>
+                <a:spcPts val="300"/>
+              </a:spcBef>
+            </a:pPr>
+            <a:r>
+              <a:rPr sz="900" b="0" i="0">
+                <a:solidFill>
+                  <a:srgbClr val="5C6975"/>
+                </a:solidFill>
+                <a:latin typeface="Consolas"/>
+              </a:rPr>
+              <a:t>[ drop in — confirm reuse rights ]</a:t>
+            </a:r>
+          </a:p>
+        </p:txBody>
+      </p:sp>
+      <p:sp>
+        <p:nvSpPr>
+          <p:cNvPr id="19" name="TextBox 18"/>
+          <p:cNvSpPr txBox="1"/>
+          <p:nvPr/>
+        </p:nvSpPr>
+        <p:spPr>
+          <a:xfrm>
+            <a:off x="6858000" y="5852160"/>
+            <a:ext cx="4846320" cy="274320"/>
+          </a:xfrm>
+          <a:prstGeom prst="rect">
+            <a:avLst/>
+          </a:prstGeom>
+          <a:noFill/>
+        </p:spPr>
+        <p:txBody>
+          <a:bodyPr wrap="square" anchor="t" lIns="0" rIns="0" tIns="0" bIns="0">
+            <a:spAutoFit/>
+          </a:bodyPr>
+          <a:lstStyle/>
+          <a:p>
+            <a:pPr algn="ctr">
+              <a:lnSpc>
+                <a:spcPct val="100000"/>
+              </a:lnSpc>
+            </a:pPr>
+            <a:r>
+              <a:rPr sz="900" b="0" i="0">
+                <a:solidFill>
+                  <a:srgbClr val="5C6975"/>
+                </a:solidFill>
+                <a:latin typeface="Consolas"/>
+              </a:rPr>
+              <a:t>Illustrative. Source: Sarıyıldız et al., via ResearchGate.</a:t>
             </a:r>
           </a:p>
         </p:txBody>
@@ -9267,7 +9631,7 @@
         </p:nvSpPr>
         <p:spPr>
           <a:xfrm>
-            <a:off x="777240" y="1005840"/>
+            <a:off x="777240" y="960120"/>
             <a:ext cx="10607040" cy="1280160"/>
           </a:xfrm>
           <a:prstGeom prst="rect">
@@ -9287,7 +9651,7 @@
               </a:lnSpc>
             </a:pPr>
             <a:r>
-              <a:rPr sz="2800" b="1" i="0">
+              <a:rPr sz="2700" b="1" i="0">
                 <a:solidFill>
                   <a:srgbClr val="ECEFF3"/>
                 </a:solidFill>
@@ -9296,7 +9660,7 @@
               <a:t>2026: two prospective studies show </a:t>
             </a:r>
             <a:r>
-              <a:rPr sz="2800" b="1" i="0">
+              <a:rPr sz="2700" b="1" i="0">
                 <a:solidFill>
                   <a:srgbClr val="E7AC51"/>
                 </a:solidFill>
@@ -9316,7 +9680,7 @@
         <p:spPr>
           <a:xfrm>
             <a:off x="777240" y="2148840"/>
-            <a:ext cx="5212080" cy="2743200"/>
+            <a:ext cx="5212080" cy="2331720"/>
           </a:xfrm>
           <a:prstGeom prst="roundRect">
             <a:avLst/>
@@ -9324,9 +9688,9 @@
           <a:solidFill>
             <a:srgbClr val="1B232D"/>
           </a:solidFill>
-          <a:ln w="13970">
+          <a:ln w="9525">
             <a:solidFill>
-              <a:srgbClr val="C98A2E"/>
+              <a:srgbClr val="2A333D"/>
             </a:solidFill>
           </a:ln>
           <a:effectLst/>
@@ -9346,7 +9710,7 @@
           </a:fontRef>
         </p:style>
         <p:txBody>
-          <a:bodyPr rtlCol="0" anchor="ctr" wrap="square" lIns="256032" rIns="219456" tIns="201168"/>
+          <a:bodyPr rtlCol="0" anchor="ctr" wrap="square" lIns="274320" rIns="219456" tIns="182880"/>
           <a:lstStyle/>
           <a:p>
             <a:pPr algn="l">
@@ -9355,13 +9719,41 @@
               </a:lnSpc>
             </a:pPr>
             <a:r>
-              <a:rPr sz="1200" b="1" i="0">
-                <a:solidFill>
-                  <a:srgbClr val="E7AC51"/>
+              <a:rPr sz="1100" b="0" i="0">
+                <a:solidFill>
+                  <a:srgbClr val="5FB7C9"/>
                 </a:solidFill>
                 <a:latin typeface="Consolas"/>
               </a:rPr>
               <a:t>MASAI · SWEDEN · RCT (~105,000)</a:t>
+            </a:r>
+          </a:p>
+          <a:p>
+            <a:pPr algn="l">
+              <a:lnSpc>
+                <a:spcPct val="118000"/>
+              </a:lnSpc>
+              <a:spcBef>
+                <a:spcPts val="800"/>
+              </a:spcBef>
+            </a:pPr>
+            <a:r>
+              <a:rPr sz="1600" b="1" i="0">
+                <a:solidFill>
+                  <a:srgbClr val="ECEFF3"/>
+                </a:solidFill>
+                <a:latin typeface="Arial"/>
+              </a:rPr>
+              <a:t>Interval cancers non-inferior</a:t>
+            </a:r>
+            <a:r>
+              <a:rPr sz="1600" b="0" i="0">
+                <a:solidFill>
+                  <a:srgbClr val="5C6975"/>
+                </a:solidFill>
+                <a:latin typeface="Arial"/>
+              </a:rPr>
+              <a:t> (ratio 0.88)</a:t>
             </a:r>
           </a:p>
           <a:p>
@@ -9370,35 +9762,203 @@
                 <a:spcPct val="130000"/>
               </a:lnSpc>
               <a:spcBef>
+                <a:spcPts val="700"/>
+              </a:spcBef>
+            </a:pPr>
+            <a:r>
+              <a:rPr sz="1300" b="0" i="0">
+                <a:solidFill>
+                  <a:srgbClr val="9DA9B5"/>
+                </a:solidFill>
+                <a:latin typeface="Arial"/>
+              </a:rPr>
+              <a:t>Sensitivity </a:t>
+            </a:r>
+            <a:r>
+              <a:rPr sz="1300" b="1" i="0">
+                <a:solidFill>
+                  <a:srgbClr val="ECEFF3"/>
+                </a:solidFill>
+                <a:latin typeface="Arial"/>
+              </a:rPr>
+              <a:t>80.5%</a:t>
+            </a:r>
+            <a:r>
+              <a:rPr sz="1300" b="0" i="0">
+                <a:solidFill>
+                  <a:srgbClr val="9DA9B5"/>
+                </a:solidFill>
+                <a:latin typeface="Arial"/>
+              </a:rPr>
+              <a:t> vs 73.8% at matched specificity · </a:t>
+            </a:r>
+            <a:r>
+              <a:rPr sz="1300" b="1" i="0">
+                <a:solidFill>
+                  <a:srgbClr val="ECEFF3"/>
+                </a:solidFill>
+                <a:latin typeface="Arial"/>
+              </a:rPr>
+              <a:t>~44%</a:t>
+            </a:r>
+            <a:r>
+              <a:rPr sz="1300" b="0" i="0">
+                <a:solidFill>
+                  <a:srgbClr val="9DA9B5"/>
+                </a:solidFill>
+                <a:latin typeface="Arial"/>
+              </a:rPr>
+              <a:t> less reading workload.</a:t>
+            </a:r>
+          </a:p>
+          <a:p>
+            <a:pPr algn="l">
+              <a:lnSpc>
+                <a:spcPct val="100000"/>
+              </a:lnSpc>
+              <a:spcBef>
+                <a:spcPts val="900"/>
+              </a:spcBef>
+            </a:pPr>
+            <a:r>
+              <a:rPr sz="900" b="0" i="0">
+                <a:solidFill>
+                  <a:srgbClr val="5C6975"/>
+                </a:solidFill>
+                <a:latin typeface="Consolas"/>
+              </a:rPr>
+              <a:t>Gommers/Lång et al., Lancet 2026;407:505–514</a:t>
+            </a:r>
+          </a:p>
+        </p:txBody>
+      </p:sp>
+      <p:sp>
+        <p:nvSpPr>
+          <p:cNvPr id="7" name="Rectangle 6"/>
+          <p:cNvSpPr/>
+          <p:nvPr/>
+        </p:nvSpPr>
+        <p:spPr>
+          <a:xfrm>
+            <a:off x="777240" y="2148840"/>
+            <a:ext cx="45720" cy="2331720"/>
+          </a:xfrm>
+          <a:prstGeom prst="rect">
+            <a:avLst/>
+          </a:prstGeom>
+          <a:solidFill>
+            <a:srgbClr val="5FB7C9"/>
+          </a:solidFill>
+          <a:ln>
+            <a:noFill/>
+          </a:ln>
+          <a:effectLst/>
+        </p:spPr>
+        <p:style>
+          <a:lnRef idx="1">
+            <a:schemeClr val="accent1"/>
+          </a:lnRef>
+          <a:fillRef idx="3">
+            <a:schemeClr val="accent1"/>
+          </a:fillRef>
+          <a:effectRef idx="2">
+            <a:schemeClr val="accent1"/>
+          </a:effectRef>
+          <a:fontRef idx="minor">
+            <a:schemeClr val="lt1"/>
+          </a:fontRef>
+        </p:style>
+        <p:txBody>
+          <a:bodyPr rtlCol="0" anchor="ctr"/>
+          <a:lstStyle/>
+          <a:p>
+            <a:pPr algn="ctr"/>
+          </a:p>
+        </p:txBody>
+      </p:sp>
+      <p:sp>
+        <p:nvSpPr>
+          <p:cNvPr id="8" name="Rounded Rectangle 7"/>
+          <p:cNvSpPr/>
+          <p:nvPr/>
+        </p:nvSpPr>
+        <p:spPr>
+          <a:xfrm>
+            <a:off x="6172200" y="2148840"/>
+            <a:ext cx="5212080" cy="2331720"/>
+          </a:xfrm>
+          <a:prstGeom prst="roundRect">
+            <a:avLst/>
+          </a:prstGeom>
+          <a:solidFill>
+            <a:srgbClr val="1B232D"/>
+          </a:solidFill>
+          <a:ln w="9525">
+            <a:solidFill>
+              <a:srgbClr val="2A333D"/>
+            </a:solidFill>
+          </a:ln>
+          <a:effectLst/>
+        </p:spPr>
+        <p:style>
+          <a:lnRef idx="1">
+            <a:schemeClr val="accent1"/>
+          </a:lnRef>
+          <a:fillRef idx="3">
+            <a:schemeClr val="accent1"/>
+          </a:fillRef>
+          <a:effectRef idx="2">
+            <a:schemeClr val="accent1"/>
+          </a:effectRef>
+          <a:fontRef idx="minor">
+            <a:schemeClr val="lt1"/>
+          </a:fontRef>
+        </p:style>
+        <p:txBody>
+          <a:bodyPr rtlCol="0" anchor="ctr" wrap="square" lIns="274320" rIns="219456" tIns="182880"/>
+          <a:lstStyle/>
+          <a:p>
+            <a:pPr algn="l">
+              <a:lnSpc>
+                <a:spcPct val="100000"/>
+              </a:lnSpc>
+            </a:pPr>
+            <a:r>
+              <a:rPr sz="1100" b="0" i="0">
+                <a:solidFill>
+                  <a:srgbClr val="5FB7C9"/>
+                </a:solidFill>
+                <a:latin typeface="Consolas"/>
+              </a:rPr>
+              <a:t>PRAIM · GERMANY · REAL-WORLD (463,000)</a:t>
+            </a:r>
+          </a:p>
+          <a:p>
+            <a:pPr algn="l">
+              <a:lnSpc>
+                <a:spcPct val="118000"/>
+              </a:lnSpc>
+              <a:spcBef>
                 <a:spcPts val="800"/>
               </a:spcBef>
             </a:pPr>
             <a:r>
-              <a:rPr sz="1400" b="0" i="0">
-                <a:solidFill>
-                  <a:srgbClr val="9DA9B5"/>
-                </a:solidFill>
-                <a:latin typeface="Arial"/>
-              </a:rPr>
-              <a:t>Interval cancers </a:t>
-            </a:r>
-            <a:r>
-              <a:rPr sz="1400" b="1" i="0">
+              <a:rPr sz="1600" b="1" i="0">
+                <a:solidFill>
+                  <a:srgbClr val="E7AC51"/>
+                </a:solidFill>
+                <a:latin typeface="Arial"/>
+              </a:rPr>
+              <a:t>+17.6%</a:t>
+            </a:r>
+            <a:r>
+              <a:rPr sz="1600" b="1" i="0">
                 <a:solidFill>
                   <a:srgbClr val="ECEFF3"/>
                 </a:solidFill>
                 <a:latin typeface="Arial"/>
               </a:rPr>
-              <a:t>non-inferior</a:t>
-            </a:r>
-            <a:r>
-              <a:rPr sz="1400" b="0" i="0">
-                <a:solidFill>
-                  <a:srgbClr val="9DA9B5"/>
-                </a:solidFill>
-                <a:latin typeface="Arial"/>
-              </a:rPr>
-              <a:t> (ratio 0.88)</a:t>
+              <a:t> cancers detected</a:t>
             </a:r>
           </a:p>
           <a:p>
@@ -9407,63 +9967,35 @@
                 <a:spcPct val="130000"/>
               </a:lnSpc>
               <a:spcBef>
-                <a:spcPts val="800"/>
+                <a:spcPts val="700"/>
               </a:spcBef>
             </a:pPr>
             <a:r>
-              <a:rPr sz="1400" b="0" i="0">
+              <a:rPr sz="1300" b="0" i="0">
                 <a:solidFill>
                   <a:srgbClr val="9DA9B5"/>
                 </a:solidFill>
                 <a:latin typeface="Arial"/>
               </a:rPr>
-              <a:t>Sensitivity </a:t>
-            </a:r>
-            <a:r>
-              <a:rPr sz="1400" b="1" i="0">
-                <a:solidFill>
-                  <a:srgbClr val="E7AC51"/>
-                </a:solidFill>
-                <a:latin typeface="Arial"/>
-              </a:rPr>
-              <a:t>80.5%</a:t>
-            </a:r>
-            <a:r>
-              <a:rPr sz="1400" b="0" i="0">
+              <a:t>Recall </a:t>
+            </a:r>
+            <a:r>
+              <a:rPr sz="1300" b="1" i="0">
+                <a:solidFill>
+                  <a:srgbClr val="ECEFF3"/>
+                </a:solidFill>
+                <a:latin typeface="Arial"/>
+              </a:rPr>
+              <a:t>non-inferior</a:t>
+            </a:r>
+            <a:r>
+              <a:rPr sz="1300" b="0" i="0">
                 <a:solidFill>
                   <a:srgbClr val="9DA9B5"/>
                 </a:solidFill>
                 <a:latin typeface="Arial"/>
               </a:rPr>
-              <a:t> vs 73.8% at matched specificity</a:t>
-            </a:r>
-          </a:p>
-          <a:p>
-            <a:pPr algn="l">
-              <a:lnSpc>
-                <a:spcPct val="130000"/>
-              </a:lnSpc>
-              <a:spcBef>
-                <a:spcPts val="800"/>
-              </a:spcBef>
-            </a:pPr>
-            <a:r>
-              <a:rPr sz="1400" b="1" i="0">
-                <a:solidFill>
-                  <a:srgbClr val="E7AC51"/>
-                </a:solidFill>
-                <a:latin typeface="Arial"/>
-              </a:rPr>
-              <a:t>~44%</a:t>
-            </a:r>
-            <a:r>
-              <a:rPr sz="1400" b="0" i="0">
-                <a:solidFill>
-                  <a:srgbClr val="9DA9B5"/>
-                </a:solidFill>
-                <a:latin typeface="Arial"/>
-              </a:rPr>
-              <a:t> less reading workload</a:t>
+              <a:t> · 6.7 vs 5.7 CDR / 1,000 · 12 sites, 119 radiologists.</a:t>
             </a:r>
           </a:p>
           <a:p>
@@ -9472,42 +10004,40 @@
                 <a:spcPct val="100000"/>
               </a:lnSpc>
               <a:spcBef>
-                <a:spcPts val="1000"/>
+                <a:spcPts val="900"/>
               </a:spcBef>
             </a:pPr>
             <a:r>
-              <a:rPr sz="950" b="0" i="0">
+              <a:rPr sz="900" b="0" i="0">
                 <a:solidFill>
                   <a:srgbClr val="5C6975"/>
                 </a:solidFill>
                 <a:latin typeface="Consolas"/>
               </a:rPr>
-              <a:t>Gommers/Lång et al., Lancet 2026;407:505–514</a:t>
-            </a:r>
-          </a:p>
-        </p:txBody>
-      </p:sp>
-      <p:sp>
-        <p:nvSpPr>
-          <p:cNvPr id="7" name="Rounded Rectangle 6"/>
+              <a:t>Eisemann et al., Nature Medicine 2025</a:t>
+            </a:r>
+          </a:p>
+        </p:txBody>
+      </p:sp>
+      <p:sp>
+        <p:nvSpPr>
+          <p:cNvPr id="9" name="Rectangle 8"/>
           <p:cNvSpPr/>
           <p:nvPr/>
         </p:nvSpPr>
         <p:spPr>
           <a:xfrm>
             <a:off x="6172200" y="2148840"/>
-            <a:ext cx="5212080" cy="2743200"/>
-          </a:xfrm>
-          <a:prstGeom prst="roundRect">
+            <a:ext cx="45720" cy="2331720"/>
+          </a:xfrm>
+          <a:prstGeom prst="rect">
             <a:avLst/>
           </a:prstGeom>
           <a:solidFill>
-            <a:srgbClr val="1B232D"/>
+            <a:srgbClr val="5FB7C9"/>
           </a:solidFill>
-          <a:ln w="13970">
-            <a:solidFill>
-              <a:srgbClr val="C98A2E"/>
-            </a:solidFill>
+          <a:ln>
+            <a:noFill/>
           </a:ln>
           <a:effectLst/>
         </p:spPr>
@@ -9526,139 +10056,67 @@
           </a:fontRef>
         </p:style>
         <p:txBody>
-          <a:bodyPr rtlCol="0" anchor="ctr" wrap="square" lIns="256032" rIns="219456" tIns="201168"/>
-          <a:lstStyle/>
-          <a:p>
-            <a:pPr algn="l">
-              <a:lnSpc>
-                <a:spcPct val="100000"/>
-              </a:lnSpc>
-            </a:pPr>
-            <a:r>
-              <a:rPr sz="1200" b="1" i="0">
-                <a:solidFill>
-                  <a:srgbClr val="E7AC51"/>
-                </a:solidFill>
-                <a:latin typeface="Consolas"/>
-              </a:rPr>
-              <a:t>PRAIM · GERMANY · REAL-WORLD (463,000)</a:t>
-            </a:r>
-          </a:p>
-          <a:p>
-            <a:pPr algn="l">
-              <a:lnSpc>
-                <a:spcPct val="130000"/>
-              </a:lnSpc>
-              <a:spcBef>
-                <a:spcPts val="800"/>
-              </a:spcBef>
-            </a:pPr>
-            <a:r>
-              <a:rPr sz="1400" b="1" i="0">
-                <a:solidFill>
-                  <a:srgbClr val="E7AC51"/>
-                </a:solidFill>
-                <a:latin typeface="Arial"/>
-              </a:rPr>
-              <a:t>+17.6%</a:t>
-            </a:r>
-            <a:r>
-              <a:rPr sz="1400" b="0" i="0">
-                <a:solidFill>
-                  <a:srgbClr val="9DA9B5"/>
-                </a:solidFill>
-                <a:latin typeface="Arial"/>
-              </a:rPr>
-              <a:t> cancers detected</a:t>
-            </a:r>
-          </a:p>
-          <a:p>
-            <a:pPr algn="l">
-              <a:lnSpc>
-                <a:spcPct val="130000"/>
-              </a:lnSpc>
-              <a:spcBef>
-                <a:spcPts val="800"/>
-              </a:spcBef>
-            </a:pPr>
-            <a:r>
-              <a:rPr sz="1400" b="0" i="0">
-                <a:solidFill>
-                  <a:srgbClr val="9DA9B5"/>
-                </a:solidFill>
-                <a:latin typeface="Arial"/>
-              </a:rPr>
-              <a:t>Recall </a:t>
-            </a:r>
-            <a:r>
-              <a:rPr sz="1400" b="1" i="0">
-                <a:solidFill>
-                  <a:srgbClr val="ECEFF3"/>
-                </a:solidFill>
-                <a:latin typeface="Arial"/>
-              </a:rPr>
-              <a:t>non-inferior</a:t>
-            </a:r>
-            <a:r>
-              <a:rPr sz="1400" b="0" i="0">
-                <a:solidFill>
-                  <a:srgbClr val="9DA9B5"/>
-                </a:solidFill>
-                <a:latin typeface="Arial"/>
-              </a:rPr>
-              <a:t> · 6.7 vs 5.7 CDR / 1,000</a:t>
-            </a:r>
-          </a:p>
-          <a:p>
-            <a:pPr algn="l">
-              <a:lnSpc>
-                <a:spcPct val="130000"/>
-              </a:lnSpc>
-              <a:spcBef>
-                <a:spcPts val="800"/>
-              </a:spcBef>
-            </a:pPr>
-            <a:r>
-              <a:rPr sz="1400" b="0" i="0">
-                <a:solidFill>
-                  <a:srgbClr val="9DA9B5"/>
-                </a:solidFill>
-                <a:latin typeface="Arial"/>
-              </a:rPr>
-              <a:t>12 sites · 119 radiologists</a:t>
-            </a:r>
-          </a:p>
-          <a:p>
-            <a:pPr algn="l">
-              <a:lnSpc>
-                <a:spcPct val="100000"/>
-              </a:lnSpc>
-              <a:spcBef>
-                <a:spcPts val="1000"/>
-              </a:spcBef>
-            </a:pPr>
-            <a:r>
-              <a:rPr sz="950" b="0" i="0">
-                <a:solidFill>
-                  <a:srgbClr val="5C6975"/>
-                </a:solidFill>
-                <a:latin typeface="Consolas"/>
-              </a:rPr>
-              <a:t>Eisemann et al., Nature Medicine 2025</a:t>
-            </a:r>
-          </a:p>
-        </p:txBody>
-      </p:sp>
-      <p:sp>
-        <p:nvSpPr>
-          <p:cNvPr id="8" name="TextBox 7"/>
+          <a:bodyPr rtlCol="0" anchor="ctr"/>
+          <a:lstStyle/>
+          <a:p>
+            <a:pPr algn="ctr"/>
+          </a:p>
+        </p:txBody>
+      </p:sp>
+      <p:sp>
+        <p:nvSpPr>
+          <p:cNvPr id="10" name="Rectangle 9"/>
+          <p:cNvSpPr/>
+          <p:nvPr/>
+        </p:nvSpPr>
+        <p:spPr>
+          <a:xfrm>
+            <a:off x="777240" y="4892040"/>
+            <a:ext cx="27432" cy="1188720"/>
+          </a:xfrm>
+          <a:prstGeom prst="rect">
+            <a:avLst/>
+          </a:prstGeom>
+          <a:solidFill>
+            <a:srgbClr val="E7AC51"/>
+          </a:solidFill>
+          <a:ln>
+            <a:noFill/>
+          </a:ln>
+          <a:effectLst/>
+        </p:spPr>
+        <p:style>
+          <a:lnRef idx="1">
+            <a:schemeClr val="accent1"/>
+          </a:lnRef>
+          <a:fillRef idx="3">
+            <a:schemeClr val="accent1"/>
+          </a:fillRef>
+          <a:effectRef idx="2">
+            <a:schemeClr val="accent1"/>
+          </a:effectRef>
+          <a:fontRef idx="minor">
+            <a:schemeClr val="lt1"/>
+          </a:fontRef>
+        </p:style>
+        <p:txBody>
+          <a:bodyPr rtlCol="0" anchor="ctr"/>
+          <a:lstStyle/>
+          <a:p>
+            <a:pPr algn="ctr"/>
+          </a:p>
+        </p:txBody>
+      </p:sp>
+      <p:sp>
+        <p:nvSpPr>
+          <p:cNvPr id="11" name="TextBox 10"/>
           <p:cNvSpPr txBox="1"/>
           <p:nvPr/>
         </p:nvSpPr>
         <p:spPr>
           <a:xfrm>
-            <a:off x="777240" y="5212080"/>
-            <a:ext cx="10607040" cy="1280160"/>
+            <a:off x="960120" y="4892040"/>
+            <a:ext cx="10424160" cy="1188720"/>
           </a:xfrm>
           <a:prstGeom prst="rect">
             <a:avLst/>
@@ -9677,7 +10135,7 @@
               </a:lnSpc>
             </a:pPr>
             <a:r>
-              <a:rPr sz="1300" b="0" i="0">
+              <a:rPr sz="1350" b="0" i="0">
                 <a:solidFill>
                   <a:srgbClr val="9DA9B5"/>
                 </a:solidFill>
@@ -9686,22 +10144,40 @@
               <a:t>A third is underway: </a:t>
             </a:r>
             <a:r>
-              <a:rPr sz="1300" b="1" i="0">
-                <a:solidFill>
-                  <a:srgbClr val="E7AC51"/>
+              <a:rPr sz="1350" b="1" i="0">
+                <a:solidFill>
+                  <a:srgbClr val="ECEFF3"/>
                 </a:solidFill>
                 <a:latin typeface="Arial"/>
               </a:rPr>
               <a:t>PRISM</a:t>
             </a:r>
             <a:r>
-              <a:rPr sz="1300" b="0" i="0">
+              <a:rPr sz="1350" b="0" i="0">
                 <a:solidFill>
                   <a:srgbClr val="9DA9B5"/>
                 </a:solidFill>
                 <a:latin typeface="Arial"/>
               </a:rPr>
-              <a:t> — the first large randomized trial of screening AI in the US (Transpara; $16M PCORI; 7 sites; recruiting). It tests the US single-reader workflow directly.</a:t>
+              <a:t> — the first large randomized trial of screening AI in the United States (Transpara; $16M PCORI; 7 sites; announced Sept 2025, recruiting). It tests the </a:t>
+            </a:r>
+            <a:r>
+              <a:rPr sz="1350" b="1" i="0">
+                <a:solidFill>
+                  <a:srgbClr val="ECEFF3"/>
+                </a:solidFill>
+                <a:latin typeface="Arial"/>
+              </a:rPr>
+              <a:t>US single-reader workflow</a:t>
+            </a:r>
+            <a:r>
+              <a:rPr sz="1350" b="0" i="0">
+                <a:solidFill>
+                  <a:srgbClr val="9DA9B5"/>
+                </a:solidFill>
+                <a:latin typeface="Arial"/>
+              </a:rPr>
+              <a:t> directly.</a:t>
             </a:r>
           </a:p>
         </p:txBody>
@@ -11440,8 +11916,8 @@
         </p:nvSpPr>
         <p:spPr>
           <a:xfrm>
-            <a:off x="777240" y="1005840"/>
-            <a:ext cx="10607040" cy="1280160"/>
+            <a:off x="777240" y="1371600"/>
+            <a:ext cx="5852160" cy="1280160"/>
           </a:xfrm>
           <a:prstGeom prst="rect">
             <a:avLst/>
@@ -11488,8 +11964,8 @@
         </p:nvSpPr>
         <p:spPr>
           <a:xfrm>
-            <a:off x="777240" y="2103120"/>
-            <a:ext cx="10241280" cy="822960"/>
+            <a:off x="777240" y="2468880"/>
+            <a:ext cx="5486400" cy="1097280"/>
           </a:xfrm>
           <a:prstGeom prst="rect">
             <a:avLst/>
@@ -11508,7 +11984,7 @@
               </a:lnSpc>
             </a:pPr>
             <a:r>
-              <a:rPr sz="1500" b="0" i="0">
+              <a:rPr sz="1400" b="0" i="0">
                 <a:solidFill>
                   <a:srgbClr val="9DA9B5"/>
                 </a:solidFill>
@@ -11517,7 +11993,7 @@
               <a:t>A commercial ICH detector looked strong overall — but sensitivity </a:t>
             </a:r>
             <a:r>
-              <a:rPr sz="1500" b="1" i="0">
+              <a:rPr sz="1400" b="1" i="0">
                 <a:solidFill>
                   <a:srgbClr val="ECEFF3"/>
                 </a:solidFill>
@@ -11526,7 +12002,7 @@
               <a:t>collapsed for subacute and chronic</a:t>
             </a:r>
             <a:r>
-              <a:rPr sz="1500" b="0" i="0">
+              <a:rPr sz="1400" b="0" i="0">
                 <a:solidFill>
                   <a:srgbClr val="9DA9B5"/>
                 </a:solidFill>
@@ -11535,7 +12011,7 @@
               <a:t> bleeds, and fell in the </a:t>
             </a:r>
             <a:r>
-              <a:rPr sz="1500" b="1" i="0">
+              <a:rPr sz="1400" b="1" i="0">
                 <a:solidFill>
                   <a:srgbClr val="ECEFF3"/>
                 </a:solidFill>
@@ -11544,7 +12020,7 @@
               <a:t>outpatient</a:t>
             </a:r>
             <a:r>
-              <a:rPr sz="1500" b="0" i="0">
+              <a:rPr sz="1400" b="0" i="0">
                 <a:solidFill>
                   <a:srgbClr val="9DA9B5"/>
                 </a:solidFill>
@@ -11563,8 +12039,8 @@
         </p:nvSpPr>
         <p:spPr>
           <a:xfrm>
-            <a:off x="777240" y="3383280"/>
-            <a:ext cx="2651760" cy="640080"/>
+            <a:off x="777240" y="3794760"/>
+            <a:ext cx="5852160" cy="457200"/>
           </a:xfrm>
           <a:prstGeom prst="rect">
             <a:avLst/>
@@ -11572,7 +12048,7 @@
           <a:noFill/>
         </p:spPr>
         <p:txBody>
-          <a:bodyPr wrap="square" anchor="t" lIns="0" rIns="0" tIns="0" bIns="0">
+          <a:bodyPr wrap="square" anchor="ctr" lIns="0" rIns="0" tIns="0" bIns="0">
             <a:spAutoFit/>
           </a:bodyPr>
           <a:lstStyle/>
@@ -11583,13 +12059,22 @@
               </a:lnSpc>
             </a:pPr>
             <a:r>
-              <a:rPr sz="4000" b="1" i="0">
+              <a:rPr sz="2400" b="1" i="0">
                 <a:solidFill>
                   <a:srgbClr val="E7AC51"/>
                 </a:solidFill>
                 <a:latin typeface="Arial"/>
               </a:rPr>
               <a:t>82.2%</a:t>
+            </a:r>
+            <a:r>
+              <a:rPr sz="1300" b="0" i="0">
+                <a:solidFill>
+                  <a:srgbClr val="9DA9B5"/>
+                </a:solidFill>
+                <a:latin typeface="Arial"/>
+              </a:rPr>
+              <a:t>   Overall sensitivity</a:t>
             </a:r>
           </a:p>
         </p:txBody>
@@ -11602,8 +12087,8 @@
         </p:nvSpPr>
         <p:spPr>
           <a:xfrm>
-            <a:off x="777240" y="4206240"/>
-            <a:ext cx="2651760" cy="548640"/>
+            <a:off x="777240" y="4361688"/>
+            <a:ext cx="5852160" cy="457200"/>
           </a:xfrm>
           <a:prstGeom prst="rect">
             <a:avLst/>
@@ -11611,46 +12096,7 @@
           <a:noFill/>
         </p:spPr>
         <p:txBody>
-          <a:bodyPr wrap="square" anchor="t" lIns="0" rIns="0" tIns="0" bIns="0">
-            <a:spAutoFit/>
-          </a:bodyPr>
-          <a:lstStyle/>
-          <a:p>
-            <a:pPr algn="l">
-              <a:lnSpc>
-                <a:spcPct val="120000"/>
-              </a:lnSpc>
-            </a:pPr>
-            <a:r>
-              <a:rPr sz="1150" b="0" i="0">
-                <a:solidFill>
-                  <a:srgbClr val="9DA9B5"/>
-                </a:solidFill>
-                <a:latin typeface="Consolas"/>
-              </a:rPr>
-              <a:t>Overall sensitivity</a:t>
-            </a:r>
-          </a:p>
-        </p:txBody>
-      </p:sp>
-      <p:sp>
-        <p:nvSpPr>
-          <p:cNvPr id="9" name="TextBox 8"/>
-          <p:cNvSpPr txBox="1"/>
-          <p:nvPr/>
-        </p:nvSpPr>
-        <p:spPr>
-          <a:xfrm>
-            <a:off x="3520440" y="3383280"/>
-            <a:ext cx="2651760" cy="640080"/>
-          </a:xfrm>
-          <a:prstGeom prst="rect">
-            <a:avLst/>
-          </a:prstGeom>
-          <a:noFill/>
-        </p:spPr>
-        <p:txBody>
-          <a:bodyPr wrap="square" anchor="t" lIns="0" rIns="0" tIns="0" bIns="0">
+          <a:bodyPr wrap="square" anchor="ctr" lIns="0" rIns="0" tIns="0" bIns="0">
             <a:spAutoFit/>
           </a:bodyPr>
           <a:lstStyle/>
@@ -11661,7 +12107,7 @@
               </a:lnSpc>
             </a:pPr>
             <a:r>
-              <a:rPr sz="4000" b="1" i="0">
+              <a:rPr sz="2400" b="1" i="0">
                 <a:solidFill>
                   <a:srgbClr val="D9785B"/>
                 </a:solidFill>
@@ -11669,19 +12115,28 @@
               </a:rPr>
               <a:t>45.5%</a:t>
             </a:r>
-          </a:p>
-        </p:txBody>
-      </p:sp>
-      <p:sp>
-        <p:nvSpPr>
-          <p:cNvPr id="10" name="TextBox 9"/>
+            <a:r>
+              <a:rPr sz="1300" b="0" i="0">
+                <a:solidFill>
+                  <a:srgbClr val="9DA9B5"/>
+                </a:solidFill>
+                <a:latin typeface="Arial"/>
+              </a:rPr>
+              <a:t>   Subacute bleeds</a:t>
+            </a:r>
+          </a:p>
+        </p:txBody>
+      </p:sp>
+      <p:sp>
+        <p:nvSpPr>
+          <p:cNvPr id="9" name="TextBox 8"/>
           <p:cNvSpPr txBox="1"/>
           <p:nvPr/>
         </p:nvSpPr>
         <p:spPr>
           <a:xfrm>
-            <a:off x="3520440" y="4206240"/>
-            <a:ext cx="2651760" cy="548640"/>
+            <a:off x="777240" y="4928616"/>
+            <a:ext cx="5852160" cy="457200"/>
           </a:xfrm>
           <a:prstGeom prst="rect">
             <a:avLst/>
@@ -11689,46 +12144,7 @@
           <a:noFill/>
         </p:spPr>
         <p:txBody>
-          <a:bodyPr wrap="square" anchor="t" lIns="0" rIns="0" tIns="0" bIns="0">
-            <a:spAutoFit/>
-          </a:bodyPr>
-          <a:lstStyle/>
-          <a:p>
-            <a:pPr algn="l">
-              <a:lnSpc>
-                <a:spcPct val="120000"/>
-              </a:lnSpc>
-            </a:pPr>
-            <a:r>
-              <a:rPr sz="1150" b="0" i="0">
-                <a:solidFill>
-                  <a:srgbClr val="9DA9B5"/>
-                </a:solidFill>
-                <a:latin typeface="Consolas"/>
-              </a:rPr>
-              <a:t>Subacute bleeds</a:t>
-            </a:r>
-          </a:p>
-        </p:txBody>
-      </p:sp>
-      <p:sp>
-        <p:nvSpPr>
-          <p:cNvPr id="11" name="TextBox 10"/>
-          <p:cNvSpPr txBox="1"/>
-          <p:nvPr/>
-        </p:nvSpPr>
-        <p:spPr>
-          <a:xfrm>
-            <a:off x="6263640" y="3383280"/>
-            <a:ext cx="2651760" cy="640080"/>
-          </a:xfrm>
-          <a:prstGeom prst="rect">
-            <a:avLst/>
-          </a:prstGeom>
-          <a:noFill/>
-        </p:spPr>
-        <p:txBody>
-          <a:bodyPr wrap="square" anchor="t" lIns="0" rIns="0" tIns="0" bIns="0">
+          <a:bodyPr wrap="square" anchor="ctr" lIns="0" rIns="0" tIns="0" bIns="0">
             <a:spAutoFit/>
           </a:bodyPr>
           <a:lstStyle/>
@@ -11739,7 +12155,7 @@
               </a:lnSpc>
             </a:pPr>
             <a:r>
-              <a:rPr sz="4000" b="1" i="0">
+              <a:rPr sz="2400" b="1" i="0">
                 <a:solidFill>
                   <a:srgbClr val="D9785B"/>
                 </a:solidFill>
@@ -11747,19 +12163,28 @@
               </a:rPr>
               <a:t>54.8%</a:t>
             </a:r>
-          </a:p>
-        </p:txBody>
-      </p:sp>
-      <p:sp>
-        <p:nvSpPr>
-          <p:cNvPr id="12" name="TextBox 11"/>
+            <a:r>
+              <a:rPr sz="1300" b="0" i="0">
+                <a:solidFill>
+                  <a:srgbClr val="9DA9B5"/>
+                </a:solidFill>
+                <a:latin typeface="Arial"/>
+              </a:rPr>
+              <a:t>   Chronic bleeds</a:t>
+            </a:r>
+          </a:p>
+        </p:txBody>
+      </p:sp>
+      <p:sp>
+        <p:nvSpPr>
+          <p:cNvPr id="10" name="TextBox 9"/>
           <p:cNvSpPr txBox="1"/>
           <p:nvPr/>
         </p:nvSpPr>
         <p:spPr>
           <a:xfrm>
-            <a:off x="6263640" y="4206240"/>
-            <a:ext cx="2651760" cy="548640"/>
+            <a:off x="777240" y="5495544"/>
+            <a:ext cx="5852160" cy="457200"/>
           </a:xfrm>
           <a:prstGeom prst="rect">
             <a:avLst/>
@@ -11767,46 +12192,7 @@
           <a:noFill/>
         </p:spPr>
         <p:txBody>
-          <a:bodyPr wrap="square" anchor="t" lIns="0" rIns="0" tIns="0" bIns="0">
-            <a:spAutoFit/>
-          </a:bodyPr>
-          <a:lstStyle/>
-          <a:p>
-            <a:pPr algn="l">
-              <a:lnSpc>
-                <a:spcPct val="120000"/>
-              </a:lnSpc>
-            </a:pPr>
-            <a:r>
-              <a:rPr sz="1150" b="0" i="0">
-                <a:solidFill>
-                  <a:srgbClr val="9DA9B5"/>
-                </a:solidFill>
-                <a:latin typeface="Consolas"/>
-              </a:rPr>
-              <a:t>Chronic bleeds</a:t>
-            </a:r>
-          </a:p>
-        </p:txBody>
-      </p:sp>
-      <p:sp>
-        <p:nvSpPr>
-          <p:cNvPr id="13" name="TextBox 12"/>
-          <p:cNvSpPr txBox="1"/>
-          <p:nvPr/>
-        </p:nvSpPr>
-        <p:spPr>
-          <a:xfrm>
-            <a:off x="9006840" y="3383280"/>
-            <a:ext cx="2651760" cy="640080"/>
-          </a:xfrm>
-          <a:prstGeom prst="rect">
-            <a:avLst/>
-          </a:prstGeom>
-          <a:noFill/>
-        </p:spPr>
-        <p:txBody>
-          <a:bodyPr wrap="square" anchor="t" lIns="0" rIns="0" tIns="0" bIns="0">
+          <a:bodyPr wrap="square" anchor="ctr" lIns="0" rIns="0" tIns="0" bIns="0">
             <a:spAutoFit/>
           </a:bodyPr>
           <a:lstStyle/>
@@ -11817,66 +12203,36 @@
               </a:lnSpc>
             </a:pPr>
             <a:r>
-              <a:rPr sz="4000" b="1" i="0">
-                <a:solidFill>
-                  <a:srgbClr val="E7AC51"/>
+              <a:rPr sz="2400" b="1" i="0">
+                <a:solidFill>
+                  <a:srgbClr val="5FB7C9"/>
                 </a:solidFill>
                 <a:latin typeface="Arial"/>
               </a:rPr>
               <a:t>72.2%</a:t>
             </a:r>
-          </a:p>
-        </p:txBody>
-      </p:sp>
-      <p:sp>
-        <p:nvSpPr>
-          <p:cNvPr id="14" name="TextBox 13"/>
+            <a:r>
+              <a:rPr sz="1300" b="0" i="0">
+                <a:solidFill>
+                  <a:srgbClr val="9DA9B5"/>
+                </a:solidFill>
+                <a:latin typeface="Arial"/>
+              </a:rPr>
+              <a:t>   Outpatient setting</a:t>
+            </a:r>
+          </a:p>
+        </p:txBody>
+      </p:sp>
+      <p:sp>
+        <p:nvSpPr>
+          <p:cNvPr id="11" name="TextBox 10"/>
           <p:cNvSpPr txBox="1"/>
           <p:nvPr/>
         </p:nvSpPr>
         <p:spPr>
           <a:xfrm>
-            <a:off x="9006840" y="4206240"/>
-            <a:ext cx="2651760" cy="548640"/>
-          </a:xfrm>
-          <a:prstGeom prst="rect">
-            <a:avLst/>
-          </a:prstGeom>
-          <a:noFill/>
-        </p:spPr>
-        <p:txBody>
-          <a:bodyPr wrap="square" anchor="t" lIns="0" rIns="0" tIns="0" bIns="0">
-            <a:spAutoFit/>
-          </a:bodyPr>
-          <a:lstStyle/>
-          <a:p>
-            <a:pPr algn="l">
-              <a:lnSpc>
-                <a:spcPct val="120000"/>
-              </a:lnSpc>
-            </a:pPr>
-            <a:r>
-              <a:rPr sz="1150" b="0" i="0">
-                <a:solidFill>
-                  <a:srgbClr val="9DA9B5"/>
-                </a:solidFill>
-                <a:latin typeface="Consolas"/>
-              </a:rPr>
-              <a:t>Outpatient setting</a:t>
-            </a:r>
-          </a:p>
-        </p:txBody>
-      </p:sp>
-      <p:sp>
-        <p:nvSpPr>
-          <p:cNvPr id="15" name="TextBox 14"/>
-          <p:cNvSpPr txBox="1"/>
-          <p:nvPr/>
-        </p:nvSpPr>
-        <p:spPr>
-          <a:xfrm>
-            <a:off x="777240" y="5394960"/>
-            <a:ext cx="10607040" cy="457200"/>
+            <a:off x="777240" y="6172200"/>
+            <a:ext cx="5486400" cy="457200"/>
           </a:xfrm>
           <a:prstGeom prst="rect">
             <a:avLst/>
@@ -11902,6 +12258,83 @@
                 <a:latin typeface="Consolas"/>
               </a:rPr>
               <a:t>[your group], npj Digital Medicine 2025.</a:t>
+            </a:r>
+          </a:p>
+        </p:txBody>
+      </p:sp>
+      <p:sp>
+        <p:nvSpPr>
+          <p:cNvPr id="12" name="Rounded Rectangle 11"/>
+          <p:cNvSpPr/>
+          <p:nvPr/>
+        </p:nvSpPr>
+        <p:spPr>
+          <a:xfrm>
+            <a:off x="6583680" y="1188720"/>
+            <a:ext cx="5120640" cy="4754880"/>
+          </a:xfrm>
+          <a:prstGeom prst="roundRect">
+            <a:avLst/>
+          </a:prstGeom>
+          <a:noFill/>
+          <a:ln w="12700">
+            <a:solidFill>
+              <a:srgbClr val="C98A2E"/>
+            </a:solidFill>
+            <a:prstDash val="dash"/>
+          </a:ln>
+          <a:effectLst/>
+        </p:spPr>
+        <p:style>
+          <a:lnRef idx="1">
+            <a:schemeClr val="accent1"/>
+          </a:lnRef>
+          <a:fillRef idx="3">
+            <a:schemeClr val="accent1"/>
+          </a:fillRef>
+          <a:effectRef idx="2">
+            <a:schemeClr val="accent1"/>
+          </a:effectRef>
+          <a:fontRef idx="minor">
+            <a:schemeClr val="lt1"/>
+          </a:fontRef>
+        </p:style>
+        <p:txBody>
+          <a:bodyPr rtlCol="0" anchor="ctr" wrap="square"/>
+          <a:lstStyle/>
+          <a:p>
+            <a:pPr algn="ctr">
+              <a:lnSpc>
+                <a:spcPct val="100000"/>
+              </a:lnSpc>
+            </a:pPr>
+            <a:r>
+              <a:rPr sz="1100" b="0" i="0">
+                <a:solidFill>
+                  <a:srgbClr val="E7AC51"/>
+                </a:solidFill>
+                <a:latin typeface="Consolas"/>
+              </a:rPr>
+              <a:t>GIF</a:t>
+            </a:r>
+          </a:p>
+          <a:p>
+            <a:pPr algn="ctr">
+              <a:lnSpc>
+                <a:spcPct val="100000"/>
+              </a:lnSpc>
+              <a:spcBef>
+                <a:spcPts val="300"/>
+              </a:spcBef>
+            </a:pPr>
+            <a:r>
+              <a:rPr sz="900" b="0" i="0">
+                <a:solidFill>
+                  <a:srgbClr val="5C6975"/>
+                </a:solidFill>
+                <a:latin typeface="Consolas"/>
+              </a:rPr>
+              <a:t>[ to be added ]</a:t>
             </a:r>
           </a:p>
         </p:txBody>
@@ -12385,7 +12818,7 @@
         <p:spPr>
           <a:xfrm>
             <a:off x="777240" y="1005840"/>
-            <a:ext cx="10607040" cy="1280160"/>
+            <a:ext cx="5852160" cy="1280160"/>
           </a:xfrm>
           <a:prstGeom prst="rect">
             <a:avLst/>
@@ -12432,8 +12865,8 @@
         </p:nvSpPr>
         <p:spPr>
           <a:xfrm>
-            <a:off x="777240" y="2194560"/>
-            <a:ext cx="10058400" cy="640080"/>
+            <a:off x="777240" y="2103120"/>
+            <a:ext cx="5669280" cy="640080"/>
           </a:xfrm>
           <a:prstGeom prst="rect">
             <a:avLst/>
@@ -12469,28 +12902,58 @@
               </a:rPr>
               <a:t>AWS Open Data Program.</a:t>
             </a:r>
-            <a:r>
-              <a:rPr sz="1500" b="0" i="0">
-                <a:solidFill>
-                  <a:srgbClr val="9DA9B5"/>
-                </a:solidFill>
-                <a:latin typeface="Arial"/>
-              </a:rPr>
-              <a:t>  EMBED v2 is in progress.</a:t>
-            </a:r>
-          </a:p>
-        </p:txBody>
-      </p:sp>
-      <p:sp>
-        <p:nvSpPr>
-          <p:cNvPr id="7" name="Rounded Rectangle 6"/>
+          </a:p>
+        </p:txBody>
+      </p:sp>
+      <p:sp>
+        <p:nvSpPr>
+          <p:cNvPr id="7" name="TextBox 6"/>
+          <p:cNvSpPr txBox="1"/>
+          <p:nvPr/>
+        </p:nvSpPr>
+        <p:spPr>
+          <a:xfrm>
+            <a:off x="777240" y="2788920"/>
+            <a:ext cx="5852160" cy="320040"/>
+          </a:xfrm>
+          <a:prstGeom prst="rect">
+            <a:avLst/>
+          </a:prstGeom>
+          <a:noFill/>
+        </p:spPr>
+        <p:txBody>
+          <a:bodyPr wrap="square" anchor="t" lIns="0" rIns="0" tIns="0" bIns="0">
+            <a:spAutoFit/>
+          </a:bodyPr>
+          <a:lstStyle/>
+          <a:p>
+            <a:pPr algn="l">
+              <a:lnSpc>
+                <a:spcPct val="100000"/>
+              </a:lnSpc>
+            </a:pPr>
+            <a:r>
+              <a:rPr sz="1150" b="1" i="0">
+                <a:solidFill>
+                  <a:srgbClr val="E7AC51"/>
+                </a:solidFill>
+                <a:latin typeface="Consolas"/>
+              </a:rPr>
+              <a:t>EMBED V2 — IN PROGRESS</a:t>
+            </a:r>
+          </a:p>
+        </p:txBody>
+      </p:sp>
+      <p:sp>
+        <p:nvSpPr>
+          <p:cNvPr id="8" name="Rounded Rectangle 7"/>
           <p:cNvSpPr/>
           <p:nvPr/>
         </p:nvSpPr>
         <p:spPr>
           <a:xfrm>
-            <a:off x="777240" y="3200400"/>
-            <a:ext cx="1704441" cy="384048"/>
+            <a:off x="777240" y="3246120"/>
+            <a:ext cx="1722455" cy="384048"/>
           </a:xfrm>
           <a:prstGeom prst="roundRect">
             <a:avLst/>
@@ -12520,7 +12983,7 @@
           </a:fontRef>
         </p:style>
         <p:txBody>
-          <a:bodyPr rtlCol="0" anchor="ctr" wrap="square" lIns="128016"/>
+          <a:bodyPr rtlCol="0" anchor="ctr" wrap="none" lIns="137160" tIns="0" bIns="0"/>
           <a:lstStyle/>
           <a:p>
             <a:pPr algn="l">
@@ -12529,27 +12992,36 @@
               </a:lnSpc>
             </a:pPr>
             <a:r>
-              <a:rPr sz="1100" b="0" i="0">
+              <a:rPr sz="1050" b="0" i="0">
                 <a:solidFill>
                   <a:srgbClr val="ECEFF3"/>
                 </a:solidFill>
                 <a:latin typeface="Consolas"/>
               </a:rPr>
-              <a:t>~300,000 patients</a:t>
-            </a:r>
-          </a:p>
-        </p:txBody>
-      </p:sp>
-      <p:sp>
-        <p:nvSpPr>
-          <p:cNvPr id="8" name="Rectangle 7"/>
+              <a:t>~300,000 </a:t>
+            </a:r>
+            <a:r>
+              <a:rPr sz="1050" b="1" i="0">
+                <a:solidFill>
+                  <a:srgbClr val="5FB7C9"/>
+                </a:solidFill>
+                <a:latin typeface="Consolas"/>
+              </a:rPr>
+              <a:t>patients</a:t>
+            </a:r>
+          </a:p>
+        </p:txBody>
+      </p:sp>
+      <p:sp>
+        <p:nvSpPr>
+          <p:cNvPr id="9" name="Rectangle 8"/>
           <p:cNvSpPr/>
           <p:nvPr/>
         </p:nvSpPr>
         <p:spPr>
           <a:xfrm>
-            <a:off x="777240" y="3200400"/>
-            <a:ext cx="36576" cy="384048"/>
+            <a:off x="777240" y="3246120"/>
+            <a:ext cx="41148" cy="384048"/>
           </a:xfrm>
           <a:prstGeom prst="rect">
             <a:avLst/>
@@ -12586,14 +13058,14 @@
       </p:sp>
       <p:sp>
         <p:nvSpPr>
-          <p:cNvPr id="9" name="Rounded Rectangle 8"/>
+          <p:cNvPr id="10" name="Rounded Rectangle 9"/>
           <p:cNvSpPr/>
           <p:nvPr/>
         </p:nvSpPr>
         <p:spPr>
           <a:xfrm>
-            <a:off x="2618841" y="3200400"/>
-            <a:ext cx="2882188" cy="384048"/>
+            <a:off x="2645999" y="3246120"/>
+            <a:ext cx="2824673" cy="384048"/>
           </a:xfrm>
           <a:prstGeom prst="roundRect">
             <a:avLst/>
@@ -12623,7 +13095,7 @@
           </a:fontRef>
         </p:style>
         <p:txBody>
-          <a:bodyPr rtlCol="0" anchor="ctr" wrap="square" lIns="128016"/>
+          <a:bodyPr rtlCol="0" anchor="ctr" wrap="none" lIns="137160" tIns="0" bIns="0"/>
           <a:lstStyle/>
           <a:p>
             <a:pPr algn="l">
@@ -12632,27 +13104,45 @@
               </a:lnSpc>
             </a:pPr>
             <a:r>
-              <a:rPr sz="1100" b="0" i="0">
+              <a:rPr sz="1050" b="0" i="0">
                 <a:solidFill>
                   <a:srgbClr val="ECEFF3"/>
                 </a:solidFill>
                 <a:latin typeface="Consolas"/>
               </a:rPr>
-              <a:t>~1M exams (2D · DBT · US · MRI)</a:t>
-            </a:r>
-          </a:p>
-        </p:txBody>
-      </p:sp>
-      <p:sp>
-        <p:nvSpPr>
-          <p:cNvPr id="10" name="Rectangle 9"/>
+              <a:t>~1M </a:t>
+            </a:r>
+            <a:r>
+              <a:rPr sz="1050" b="1" i="0">
+                <a:solidFill>
+                  <a:srgbClr val="5FB7C9"/>
+                </a:solidFill>
+                <a:latin typeface="Consolas"/>
+              </a:rPr>
+              <a:t>exams</a:t>
+            </a:r>
+            <a:r>
+              <a:rPr sz="1050" b="0" i="0">
+                <a:solidFill>
+                  <a:srgbClr val="ECEFF3"/>
+                </a:solidFill>
+                <a:latin typeface="Consolas"/>
+              </a:rPr>
+              <a:t> (2D · DBT · US · MRI)</a:t>
+            </a:r>
+          </a:p>
+        </p:txBody>
+      </p:sp>
+      <p:sp>
+        <p:nvSpPr>
+          <p:cNvPr id="11" name="Rectangle 10"/>
           <p:cNvSpPr/>
           <p:nvPr/>
         </p:nvSpPr>
         <p:spPr>
           <a:xfrm>
-            <a:off x="2618841" y="3200400"/>
-            <a:ext cx="36576" cy="384048"/>
+            <a:off x="2645999" y="3246120"/>
+            <a:ext cx="41148" cy="384048"/>
           </a:xfrm>
           <a:prstGeom prst="rect">
             <a:avLst/>
@@ -12689,14 +13179,14 @@
       </p:sp>
       <p:sp>
         <p:nvSpPr>
-          <p:cNvPr id="11" name="Rounded Rectangle 10"/>
+          <p:cNvPr id="12" name="Rounded Rectangle 11"/>
           <p:cNvSpPr/>
           <p:nvPr/>
         </p:nvSpPr>
         <p:spPr>
           <a:xfrm>
-            <a:off x="5638190" y="3200400"/>
-            <a:ext cx="1704441" cy="384048"/>
+            <a:off x="777240" y="3749039"/>
+            <a:ext cx="1722455" cy="384048"/>
           </a:xfrm>
           <a:prstGeom prst="roundRect">
             <a:avLst/>
@@ -12726,7 +13216,7 @@
           </a:fontRef>
         </p:style>
         <p:txBody>
-          <a:bodyPr rtlCol="0" anchor="ctr" wrap="square" lIns="128016"/>
+          <a:bodyPr rtlCol="0" anchor="ctr" wrap="none" lIns="137160" tIns="0" bIns="0"/>
           <a:lstStyle/>
           <a:p>
             <a:pPr algn="l">
@@ -12735,27 +13225,36 @@
               </a:lnSpc>
             </a:pPr>
             <a:r>
-              <a:rPr sz="1100" b="0" i="0">
+              <a:rPr sz="1050" b="0" i="0">
                 <a:solidFill>
                   <a:srgbClr val="ECEFF3"/>
                 </a:solidFill>
                 <a:latin typeface="Consolas"/>
               </a:rPr>
-              <a:t>Free-text reports</a:t>
-            </a:r>
-          </a:p>
-        </p:txBody>
-      </p:sp>
-      <p:sp>
-        <p:nvSpPr>
-          <p:cNvPr id="12" name="Rectangle 11"/>
+              <a:t>Free-text </a:t>
+            </a:r>
+            <a:r>
+              <a:rPr sz="1050" b="1" i="0">
+                <a:solidFill>
+                  <a:srgbClr val="5FB7C9"/>
+                </a:solidFill>
+                <a:latin typeface="Consolas"/>
+              </a:rPr>
+              <a:t>reports</a:t>
+            </a:r>
+          </a:p>
+        </p:txBody>
+      </p:sp>
+      <p:sp>
+        <p:nvSpPr>
+          <p:cNvPr id="13" name="Rectangle 12"/>
           <p:cNvSpPr/>
           <p:nvPr/>
         </p:nvSpPr>
         <p:spPr>
           <a:xfrm>
-            <a:off x="5638190" y="3200400"/>
-            <a:ext cx="36576" cy="384048"/>
+            <a:off x="777240" y="3749039"/>
+            <a:ext cx="41148" cy="384048"/>
           </a:xfrm>
           <a:prstGeom prst="rect">
             <a:avLst/>
@@ -12792,14 +13291,14 @@
       </p:sp>
       <p:sp>
         <p:nvSpPr>
-          <p:cNvPr id="13" name="Rounded Rectangle 12"/>
+          <p:cNvPr id="14" name="Rounded Rectangle 13"/>
           <p:cNvSpPr/>
           <p:nvPr/>
         </p:nvSpPr>
         <p:spPr>
           <a:xfrm>
-            <a:off x="7479792" y="3200400"/>
-            <a:ext cx="1704441" cy="384048"/>
+            <a:off x="2645999" y="3749039"/>
+            <a:ext cx="1722455" cy="384048"/>
           </a:xfrm>
           <a:prstGeom prst="roundRect">
             <a:avLst/>
@@ -12829,7 +13328,7 @@
           </a:fontRef>
         </p:style>
         <p:txBody>
-          <a:bodyPr rtlCol="0" anchor="ctr" wrap="square" lIns="128016"/>
+          <a:bodyPr rtlCol="0" anchor="ctr" wrap="none" lIns="137160" tIns="0" bIns="0"/>
           <a:lstStyle/>
           <a:p>
             <a:pPr algn="l">
@@ -12838,27 +13337,36 @@
               </a:lnSpc>
             </a:pPr>
             <a:r>
-              <a:rPr sz="1100" b="0" i="0">
+              <a:rPr sz="1050" b="0" i="0">
                 <a:solidFill>
                   <a:srgbClr val="ECEFF3"/>
                 </a:solidFill>
                 <a:latin typeface="Consolas"/>
               </a:rPr>
-              <a:t>Patient risk data</a:t>
-            </a:r>
-          </a:p>
-        </p:txBody>
-      </p:sp>
-      <p:sp>
-        <p:nvSpPr>
-          <p:cNvPr id="14" name="Rectangle 13"/>
+              <a:t>Patient </a:t>
+            </a:r>
+            <a:r>
+              <a:rPr sz="1050" b="1" i="0">
+                <a:solidFill>
+                  <a:srgbClr val="5FB7C9"/>
+                </a:solidFill>
+                <a:latin typeface="Consolas"/>
+              </a:rPr>
+              <a:t>risk data</a:t>
+            </a:r>
+          </a:p>
+        </p:txBody>
+      </p:sp>
+      <p:sp>
+        <p:nvSpPr>
+          <p:cNvPr id="15" name="Rectangle 14"/>
           <p:cNvSpPr/>
           <p:nvPr/>
         </p:nvSpPr>
         <p:spPr>
           <a:xfrm>
-            <a:off x="7479792" y="3200400"/>
-            <a:ext cx="36576" cy="384048"/>
+            <a:off x="2645999" y="3749039"/>
+            <a:ext cx="41148" cy="384048"/>
           </a:xfrm>
           <a:prstGeom prst="rect">
             <a:avLst/>
@@ -12895,14 +13403,14 @@
       </p:sp>
       <p:sp>
         <p:nvSpPr>
-          <p:cNvPr id="15" name="Rounded Rectangle 14"/>
+          <p:cNvPr id="16" name="Rounded Rectangle 15"/>
           <p:cNvSpPr/>
           <p:nvPr/>
         </p:nvSpPr>
         <p:spPr>
           <a:xfrm>
-            <a:off x="777240" y="3703320"/>
-            <a:ext cx="2629814" cy="384048"/>
+            <a:off x="777240" y="4251959"/>
+            <a:ext cx="2588483" cy="384048"/>
           </a:xfrm>
           <a:prstGeom prst="roundRect">
             <a:avLst/>
@@ -12932,7 +13440,7 @@
           </a:fontRef>
         </p:style>
         <p:txBody>
-          <a:bodyPr rtlCol="0" anchor="ctr" wrap="square" lIns="128016"/>
+          <a:bodyPr rtlCol="0" anchor="ctr" wrap="none" lIns="137160" tIns="0" bIns="0"/>
           <a:lstStyle/>
           <a:p>
             <a:pPr algn="l">
@@ -12941,27 +13449,36 @@
               </a:lnSpc>
             </a:pPr>
             <a:r>
-              <a:rPr sz="1100" b="0" i="0">
+              <a:rPr sz="1050" b="0" i="0">
                 <a:solidFill>
                   <a:srgbClr val="ECEFF3"/>
                 </a:solidFill>
                 <a:latin typeface="Consolas"/>
               </a:rPr>
-              <a:t>Outcomes registry-harmonized</a:t>
-            </a:r>
-          </a:p>
-        </p:txBody>
-      </p:sp>
-      <p:sp>
-        <p:nvSpPr>
-          <p:cNvPr id="16" name="Rectangle 15"/>
+              <a:t>Outcomes </a:t>
+            </a:r>
+            <a:r>
+              <a:rPr sz="1050" b="1" i="0">
+                <a:solidFill>
+                  <a:srgbClr val="5FB7C9"/>
+                </a:solidFill>
+                <a:latin typeface="Consolas"/>
+              </a:rPr>
+              <a:t>registry-harmonized</a:t>
+            </a:r>
+          </a:p>
+        </p:txBody>
+      </p:sp>
+      <p:sp>
+        <p:nvSpPr>
+          <p:cNvPr id="17" name="Rectangle 16"/>
           <p:cNvSpPr/>
           <p:nvPr/>
         </p:nvSpPr>
         <p:spPr>
           <a:xfrm>
-            <a:off x="777240" y="3703320"/>
-            <a:ext cx="36576" cy="384048"/>
+            <a:off x="777240" y="4251959"/>
+            <a:ext cx="41148" cy="384048"/>
           </a:xfrm>
           <a:prstGeom prst="rect">
             <a:avLst/>
@@ -12998,14 +13515,14 @@
       </p:sp>
       <p:sp>
         <p:nvSpPr>
-          <p:cNvPr id="17" name="TextBox 16"/>
+          <p:cNvPr id="18" name="TextBox 17"/>
           <p:cNvSpPr txBox="1"/>
           <p:nvPr/>
         </p:nvSpPr>
         <p:spPr>
           <a:xfrm>
-            <a:off x="777240" y="5852160"/>
-            <a:ext cx="10607040" cy="457200"/>
+            <a:off x="777240" y="5897880"/>
+            <a:ext cx="5852160" cy="457200"/>
           </a:xfrm>
           <a:prstGeom prst="rect">
             <a:avLst/>
@@ -13031,6 +13548,122 @@
                 <a:latin typeface="Consolas"/>
               </a:rPr>
               <a:t>v1: [your group], Radiology: Artificial Intelligence 2023 (Fig. 1) · aws.amazon.com/opendata</a:t>
+            </a:r>
+          </a:p>
+        </p:txBody>
+      </p:sp>
+      <p:sp>
+        <p:nvSpPr>
+          <p:cNvPr id="19" name="Rounded Rectangle 18"/>
+          <p:cNvSpPr/>
+          <p:nvPr/>
+        </p:nvSpPr>
+        <p:spPr>
+          <a:xfrm>
+            <a:off x="6583680" y="1188720"/>
+            <a:ext cx="5120640" cy="4480560"/>
+          </a:xfrm>
+          <a:prstGeom prst="roundRect">
+            <a:avLst/>
+          </a:prstGeom>
+          <a:noFill/>
+          <a:ln w="12700">
+            <a:solidFill>
+              <a:srgbClr val="C98A2E"/>
+            </a:solidFill>
+            <a:prstDash val="dash"/>
+          </a:ln>
+          <a:effectLst/>
+        </p:spPr>
+        <p:style>
+          <a:lnRef idx="1">
+            <a:schemeClr val="accent1"/>
+          </a:lnRef>
+          <a:fillRef idx="3">
+            <a:schemeClr val="accent1"/>
+          </a:fillRef>
+          <a:effectRef idx="2">
+            <a:schemeClr val="accent1"/>
+          </a:effectRef>
+          <a:fontRef idx="minor">
+            <a:schemeClr val="lt1"/>
+          </a:fontRef>
+        </p:style>
+        <p:txBody>
+          <a:bodyPr rtlCol="0" anchor="ctr" wrap="square"/>
+          <a:lstStyle/>
+          <a:p>
+            <a:pPr algn="ctr">
+              <a:lnSpc>
+                <a:spcPct val="100000"/>
+              </a:lnSpc>
+            </a:pPr>
+            <a:r>
+              <a:rPr sz="1100" b="0" i="0">
+                <a:solidFill>
+                  <a:srgbClr val="E7AC51"/>
+                </a:solidFill>
+                <a:latin typeface="Consolas"/>
+              </a:rPr>
+              <a:t>MAP — EMBED USERS BY COUNTRY</a:t>
+            </a:r>
+          </a:p>
+          <a:p>
+            <a:pPr algn="ctr">
+              <a:lnSpc>
+                <a:spcPct val="100000"/>
+              </a:lnSpc>
+              <a:spcBef>
+                <a:spcPts val="300"/>
+              </a:spcBef>
+            </a:pPr>
+            <a:r>
+              <a:rPr sz="900" b="0" i="0">
+                <a:solidFill>
+                  <a:srgbClr val="5C6975"/>
+                </a:solidFill>
+                <a:latin typeface="Consolas"/>
+              </a:rPr>
+              <a:t>[ drop in PNG ]</a:t>
+            </a:r>
+          </a:p>
+        </p:txBody>
+      </p:sp>
+      <p:sp>
+        <p:nvSpPr>
+          <p:cNvPr id="20" name="TextBox 19"/>
+          <p:cNvSpPr txBox="1"/>
+          <p:nvPr/>
+        </p:nvSpPr>
+        <p:spPr>
+          <a:xfrm>
+            <a:off x="6583680" y="5760720"/>
+            <a:ext cx="5120640" cy="274320"/>
+          </a:xfrm>
+          <a:prstGeom prst="rect">
+            <a:avLst/>
+          </a:prstGeom>
+          <a:noFill/>
+        </p:spPr>
+        <p:txBody>
+          <a:bodyPr wrap="square" anchor="t" lIns="0" rIns="0" tIns="0" bIns="0">
+            <a:spAutoFit/>
+          </a:bodyPr>
+          <a:lstStyle/>
+          <a:p>
+            <a:pPr algn="ctr">
+              <a:lnSpc>
+                <a:spcPct val="100000"/>
+              </a:lnSpc>
+            </a:pPr>
+            <a:r>
+              <a:rPr sz="900" b="0" i="0">
+                <a:solidFill>
+                  <a:srgbClr val="5C6975"/>
+                </a:solidFill>
+                <a:latin typeface="Consolas"/>
+              </a:rPr>
+              <a:t>opt: EMBED v1 schematic — Radiology: AI, Fig. 1</a:t>
             </a:r>
           </a:p>
         </p:txBody>

--- a/keynote-iwbi-2026/pptx/sections/IWBI2026_Trivedi_02b_EraII_2026.pptx
+++ b/keynote-iwbi-2026/pptx/sections/IWBI2026_Trivedi_02b_EraII_2026.pptx
@@ -5012,8 +5012,8 @@
         </p:nvSpPr>
         <p:spPr>
           <a:xfrm>
-            <a:off x="777240" y="566928"/>
-            <a:ext cx="8229600" cy="365760"/>
+            <a:off x="777240" y="2240280"/>
+            <a:ext cx="8229600" cy="310896"/>
           </a:xfrm>
           <a:prstGeom prst="rect">
             <a:avLst/>
@@ -5051,8 +5051,8 @@
         </p:nvSpPr>
         <p:spPr>
           <a:xfrm>
-            <a:off x="777240" y="2286000"/>
-            <a:ext cx="6126480" cy="1463040"/>
+            <a:off x="777240" y="2606040"/>
+            <a:ext cx="6309360" cy="868680"/>
           </a:xfrm>
           <a:prstGeom prst="rect">
             <a:avLst/>
@@ -5071,7 +5071,7 @@
               </a:lnSpc>
             </a:pPr>
             <a:r>
-              <a:rPr sz="5000" b="1" i="0">
+              <a:rPr sz="4400" b="1" i="0">
                 <a:solidFill>
                   <a:srgbClr val="ECEFF3"/>
                 </a:solidFill>
@@ -5080,7 +5080,7 @@
               <a:t>The year is </a:t>
             </a:r>
             <a:r>
-              <a:rPr sz="5000" b="1" i="0">
+              <a:rPr sz="4400" b="1" i="0">
                 <a:solidFill>
                   <a:srgbClr val="E7AC51"/>
                 </a:solidFill>
@@ -5099,8 +5099,8 @@
         </p:nvSpPr>
         <p:spPr>
           <a:xfrm>
-            <a:off x="777240" y="3977639"/>
-            <a:ext cx="6035040" cy="1463040"/>
+            <a:off x="777240" y="3611880"/>
+            <a:ext cx="5760720" cy="1188720"/>
           </a:xfrm>
           <a:prstGeom prst="rect">
             <a:avLst/>
@@ -5115,11 +5115,11 @@
           <a:p>
             <a:pPr algn="l">
               <a:lnSpc>
-                <a:spcPct val="130000"/>
+                <a:spcPct val="140000"/>
               </a:lnSpc>
             </a:pPr>
             <a:r>
-              <a:rPr sz="1900" b="0" i="0">
+              <a:rPr sz="1700" b="0" i="0">
                 <a:solidFill>
                   <a:srgbClr val="9DA9B5"/>
                 </a:solidFill>
@@ -5128,7 +5128,7 @@
               <a:t>Ten years on, the early promise has been put to the test — </a:t>
             </a:r>
             <a:r>
-              <a:rPr sz="1900" b="1" i="0">
+              <a:rPr sz="1700" b="1" i="0">
                 <a:solidFill>
                   <a:srgbClr val="ECEFF3"/>
                 </a:solidFill>
@@ -5155,8 +5155,8 @@
         </p:blipFill>
         <p:spPr>
           <a:xfrm>
-            <a:off x="7040880" y="2305594"/>
-            <a:ext cx="4572000" cy="2612571"/>
+            <a:off x="7132320" y="1828800"/>
+            <a:ext cx="4480560" cy="2560320"/>
           </a:xfrm>
           <a:prstGeom prst="rect">
             <a:avLst/>
@@ -10540,8 +10540,8 @@
         </p:nvSpPr>
         <p:spPr>
           <a:xfrm>
-            <a:off x="777240" y="566928"/>
-            <a:ext cx="8229600" cy="365760"/>
+            <a:off x="777240" y="2240280"/>
+            <a:ext cx="8229600" cy="310896"/>
           </a:xfrm>
           <a:prstGeom prst="rect">
             <a:avLst/>
@@ -10579,8 +10579,8 @@
         </p:nvSpPr>
         <p:spPr>
           <a:xfrm>
-            <a:off x="777240" y="2286000"/>
-            <a:ext cx="6126480" cy="1463040"/>
+            <a:off x="777240" y="2606040"/>
+            <a:ext cx="6309360" cy="868680"/>
           </a:xfrm>
           <a:prstGeom prst="rect">
             <a:avLst/>
@@ -10599,7 +10599,7 @@
               </a:lnSpc>
             </a:pPr>
             <a:r>
-              <a:rPr sz="5000" b="1" i="0">
+              <a:rPr sz="4400" b="1" i="0">
                 <a:solidFill>
                   <a:srgbClr val="ECEFF3"/>
                 </a:solidFill>
@@ -10608,7 +10608,7 @@
               <a:t>The year is </a:t>
             </a:r>
             <a:r>
-              <a:rPr sz="5000" b="1" i="0">
+              <a:rPr sz="4400" b="1" i="0">
                 <a:solidFill>
                   <a:srgbClr val="E7AC51"/>
                 </a:solidFill>
@@ -10627,8 +10627,8 @@
         </p:nvSpPr>
         <p:spPr>
           <a:xfrm>
-            <a:off x="777240" y="3977639"/>
-            <a:ext cx="6035040" cy="1463040"/>
+            <a:off x="777240" y="3611880"/>
+            <a:ext cx="5760720" cy="1188720"/>
           </a:xfrm>
           <a:prstGeom prst="rect">
             <a:avLst/>
@@ -10643,11 +10643,11 @@
           <a:p>
             <a:pPr algn="l">
               <a:lnSpc>
-                <a:spcPct val="130000"/>
+                <a:spcPct val="140000"/>
               </a:lnSpc>
             </a:pPr>
             <a:r>
-              <a:rPr sz="1900" b="0" i="0">
+              <a:rPr sz="1700" b="0" i="0">
                 <a:solidFill>
                   <a:srgbClr val="9DA9B5"/>
                 </a:solidFill>
@@ -10656,7 +10656,7 @@
               <a:t>From here, today's models are a decade old. The real question: what happens when imaging, pathology, and omics finally converge — </a:t>
             </a:r>
             <a:r>
-              <a:rPr sz="1900" b="1" i="0">
+              <a:rPr sz="1700" b="1" i="0">
                 <a:solidFill>
                   <a:srgbClr val="ECEFF3"/>
                 </a:solidFill>
@@ -10683,8 +10683,8 @@
         </p:blipFill>
         <p:spPr>
           <a:xfrm>
-            <a:off x="7040880" y="2305594"/>
-            <a:ext cx="4572000" cy="2612571"/>
+            <a:off x="7132320" y="1828800"/>
+            <a:ext cx="4480560" cy="2560320"/>
           </a:xfrm>
           <a:prstGeom prst="rect">
             <a:avLst/>

--- a/keynote-iwbi-2026/pptx/sections/IWBI2026_Trivedi_02b_EraII_2026.pptx
+++ b/keynote-iwbi-2026/pptx/sections/IWBI2026_Trivedi_02b_EraII_2026.pptx
@@ -25,7 +25,6 @@
     <p:sldId id="273" r:id="rId25"/>
     <p:sldId id="274" r:id="rId26"/>
     <p:sldId id="275" r:id="rId27"/>
-    <p:sldId id="276" r:id="rId28"/>
   </p:sldIdLst>
   <p:sldSz cx="12191695" cy="6858000" type="screen4x3"/>
   <p:notesSz cx="6858000" cy="9144000"/>
@@ -592,7 +591,7 @@
           <a:lstStyle/>
           <a:p>
             <a:r>
-              <a:t>For forty years, the only risk signal we could read off the image was breast density — coarse and subjective. The clinical models we layered on top, Gail and Tyrer-Cuzick, were weak: Tyrer-Cuzick predicts five-year risk at an AUC around 0.62, barely better than chance at the level of the individual.</a:t>
+              <a:t>The image itself carries risk. Yala and colleagues at MIT and MGH showed a deep network reading the mammogram out-predicts the questionnaire models — Mirai, externally validated across three countries at a C-index of 0.76 to 0.81. Among women who developed cancer within five years, it flagged 41.5 percent as high-risk versus 22.9 percent for Tyrer-Cuzick. And this is no longer just research: in June 2025 Clairity received FDA De Novo authorization — the first tool to predict five-year breast-cancer risk from a routine screening mammogram alone, and it was added to the 2026 NCCN guidance. Research model to cleared product to guideline in under five years. There is not yet a primary peer-reviewed validation paper for Clairity.</a:t>
             </a:r>
           </a:p>
         </p:txBody>
@@ -662,7 +661,7 @@
           <a:lstStyle/>
           <a:p>
             <a:r>
-              <a:t>The image itself carries risk. Yala and colleagues at MIT and MGH showed a deep network reading the mammogram out-predicts the questionnaire models — Mirai, externally validated across three countries at a C-index of 0.76 to 0.81. Among women who developed cancer within five years, it flagged 41.5 percent as high-risk versus 22.9 percent for Tyrer-Cuzick. And this is no longer just research: in June 2025 Clairity received FDA De Novo authorization — the first tool to predict five-year breast-cancer risk from a routine screening mammogram alone, and it was added to the 2026 NCCN guidance. Research model to cleared product to guideline in under five years. There is not yet a primary peer-reviewed validation paper for Clairity.</a:t>
+              <a:t>Here is explainability done right, and it is our group's work with Duke. We asked what Mirai was actually keying on. The answer was surprisingly simple: local bilateral dissimilarity — the difference between left and right breast tissue in the same region. A transparent model built only on that asymmetry nearly matched the black box: one-year AUC 0.79 versus 0.84, and in stable-tissue subgroups three-year AUC 0.92. A risk signal you can point to on the image, and audit for where it fails.</a:t>
             </a:r>
           </a:p>
         </p:txBody>
@@ -732,7 +731,7 @@
           <a:lstStyle/>
           <a:p>
             <a:r>
-              <a:t>Here is explainability done right, and it is our group's work with Duke. We asked what Mirai was actually keying on. The answer was surprisingly simple: local bilateral dissimilarity — the difference between left and right breast tissue in the same region. A transparent model built only on that asymmetry nearly matched the black box: one-year AUC 0.79 versus 0.84, and in stable-tissue subgroups three-year AUC 0.92. A risk signal you can point to on the image, and audit for where it fails.</a:t>
+              <a:t>Here is what the model does. A transformer segments the breast arterial calcification on the routine mammogram and reports its burden as an area, in square millimeters — the original image on the left, the model's segmentation on the right. You can see it scale, from mild calcification at about five square millimeters, to moderate at eighteen, to severe at over a hundred. That continuous number is what turns an incidental finding into a graded, quantitative risk marker. Our group built the segmentation model behind this, SCU-Net.</a:t>
             </a:r>
           </a:p>
         </p:txBody>
@@ -802,7 +801,7 @@
           <a:lstStyle/>
           <a:p>
             <a:r>
-              <a:t>Here is what the model does. A transformer segments the breast arterial calcification on the routine mammogram and reports its burden as an area, in square millimeters — the original image on the left, the model's segmentation on the right. You can see it scale, from mild calcification at about five square millimeters, to moderate at eighteen, to severe at over a hundred. That continuous number is what turns an incidental finding into a graded, quantitative risk marker. Our group built the segmentation model behind this, SCU-Net.</a:t>
+              <a:t>Now the outcomes. In a multi-site cohort of more than 120,000 women across Emory and Mayo, AI-quantified BAC independently predicted major adverse cardiovascular events in a graded, dose-response fashion: mild hazard ratios around 1.2, moderate around 1.4, severe around 2.0 to 2.2. And the risk held across every component endpoint within PREVENT categories — heart attack, stroke, heart failure, and all-cause mortality. Crucially, the signal persists in women under 50, a group traditionally deemed low-risk in whom coronary calcium has usually not yet developed. An age-adjusted nomogram from Nerlekar showed a 17 percent increase in MACE per 10 percentiles of BAC and reclassified about 5 percent of women beyond standard scoring, improving the C-statistic from 0.67 to 0.71. And BAC is dynamic, not static: in 41,621 women with serial mammograms, current BAC stayed predictive throughout 8.6 years of follow-up. The commercial FDA-cleared tool reports only presence or absence; quantification is what turns a weak binary flag into an actionable, graded risk marker.</a:t>
             </a:r>
           </a:p>
         </p:txBody>
@@ -872,7 +871,7 @@
           <a:lstStyle/>
           <a:p>
             <a:r>
-              <a:t>Now the outcomes. In a multi-site cohort of more than 120,000 women across Emory and Mayo, AI-quantified BAC independently predicted major adverse cardiovascular events in a graded, dose-response fashion: mild hazard ratios around 1.2, moderate around 1.4, severe around 2.0 to 2.2. And the risk held across every component endpoint within PREVENT categories — heart attack, stroke, heart failure, and all-cause mortality. Crucially, the signal persists in women under 50, a group traditionally deemed low-risk in whom coronary calcium has usually not yet developed. An age-adjusted nomogram from Nerlekar showed a 17 percent increase in MACE per 10 percentiles of BAC and reclassified about 5 percent of women beyond standard scoring, improving the C-statistic from 0.67 to 0.71. And BAC is dynamic, not static: in 41,621 women with serial mammograms, current BAC stayed predictive throughout 8.6 years of follow-up. The commercial FDA-cleared tool reports only presence or absence; quantification is what turns a weak binary flag into an actionable, graded risk marker.</a:t>
+              <a:t>The same calcium biology shows up in the legs. BAC is medial arterial calcification — Mönckeberg sclerosis — the dominant pattern in peripheral arterial disease, distinct from coronary intimal atherosclerosis. In 59,854 women over a median eight years, severe BAC versus zero predicted needing a vascular intervention for PAD: overall adjusted hazard ratio 3.62, and it held across risk-factor subgroups — diabetes 6.81, smoking 5.77, CKD 4.29, hyperlipidemia 3.46, hypertension 3.11 though not significant there. In women under 50 the effect was extreme, a hazard ratio over a hundred, off this scale. The point: BAC refines who actually progresses to needing an intervention, on top of the usual risk factors.</a:t>
             </a:r>
           </a:p>
         </p:txBody>
@@ -942,7 +941,7 @@
           <a:lstStyle/>
           <a:p>
             <a:r>
-              <a:t>The same calcium biology shows up in the legs. BAC is medial arterial calcification — Mönckeberg sclerosis — the dominant pattern in peripheral arterial disease, distinct from coronary intimal atherosclerosis. In 59,854 women over a median eight years, severe BAC versus zero predicted needing a vascular intervention for PAD: overall adjusted hazard ratio 3.62, and it held across risk-factor subgroups — diabetes 6.81, smoking 5.77, CKD 4.29, hyperlipidemia 3.46, hypertension 3.11 though not significant there. In women under 50 the effect was extreme, a hazard ratio over a hundred, off this scale. The point: BAC refines who actually progresses to needing an intervention, on top of the usual risk factors.</a:t>
+              <a:t>It is not only arteries. In 122,011 women, BAC predicted incident valvular heart disease in a dose-response fashion, with strong discrimination — a C-index around 0.80. For severe BAC versus none: aortic stenosis 11.4, aortic regurgitation 3.1, mitral regurgitation 2.6, tricuspid regurgitation 2.3. Mitral stenosis showed no association, p about 0.97 — a built-in negative control, because mitral stenosis is rheumatic, not calcific. Severe BAC carried a five-year incidence of any mild-or-greater valve disease of 19.3 percent versus 4.6 percent — a number-needed-to-scan of seven.</a:t>
             </a:r>
           </a:p>
         </p:txBody>
@@ -1012,7 +1011,7 @@
           <a:lstStyle/>
           <a:p>
             <a:r>
-              <a:t>It is not only arteries. In 122,011 women, BAC predicted incident valvular heart disease in a dose-response fashion, with strong discrimination — a C-index around 0.80. For severe BAC versus none: aortic stenosis 11.4, aortic regurgitation 3.1, mitral regurgitation 2.6, tricuspid regurgitation 2.3. Mitral stenosis showed no association, p about 0.97 — a built-in negative control, because mitral stenosis is rheumatic, not calcific. Severe BAC carried a five-year incidence of any mild-or-greater valve disease of 19.3 percent versus 4.6 percent — a number-needed-to-scan of seven.</a:t>
+              <a:t>Step back, and BAC starts to look like an index of a body-wide calcification tendency. First, coronary artery calcium: in 2,079 women who later had a cardiac CT, the rate of detectable coronary calcium rose stepwise with BAC severity — from 38 percent up to 67 percent — with CAC-over-100 rates two-and-a-half times higher, and BAC independently predicting coronary calcium after adjusting for age. The mammogram is previewing the coronary CT.</a:t>
             </a:r>
           </a:p>
         </p:txBody>
@@ -1082,7 +1081,7 @@
           <a:lstStyle/>
           <a:p>
             <a:r>
-              <a:t>Step back, and BAC starts to look like an index of a body-wide calcification tendency. First, coronary artery calcium: in 2,079 women who later had a cardiac CT, the rate of detectable coronary calcium rose stepwise with BAC severity — from 38 percent up to 67 percent — with CAC-over-100 rates two-and-a-half times higher, and BAC independently predicting coronary calcium after adjusting for age. The mammogram is previewing the coronary CT.</a:t>
+              <a:t>And more surprising, a non-vascular marker: costal cartilage calcification. In 1,311 women with both a mammogram and a chest CT, BAC correlated with costal cartilage calcification — and at the 75th percentile, high BAC was associated with about 3,400 cubic millimeters more cartilage calcification, adjusted for age and diabetes; the median effect was not significant. So BAC indexes calcification that is vascular, valvular, and even skeletal — one free finding pointing to a systemic propensity.</a:t>
             </a:r>
           </a:p>
         </p:txBody>
@@ -1152,7 +1151,7 @@
           <a:lstStyle/>
           <a:p>
             <a:r>
-              <a:t>And more surprising, a non-vascular marker: costal cartilage calcification. In 1,311 women with both a mammogram and a chest CT, BAC correlated with costal cartilage calcification — and at the 75th percentile, high BAC was associated with about 3,400 cubic millimeters more cartilage calcification, adjusted for age and diabetes; the median effect was not significant. So BAC indexes calcification that is vascular, valvular, and even skeletal — one free finding pointing to a systemic propensity.</a:t>
+              <a:t>So how do we close the loop — from a validated model to changed care? Here is the gap: fewer than 7 percent of women at Emory and 15 percent at Mayo even had the chart data needed to compute a standard PREVENT or ASCVD risk score — including women with severe BAC. Detection without action is a missed opportunity at the scale of four to six million women a year. So we built I-BAC, an NIH-funded pragmatic randomized trial — a hybrid effectiveness-implementation design across Emory and Mayo Arizona, about 225,000 screening mammograms a year combined. Aim 1 is formative work with patients and providers to design the notification. Aim 2 randomizes 6,000 women with moderate or severe BAC to notification versus usual care, with patient filtering automated through our Carebricks agentic-AI pipeline. Aim 3 is a RE-AIM evaluation — reach, adoption, fidelity, and harms like anxiety or low-value testing. The primary endpoint is a six-month composite of lipid-panel completion, preventive-medication change, or CAC testing. Our precedent is NOTIFY-PICTURE for incidental coronary calcium — but BAC is harder, because it has no established management guideline yet.</a:t>
             </a:r>
           </a:p>
         </p:txBody>
@@ -1222,7 +1221,7 @@
           <a:lstStyle/>
           <a:p>
             <a:r>
-              <a:t>So how do we close the loop — from a validated model to changed care? Here is the gap: fewer than 7 percent of women at Emory and 15 percent at Mayo even had the chart data needed to compute a standard PREVENT or ASCVD risk score — including women with severe BAC. Detection without action is a missed opportunity at the scale of four to six million women a year. So we built I-BAC, an NIH-funded pragmatic randomized trial — a hybrid effectiveness-implementation design across Emory and Mayo Arizona, about 225,000 screening mammograms a year combined. Aim 1 is formative work with patients and providers to design the notification. Aim 2 randomizes 6,000 women with moderate or severe BAC to notification versus usual care, with patient filtering automated through our Carebricks agentic-AI pipeline. Aim 3 is a RE-AIM evaluation — reach, adoption, fidelity, and harms like anxiety or low-value testing. The primary endpoint is a six-month composite of lipid-panel completion, preventive-medication change, or CAC testing. Our precedent is NOTIFY-PICTURE for incidental coronary calcium — but BAC is harder, because it has no established management guideline yet.</a:t>
+              <a:t>Step back and notice what every one of these has in common. Risk from the image, a cardiovascular signal from the calcium, a molecular score from the tissue — each is still one model reading one modality. The real frontier is to stop doing that: to combine the image, the pathology, the genome, and the clinical record into a single model of the patient. We are right at the verge of that — multimodal, multi-omics AI. And to see where it goes, we have to leave 2026.</a:t>
             </a:r>
           </a:p>
         </p:txBody>
@@ -1362,76 +1361,6 @@
           <a:lstStyle/>
           <a:p>
             <a:r>
-              <a:t>Step back and notice what every one of these has in common. Risk from the image, a cardiovascular signal from the calcium, a molecular score from the tissue — each is still one model reading one modality. The real frontier is to stop doing that: to combine the image, the pathology, the genome, and the clinical record into a single model of the patient. We are right at the verge of that — multimodal, multi-omics AI. And to see where it goes, we have to leave 2026.</a:t>
-            </a:r>
-          </a:p>
-        </p:txBody>
-      </p:sp>
-      <p:sp>
-        <p:nvSpPr>
-          <p:cNvPr id="4" name="Slide Number Placeholder 3"/>
-          <p:cNvSpPr>
-            <a:spLocks noGrp="1"/>
-          </p:cNvSpPr>
-          <p:nvPr>
-            <p:ph type="sldNum" idx="5" sz="quarter"/>
-          </p:nvPr>
-        </p:nvSpPr>
-        <p:spPr/>
-      </p:sp>
-    </p:spTree>
-  </p:cSld>
-  <p:clrMapOvr>
-    <a:masterClrMapping/>
-  </p:clrMapOvr>
-</p:notes>
-</file>
-
-<file path=ppt/notesSlides/notesSlide21.xml><?xml version="1.0" encoding="utf-8"?>
-<p:notes xmlns:a="http://schemas.openxmlformats.org/drawingml/2006/main" xmlns:p="http://schemas.openxmlformats.org/presentationml/2006/main" xmlns:r="http://schemas.openxmlformats.org/officeDocument/2006/relationships">
-  <p:cSld>
-    <p:spTree>
-      <p:nvGrpSpPr>
-        <p:cNvPr id="1" name=""/>
-        <p:cNvGrpSpPr/>
-        <p:nvPr/>
-      </p:nvGrpSpPr>
-      <p:grpSpPr>
-        <a:xfrm>
-          <a:off x="0" y="0"/>
-          <a:ext cx="0" cy="0"/>
-          <a:chOff x="0" y="0"/>
-          <a:chExt cx="0" cy="0"/>
-        </a:xfrm>
-      </p:grpSpPr>
-      <p:sp>
-        <p:nvSpPr>
-          <p:cNvPr id="2" name="Slide Image Placeholder 1"/>
-          <p:cNvSpPr>
-            <a:spLocks noGrp="1"/>
-          </p:cNvSpPr>
-          <p:nvPr>
-            <p:ph type="sldImg" idx="2"/>
-          </p:nvPr>
-        </p:nvSpPr>
-        <p:spPr/>
-      </p:sp>
-      <p:sp>
-        <p:nvSpPr>
-          <p:cNvPr id="3" name="Notes Placeholder 2"/>
-          <p:cNvSpPr>
-            <a:spLocks noGrp="1"/>
-          </p:cNvSpPr>
-          <p:nvPr>
-            <p:ph type="body" idx="3" sz="quarter"/>
-          </p:nvPr>
-        </p:nvSpPr>
-        <p:spPr/>
-        <p:txBody>
-          <a:bodyPr/>
-          <a:lstStyle/>
-          <a:p>
-            <a:r>
               <a:t>So get back in the time machine, and come forward another ten years — to 2035. From here, everything we just saw — image-based risk, the cardiovascular signal, the molecular score — is a decade old. The question now is what we can do when all of it finally comes together, on one patient.</a:t>
             </a:r>
           </a:p>
@@ -1712,7 +1641,7 @@
           <a:lstStyle/>
           <a:p>
             <a:r>
-              <a:t>First, intracranial hemorrhage on head CT. A commercial detection model looked strong overall — 82.2 percent sensitivity. But broken down by the age of the bleed, it collapsed: subacute hemorrhages were caught only 45.5 percent of the time, chronic ones 54.8 percent. And in the outpatient setting, where bleeds are subtler, sensitivity fell to 72.2 percent. The same shape as breast: strong average, weak where it matters.</a:t>
+              <a:t>Two organs beyond breast, same story. On head CT, a commercial intracranial-hemorrhage detector looked strong overall at 82.2 percent — but by the age of the bleed it collapsed: subacute 45.5 percent, chronic 54.8 percent, and in the outpatient setting 72.2 percent. On chest CT, an FDA-cleared pulmonary-embolism model cleared at 94.9 percent reached 86.8 percent overall across two years of real-world CT angiograms, then fell apart on the hard cases — non-acute 65.3 percent, subsegmental 72.9 percent, left-sided 70.5 percent, and incidental PE on routine scans just 73.5 percent (354 of 538). Same shape as breast: a strong average, weak exactly where it matters.</a:t>
             </a:r>
           </a:p>
         </p:txBody>
@@ -1782,7 +1711,7 @@
           <a:lstStyle/>
           <a:p>
             <a:r>
-              <a:t>Second, pulmonary embolism on chest CT — our own evaluation, not yet published. An FDA-cleared model was cleared at 94.9 percent sensitivity. Across two years of real-world data — about thirty thousand dedicated CT angiograms — it reached 86.8 percent overall. But again it fell apart in the hard cases: non-acute clots 65.3 percent, the small subsegmental clots 72.9 percent, left-sided 70.5 percent. And on routine CTs done for other reasons, incidental PE was caught only 73.5 percent of the time — 354 of 538. Same story, different organ: the clearance number is not the number you get on the cases that are easy to miss.</a:t>
+              <a:t>Before we cross into Era III, one plug. All of this work runs on EMBED — the Emory Breast Imaging Dataset — which we have made free to researchers worldwide through the AWS Open Data Program. The first release is described in our Radiology: Artificial Intelligence paper. And we are finishing EMBED version two: nearly 300,000 patients, about a million exams, both 2D and tomosynthesis, 50,000 ultrasound and 25,000 MRI studies, outcomes harmonized with state and local cancer registries, the free-text radiology reports, and patient risk data. The map gives a sense of the reach — researchers on every continent are already using it.</a:t>
             </a:r>
           </a:p>
         </p:txBody>
@@ -1852,7 +1781,7 @@
           <a:lstStyle/>
           <a:p>
             <a:r>
-              <a:t>Before we cross into Era III, one plug. All of this work runs on EMBED — the Emory Breast Imaging Dataset — which we have made free to researchers worldwide through the AWS Open Data Program. The first release is described in our Radiology: Artificial Intelligence paper. And we are finishing EMBED version two: nearly 300,000 patients, about a million exams, both 2D and tomosynthesis, 50,000 ultrasound and 25,000 MRI studies, outcomes harmonized with state and local cancer registries, the free-text radiology reports, and patient risk data. The map gives a sense of the reach — researchers on every continent are already using it.</a:t>
+              <a:t>So detection works — we now have the prospective evidence. But here is what is striking: it is still 2026, and the very same mammogram — and the tissue that follows it — already tells us far more than whether there is a cancer today. From this one screening image we can read a woman's future risk and a cardiovascular signal; from her biopsy slide, a molecular recurrence score. We are standing at the brink of Era III — the shift from finding the lesion to characterizing the patient — and, remarkably, much of it is available right now.</a:t>
             </a:r>
           </a:p>
         </p:txBody>
@@ -1922,7 +1851,7 @@
           <a:lstStyle/>
           <a:p>
             <a:r>
-              <a:t>So detection works — we now have the prospective evidence. But here is what is striking: it is still 2026, and the very same mammogram — and the tissue that follows it — already tells us far more than whether there is a cancer today. From this one screening image we can read a woman's future risk and a cardiovascular signal; from her biopsy slide, a molecular recurrence score. We are standing at the brink of Era III — the shift from finding the lesion to characterizing the patient — and, remarkably, much of it is available right now.</a:t>
+              <a:t>For forty years, the only risk signal we could read off the image was breast density — coarse and subjective. The clinical models we layered on top, Gail and Tyrer-Cuzick, were weak: Tyrer-Cuzick predicts five-year risk at an AUC around 0.62, barely better than chance at the level of the individual.</a:t>
             </a:r>
           </a:p>
         </p:txBody>
@@ -5304,8 +5233,8 @@
         </p:nvSpPr>
         <p:spPr>
           <a:xfrm>
-            <a:off x="777240" y="1828800"/>
-            <a:ext cx="6126480" cy="2926080"/>
+            <a:off x="777240" y="1005840"/>
+            <a:ext cx="5852160" cy="1280160"/>
           </a:xfrm>
           <a:prstGeom prst="rect">
             <a:avLst/>
@@ -5320,71 +5249,26 @@
           <a:p>
             <a:pPr algn="l">
               <a:lnSpc>
-                <a:spcPct val="132000"/>
+                <a:spcPct val="112000"/>
               </a:lnSpc>
             </a:pPr>
             <a:r>
-              <a:rPr sz="2400" b="0" i="0">
-                <a:solidFill>
-                  <a:srgbClr val="9DA9B5"/>
-                </a:solidFill>
-                <a:latin typeface="Arial"/>
-              </a:rPr>
-              <a:t>For 40 years, the only risk signal we could read off the image was </a:t>
-            </a:r>
-            <a:r>
-              <a:rPr sz="2400" b="0" i="0">
+              <a:rPr sz="2600" b="1" i="0">
                 <a:solidFill>
                   <a:srgbClr val="E7AC51"/>
                 </a:solidFill>
                 <a:latin typeface="Arial"/>
               </a:rPr>
-              <a:t>density</a:t>
-            </a:r>
-            <a:r>
-              <a:rPr sz="2400" b="0" i="0">
-                <a:solidFill>
-                  <a:srgbClr val="9DA9B5"/>
-                </a:solidFill>
-                <a:latin typeface="Arial"/>
-              </a:rPr>
-              <a:t>. The clinical models layered on top — </a:t>
-            </a:r>
-            <a:r>
-              <a:rPr sz="2400" b="0" i="0">
-                <a:solidFill>
-                  <a:srgbClr val="E7AC51"/>
-                </a:solidFill>
-                <a:latin typeface="Arial"/>
-              </a:rPr>
-              <a:t>Gail</a:t>
-            </a:r>
-            <a:r>
-              <a:rPr sz="2400" b="0" i="0">
-                <a:solidFill>
-                  <a:srgbClr val="9DA9B5"/>
-                </a:solidFill>
-                <a:latin typeface="Arial"/>
-              </a:rPr>
-              <a:t> and </a:t>
-            </a:r>
-            <a:r>
-              <a:rPr sz="2400" b="0" i="0">
-                <a:solidFill>
-                  <a:srgbClr val="E7AC51"/>
-                </a:solidFill>
-                <a:latin typeface="Arial"/>
-              </a:rPr>
-              <a:t>Tyrer-Cuzick</a:t>
-            </a:r>
-            <a:r>
-              <a:rPr sz="2400" b="0" i="0">
-                <a:solidFill>
-                  <a:srgbClr val="9DA9B5"/>
-                </a:solidFill>
-                <a:latin typeface="Arial"/>
-              </a:rPr>
-              <a:t> — were hardly better than a coin flip.</a:t>
+              <a:t>Image-based risk</a:t>
+            </a:r>
+            <a:r>
+              <a:rPr sz="2600" b="1" i="0">
+                <a:solidFill>
+                  <a:srgbClr val="ECEFF3"/>
+                </a:solidFill>
+                <a:latin typeface="Arial"/>
+              </a:rPr>
+              <a:t> — Mirai and a de novo FDA clearance.</a:t>
             </a:r>
           </a:p>
         </p:txBody>
@@ -5397,91 +5281,8 @@
         </p:nvSpPr>
         <p:spPr>
           <a:xfrm>
-            <a:off x="777240" y="5120640"/>
-            <a:ext cx="6126480" cy="457200"/>
-          </a:xfrm>
-          <a:prstGeom prst="rect">
-            <a:avLst/>
-          </a:prstGeom>
-          <a:noFill/>
-        </p:spPr>
-        <p:txBody>
-          <a:bodyPr wrap="square" anchor="t" lIns="0" rIns="0" tIns="0" bIns="0">
-            <a:spAutoFit/>
-          </a:bodyPr>
-          <a:lstStyle/>
-          <a:p>
-            <a:pPr algn="l">
-              <a:lnSpc>
-                <a:spcPct val="130000"/>
-              </a:lnSpc>
-            </a:pPr>
-            <a:r>
-              <a:rPr sz="950" b="0" i="0">
-                <a:solidFill>
-                  <a:srgbClr val="5C6975"/>
-                </a:solidFill>
-                <a:latin typeface="Consolas"/>
-              </a:rPr>
-              <a:t>Gail · Tyrer-Cuzick · BCSC — questionnaire + density models</a:t>
-            </a:r>
-          </a:p>
-        </p:txBody>
-      </p:sp>
-      <p:sp>
-        <p:nvSpPr>
-          <p:cNvPr id="7" name="Rectangle 6"/>
-          <p:cNvSpPr/>
-          <p:nvPr/>
-        </p:nvSpPr>
-        <p:spPr>
-          <a:xfrm>
-            <a:off x="7315200" y="2011680"/>
-            <a:ext cx="12700" cy="2194560"/>
-          </a:xfrm>
-          <a:prstGeom prst="rect">
-            <a:avLst/>
-          </a:prstGeom>
-          <a:solidFill>
-            <a:srgbClr val="2A333D"/>
-          </a:solidFill>
-          <a:ln>
-            <a:noFill/>
-          </a:ln>
-          <a:effectLst/>
-        </p:spPr>
-        <p:style>
-          <a:lnRef idx="1">
-            <a:schemeClr val="accent1"/>
-          </a:lnRef>
-          <a:fillRef idx="3">
-            <a:schemeClr val="accent1"/>
-          </a:fillRef>
-          <a:effectRef idx="2">
-            <a:schemeClr val="accent1"/>
-          </a:effectRef>
-          <a:fontRef idx="minor">
-            <a:schemeClr val="lt1"/>
-          </a:fontRef>
-        </p:style>
-        <p:txBody>
-          <a:bodyPr rtlCol="0" anchor="ctr"/>
-          <a:lstStyle/>
-          <a:p>
-            <a:pPr algn="ctr"/>
-          </a:p>
-        </p:txBody>
-      </p:sp>
-      <p:sp>
-        <p:nvSpPr>
-          <p:cNvPr id="8" name="TextBox 7"/>
-          <p:cNvSpPr txBox="1"/>
-          <p:nvPr/>
-        </p:nvSpPr>
-        <p:spPr>
-          <a:xfrm>
-            <a:off x="7680960" y="2148840"/>
-            <a:ext cx="4206240" cy="502920"/>
+            <a:off x="777240" y="2743200"/>
+            <a:ext cx="5486400" cy="502920"/>
           </a:xfrm>
           <a:prstGeom prst="rect">
             <a:avLst/>
@@ -5500,27 +5301,27 @@
               </a:lnSpc>
             </a:pPr>
             <a:r>
-              <a:rPr sz="2200" b="1" i="0">
-                <a:solidFill>
-                  <a:srgbClr val="ECEFF3"/>
-                </a:solidFill>
-                <a:latin typeface="Arial"/>
-              </a:rPr>
-              <a:t>~0.62</a:t>
-            </a:r>
-          </a:p>
-        </p:txBody>
-      </p:sp>
-      <p:sp>
-        <p:nvSpPr>
-          <p:cNvPr id="9" name="TextBox 8"/>
+              <a:rPr sz="4000" b="1" i="0">
+                <a:solidFill>
+                  <a:srgbClr val="E7AC51"/>
+                </a:solidFill>
+                <a:latin typeface="Arial"/>
+              </a:rPr>
+              <a:t>0.76–0.81</a:t>
+            </a:r>
+          </a:p>
+        </p:txBody>
+      </p:sp>
+      <p:sp>
+        <p:nvSpPr>
+          <p:cNvPr id="7" name="TextBox 6"/>
           <p:cNvSpPr txBox="1"/>
           <p:nvPr/>
         </p:nvSpPr>
         <p:spPr>
           <a:xfrm>
-            <a:off x="7680960" y="2441448"/>
-            <a:ext cx="4206240" cy="548640"/>
+            <a:off x="777240" y="3200400"/>
+            <a:ext cx="5486400" cy="548640"/>
           </a:xfrm>
           <a:prstGeom prst="rect">
             <a:avLst/>
@@ -5545,21 +5346,21 @@
                 </a:solidFill>
                 <a:latin typeface="Consolas"/>
               </a:rPr>
-              <a:t>Tyrer-Cuzick v8 · 5-yr AUC</a:t>
-            </a:r>
-          </a:p>
-        </p:txBody>
-      </p:sp>
-      <p:sp>
-        <p:nvSpPr>
-          <p:cNvPr id="10" name="TextBox 9"/>
+              <a:t>Mirai C-index · 3 countries</a:t>
+            </a:r>
+          </a:p>
+        </p:txBody>
+      </p:sp>
+      <p:sp>
+        <p:nvSpPr>
+          <p:cNvPr id="8" name="TextBox 7"/>
           <p:cNvSpPr txBox="1"/>
           <p:nvPr/>
         </p:nvSpPr>
         <p:spPr>
           <a:xfrm>
-            <a:off x="7680960" y="2971800"/>
-            <a:ext cx="4206240" cy="502920"/>
+            <a:off x="777240" y="4114800"/>
+            <a:ext cx="5486400" cy="502920"/>
           </a:xfrm>
           <a:prstGeom prst="rect">
             <a:avLst/>
@@ -5578,27 +5379,27 @@
               </a:lnSpc>
             </a:pPr>
             <a:r>
-              <a:rPr sz="2200" b="1" i="0">
-                <a:solidFill>
-                  <a:srgbClr val="ECEFF3"/>
-                </a:solidFill>
-                <a:latin typeface="Arial"/>
-              </a:rPr>
-              <a:t>~0.55–0.58</a:t>
-            </a:r>
-          </a:p>
-        </p:txBody>
-      </p:sp>
-      <p:sp>
-        <p:nvSpPr>
-          <p:cNvPr id="11" name="TextBox 10"/>
+              <a:rPr sz="4000" b="1" i="0">
+                <a:solidFill>
+                  <a:srgbClr val="E7AC51"/>
+                </a:solidFill>
+                <a:latin typeface="Arial"/>
+              </a:rPr>
+              <a:t>&lt; 5 yr</a:t>
+            </a:r>
+          </a:p>
+        </p:txBody>
+      </p:sp>
+      <p:sp>
+        <p:nvSpPr>
+          <p:cNvPr id="9" name="TextBox 8"/>
           <p:cNvSpPr txBox="1"/>
           <p:nvPr/>
         </p:nvSpPr>
         <p:spPr>
           <a:xfrm>
-            <a:off x="7680960" y="3264408"/>
-            <a:ext cx="4206240" cy="548640"/>
+            <a:off x="777240" y="4572000"/>
+            <a:ext cx="5486400" cy="548640"/>
           </a:xfrm>
           <a:prstGeom prst="rect">
             <a:avLst/>
@@ -5623,59 +5424,35 @@
                 </a:solidFill>
                 <a:latin typeface="Consolas"/>
               </a:rPr>
-              <a:t>Gail model · 5-yr AUC</a:t>
-            </a:r>
-          </a:p>
-        </p:txBody>
-      </p:sp>
-      <p:sp>
-        <p:nvSpPr>
-          <p:cNvPr id="12" name="TextBox 11"/>
-          <p:cNvSpPr txBox="1"/>
-          <p:nvPr/>
-        </p:nvSpPr>
-        <p:spPr>
-          <a:xfrm>
-            <a:off x="7680960" y="3886200"/>
-            <a:ext cx="4206240" cy="822960"/>
-          </a:xfrm>
-          <a:prstGeom prst="rect">
-            <a:avLst/>
-          </a:prstGeom>
-          <a:noFill/>
-        </p:spPr>
-        <p:txBody>
-          <a:bodyPr wrap="square" anchor="t" lIns="0" rIns="0" tIns="0" bIns="0">
-            <a:spAutoFit/>
-          </a:bodyPr>
-          <a:lstStyle/>
-          <a:p>
-            <a:pPr algn="l">
-              <a:lnSpc>
-                <a:spcPct val="135000"/>
-              </a:lnSpc>
-            </a:pPr>
-            <a:r>
-              <a:rPr sz="1300" b="0" i="0">
-                <a:solidFill>
-                  <a:srgbClr val="ECEFF3"/>
-                </a:solidFill>
-                <a:latin typeface="Arial"/>
-              </a:rPr>
-              <a:t>Coin flip is 0.50. </a:t>
-            </a:r>
-            <a:r>
-              <a:rPr sz="1300" b="0" i="0">
-                <a:solidFill>
-                  <a:srgbClr val="9DA9B5"/>
-                </a:solidFill>
-                <a:latin typeface="Arial"/>
-              </a:rPr>
-              <a:t>For the woman in front of you, barely above it.</a:t>
-            </a:r>
-          </a:p>
-        </p:txBody>
-      </p:sp>
+              <a:t>research → cleared → guideline</a:t>
+            </a:r>
+          </a:p>
+        </p:txBody>
+      </p:sp>
+      <p:pic>
+        <p:nvPicPr>
+          <p:cNvPr id="10" name="Picture 9" descr="svg_39113bbbe0.png"/>
+          <p:cNvPicPr>
+            <a:picLocks noChangeAspect="1"/>
+          </p:cNvPicPr>
+          <p:nvPr/>
+        </p:nvPicPr>
+        <p:blipFill>
+          <a:blip r:embed="rId4"/>
+          <a:stretch>
+            <a:fillRect/>
+          </a:stretch>
+        </p:blipFill>
+        <p:spPr>
+          <a:xfrm>
+            <a:off x="6400800" y="1577339"/>
+            <a:ext cx="5303520" cy="3977640"/>
+          </a:xfrm>
+          <a:prstGeom prst="rect">
+            <a:avLst/>
+          </a:prstGeom>
+        </p:spPr>
+      </p:pic>
     </p:spTree>
   </p:cSld>
   <p:clrMapOvr>
@@ -5818,7 +5595,7 @@
         <p:spPr>
           <a:xfrm>
             <a:off x="777240" y="1005840"/>
-            <a:ext cx="5852160" cy="1280160"/>
+            <a:ext cx="5760720" cy="1280160"/>
           </a:xfrm>
           <a:prstGeom prst="rect">
             <a:avLst/>
@@ -5843,7 +5620,7 @@
                 </a:solidFill>
                 <a:latin typeface="Arial"/>
               </a:rPr>
-              <a:t>Image-based risk</a:t>
+              <a:t>AsymMirai</a:t>
             </a:r>
             <a:r>
               <a:rPr sz="2600" b="1" i="0">
@@ -5852,7 +5629,7 @@
                 </a:solidFill>
                 <a:latin typeface="Arial"/>
               </a:rPr>
-              <a:t> — Mirai and a de novo FDA clearance.</a:t>
+              <a:t> — an explainable risk model.</a:t>
             </a:r>
           </a:p>
         </p:txBody>
@@ -5865,8 +5642,8 @@
         </p:nvSpPr>
         <p:spPr>
           <a:xfrm>
-            <a:off x="777240" y="2743200"/>
-            <a:ext cx="5486400" cy="502920"/>
+            <a:off x="777240" y="2651760"/>
+            <a:ext cx="5669280" cy="914400"/>
           </a:xfrm>
           <a:prstGeom prst="rect">
             <a:avLst/>
@@ -5881,141 +5658,106 @@
           <a:p>
             <a:pPr algn="l">
               <a:lnSpc>
-                <a:spcPct val="100000"/>
+                <a:spcPct val="140000"/>
               </a:lnSpc>
             </a:pPr>
             <a:r>
-              <a:rPr sz="4000" b="1" i="0">
-                <a:solidFill>
-                  <a:srgbClr val="E7AC51"/>
-                </a:solidFill>
-                <a:latin typeface="Arial"/>
-              </a:rPr>
-              <a:t>0.76–0.81</a:t>
-            </a:r>
-          </a:p>
-        </p:txBody>
-      </p:sp>
-      <p:sp>
-        <p:nvSpPr>
-          <p:cNvPr id="7" name="TextBox 6"/>
-          <p:cNvSpPr txBox="1"/>
-          <p:nvPr/>
-        </p:nvSpPr>
-        <p:spPr>
-          <a:xfrm>
-            <a:off x="777240" y="3200400"/>
-            <a:ext cx="5486400" cy="548640"/>
-          </a:xfrm>
-          <a:prstGeom prst="rect">
-            <a:avLst/>
-          </a:prstGeom>
-          <a:noFill/>
-        </p:spPr>
-        <p:txBody>
-          <a:bodyPr wrap="square" anchor="t" lIns="0" rIns="0" tIns="0" bIns="0">
-            <a:spAutoFit/>
-          </a:bodyPr>
-          <a:lstStyle/>
-          <a:p>
-            <a:pPr algn="l">
-              <a:lnSpc>
-                <a:spcPct val="120000"/>
-              </a:lnSpc>
-            </a:pPr>
-            <a:r>
-              <a:rPr sz="1100" b="0" i="0">
+              <a:rPr sz="1500" b="0" i="0">
                 <a:solidFill>
                   <a:srgbClr val="9DA9B5"/>
                 </a:solidFill>
-                <a:latin typeface="Consolas"/>
-              </a:rPr>
-              <a:t>Mirai C-index · 3 countries</a:t>
-            </a:r>
-          </a:p>
-        </p:txBody>
-      </p:sp>
-      <p:sp>
-        <p:nvSpPr>
-          <p:cNvPr id="8" name="TextBox 7"/>
-          <p:cNvSpPr txBox="1"/>
-          <p:nvPr/>
-        </p:nvSpPr>
-        <p:spPr>
-          <a:xfrm>
-            <a:off x="777240" y="4114800"/>
-            <a:ext cx="5486400" cy="502920"/>
-          </a:xfrm>
-          <a:prstGeom prst="rect">
-            <a:avLst/>
-          </a:prstGeom>
-          <a:noFill/>
-        </p:spPr>
-        <p:txBody>
-          <a:bodyPr wrap="square" anchor="t" lIns="0" rIns="0" tIns="0" bIns="0">
-            <a:spAutoFit/>
-          </a:bodyPr>
-          <a:lstStyle/>
-          <a:p>
-            <a:pPr algn="l">
-              <a:lnSpc>
-                <a:spcPct val="100000"/>
-              </a:lnSpc>
-            </a:pPr>
-            <a:r>
-              <a:rPr sz="4000" b="1" i="0">
-                <a:solidFill>
-                  <a:srgbClr val="E7AC51"/>
-                </a:solidFill>
-                <a:latin typeface="Arial"/>
-              </a:rPr>
-              <a:t>&lt; 5 yr</a:t>
-            </a:r>
-          </a:p>
-        </p:txBody>
-      </p:sp>
-      <p:sp>
-        <p:nvSpPr>
-          <p:cNvPr id="9" name="TextBox 8"/>
-          <p:cNvSpPr txBox="1"/>
-          <p:nvPr/>
-        </p:nvSpPr>
-        <p:spPr>
-          <a:xfrm>
-            <a:off x="777240" y="4572000"/>
-            <a:ext cx="5486400" cy="548640"/>
-          </a:xfrm>
-          <a:prstGeom prst="rect">
-            <a:avLst/>
-          </a:prstGeom>
-          <a:noFill/>
-        </p:spPr>
-        <p:txBody>
-          <a:bodyPr wrap="square" anchor="t" lIns="0" rIns="0" tIns="0" bIns="0">
-            <a:spAutoFit/>
-          </a:bodyPr>
-          <a:lstStyle/>
-          <a:p>
-            <a:pPr algn="l">
-              <a:lnSpc>
-                <a:spcPct val="120000"/>
-              </a:lnSpc>
-            </a:pPr>
-            <a:r>
-              <a:rPr sz="1100" b="0" i="0">
+                <a:latin typeface="Arial"/>
+              </a:rPr>
+              <a:t>1-yr AUC </a:t>
+            </a:r>
+            <a:r>
+              <a:rPr sz="1500" b="1" i="0">
+                <a:solidFill>
+                  <a:srgbClr val="ECEFF3"/>
+                </a:solidFill>
+                <a:latin typeface="Arial"/>
+              </a:rPr>
+              <a:t>0.79</a:t>
+            </a:r>
+            <a:r>
+              <a:rPr sz="1500" b="0" i="0">
                 <a:solidFill>
                   <a:srgbClr val="9DA9B5"/>
                 </a:solidFill>
-                <a:latin typeface="Consolas"/>
-              </a:rPr>
-              <a:t>research → cleared → guideline</a:t>
-            </a:r>
+                <a:latin typeface="Arial"/>
+              </a:rPr>
+              <a:t> vs Mirai 0.84  ·  3-yr AUC </a:t>
+            </a:r>
+            <a:r>
+              <a:rPr sz="1500" b="1" i="0">
+                <a:solidFill>
+                  <a:srgbClr val="ECEFF3"/>
+                </a:solidFill>
+                <a:latin typeface="Arial"/>
+              </a:rPr>
+              <a:t>0.92</a:t>
+            </a:r>
+            <a:r>
+              <a:rPr sz="1500" b="0" i="0">
+                <a:solidFill>
+                  <a:srgbClr val="9DA9B5"/>
+                </a:solidFill>
+                <a:latin typeface="Arial"/>
+              </a:rPr>
+              <a:t> (stable tissue)</a:t>
+            </a:r>
+          </a:p>
+        </p:txBody>
+      </p:sp>
+      <p:sp>
+        <p:nvSpPr>
+          <p:cNvPr id="7" name="Rounded Rectangle 6"/>
+          <p:cNvSpPr/>
+          <p:nvPr/>
+        </p:nvSpPr>
+        <p:spPr>
+          <a:xfrm>
+            <a:off x="6309360" y="1933103"/>
+            <a:ext cx="5486400" cy="3266112"/>
+          </a:xfrm>
+          <a:prstGeom prst="roundRect">
+            <a:avLst/>
+          </a:prstGeom>
+          <a:solidFill>
+            <a:srgbClr val="FFFFFF"/>
+          </a:solidFill>
+          <a:ln w="9525">
+            <a:solidFill>
+              <a:srgbClr val="C98A2E"/>
+            </a:solidFill>
+          </a:ln>
+          <a:effectLst/>
+        </p:spPr>
+        <p:style>
+          <a:lnRef idx="1">
+            <a:schemeClr val="accent1"/>
+          </a:lnRef>
+          <a:fillRef idx="3">
+            <a:schemeClr val="accent1"/>
+          </a:fillRef>
+          <a:effectRef idx="2">
+            <a:schemeClr val="accent1"/>
+          </a:effectRef>
+          <a:fontRef idx="minor">
+            <a:schemeClr val="lt1"/>
+          </a:fontRef>
+        </p:style>
+        <p:txBody>
+          <a:bodyPr rtlCol="0" anchor="ctr"/>
+          <a:lstStyle/>
+          <a:p>
+            <a:pPr algn="ctr"/>
           </a:p>
         </p:txBody>
       </p:sp>
       <p:pic>
         <p:nvPicPr>
-          <p:cNvPr id="10" name="Picture 9" descr="svg_39113bbbe0.png"/>
+          <p:cNvPr id="8" name="Picture 7" descr="img_a5bc477317.jpg"/>
           <p:cNvPicPr>
             <a:picLocks noChangeAspect="1"/>
           </p:cNvPicPr>
@@ -6029,8 +5771,8 @@
         </p:blipFill>
         <p:spPr>
           <a:xfrm>
-            <a:off x="6400800" y="1577339"/>
-            <a:ext cx="5303520" cy="3977640"/>
+            <a:off x="6400800" y="2024543"/>
+            <a:ext cx="5303520" cy="3083232"/>
           </a:xfrm>
           <a:prstGeom prst="rect">
             <a:avLst/>
@@ -6179,7 +5921,7 @@
         <p:spPr>
           <a:xfrm>
             <a:off x="777240" y="1005840"/>
-            <a:ext cx="5760720" cy="1280160"/>
+            <a:ext cx="5852160" cy="1280160"/>
           </a:xfrm>
           <a:prstGeom prst="rect">
             <a:avLst/>
@@ -6198,22 +5940,22 @@
               </a:lnSpc>
             </a:pPr>
             <a:r>
-              <a:rPr sz="2600" b="1" i="0">
+              <a:rPr sz="2300" b="1" i="0">
+                <a:solidFill>
+                  <a:srgbClr val="ECEFF3"/>
+                </a:solidFill>
+                <a:latin typeface="Arial"/>
+              </a:rPr>
+              <a:t>Breast Arterial Calcification (BAC) as a </a:t>
+            </a:r>
+            <a:r>
+              <a:rPr sz="2300" b="1" i="0">
                 <a:solidFill>
                   <a:srgbClr val="E7AC51"/>
                 </a:solidFill>
                 <a:latin typeface="Arial"/>
               </a:rPr>
-              <a:t>AsymMirai</a:t>
-            </a:r>
-            <a:r>
-              <a:rPr sz="2600" b="1" i="0">
-                <a:solidFill>
-                  <a:srgbClr val="ECEFF3"/>
-                </a:solidFill>
-                <a:latin typeface="Arial"/>
-              </a:rPr>
-              <a:t> — an explainable risk model.</a:t>
+              <a:t>continuous measurement (mm²).</a:t>
             </a:r>
           </a:p>
         </p:txBody>
@@ -6226,8 +5968,8 @@
         </p:nvSpPr>
         <p:spPr>
           <a:xfrm>
-            <a:off x="777240" y="2651760"/>
-            <a:ext cx="5669280" cy="914400"/>
+            <a:off x="777240" y="2743200"/>
+            <a:ext cx="5852160" cy="2011680"/>
           </a:xfrm>
           <a:prstGeom prst="rect">
             <a:avLst/>
@@ -6246,69 +5988,81 @@
               </a:lnSpc>
             </a:pPr>
             <a:r>
-              <a:rPr sz="1500" b="0" i="0">
+              <a:rPr sz="1450" b="0" i="0">
                 <a:solidFill>
                   <a:srgbClr val="9DA9B5"/>
                 </a:solidFill>
                 <a:latin typeface="Arial"/>
               </a:rPr>
-              <a:t>1-yr AUC </a:t>
-            </a:r>
-            <a:r>
-              <a:rPr sz="1500" b="1" i="0">
+              <a:t>A transformer segments breast arterial calcification on the routine mammogram and quantifies its area — turning an incidental finding into a </a:t>
+            </a:r>
+            <a:r>
+              <a:rPr sz="1450" b="1" i="0">
                 <a:solidFill>
                   <a:srgbClr val="ECEFF3"/>
                 </a:solidFill>
                 <a:latin typeface="Arial"/>
               </a:rPr>
-              <a:t>0.79</a:t>
-            </a:r>
-            <a:r>
-              <a:rPr sz="1500" b="0" i="0">
-                <a:solidFill>
-                  <a:srgbClr val="9DA9B5"/>
-                </a:solidFill>
-                <a:latin typeface="Arial"/>
-              </a:rPr>
-              <a:t> vs Mirai 0.84  ·  3-yr AUC </a:t>
-            </a:r>
-            <a:r>
-              <a:rPr sz="1500" b="1" i="0">
-                <a:solidFill>
-                  <a:srgbClr val="ECEFF3"/>
-                </a:solidFill>
-                <a:latin typeface="Arial"/>
-              </a:rPr>
-              <a:t>0.92</a:t>
-            </a:r>
-            <a:r>
-              <a:rPr sz="1500" b="0" i="0">
-                <a:solidFill>
-                  <a:srgbClr val="9DA9B5"/>
-                </a:solidFill>
-                <a:latin typeface="Arial"/>
-              </a:rPr>
-              <a:t> (stable tissue)</a:t>
-            </a:r>
-          </a:p>
-        </p:txBody>
-      </p:sp>
-      <p:sp>
-        <p:nvSpPr>
-          <p:cNvPr id="7" name="Rounded Rectangle 6"/>
+              <a:t>graded, quantitative risk marker.</a:t>
+            </a:r>
+          </a:p>
+        </p:txBody>
+      </p:sp>
+      <p:sp>
+        <p:nvSpPr>
+          <p:cNvPr id="7" name="TextBox 6"/>
+          <p:cNvSpPr txBox="1"/>
+          <p:nvPr/>
+        </p:nvSpPr>
+        <p:spPr>
+          <a:xfrm>
+            <a:off x="777240" y="5943600"/>
+            <a:ext cx="5852160" cy="457200"/>
+          </a:xfrm>
+          <a:prstGeom prst="rect">
+            <a:avLst/>
+          </a:prstGeom>
+          <a:noFill/>
+        </p:spPr>
+        <p:txBody>
+          <a:bodyPr wrap="square" anchor="t" lIns="0" rIns="0" tIns="0" bIns="0">
+            <a:spAutoFit/>
+          </a:bodyPr>
+          <a:lstStyle/>
+          <a:p>
+            <a:pPr algn="l">
+              <a:lnSpc>
+                <a:spcPct val="130000"/>
+              </a:lnSpc>
+            </a:pPr>
+            <a:r>
+              <a:rPr sz="950" b="0" i="0">
+                <a:solidFill>
+                  <a:srgbClr val="5C6975"/>
+                </a:solidFill>
+                <a:latin typeface="Consolas"/>
+              </a:rPr>
+              <a:t>Segmentation: SCU-Net (your group). Dapamede et al., Eur Heart J 2026;47(18):2206–2220.</a:t>
+            </a:r>
+          </a:p>
+        </p:txBody>
+      </p:sp>
+      <p:sp>
+        <p:nvSpPr>
+          <p:cNvPr id="8" name="Rounded Rectangle 7"/>
           <p:cNvSpPr/>
           <p:nvPr/>
         </p:nvSpPr>
         <p:spPr>
           <a:xfrm>
-            <a:off x="6309360" y="1933103"/>
-            <a:ext cx="5486400" cy="3266112"/>
+            <a:off x="7584284" y="1097280"/>
+            <a:ext cx="2936551" cy="5120640"/>
           </a:xfrm>
           <a:prstGeom prst="roundRect">
             <a:avLst/>
           </a:prstGeom>
           <a:solidFill>
-            <a:srgbClr val="FFFFFF"/>
+            <a:srgbClr val="000000"/>
           </a:solidFill>
           <a:ln w="9525">
             <a:solidFill>
@@ -6341,7 +6095,7 @@
       </p:sp>
       <p:pic>
         <p:nvPicPr>
-          <p:cNvPr id="8" name="Picture 7" descr="img_a5bc477317.jpg"/>
+          <p:cNvPr id="9" name="Picture 8" descr="img_ebbc2d2c9e.jpg"/>
           <p:cNvPicPr>
             <a:picLocks noChangeAspect="1"/>
           </p:cNvPicPr>
@@ -6355,8 +6109,8 @@
         </p:blipFill>
         <p:spPr>
           <a:xfrm>
-            <a:off x="6400800" y="2024543"/>
-            <a:ext cx="5303520" cy="3083232"/>
+            <a:off x="7675724" y="1188720"/>
+            <a:ext cx="2753671" cy="4937760"/>
           </a:xfrm>
           <a:prstGeom prst="rect">
             <a:avLst/>
@@ -6524,22 +6278,22 @@
               </a:lnSpc>
             </a:pPr>
             <a:r>
-              <a:rPr sz="2300" b="1" i="0">
+              <a:rPr sz="2400" b="1" i="0">
                 <a:solidFill>
                   <a:srgbClr val="ECEFF3"/>
                 </a:solidFill>
                 <a:latin typeface="Arial"/>
               </a:rPr>
-              <a:t>Breast Arterial Calcification (BAC) as a </a:t>
-            </a:r>
-            <a:r>
-              <a:rPr sz="2300" b="1" i="0">
+              <a:t>BAC predicts MACE — </a:t>
+            </a:r>
+            <a:r>
+              <a:rPr sz="2400" b="1" i="0">
                 <a:solidFill>
                   <a:srgbClr val="E7AC51"/>
                 </a:solidFill>
                 <a:latin typeface="Arial"/>
               </a:rPr>
-              <a:t>continuous measurement (mm²).</a:t>
+              <a:t>more calcium, more risk.</a:t>
             </a:r>
           </a:p>
         </p:txBody>
@@ -6552,8 +6306,8 @@
         </p:nvSpPr>
         <p:spPr>
           <a:xfrm>
-            <a:off x="777240" y="2743200"/>
-            <a:ext cx="5852160" cy="2011680"/>
+            <a:off x="777240" y="2468880"/>
+            <a:ext cx="5852160" cy="1828800"/>
           </a:xfrm>
           <a:prstGeom prst="rect">
             <a:avLst/>
@@ -6572,13 +6326,22 @@
               </a:lnSpc>
             </a:pPr>
             <a:r>
+              <a:rPr sz="1450" b="1" i="0">
+                <a:solidFill>
+                  <a:srgbClr val="ECEFF3"/>
+                </a:solidFill>
+                <a:latin typeface="Arial"/>
+              </a:rPr>
+              <a:t>~120,000 women</a:t>
+            </a:r>
+            <a:r>
               <a:rPr sz="1450" b="0" i="0">
                 <a:solidFill>
                   <a:srgbClr val="9DA9B5"/>
                 </a:solidFill>
                 <a:latin typeface="Arial"/>
               </a:rPr>
-              <a:t>A transformer segments breast arterial calcification on the routine mammogram and quantifies its area — turning an incidental finding into a </a:t>
+              <a:t>, two sites, racially diverse. Dose-response: </a:t>
             </a:r>
             <a:r>
               <a:rPr sz="1450" b="1" i="0">
@@ -6587,7 +6350,7 @@
                 </a:solidFill>
                 <a:latin typeface="Arial"/>
               </a:rPr>
-              <a:t>graded, quantitative risk marker.</a:t>
+              <a:t>mild HR 1.18–1.22 · moderate 1.38–1.47 · severe 2.03–2.22.</a:t>
             </a:r>
           </a:p>
         </p:txBody>
@@ -6626,7 +6389,7 @@
                 </a:solidFill>
                 <a:latin typeface="Consolas"/>
               </a:rPr>
-              <a:t>Segmentation: SCU-Net (your group). Dapamede et al., Eur Heart J 2026;47(18):2206–2220.</a:t>
+              <a:t>Event-free survival by BAC severity — MACE, AMI, stroke, HF, death. Dapamede et al., Eur Heart J Open 2025.</a:t>
             </a:r>
           </a:p>
         </p:txBody>
@@ -6639,14 +6402,14 @@
         </p:nvSpPr>
         <p:spPr>
           <a:xfrm>
-            <a:off x="7584284" y="1097280"/>
-            <a:ext cx="2936551" cy="5120640"/>
+            <a:off x="6309360" y="2998302"/>
+            <a:ext cx="5486400" cy="1135715"/>
           </a:xfrm>
           <a:prstGeom prst="roundRect">
             <a:avLst/>
           </a:prstGeom>
           <a:solidFill>
-            <a:srgbClr val="000000"/>
+            <a:srgbClr val="FFFFFF"/>
           </a:solidFill>
           <a:ln w="9525">
             <a:solidFill>
@@ -6679,7 +6442,7 @@
       </p:sp>
       <p:pic>
         <p:nvPicPr>
-          <p:cNvPr id="9" name="Picture 8" descr="img_ebbc2d2c9e.jpg"/>
+          <p:cNvPr id="9" name="Picture 8" descr="img_06d0d2a955.jpg"/>
           <p:cNvPicPr>
             <a:picLocks noChangeAspect="1"/>
           </p:cNvPicPr>
@@ -6693,8 +6456,8 @@
         </p:blipFill>
         <p:spPr>
           <a:xfrm>
-            <a:off x="7675724" y="1188720"/>
-            <a:ext cx="2753671" cy="4937760"/>
+            <a:off x="6400800" y="3089742"/>
+            <a:ext cx="5303520" cy="952835"/>
           </a:xfrm>
           <a:prstGeom prst="rect">
             <a:avLst/>
@@ -6843,7 +6606,7 @@
         <p:spPr>
           <a:xfrm>
             <a:off x="777240" y="1005840"/>
-            <a:ext cx="5852160" cy="1280160"/>
+            <a:ext cx="5486400" cy="1097280"/>
           </a:xfrm>
           <a:prstGeom prst="rect">
             <a:avLst/>
@@ -6858,26 +6621,26 @@
           <a:p>
             <a:pPr algn="l">
               <a:lnSpc>
-                <a:spcPct val="112000"/>
+                <a:spcPct val="100000"/>
               </a:lnSpc>
             </a:pPr>
             <a:r>
-              <a:rPr sz="2400" b="1" i="0">
+              <a:rPr sz="2600" b="1" i="0">
                 <a:solidFill>
                   <a:srgbClr val="ECEFF3"/>
                 </a:solidFill>
                 <a:latin typeface="Arial"/>
               </a:rPr>
-              <a:t>BAC predicts MACE — </a:t>
-            </a:r>
-            <a:r>
-              <a:rPr sz="2400" b="1" i="0">
+              <a:t>BAC and </a:t>
+            </a:r>
+            <a:r>
+              <a:rPr sz="2600" b="1" i="0">
                 <a:solidFill>
                   <a:srgbClr val="E7AC51"/>
                 </a:solidFill>
                 <a:latin typeface="Arial"/>
               </a:rPr>
-              <a:t>more calcium, more risk.</a:t>
+              <a:t>PAD.</a:t>
             </a:r>
           </a:p>
         </p:txBody>
@@ -6890,8 +6653,8 @@
         </p:nvSpPr>
         <p:spPr>
           <a:xfrm>
-            <a:off x="777240" y="2468880"/>
-            <a:ext cx="5852160" cy="1828800"/>
+            <a:off x="777240" y="2103120"/>
+            <a:ext cx="5486400" cy="2194560"/>
           </a:xfrm>
           <a:prstGeom prst="rect">
             <a:avLst/>
@@ -6910,31 +6673,67 @@
               </a:lnSpc>
             </a:pPr>
             <a:r>
-              <a:rPr sz="1450" b="1" i="0">
+              <a:rPr sz="1350" b="0" i="0">
+                <a:solidFill>
+                  <a:srgbClr val="9DA9B5"/>
+                </a:solidFill>
+                <a:latin typeface="Arial"/>
+              </a:rPr>
+              <a:t>BAC is </a:t>
+            </a:r>
+            <a:r>
+              <a:rPr sz="1350" b="1" i="0">
                 <a:solidFill>
                   <a:srgbClr val="ECEFF3"/>
                 </a:solidFill>
                 <a:latin typeface="Arial"/>
               </a:rPr>
-              <a:t>~120,000 women</a:t>
-            </a:r>
-            <a:r>
-              <a:rPr sz="1450" b="0" i="0">
+              <a:t>medial</a:t>
+            </a:r>
+            <a:r>
+              <a:rPr sz="1350" b="0" i="0">
                 <a:solidFill>
                   <a:srgbClr val="9DA9B5"/>
                 </a:solidFill>
                 <a:latin typeface="Arial"/>
               </a:rPr>
-              <a:t>, two sites, racially diverse. Dose-response: </a:t>
-            </a:r>
-            <a:r>
-              <a:rPr sz="1450" b="1" i="0">
+              <a:t> calcification (Mönckeberg's) — the pattern that dominates PAD. In </a:t>
+            </a:r>
+            <a:r>
+              <a:rPr sz="1350" b="1" i="0">
                 <a:solidFill>
                   <a:srgbClr val="ECEFF3"/>
                 </a:solidFill>
                 <a:latin typeface="Arial"/>
               </a:rPr>
-              <a:t>mild HR 1.18–1.22 · moderate 1.38–1.47 · severe 2.03–2.22.</a:t>
+              <a:t>59,854 women</a:t>
+            </a:r>
+            <a:r>
+              <a:rPr sz="1350" b="0" i="0">
+                <a:solidFill>
+                  <a:srgbClr val="9DA9B5"/>
+                </a:solidFill>
+                <a:latin typeface="Arial"/>
+              </a:rPr>
+              <a:t> (~8-yr follow-up), it graded the risk of </a:t>
+            </a:r>
+            <a:r>
+              <a:rPr sz="1350" b="1" i="0">
+                <a:solidFill>
+                  <a:srgbClr val="ECEFF3"/>
+                </a:solidFill>
+                <a:latin typeface="Arial"/>
+              </a:rPr>
+              <a:t>vascular intervention</a:t>
+            </a:r>
+            <a:r>
+              <a:rPr sz="1350" b="0" i="0">
+                <a:solidFill>
+                  <a:srgbClr val="9DA9B5"/>
+                </a:solidFill>
+                <a:latin typeface="Arial"/>
+              </a:rPr>
+              <a:t> overall and within every high-risk subgroup.</a:t>
             </a:r>
           </a:p>
         </p:txBody>
@@ -6948,7 +6747,7 @@
         <p:spPr>
           <a:xfrm>
             <a:off x="777240" y="5943600"/>
-            <a:ext cx="5852160" cy="457200"/>
+            <a:ext cx="5486400" cy="457200"/>
           </a:xfrm>
           <a:prstGeom prst="rect">
             <a:avLst/>
@@ -6973,27 +6772,51 @@
                 </a:solidFill>
                 <a:latin typeface="Consolas"/>
               </a:rPr>
-              <a:t>Event-free survival by BAC severity — MACE, AMI, stroke, HF, death. Dapamede et al., Eur Heart J Open 2025.</a:t>
-            </a:r>
-          </a:p>
-        </p:txBody>
-      </p:sp>
-      <p:sp>
-        <p:nvSpPr>
-          <p:cNvPr id="8" name="Rounded Rectangle 7"/>
+              <a:t>[your group], abstract — adj. age, DM, HTN, HLD, CKD, smoking. Angiogram: Radiopaedia.org (CC).</a:t>
+            </a:r>
+          </a:p>
+        </p:txBody>
+      </p:sp>
+      <p:pic>
+        <p:nvPicPr>
+          <p:cNvPr id="8" name="Picture 7" descr="svg_552f3c5534.png"/>
+          <p:cNvPicPr>
+            <a:picLocks noChangeAspect="1"/>
+          </p:cNvPicPr>
+          <p:nvPr/>
+        </p:nvPicPr>
+        <p:blipFill>
+          <a:blip r:embed="rId4"/>
+          <a:stretch>
+            <a:fillRect/>
+          </a:stretch>
+        </p:blipFill>
+        <p:spPr>
+          <a:xfrm>
+            <a:off x="6263640" y="2564891"/>
+            <a:ext cx="3840480" cy="2002536"/>
+          </a:xfrm>
+          <a:prstGeom prst="rect">
+            <a:avLst/>
+          </a:prstGeom>
+        </p:spPr>
+      </p:pic>
+      <p:sp>
+        <p:nvSpPr>
+          <p:cNvPr id="9" name="Rounded Rectangle 8"/>
           <p:cNvSpPr/>
           <p:nvPr/>
         </p:nvSpPr>
         <p:spPr>
           <a:xfrm>
-            <a:off x="6309360" y="2998302"/>
-            <a:ext cx="5486400" cy="1135715"/>
+            <a:off x="10012680" y="2154110"/>
+            <a:ext cx="1920240" cy="2458339"/>
           </a:xfrm>
           <a:prstGeom prst="roundRect">
             <a:avLst/>
           </a:prstGeom>
           <a:solidFill>
-            <a:srgbClr val="FFFFFF"/>
+            <a:srgbClr val="000000"/>
           </a:solidFill>
           <a:ln w="9525">
             <a:solidFill>
@@ -7026,22 +6849,22 @@
       </p:sp>
       <p:pic>
         <p:nvPicPr>
-          <p:cNvPr id="9" name="Picture 8" descr="img_06d0d2a955.jpg"/>
+          <p:cNvPr id="10" name="Picture 9" descr="img_72dc4dd0ee.jpg"/>
           <p:cNvPicPr>
             <a:picLocks noChangeAspect="1"/>
           </p:cNvPicPr>
           <p:nvPr/>
         </p:nvPicPr>
         <p:blipFill>
-          <a:blip r:embed="rId4"/>
+          <a:blip r:embed="rId5"/>
           <a:stretch>
             <a:fillRect/>
           </a:stretch>
         </p:blipFill>
         <p:spPr>
           <a:xfrm>
-            <a:off x="6400800" y="3089742"/>
-            <a:ext cx="5303520" cy="952835"/>
+            <a:off x="10104120" y="2245550"/>
+            <a:ext cx="1737360" cy="2275459"/>
           </a:xfrm>
           <a:prstGeom prst="rect">
             <a:avLst/>
@@ -7190,7 +7013,7 @@
         <p:spPr>
           <a:xfrm>
             <a:off x="777240" y="1005840"/>
-            <a:ext cx="5486400" cy="1097280"/>
+            <a:ext cx="5669280" cy="1097280"/>
           </a:xfrm>
           <a:prstGeom prst="rect">
             <a:avLst/>
@@ -7224,7 +7047,7 @@
                 </a:solidFill>
                 <a:latin typeface="Arial"/>
               </a:rPr>
-              <a:t>PAD.</a:t>
+              <a:t>valvular disease.</a:t>
             </a:r>
           </a:p>
         </p:txBody>
@@ -7238,7 +7061,7 @@
         <p:spPr>
           <a:xfrm>
             <a:off x="777240" y="2103120"/>
-            <a:ext cx="5486400" cy="2194560"/>
+            <a:ext cx="5669280" cy="2377440"/>
           </a:xfrm>
           <a:prstGeom prst="rect">
             <a:avLst/>
@@ -7257,67 +7080,58 @@
               </a:lnSpc>
             </a:pPr>
             <a:r>
-              <a:rPr sz="1350" b="0" i="0">
+              <a:rPr sz="1400" b="1" i="0">
+                <a:solidFill>
+                  <a:srgbClr val="ECEFF3"/>
+                </a:solidFill>
+                <a:latin typeface="Arial"/>
+              </a:rPr>
+              <a:t>122,011 women.</a:t>
+            </a:r>
+            <a:r>
+              <a:rPr sz="1400" b="0" i="0">
                 <a:solidFill>
                   <a:srgbClr val="9DA9B5"/>
                 </a:solidFill>
                 <a:latin typeface="Arial"/>
               </a:rPr>
-              <a:t>BAC is </a:t>
-            </a:r>
-            <a:r>
-              <a:rPr sz="1350" b="1" i="0">
+              <a:t> Severe BAC vs none — </a:t>
+            </a:r>
+            <a:r>
+              <a:rPr sz="1400" b="1" i="0">
                 <a:solidFill>
                   <a:srgbClr val="ECEFF3"/>
                 </a:solidFill>
                 <a:latin typeface="Arial"/>
               </a:rPr>
-              <a:t>medial</a:t>
-            </a:r>
-            <a:r>
-              <a:rPr sz="1350" b="0" i="0">
+              <a:t>AS 11.4 · AR 3.1 · MR 2.6 · TR 2.3</a:t>
+            </a:r>
+            <a:r>
+              <a:rPr sz="1400" b="0" i="0">
                 <a:solidFill>
                   <a:srgbClr val="9DA9B5"/>
                 </a:solidFill>
                 <a:latin typeface="Arial"/>
               </a:rPr>
-              <a:t> calcification (Mönckeberg's) — the pattern that dominates PAD. In </a:t>
-            </a:r>
-            <a:r>
-              <a:rPr sz="1350" b="1" i="0">
-                <a:solidFill>
-                  <a:srgbClr val="ECEFF3"/>
-                </a:solidFill>
-                <a:latin typeface="Arial"/>
-              </a:rPr>
-              <a:t>59,854 women</a:t>
-            </a:r>
-            <a:r>
-              <a:rPr sz="1350" b="0" i="0">
+              <a:t>; mitral stenosis null (negative control). 5-yr any-VHD </a:t>
+            </a:r>
+            <a:r>
+              <a:rPr sz="1400" b="1" i="0">
+                <a:solidFill>
+                  <a:srgbClr val="E7AC51"/>
+                </a:solidFill>
+                <a:latin typeface="Arial"/>
+              </a:rPr>
+              <a:t>19.3% vs 4.6%</a:t>
+            </a:r>
+            <a:r>
+              <a:rPr sz="1400" b="0" i="0">
                 <a:solidFill>
                   <a:srgbClr val="9DA9B5"/>
                 </a:solidFill>
                 <a:latin typeface="Arial"/>
               </a:rPr>
-              <a:t> (~8-yr follow-up), it graded the risk of </a:t>
-            </a:r>
-            <a:r>
-              <a:rPr sz="1350" b="1" i="0">
-                <a:solidFill>
-                  <a:srgbClr val="ECEFF3"/>
-                </a:solidFill>
-                <a:latin typeface="Arial"/>
-              </a:rPr>
-              <a:t>vascular intervention</a:t>
-            </a:r>
-            <a:r>
-              <a:rPr sz="1350" b="0" i="0">
-                <a:solidFill>
-                  <a:srgbClr val="9DA9B5"/>
-                </a:solidFill>
-                <a:latin typeface="Arial"/>
-              </a:rPr>
-              <a:t> overall and within every high-risk subgroup.</a:t>
+              <a:t> (NNS 7).</a:t>
             </a:r>
           </a:p>
         </p:txBody>
@@ -7331,7 +7145,7 @@
         <p:spPr>
           <a:xfrm>
             <a:off x="777240" y="5943600"/>
-            <a:ext cx="5486400" cy="457200"/>
+            <a:ext cx="5669280" cy="457200"/>
           </a:xfrm>
           <a:prstGeom prst="rect">
             <a:avLst/>
@@ -7356,14 +7170,60 @@
                 </a:solidFill>
                 <a:latin typeface="Consolas"/>
               </a:rPr>
-              <a:t>[your group], abstract — adj. age, DM, HTN, HLD, CKD, smoking. Angiogram: Radiopaedia.org (CC).</a:t>
-            </a:r>
+              <a:t>Any VHD by BAC severity. Dapamede et al., Fig. 1. Valve MRI: ECR 2024 EPOS #166904 (used w/ permission).</a:t>
+            </a:r>
+          </a:p>
+        </p:txBody>
+      </p:sp>
+      <p:sp>
+        <p:nvSpPr>
+          <p:cNvPr id="8" name="Rounded Rectangle 7"/>
+          <p:cNvSpPr/>
+          <p:nvPr/>
+        </p:nvSpPr>
+        <p:spPr>
+          <a:xfrm>
+            <a:off x="6885341" y="1188719"/>
+            <a:ext cx="4425877" cy="3291840"/>
+          </a:xfrm>
+          <a:prstGeom prst="roundRect">
+            <a:avLst/>
+          </a:prstGeom>
+          <a:solidFill>
+            <a:srgbClr val="FFFFFF"/>
+          </a:solidFill>
+          <a:ln w="9525">
+            <a:solidFill>
+              <a:srgbClr val="C98A2E"/>
+            </a:solidFill>
+          </a:ln>
+          <a:effectLst/>
+        </p:spPr>
+        <p:style>
+          <a:lnRef idx="1">
+            <a:schemeClr val="accent1"/>
+          </a:lnRef>
+          <a:fillRef idx="3">
+            <a:schemeClr val="accent1"/>
+          </a:fillRef>
+          <a:effectRef idx="2">
+            <a:schemeClr val="accent1"/>
+          </a:effectRef>
+          <a:fontRef idx="minor">
+            <a:schemeClr val="lt1"/>
+          </a:fontRef>
+        </p:style>
+        <p:txBody>
+          <a:bodyPr rtlCol="0" anchor="ctr"/>
+          <a:lstStyle/>
+          <a:p>
+            <a:pPr algn="ctr"/>
           </a:p>
         </p:txBody>
       </p:sp>
       <p:pic>
         <p:nvPicPr>
-          <p:cNvPr id="8" name="Picture 7" descr="svg_552f3c5534.png"/>
+          <p:cNvPr id="9" name="Picture 8" descr="img_748c07e4e3.jpg"/>
           <p:cNvPicPr>
             <a:picLocks noChangeAspect="1"/>
           </p:cNvPicPr>
@@ -7377,8 +7237,8 @@
         </p:blipFill>
         <p:spPr>
           <a:xfrm>
-            <a:off x="6263640" y="2564891"/>
-            <a:ext cx="3840480" cy="2002536"/>
+            <a:off x="6976781" y="1280160"/>
+            <a:ext cx="4242997" cy="3108960"/>
           </a:xfrm>
           <a:prstGeom prst="rect">
             <a:avLst/>
@@ -7387,14 +7247,14 @@
       </p:pic>
       <p:sp>
         <p:nvSpPr>
-          <p:cNvPr id="9" name="Rounded Rectangle 8"/>
+          <p:cNvPr id="10" name="Rounded Rectangle 9"/>
           <p:cNvSpPr/>
           <p:nvPr/>
         </p:nvSpPr>
         <p:spPr>
           <a:xfrm>
-            <a:off x="10012680" y="2154110"/>
-            <a:ext cx="1920240" cy="2458339"/>
+            <a:off x="7909560" y="4434840"/>
+            <a:ext cx="2377440" cy="1828800"/>
           </a:xfrm>
           <a:prstGeom prst="roundRect">
             <a:avLst/>
@@ -7433,7 +7293,7 @@
       </p:sp>
       <p:pic>
         <p:nvPicPr>
-          <p:cNvPr id="10" name="Picture 9" descr="img_72dc4dd0ee.jpg"/>
+          <p:cNvPr id="11" name="Picture 10" descr="img_0396664eba.jpg"/>
           <p:cNvPicPr>
             <a:picLocks noChangeAspect="1"/>
           </p:cNvPicPr>
@@ -7447,8 +7307,8 @@
         </p:blipFill>
         <p:spPr>
           <a:xfrm>
-            <a:off x="10104120" y="2245550"/>
-            <a:ext cx="1737360" cy="2275459"/>
+            <a:off x="8001000" y="4526280"/>
+            <a:ext cx="2194560" cy="1645920"/>
           </a:xfrm>
           <a:prstGeom prst="rect">
             <a:avLst/>
@@ -7631,7 +7491,7 @@
                 </a:solidFill>
                 <a:latin typeface="Arial"/>
               </a:rPr>
-              <a:t>valvular disease.</a:t>
+              <a:t>CAC.</a:t>
             </a:r>
           </a:p>
         </p:txBody>
@@ -7645,7 +7505,7 @@
         <p:spPr>
           <a:xfrm>
             <a:off x="777240" y="2103120"/>
-            <a:ext cx="5669280" cy="2377440"/>
+            <a:ext cx="5669280" cy="2560320"/>
           </a:xfrm>
           <a:prstGeom prst="rect">
             <a:avLst/>
@@ -7664,13 +7524,22 @@
               </a:lnSpc>
             </a:pPr>
             <a:r>
+              <a:rPr sz="1400" b="0" i="0">
+                <a:solidFill>
+                  <a:srgbClr val="9DA9B5"/>
+                </a:solidFill>
+                <a:latin typeface="Arial"/>
+              </a:rPr>
+              <a:t>In </a:t>
+            </a:r>
+            <a:r>
               <a:rPr sz="1400" b="1" i="0">
                 <a:solidFill>
                   <a:srgbClr val="ECEFF3"/>
                 </a:solidFill>
                 <a:latin typeface="Arial"/>
               </a:rPr>
-              <a:t>122,011 women.</a:t>
+              <a:t>2,079 women</a:t>
             </a:r>
             <a:r>
               <a:rPr sz="1400" b="0" i="0">
@@ -7679,7 +7548,7 @@
                 </a:solidFill>
                 <a:latin typeface="Arial"/>
               </a:rPr>
-              <a:t> Severe BAC vs none — </a:t>
+              <a:t> who later had a cardiac CT, detectable </a:t>
             </a:r>
             <a:r>
               <a:rPr sz="1400" b="1" i="0">
@@ -7688,7 +7557,7 @@
                 </a:solidFill>
                 <a:latin typeface="Arial"/>
               </a:rPr>
-              <a:t>AS 11.4 · AR 3.1 · MR 2.6 · TR 2.3</a:t>
+              <a:t>coronary calcium rose 38% → 67%</a:t>
             </a:r>
             <a:r>
               <a:rPr sz="1400" b="0" i="0">
@@ -7697,7 +7566,7 @@
                 </a:solidFill>
                 <a:latin typeface="Arial"/>
               </a:rPr>
-              <a:t>; mitral stenosis null (negative control). 5-yr any-VHD </a:t>
+              <a:t> across BAC tiers; CAC&gt;100 up </a:t>
             </a:r>
             <a:r>
               <a:rPr sz="1400" b="1" i="0">
@@ -7706,7 +7575,7 @@
                 </a:solidFill>
                 <a:latin typeface="Arial"/>
               </a:rPr>
-              <a:t>19.3% vs 4.6%</a:t>
+              <a:t>2.5×</a:t>
             </a:r>
             <a:r>
               <a:rPr sz="1400" b="0" i="0">
@@ -7715,7 +7584,16 @@
                 </a:solidFill>
                 <a:latin typeface="Arial"/>
               </a:rPr>
-              <a:t> (NNS 7).</a:t>
+              <a:t>. BAC independently predicted CAC (OR 1.32 / SD). </a:t>
+            </a:r>
+            <a:r>
+              <a:rPr sz="1400" b="1" i="0">
+                <a:solidFill>
+                  <a:srgbClr val="ECEFF3"/>
+                </a:solidFill>
+                <a:latin typeface="Arial"/>
+              </a:rPr>
+              <a:t>The mammogram previews the coronary CT.</a:t>
             </a:r>
           </a:p>
         </p:txBody>
@@ -7754,7 +7632,7 @@
                 </a:solidFill>
                 <a:latin typeface="Consolas"/>
               </a:rPr>
-              <a:t>Any VHD by BAC severity. Dapamede et al., Fig. 1. Valve MRI: ECR 2024 EPOS #166904 (used w/ permission).</a:t>
+              <a:t>[your group], RSNA 2026 abstract (BAC–CAC). CAC detection by BAC tier (n=2,079).</a:t>
             </a:r>
           </a:p>
         </p:txBody>
@@ -7767,8 +7645,8 @@
         </p:nvSpPr>
         <p:spPr>
           <a:xfrm>
-            <a:off x="6885341" y="1188719"/>
-            <a:ext cx="4425877" cy="3291840"/>
+            <a:off x="6400800" y="1826894"/>
+            <a:ext cx="5394960" cy="3295650"/>
           </a:xfrm>
           <a:prstGeom prst="roundRect">
             <a:avLst/>
@@ -7807,7 +7685,7 @@
       </p:sp>
       <p:pic>
         <p:nvPicPr>
-          <p:cNvPr id="9" name="Picture 8" descr="img_748c07e4e3.jpg"/>
+          <p:cNvPr id="9" name="Picture 8" descr="img_3e559c34cb.jpg"/>
           <p:cNvPicPr>
             <a:picLocks noChangeAspect="1"/>
           </p:cNvPicPr>
@@ -7821,78 +7699,8 @@
         </p:blipFill>
         <p:spPr>
           <a:xfrm>
-            <a:off x="6976781" y="1280160"/>
-            <a:ext cx="4242997" cy="3108960"/>
-          </a:xfrm>
-          <a:prstGeom prst="rect">
-            <a:avLst/>
-          </a:prstGeom>
-        </p:spPr>
-      </p:pic>
-      <p:sp>
-        <p:nvSpPr>
-          <p:cNvPr id="10" name="Rounded Rectangle 9"/>
-          <p:cNvSpPr/>
-          <p:nvPr/>
-        </p:nvSpPr>
-        <p:spPr>
-          <a:xfrm>
-            <a:off x="7909560" y="4434840"/>
-            <a:ext cx="2377440" cy="1828800"/>
-          </a:xfrm>
-          <a:prstGeom prst="roundRect">
-            <a:avLst/>
-          </a:prstGeom>
-          <a:solidFill>
-            <a:srgbClr val="000000"/>
-          </a:solidFill>
-          <a:ln w="9525">
-            <a:solidFill>
-              <a:srgbClr val="C98A2E"/>
-            </a:solidFill>
-          </a:ln>
-          <a:effectLst/>
-        </p:spPr>
-        <p:style>
-          <a:lnRef idx="1">
-            <a:schemeClr val="accent1"/>
-          </a:lnRef>
-          <a:fillRef idx="3">
-            <a:schemeClr val="accent1"/>
-          </a:fillRef>
-          <a:effectRef idx="2">
-            <a:schemeClr val="accent1"/>
-          </a:effectRef>
-          <a:fontRef idx="minor">
-            <a:schemeClr val="lt1"/>
-          </a:fontRef>
-        </p:style>
-        <p:txBody>
-          <a:bodyPr rtlCol="0" anchor="ctr"/>
-          <a:lstStyle/>
-          <a:p>
-            <a:pPr algn="ctr"/>
-          </a:p>
-        </p:txBody>
-      </p:sp>
-      <p:pic>
-        <p:nvPicPr>
-          <p:cNvPr id="11" name="Picture 10" descr="img_0396664eba.jpg"/>
-          <p:cNvPicPr>
-            <a:picLocks noChangeAspect="1"/>
-          </p:cNvPicPr>
-          <p:nvPr/>
-        </p:nvPicPr>
-        <p:blipFill>
-          <a:blip r:embed="rId5"/>
-          <a:stretch>
-            <a:fillRect/>
-          </a:stretch>
-        </p:blipFill>
-        <p:spPr>
-          <a:xfrm>
-            <a:off x="8001000" y="4526280"/>
-            <a:ext cx="2194560" cy="1645920"/>
+            <a:off x="6492240" y="1918334"/>
+            <a:ext cx="5212080" cy="3112770"/>
           </a:xfrm>
           <a:prstGeom prst="rect">
             <a:avLst/>
@@ -8041,7 +7849,7 @@
         <p:spPr>
           <a:xfrm>
             <a:off x="777240" y="1005840"/>
-            <a:ext cx="5669280" cy="1097280"/>
+            <a:ext cx="5852160" cy="1097280"/>
           </a:xfrm>
           <a:prstGeom prst="rect">
             <a:avLst/>
@@ -8075,7 +7883,7 @@
                 </a:solidFill>
                 <a:latin typeface="Arial"/>
               </a:rPr>
-              <a:t>CAC.</a:t>
+              <a:t>costochondral calcification.</a:t>
             </a:r>
           </a:p>
         </p:txBody>
@@ -8088,8 +7896,8 @@
         </p:nvSpPr>
         <p:spPr>
           <a:xfrm>
-            <a:off x="777240" y="2103120"/>
-            <a:ext cx="5669280" cy="2560320"/>
+            <a:off x="777240" y="2148840"/>
+            <a:ext cx="5669280" cy="1280160"/>
           </a:xfrm>
           <a:prstGeom prst="rect">
             <a:avLst/>
@@ -8114,7 +7922,7 @@
                 </a:solidFill>
                 <a:latin typeface="Arial"/>
               </a:rPr>
-              <a:t>In </a:t>
+              <a:t>A </a:t>
             </a:r>
             <a:r>
               <a:rPr sz="1400" b="1" i="0">
@@ -8123,7 +7931,7 @@
                 </a:solidFill>
                 <a:latin typeface="Arial"/>
               </a:rPr>
-              <a:t>2,079 women</a:t>
+              <a:t>non-vascular</a:t>
             </a:r>
             <a:r>
               <a:rPr sz="1400" b="0" i="0">
@@ -8132,7 +7940,7 @@
                 </a:solidFill>
                 <a:latin typeface="Arial"/>
               </a:rPr>
-              <a:t> who later had a cardiac CT, detectable </a:t>
+              <a:t> marker — calcification in the costal cartilage on chest CT (</a:t>
             </a:r>
             <a:r>
               <a:rPr sz="1400" b="1" i="0">
@@ -8141,7 +7949,7 @@
                 </a:solidFill>
                 <a:latin typeface="Arial"/>
               </a:rPr>
-              <a:t>coronary calcium rose 38% → 67%</a:t>
+              <a:t>n=1,311</a:t>
             </a:r>
             <a:r>
               <a:rPr sz="1400" b="0" i="0">
@@ -8150,48 +7958,435 @@
                 </a:solidFill>
                 <a:latin typeface="Arial"/>
               </a:rPr>
-              <a:t> across BAC tiers; CAC&gt;100 up </a:t>
-            </a:r>
-            <a:r>
-              <a:rPr sz="1400" b="1" i="0">
+              <a:t>). Correlated with BAC (ρ=0.089, p=0.001).</a:t>
+            </a:r>
+          </a:p>
+        </p:txBody>
+      </p:sp>
+      <p:sp>
+        <p:nvSpPr>
+          <p:cNvPr id="7" name="Rectangle 6"/>
+          <p:cNvSpPr/>
+          <p:nvPr/>
+        </p:nvSpPr>
+        <p:spPr>
+          <a:xfrm>
+            <a:off x="777240" y="3611880"/>
+            <a:ext cx="5120640" cy="457200"/>
+          </a:xfrm>
+          <a:prstGeom prst="rect">
+            <a:avLst/>
+          </a:prstGeom>
+          <a:solidFill>
+            <a:srgbClr val="1B232D"/>
+          </a:solidFill>
+          <a:ln>
+            <a:noFill/>
+          </a:ln>
+          <a:effectLst/>
+        </p:spPr>
+        <p:style>
+          <a:lnRef idx="1">
+            <a:schemeClr val="accent1"/>
+          </a:lnRef>
+          <a:fillRef idx="3">
+            <a:schemeClr val="accent1"/>
+          </a:fillRef>
+          <a:effectRef idx="2">
+            <a:schemeClr val="accent1"/>
+          </a:effectRef>
+          <a:fontRef idx="minor">
+            <a:schemeClr val="lt1"/>
+          </a:fontRef>
+        </p:style>
+        <p:txBody>
+          <a:bodyPr rtlCol="0" anchor="ctr"/>
+          <a:lstStyle/>
+          <a:p>
+            <a:pPr algn="ctr"/>
+          </a:p>
+        </p:txBody>
+      </p:sp>
+      <p:sp>
+        <p:nvSpPr>
+          <p:cNvPr id="8" name="TextBox 7"/>
+          <p:cNvSpPr txBox="1"/>
+          <p:nvPr/>
+        </p:nvSpPr>
+        <p:spPr>
+          <a:xfrm>
+            <a:off x="886968" y="3611880"/>
+            <a:ext cx="3566160" cy="457200"/>
+          </a:xfrm>
+          <a:prstGeom prst="rect">
+            <a:avLst/>
+          </a:prstGeom>
+          <a:noFill/>
+        </p:spPr>
+        <p:txBody>
+          <a:bodyPr wrap="square" anchor="ctr" lIns="0" rIns="0" tIns="0" bIns="0">
+            <a:spAutoFit/>
+          </a:bodyPr>
+          <a:lstStyle/>
+          <a:p>
+            <a:pPr algn="l">
+              <a:lnSpc>
+                <a:spcPct val="100000"/>
+              </a:lnSpc>
+            </a:pPr>
+            <a:r>
+              <a:rPr sz="1000" b="0" i="0">
+                <a:solidFill>
+                  <a:srgbClr val="9DA9B5"/>
+                </a:solidFill>
+                <a:latin typeface="Consolas"/>
+              </a:rPr>
+              <a:t>HIGH BAC VS ZERO (ΔCCC)</a:t>
+            </a:r>
+          </a:p>
+        </p:txBody>
+      </p:sp>
+      <p:sp>
+        <p:nvSpPr>
+          <p:cNvPr id="9" name="TextBox 8"/>
+          <p:cNvSpPr txBox="1"/>
+          <p:nvPr/>
+        </p:nvSpPr>
+        <p:spPr>
+          <a:xfrm>
+            <a:off x="4343400" y="3611880"/>
+            <a:ext cx="1444751" cy="457200"/>
+          </a:xfrm>
+          <a:prstGeom prst="rect">
+            <a:avLst/>
+          </a:prstGeom>
+          <a:noFill/>
+        </p:spPr>
+        <p:txBody>
+          <a:bodyPr wrap="square" anchor="ctr" lIns="0" rIns="0" tIns="0" bIns="0">
+            <a:spAutoFit/>
+          </a:bodyPr>
+          <a:lstStyle/>
+          <a:p>
+            <a:pPr algn="r">
+              <a:lnSpc>
+                <a:spcPct val="100000"/>
+              </a:lnSpc>
+            </a:pPr>
+            <a:r>
+              <a:rPr sz="1000" b="0" i="0">
+                <a:solidFill>
+                  <a:srgbClr val="9DA9B5"/>
+                </a:solidFill>
+                <a:latin typeface="Consolas"/>
+              </a:rPr>
+              <a:t>ADJ. P</a:t>
+            </a:r>
+          </a:p>
+        </p:txBody>
+      </p:sp>
+      <p:sp>
+        <p:nvSpPr>
+          <p:cNvPr id="10" name="TextBox 9"/>
+          <p:cNvSpPr txBox="1"/>
+          <p:nvPr/>
+        </p:nvSpPr>
+        <p:spPr>
+          <a:xfrm>
+            <a:off x="886968" y="4069080"/>
+            <a:ext cx="3566160" cy="457200"/>
+          </a:xfrm>
+          <a:prstGeom prst="rect">
+            <a:avLst/>
+          </a:prstGeom>
+          <a:noFill/>
+        </p:spPr>
+        <p:txBody>
+          <a:bodyPr wrap="square" anchor="ctr" lIns="0" rIns="0" tIns="0" bIns="0">
+            <a:spAutoFit/>
+          </a:bodyPr>
+          <a:lstStyle/>
+          <a:p>
+            <a:pPr algn="l">
+              <a:lnSpc>
+                <a:spcPct val="100000"/>
+              </a:lnSpc>
+            </a:pPr>
+            <a:r>
+              <a:rPr sz="1300" b="0" i="0">
+                <a:solidFill>
+                  <a:srgbClr val="9DA9B5"/>
+                </a:solidFill>
+                <a:latin typeface="Arial"/>
+              </a:rPr>
+              <a:t>Median (q0.50)</a:t>
+            </a:r>
+          </a:p>
+        </p:txBody>
+      </p:sp>
+      <p:sp>
+        <p:nvSpPr>
+          <p:cNvPr id="11" name="TextBox 10"/>
+          <p:cNvSpPr txBox="1"/>
+          <p:nvPr/>
+        </p:nvSpPr>
+        <p:spPr>
+          <a:xfrm>
+            <a:off x="4343400" y="4069080"/>
+            <a:ext cx="1444751" cy="457200"/>
+          </a:xfrm>
+          <a:prstGeom prst="rect">
+            <a:avLst/>
+          </a:prstGeom>
+          <a:noFill/>
+        </p:spPr>
+        <p:txBody>
+          <a:bodyPr wrap="square" anchor="ctr" lIns="0" rIns="0" tIns="0" bIns="0">
+            <a:spAutoFit/>
+          </a:bodyPr>
+          <a:lstStyle/>
+          <a:p>
+            <a:pPr algn="r">
+              <a:lnSpc>
+                <a:spcPct val="100000"/>
+              </a:lnSpc>
+            </a:pPr>
+            <a:r>
+              <a:rPr sz="1300" b="0" i="0">
+                <a:solidFill>
+                  <a:srgbClr val="9DA9B5"/>
+                </a:solidFill>
+                <a:latin typeface="Arial"/>
+              </a:rPr>
+              <a:t>NS · 0.47</a:t>
+            </a:r>
+          </a:p>
+        </p:txBody>
+      </p:sp>
+      <p:sp>
+        <p:nvSpPr>
+          <p:cNvPr id="12" name="Rectangle 11"/>
+          <p:cNvSpPr/>
+          <p:nvPr/>
+        </p:nvSpPr>
+        <p:spPr>
+          <a:xfrm>
+            <a:off x="777240" y="4526280"/>
+            <a:ext cx="5120640" cy="457200"/>
+          </a:xfrm>
+          <a:prstGeom prst="rect">
+            <a:avLst/>
+          </a:prstGeom>
+          <a:solidFill>
+            <a:srgbClr val="222C37"/>
+          </a:solidFill>
+          <a:ln>
+            <a:noFill/>
+          </a:ln>
+          <a:effectLst/>
+        </p:spPr>
+        <p:style>
+          <a:lnRef idx="1">
+            <a:schemeClr val="accent1"/>
+          </a:lnRef>
+          <a:fillRef idx="3">
+            <a:schemeClr val="accent1"/>
+          </a:fillRef>
+          <a:effectRef idx="2">
+            <a:schemeClr val="accent1"/>
+          </a:effectRef>
+          <a:fontRef idx="minor">
+            <a:schemeClr val="lt1"/>
+          </a:fontRef>
+        </p:style>
+        <p:txBody>
+          <a:bodyPr rtlCol="0" anchor="ctr"/>
+          <a:lstStyle/>
+          <a:p>
+            <a:pPr algn="ctr"/>
+          </a:p>
+        </p:txBody>
+      </p:sp>
+      <p:sp>
+        <p:nvSpPr>
+          <p:cNvPr id="13" name="TextBox 12"/>
+          <p:cNvSpPr txBox="1"/>
+          <p:nvPr/>
+        </p:nvSpPr>
+        <p:spPr>
+          <a:xfrm>
+            <a:off x="886968" y="4526280"/>
+            <a:ext cx="3566160" cy="457200"/>
+          </a:xfrm>
+          <a:prstGeom prst="rect">
+            <a:avLst/>
+          </a:prstGeom>
+          <a:noFill/>
+        </p:spPr>
+        <p:txBody>
+          <a:bodyPr wrap="square" anchor="ctr" lIns="0" rIns="0" tIns="0" bIns="0">
+            <a:spAutoFit/>
+          </a:bodyPr>
+          <a:lstStyle/>
+          <a:p>
+            <a:pPr algn="l">
+              <a:lnSpc>
+                <a:spcPct val="100000"/>
+              </a:lnSpc>
+            </a:pPr>
+            <a:r>
+              <a:rPr sz="1300" b="1" i="0">
+                <a:solidFill>
+                  <a:srgbClr val="ECEFF3"/>
+                </a:solidFill>
+                <a:latin typeface="Arial"/>
+              </a:rPr>
+              <a:t>75th pct (q0.75)  </a:t>
+            </a:r>
+            <a:r>
+              <a:rPr sz="1300" b="1" i="0">
                 <a:solidFill>
                   <a:srgbClr val="E7AC51"/>
                 </a:solidFill>
                 <a:latin typeface="Arial"/>
               </a:rPr>
-              <a:t>2.5×</a:t>
-            </a:r>
-            <a:r>
-              <a:rPr sz="1400" b="0" i="0">
-                <a:solidFill>
-                  <a:srgbClr val="9DA9B5"/>
-                </a:solidFill>
-                <a:latin typeface="Arial"/>
-              </a:rPr>
-              <a:t>. BAC independently predicted CAC (OR 1.32 / SD). </a:t>
-            </a:r>
-            <a:r>
-              <a:rPr sz="1400" b="1" i="0">
+              <a:t>+3,408 mm³</a:t>
+            </a:r>
+          </a:p>
+        </p:txBody>
+      </p:sp>
+      <p:sp>
+        <p:nvSpPr>
+          <p:cNvPr id="14" name="TextBox 13"/>
+          <p:cNvSpPr txBox="1"/>
+          <p:nvPr/>
+        </p:nvSpPr>
+        <p:spPr>
+          <a:xfrm>
+            <a:off x="4343400" y="4526280"/>
+            <a:ext cx="1444751" cy="457200"/>
+          </a:xfrm>
+          <a:prstGeom prst="rect">
+            <a:avLst/>
+          </a:prstGeom>
+          <a:noFill/>
+        </p:spPr>
+        <p:txBody>
+          <a:bodyPr wrap="square" anchor="ctr" lIns="0" rIns="0" tIns="0" bIns="0">
+            <a:spAutoFit/>
+          </a:bodyPr>
+          <a:lstStyle/>
+          <a:p>
+            <a:pPr algn="r">
+              <a:lnSpc>
+                <a:spcPct val="100000"/>
+              </a:lnSpc>
+            </a:pPr>
+            <a:r>
+              <a:rPr sz="1300" b="1" i="0">
                 <a:solidFill>
                   <a:srgbClr val="ECEFF3"/>
                 </a:solidFill>
                 <a:latin typeface="Arial"/>
               </a:rPr>
-              <a:t>The mammogram previews the coronary CT.</a:t>
-            </a:r>
-          </a:p>
-        </p:txBody>
-      </p:sp>
-      <p:sp>
-        <p:nvSpPr>
-          <p:cNvPr id="7" name="TextBox 6"/>
+              <a:t>&lt;0.001</a:t>
+            </a:r>
+          </a:p>
+        </p:txBody>
+      </p:sp>
+      <p:sp>
+        <p:nvSpPr>
+          <p:cNvPr id="15" name="Rectangle 14"/>
+          <p:cNvSpPr/>
+          <p:nvPr/>
+        </p:nvSpPr>
+        <p:spPr>
+          <a:xfrm>
+            <a:off x="777240" y="5212080"/>
+            <a:ext cx="27432" cy="640080"/>
+          </a:xfrm>
+          <a:prstGeom prst="rect">
+            <a:avLst/>
+          </a:prstGeom>
+          <a:solidFill>
+            <a:srgbClr val="E7AC51"/>
+          </a:solidFill>
+          <a:ln>
+            <a:noFill/>
+          </a:ln>
+          <a:effectLst/>
+        </p:spPr>
+        <p:style>
+          <a:lnRef idx="1">
+            <a:schemeClr val="accent1"/>
+          </a:lnRef>
+          <a:fillRef idx="3">
+            <a:schemeClr val="accent1"/>
+          </a:fillRef>
+          <a:effectRef idx="2">
+            <a:schemeClr val="accent1"/>
+          </a:effectRef>
+          <a:fontRef idx="minor">
+            <a:schemeClr val="lt1"/>
+          </a:fontRef>
+        </p:style>
+        <p:txBody>
+          <a:bodyPr rtlCol="0" anchor="ctr"/>
+          <a:lstStyle/>
+          <a:p>
+            <a:pPr algn="ctr"/>
+          </a:p>
+        </p:txBody>
+      </p:sp>
+      <p:sp>
+        <p:nvSpPr>
+          <p:cNvPr id="16" name="TextBox 15"/>
           <p:cNvSpPr txBox="1"/>
           <p:nvPr/>
         </p:nvSpPr>
         <p:spPr>
           <a:xfrm>
-            <a:off x="777240" y="5943600"/>
-            <a:ext cx="5669280" cy="457200"/>
+            <a:off x="960120" y="5212080"/>
+            <a:ext cx="5486400" cy="640080"/>
+          </a:xfrm>
+          <a:prstGeom prst="rect">
+            <a:avLst/>
+          </a:prstGeom>
+          <a:noFill/>
+        </p:spPr>
+        <p:txBody>
+          <a:bodyPr wrap="square" anchor="t" lIns="0" rIns="0" tIns="0" bIns="0">
+            <a:spAutoFit/>
+          </a:bodyPr>
+          <a:lstStyle/>
+          <a:p>
+            <a:pPr algn="l">
+              <a:lnSpc>
+                <a:spcPct val="135000"/>
+              </a:lnSpc>
+            </a:pPr>
+            <a:r>
+              <a:rPr sz="1350" b="0" i="0">
+                <a:solidFill>
+                  <a:srgbClr val="ECEFF3"/>
+                </a:solidFill>
+                <a:latin typeface="Arial"/>
+              </a:rPr>
+              <a:t>Vascular + valvular + skeletal — one free mammographic finding.</a:t>
+            </a:r>
+          </a:p>
+        </p:txBody>
+      </p:sp>
+      <p:sp>
+        <p:nvSpPr>
+          <p:cNvPr id="17" name="TextBox 16"/>
+          <p:cNvSpPr txBox="1"/>
+          <p:nvPr/>
+        </p:nvSpPr>
+        <p:spPr>
+          <a:xfrm>
+            <a:off x="777240" y="5989320"/>
+            <a:ext cx="5852160" cy="457200"/>
           </a:xfrm>
           <a:prstGeom prst="rect">
             <a:avLst/>
@@ -8216,32 +8411,31 @@
                 </a:solidFill>
                 <a:latin typeface="Consolas"/>
               </a:rPr>
-              <a:t>[your group], RSNA 2026 abstract (BAC–CAC). CAC detection by BAC tier (n=2,079).</a:t>
-            </a:r>
-          </a:p>
-        </p:txBody>
-      </p:sp>
-      <p:sp>
-        <p:nvSpPr>
-          <p:cNvPr id="8" name="Rounded Rectangle 7"/>
+              <a:t>[your group], RSNA 2026 abstract (BAC–CCC) · quantile regression, adj. age + DM.</a:t>
+            </a:r>
+          </a:p>
+        </p:txBody>
+      </p:sp>
+      <p:sp>
+        <p:nvSpPr>
+          <p:cNvPr id="18" name="Rounded Rectangle 17"/>
           <p:cNvSpPr/>
           <p:nvPr/>
         </p:nvSpPr>
         <p:spPr>
           <a:xfrm>
-            <a:off x="6400800" y="1826894"/>
-            <a:ext cx="5394960" cy="3295650"/>
+            <a:off x="6858000" y="1188720"/>
+            <a:ext cx="4846320" cy="4572000"/>
           </a:xfrm>
           <a:prstGeom prst="roundRect">
             <a:avLst/>
           </a:prstGeom>
-          <a:solidFill>
-            <a:srgbClr val="FFFFFF"/>
-          </a:solidFill>
-          <a:ln w="9525">
+          <a:noFill/>
+          <a:ln w="12700">
             <a:solidFill>
               <a:srgbClr val="C98A2E"/>
             </a:solidFill>
+            <a:prstDash val="dash"/>
           </a:ln>
           <a:effectLst/>
         </p:spPr>
@@ -8260,37 +8454,84 @@
           </a:fontRef>
         </p:style>
         <p:txBody>
-          <a:bodyPr rtlCol="0" anchor="ctr"/>
-          <a:lstStyle/>
-          <a:p>
-            <a:pPr algn="ctr"/>
-          </a:p>
-        </p:txBody>
-      </p:sp>
-      <p:pic>
-        <p:nvPicPr>
-          <p:cNvPr id="9" name="Picture 8" descr="img_3e559c34cb.jpg"/>
-          <p:cNvPicPr>
-            <a:picLocks noChangeAspect="1"/>
-          </p:cNvPicPr>
-          <p:nvPr/>
-        </p:nvPicPr>
-        <p:blipFill>
-          <a:blip r:embed="rId4"/>
-          <a:stretch>
-            <a:fillRect/>
-          </a:stretch>
-        </p:blipFill>
-        <p:spPr>
-          <a:xfrm>
-            <a:off x="6492240" y="1918334"/>
-            <a:ext cx="5212080" cy="3112770"/>
-          </a:xfrm>
-          <a:prstGeom prst="rect">
-            <a:avLst/>
-          </a:prstGeom>
-        </p:spPr>
-      </p:pic>
+          <a:bodyPr rtlCol="0" anchor="ctr" wrap="square"/>
+          <a:lstStyle/>
+          <a:p>
+            <a:pPr algn="ctr">
+              <a:lnSpc>
+                <a:spcPct val="100000"/>
+              </a:lnSpc>
+            </a:pPr>
+            <a:r>
+              <a:rPr sz="1100" b="0" i="0">
+                <a:solidFill>
+                  <a:srgbClr val="E7AC51"/>
+                </a:solidFill>
+                <a:latin typeface="Consolas"/>
+              </a:rPr>
+              <a:t>COSTOCHONDRAL CALCIFICATION</a:t>
+            </a:r>
+          </a:p>
+          <a:p>
+            <a:pPr algn="ctr">
+              <a:lnSpc>
+                <a:spcPct val="100000"/>
+              </a:lnSpc>
+              <a:spcBef>
+                <a:spcPts val="300"/>
+              </a:spcBef>
+            </a:pPr>
+            <a:r>
+              <a:rPr sz="900" b="0" i="0">
+                <a:solidFill>
+                  <a:srgbClr val="5C6975"/>
+                </a:solidFill>
+                <a:latin typeface="Consolas"/>
+              </a:rPr>
+              <a:t>[ drop in — confirm reuse rights ]</a:t>
+            </a:r>
+          </a:p>
+        </p:txBody>
+      </p:sp>
+      <p:sp>
+        <p:nvSpPr>
+          <p:cNvPr id="19" name="TextBox 18"/>
+          <p:cNvSpPr txBox="1"/>
+          <p:nvPr/>
+        </p:nvSpPr>
+        <p:spPr>
+          <a:xfrm>
+            <a:off x="6858000" y="5852160"/>
+            <a:ext cx="4846320" cy="274320"/>
+          </a:xfrm>
+          <a:prstGeom prst="rect">
+            <a:avLst/>
+          </a:prstGeom>
+          <a:noFill/>
+        </p:spPr>
+        <p:txBody>
+          <a:bodyPr wrap="square" anchor="t" lIns="0" rIns="0" tIns="0" bIns="0">
+            <a:spAutoFit/>
+          </a:bodyPr>
+          <a:lstStyle/>
+          <a:p>
+            <a:pPr algn="ctr">
+              <a:lnSpc>
+                <a:spcPct val="100000"/>
+              </a:lnSpc>
+            </a:pPr>
+            <a:r>
+              <a:rPr sz="900" b="0" i="0">
+                <a:solidFill>
+                  <a:srgbClr val="5C6975"/>
+                </a:solidFill>
+                <a:latin typeface="Consolas"/>
+              </a:rPr>
+              <a:t>Illustrative. Source: Sarıyıldız et al., via ResearchGate.</a:t>
+            </a:r>
+          </a:p>
+        </p:txBody>
+      </p:sp>
     </p:spTree>
   </p:cSld>
   <p:clrMapOvr>
@@ -8433,7 +8674,7 @@
         <p:spPr>
           <a:xfrm>
             <a:off x="777240" y="1005840"/>
-            <a:ext cx="5852160" cy="1097280"/>
+            <a:ext cx="5852160" cy="1280160"/>
           </a:xfrm>
           <a:prstGeom prst="rect">
             <a:avLst/>
@@ -8448,26 +8689,26 @@
           <a:p>
             <a:pPr algn="l">
               <a:lnSpc>
-                <a:spcPct val="100000"/>
+                <a:spcPct val="112000"/>
               </a:lnSpc>
             </a:pPr>
             <a:r>
-              <a:rPr sz="2600" b="1" i="0">
+              <a:rPr sz="2400" b="1" i="0">
                 <a:solidFill>
                   <a:srgbClr val="ECEFF3"/>
                 </a:solidFill>
                 <a:latin typeface="Arial"/>
               </a:rPr>
-              <a:t>BAC and </a:t>
-            </a:r>
-            <a:r>
-              <a:rPr sz="2600" b="1" i="0">
+              <a:t>Closing the loop: the </a:t>
+            </a:r>
+            <a:r>
+              <a:rPr sz="2400" b="1" i="0">
                 <a:solidFill>
                   <a:srgbClr val="E7AC51"/>
                 </a:solidFill>
                 <a:latin typeface="Arial"/>
               </a:rPr>
-              <a:t>costochondral calcification.</a:t>
+              <a:t>I-BAC pragmatic trial.</a:t>
             </a:r>
           </a:p>
         </p:txBody>
@@ -8480,8 +8721,8 @@
         </p:nvSpPr>
         <p:spPr>
           <a:xfrm>
-            <a:off x="777240" y="2148840"/>
-            <a:ext cx="5669280" cy="1280160"/>
+            <a:off x="777240" y="2468880"/>
+            <a:ext cx="5852160" cy="2743200"/>
           </a:xfrm>
           <a:prstGeom prst="rect">
             <a:avLst/>
@@ -8500,72 +8741,122 @@
               </a:lnSpc>
             </a:pPr>
             <a:r>
-              <a:rPr sz="1400" b="0" i="0">
+              <a:rPr sz="1350" b="0" i="0">
                 <a:solidFill>
                   <a:srgbClr val="9DA9B5"/>
                 </a:solidFill>
                 <a:latin typeface="Arial"/>
               </a:rPr>
-              <a:t>A </a:t>
-            </a:r>
-            <a:r>
-              <a:rPr sz="1400" b="1" i="0">
+              <a:t>The gap: </a:t>
+            </a:r>
+            <a:r>
+              <a:rPr sz="1350" b="1" i="0">
                 <a:solidFill>
                   <a:srgbClr val="ECEFF3"/>
                 </a:solidFill>
                 <a:latin typeface="Arial"/>
               </a:rPr>
-              <a:t>non-vascular</a:t>
-            </a:r>
-            <a:r>
-              <a:rPr sz="1400" b="0" i="0">
+              <a:t>&lt;7% (Emory) / 15% (Mayo)</a:t>
+            </a:r>
+            <a:r>
+              <a:rPr sz="1350" b="0" i="0">
                 <a:solidFill>
                   <a:srgbClr val="9DA9B5"/>
                 </a:solidFill>
                 <a:latin typeface="Arial"/>
               </a:rPr>
-              <a:t> marker — calcification in the costal cartilage on chest CT (</a:t>
-            </a:r>
-            <a:r>
-              <a:rPr sz="1400" b="1" i="0">
+              <a:t> of women had the chart data to even compute a PREVENT/ASCVD score. </a:t>
+            </a:r>
+            <a:r>
+              <a:rPr sz="1350" b="1" i="0">
+                <a:solidFill>
+                  <a:srgbClr val="E7AC51"/>
+                </a:solidFill>
+                <a:latin typeface="Arial"/>
+              </a:rPr>
+              <a:t>I-BAC</a:t>
+            </a:r>
+            <a:r>
+              <a:rPr sz="1350" b="0" i="0">
+                <a:solidFill>
+                  <a:srgbClr val="9DA9B5"/>
+                </a:solidFill>
+                <a:latin typeface="Arial"/>
+              </a:rPr>
+              <a:t> (R01HL167811) is a Hybrid Type 1 pragmatic RCT across Emory + Mayo AZ. Primary endpoint: 6-mo composite of </a:t>
+            </a:r>
+            <a:r>
+              <a:rPr sz="1350" b="1" i="0">
                 <a:solidFill>
                   <a:srgbClr val="ECEFF3"/>
                 </a:solidFill>
                 <a:latin typeface="Arial"/>
               </a:rPr>
-              <a:t>n=1,311</a:t>
-            </a:r>
-            <a:r>
-              <a:rPr sz="1400" b="0" i="0">
-                <a:solidFill>
-                  <a:srgbClr val="9DA9B5"/>
-                </a:solidFill>
-                <a:latin typeface="Arial"/>
-              </a:rPr>
-              <a:t>). Correlated with BAC (ρ=0.089, p=0.001).</a:t>
-            </a:r>
-          </a:p>
-        </p:txBody>
-      </p:sp>
-      <p:sp>
-        <p:nvSpPr>
-          <p:cNvPr id="7" name="Rectangle 6"/>
+              <a:t>lipid panel · preventive-med change · CAC testing.</a:t>
+            </a:r>
+          </a:p>
+        </p:txBody>
+      </p:sp>
+      <p:sp>
+        <p:nvSpPr>
+          <p:cNvPr id="7" name="TextBox 6"/>
+          <p:cNvSpPr txBox="1"/>
+          <p:nvPr/>
+        </p:nvSpPr>
+        <p:spPr>
+          <a:xfrm>
+            <a:off x="777240" y="5943600"/>
+            <a:ext cx="5852160" cy="457200"/>
+          </a:xfrm>
+          <a:prstGeom prst="rect">
+            <a:avLst/>
+          </a:prstGeom>
+          <a:noFill/>
+        </p:spPr>
+        <p:txBody>
+          <a:bodyPr wrap="square" anchor="t" lIns="0" rIns="0" tIns="0" bIns="0">
+            <a:spAutoFit/>
+          </a:bodyPr>
+          <a:lstStyle/>
+          <a:p>
+            <a:pPr algn="l">
+              <a:lnSpc>
+                <a:spcPct val="130000"/>
+              </a:lnSpc>
+            </a:pPr>
+            <a:r>
+              <a:rPr sz="950" b="0" i="0">
+                <a:solidFill>
+                  <a:srgbClr val="5C6975"/>
+                </a:solidFill>
+                <a:latin typeface="Consolas"/>
+              </a:rPr>
+              <a:t>Deployment + pragmatic-trial structure (Aim 2). Precedent: NOTIFY-PICTURE — BAC has no guideline yet.</a:t>
+            </a:r>
+          </a:p>
+        </p:txBody>
+      </p:sp>
+      <p:sp>
+        <p:nvSpPr>
+          <p:cNvPr id="8" name="Rounded Rectangle 7"/>
           <p:cNvSpPr/>
           <p:nvPr/>
         </p:nvSpPr>
         <p:spPr>
           <a:xfrm>
-            <a:off x="777240" y="3611880"/>
-            <a:ext cx="5120640" cy="457200"/>
-          </a:xfrm>
-          <a:prstGeom prst="rect">
+            <a:off x="6309360" y="2544845"/>
+            <a:ext cx="5577840" cy="1676868"/>
+          </a:xfrm>
+          <a:prstGeom prst="roundRect">
             <a:avLst/>
           </a:prstGeom>
           <a:solidFill>
-            <a:srgbClr val="1B232D"/>
+            <a:srgbClr val="FFFFFF"/>
           </a:solidFill>
-          <a:ln>
-            <a:noFill/>
+          <a:ln w="9525">
+            <a:solidFill>
+              <a:srgbClr val="C98A2E"/>
+            </a:solidFill>
           </a:ln>
           <a:effectLst/>
         </p:spPr>
@@ -8591,531 +8882,30 @@
           </a:p>
         </p:txBody>
       </p:sp>
-      <p:sp>
-        <p:nvSpPr>
-          <p:cNvPr id="8" name="TextBox 7"/>
-          <p:cNvSpPr txBox="1"/>
-          <p:nvPr/>
-        </p:nvSpPr>
-        <p:spPr>
-          <a:xfrm>
-            <a:off x="886968" y="3611880"/>
-            <a:ext cx="3566160" cy="457200"/>
-          </a:xfrm>
-          <a:prstGeom prst="rect">
-            <a:avLst/>
-          </a:prstGeom>
-          <a:noFill/>
-        </p:spPr>
-        <p:txBody>
-          <a:bodyPr wrap="square" anchor="ctr" lIns="0" rIns="0" tIns="0" bIns="0">
-            <a:spAutoFit/>
-          </a:bodyPr>
-          <a:lstStyle/>
-          <a:p>
-            <a:pPr algn="l">
-              <a:lnSpc>
-                <a:spcPct val="100000"/>
-              </a:lnSpc>
-            </a:pPr>
-            <a:r>
-              <a:rPr sz="1000" b="0" i="0">
-                <a:solidFill>
-                  <a:srgbClr val="9DA9B5"/>
-                </a:solidFill>
-                <a:latin typeface="Consolas"/>
-              </a:rPr>
-              <a:t>HIGH BAC VS ZERO (ΔCCC)</a:t>
-            </a:r>
-          </a:p>
-        </p:txBody>
-      </p:sp>
-      <p:sp>
-        <p:nvSpPr>
-          <p:cNvPr id="9" name="TextBox 8"/>
-          <p:cNvSpPr txBox="1"/>
-          <p:nvPr/>
-        </p:nvSpPr>
-        <p:spPr>
-          <a:xfrm>
-            <a:off x="4343400" y="3611880"/>
-            <a:ext cx="1444751" cy="457200"/>
-          </a:xfrm>
-          <a:prstGeom prst="rect">
-            <a:avLst/>
-          </a:prstGeom>
-          <a:noFill/>
-        </p:spPr>
-        <p:txBody>
-          <a:bodyPr wrap="square" anchor="ctr" lIns="0" rIns="0" tIns="0" bIns="0">
-            <a:spAutoFit/>
-          </a:bodyPr>
-          <a:lstStyle/>
-          <a:p>
-            <a:pPr algn="r">
-              <a:lnSpc>
-                <a:spcPct val="100000"/>
-              </a:lnSpc>
-            </a:pPr>
-            <a:r>
-              <a:rPr sz="1000" b="0" i="0">
-                <a:solidFill>
-                  <a:srgbClr val="9DA9B5"/>
-                </a:solidFill>
-                <a:latin typeface="Consolas"/>
-              </a:rPr>
-              <a:t>ADJ. P</a:t>
-            </a:r>
-          </a:p>
-        </p:txBody>
-      </p:sp>
-      <p:sp>
-        <p:nvSpPr>
-          <p:cNvPr id="10" name="TextBox 9"/>
-          <p:cNvSpPr txBox="1"/>
-          <p:nvPr/>
-        </p:nvSpPr>
-        <p:spPr>
-          <a:xfrm>
-            <a:off x="886968" y="4069080"/>
-            <a:ext cx="3566160" cy="457200"/>
-          </a:xfrm>
-          <a:prstGeom prst="rect">
-            <a:avLst/>
-          </a:prstGeom>
-          <a:noFill/>
-        </p:spPr>
-        <p:txBody>
-          <a:bodyPr wrap="square" anchor="ctr" lIns="0" rIns="0" tIns="0" bIns="0">
-            <a:spAutoFit/>
-          </a:bodyPr>
-          <a:lstStyle/>
-          <a:p>
-            <a:pPr algn="l">
-              <a:lnSpc>
-                <a:spcPct val="100000"/>
-              </a:lnSpc>
-            </a:pPr>
-            <a:r>
-              <a:rPr sz="1300" b="0" i="0">
-                <a:solidFill>
-                  <a:srgbClr val="9DA9B5"/>
-                </a:solidFill>
-                <a:latin typeface="Arial"/>
-              </a:rPr>
-              <a:t>Median (q0.50)</a:t>
-            </a:r>
-          </a:p>
-        </p:txBody>
-      </p:sp>
-      <p:sp>
-        <p:nvSpPr>
-          <p:cNvPr id="11" name="TextBox 10"/>
-          <p:cNvSpPr txBox="1"/>
-          <p:nvPr/>
-        </p:nvSpPr>
-        <p:spPr>
-          <a:xfrm>
-            <a:off x="4343400" y="4069080"/>
-            <a:ext cx="1444751" cy="457200"/>
-          </a:xfrm>
-          <a:prstGeom prst="rect">
-            <a:avLst/>
-          </a:prstGeom>
-          <a:noFill/>
-        </p:spPr>
-        <p:txBody>
-          <a:bodyPr wrap="square" anchor="ctr" lIns="0" rIns="0" tIns="0" bIns="0">
-            <a:spAutoFit/>
-          </a:bodyPr>
-          <a:lstStyle/>
-          <a:p>
-            <a:pPr algn="r">
-              <a:lnSpc>
-                <a:spcPct val="100000"/>
-              </a:lnSpc>
-            </a:pPr>
-            <a:r>
-              <a:rPr sz="1300" b="0" i="0">
-                <a:solidFill>
-                  <a:srgbClr val="9DA9B5"/>
-                </a:solidFill>
-                <a:latin typeface="Arial"/>
-              </a:rPr>
-              <a:t>NS · 0.47</a:t>
-            </a:r>
-          </a:p>
-        </p:txBody>
-      </p:sp>
-      <p:sp>
-        <p:nvSpPr>
-          <p:cNvPr id="12" name="Rectangle 11"/>
-          <p:cNvSpPr/>
-          <p:nvPr/>
-        </p:nvSpPr>
-        <p:spPr>
-          <a:xfrm>
-            <a:off x="777240" y="4526280"/>
-            <a:ext cx="5120640" cy="457200"/>
-          </a:xfrm>
-          <a:prstGeom prst="rect">
-            <a:avLst/>
-          </a:prstGeom>
-          <a:solidFill>
-            <a:srgbClr val="222C37"/>
-          </a:solidFill>
-          <a:ln>
-            <a:noFill/>
-          </a:ln>
-          <a:effectLst/>
-        </p:spPr>
-        <p:style>
-          <a:lnRef idx="1">
-            <a:schemeClr val="accent1"/>
-          </a:lnRef>
-          <a:fillRef idx="3">
-            <a:schemeClr val="accent1"/>
-          </a:fillRef>
-          <a:effectRef idx="2">
-            <a:schemeClr val="accent1"/>
-          </a:effectRef>
-          <a:fontRef idx="minor">
-            <a:schemeClr val="lt1"/>
-          </a:fontRef>
-        </p:style>
-        <p:txBody>
-          <a:bodyPr rtlCol="0" anchor="ctr"/>
-          <a:lstStyle/>
-          <a:p>
-            <a:pPr algn="ctr"/>
-          </a:p>
-        </p:txBody>
-      </p:sp>
-      <p:sp>
-        <p:nvSpPr>
-          <p:cNvPr id="13" name="TextBox 12"/>
-          <p:cNvSpPr txBox="1"/>
-          <p:nvPr/>
-        </p:nvSpPr>
-        <p:spPr>
-          <a:xfrm>
-            <a:off x="886968" y="4526280"/>
-            <a:ext cx="3566160" cy="457200"/>
-          </a:xfrm>
-          <a:prstGeom prst="rect">
-            <a:avLst/>
-          </a:prstGeom>
-          <a:noFill/>
-        </p:spPr>
-        <p:txBody>
-          <a:bodyPr wrap="square" anchor="ctr" lIns="0" rIns="0" tIns="0" bIns="0">
-            <a:spAutoFit/>
-          </a:bodyPr>
-          <a:lstStyle/>
-          <a:p>
-            <a:pPr algn="l">
-              <a:lnSpc>
-                <a:spcPct val="100000"/>
-              </a:lnSpc>
-            </a:pPr>
-            <a:r>
-              <a:rPr sz="1300" b="1" i="0">
-                <a:solidFill>
-                  <a:srgbClr val="ECEFF3"/>
-                </a:solidFill>
-                <a:latin typeface="Arial"/>
-              </a:rPr>
-              <a:t>75th pct (q0.75)  </a:t>
-            </a:r>
-            <a:r>
-              <a:rPr sz="1300" b="1" i="0">
-                <a:solidFill>
-                  <a:srgbClr val="E7AC51"/>
-                </a:solidFill>
-                <a:latin typeface="Arial"/>
-              </a:rPr>
-              <a:t>+3,408 mm³</a:t>
-            </a:r>
-          </a:p>
-        </p:txBody>
-      </p:sp>
-      <p:sp>
-        <p:nvSpPr>
-          <p:cNvPr id="14" name="TextBox 13"/>
-          <p:cNvSpPr txBox="1"/>
-          <p:nvPr/>
-        </p:nvSpPr>
-        <p:spPr>
-          <a:xfrm>
-            <a:off x="4343400" y="4526280"/>
-            <a:ext cx="1444751" cy="457200"/>
-          </a:xfrm>
-          <a:prstGeom prst="rect">
-            <a:avLst/>
-          </a:prstGeom>
-          <a:noFill/>
-        </p:spPr>
-        <p:txBody>
-          <a:bodyPr wrap="square" anchor="ctr" lIns="0" rIns="0" tIns="0" bIns="0">
-            <a:spAutoFit/>
-          </a:bodyPr>
-          <a:lstStyle/>
-          <a:p>
-            <a:pPr algn="r">
-              <a:lnSpc>
-                <a:spcPct val="100000"/>
-              </a:lnSpc>
-            </a:pPr>
-            <a:r>
-              <a:rPr sz="1300" b="1" i="0">
-                <a:solidFill>
-                  <a:srgbClr val="ECEFF3"/>
-                </a:solidFill>
-                <a:latin typeface="Arial"/>
-              </a:rPr>
-              <a:t>&lt;0.001</a:t>
-            </a:r>
-          </a:p>
-        </p:txBody>
-      </p:sp>
-      <p:sp>
-        <p:nvSpPr>
-          <p:cNvPr id="15" name="Rectangle 14"/>
-          <p:cNvSpPr/>
-          <p:nvPr/>
-        </p:nvSpPr>
-        <p:spPr>
-          <a:xfrm>
-            <a:off x="777240" y="5212080"/>
-            <a:ext cx="27432" cy="640080"/>
-          </a:xfrm>
-          <a:prstGeom prst="rect">
-            <a:avLst/>
-          </a:prstGeom>
-          <a:solidFill>
-            <a:srgbClr val="E7AC51"/>
-          </a:solidFill>
-          <a:ln>
-            <a:noFill/>
-          </a:ln>
-          <a:effectLst/>
-        </p:spPr>
-        <p:style>
-          <a:lnRef idx="1">
-            <a:schemeClr val="accent1"/>
-          </a:lnRef>
-          <a:fillRef idx="3">
-            <a:schemeClr val="accent1"/>
-          </a:fillRef>
-          <a:effectRef idx="2">
-            <a:schemeClr val="accent1"/>
-          </a:effectRef>
-          <a:fontRef idx="minor">
-            <a:schemeClr val="lt1"/>
-          </a:fontRef>
-        </p:style>
-        <p:txBody>
-          <a:bodyPr rtlCol="0" anchor="ctr"/>
-          <a:lstStyle/>
-          <a:p>
-            <a:pPr algn="ctr"/>
-          </a:p>
-        </p:txBody>
-      </p:sp>
-      <p:sp>
-        <p:nvSpPr>
-          <p:cNvPr id="16" name="TextBox 15"/>
-          <p:cNvSpPr txBox="1"/>
-          <p:nvPr/>
-        </p:nvSpPr>
-        <p:spPr>
-          <a:xfrm>
-            <a:off x="960120" y="5212080"/>
-            <a:ext cx="5486400" cy="640080"/>
-          </a:xfrm>
-          <a:prstGeom prst="rect">
-            <a:avLst/>
-          </a:prstGeom>
-          <a:noFill/>
-        </p:spPr>
-        <p:txBody>
-          <a:bodyPr wrap="square" anchor="t" lIns="0" rIns="0" tIns="0" bIns="0">
-            <a:spAutoFit/>
-          </a:bodyPr>
-          <a:lstStyle/>
-          <a:p>
-            <a:pPr algn="l">
-              <a:lnSpc>
-                <a:spcPct val="135000"/>
-              </a:lnSpc>
-            </a:pPr>
-            <a:r>
-              <a:rPr sz="1350" b="0" i="0">
-                <a:solidFill>
-                  <a:srgbClr val="ECEFF3"/>
-                </a:solidFill>
-                <a:latin typeface="Arial"/>
-              </a:rPr>
-              <a:t>Vascular + valvular + skeletal — one free mammographic finding.</a:t>
-            </a:r>
-          </a:p>
-        </p:txBody>
-      </p:sp>
-      <p:sp>
-        <p:nvSpPr>
-          <p:cNvPr id="17" name="TextBox 16"/>
-          <p:cNvSpPr txBox="1"/>
-          <p:nvPr/>
-        </p:nvSpPr>
-        <p:spPr>
-          <a:xfrm>
-            <a:off x="777240" y="5989320"/>
-            <a:ext cx="5852160" cy="457200"/>
-          </a:xfrm>
-          <a:prstGeom prst="rect">
-            <a:avLst/>
-          </a:prstGeom>
-          <a:noFill/>
-        </p:spPr>
-        <p:txBody>
-          <a:bodyPr wrap="square" anchor="t" lIns="0" rIns="0" tIns="0" bIns="0">
-            <a:spAutoFit/>
-          </a:bodyPr>
-          <a:lstStyle/>
-          <a:p>
-            <a:pPr algn="l">
-              <a:lnSpc>
-                <a:spcPct val="130000"/>
-              </a:lnSpc>
-            </a:pPr>
-            <a:r>
-              <a:rPr sz="950" b="0" i="0">
-                <a:solidFill>
-                  <a:srgbClr val="5C6975"/>
-                </a:solidFill>
-                <a:latin typeface="Consolas"/>
-              </a:rPr>
-              <a:t>[your group], RSNA 2026 abstract (BAC–CCC) · quantile regression, adj. age + DM.</a:t>
-            </a:r>
-          </a:p>
-        </p:txBody>
-      </p:sp>
-      <p:sp>
-        <p:nvSpPr>
-          <p:cNvPr id="18" name="Rounded Rectangle 17"/>
-          <p:cNvSpPr/>
-          <p:nvPr/>
-        </p:nvSpPr>
-        <p:spPr>
-          <a:xfrm>
-            <a:off x="6858000" y="1188720"/>
-            <a:ext cx="4846320" cy="4572000"/>
-          </a:xfrm>
-          <a:prstGeom prst="roundRect">
-            <a:avLst/>
-          </a:prstGeom>
-          <a:noFill/>
-          <a:ln w="12700">
-            <a:solidFill>
-              <a:srgbClr val="C98A2E"/>
-            </a:solidFill>
-            <a:prstDash val="dash"/>
-          </a:ln>
-          <a:effectLst/>
-        </p:spPr>
-        <p:style>
-          <a:lnRef idx="1">
-            <a:schemeClr val="accent1"/>
-          </a:lnRef>
-          <a:fillRef idx="3">
-            <a:schemeClr val="accent1"/>
-          </a:fillRef>
-          <a:effectRef idx="2">
-            <a:schemeClr val="accent1"/>
-          </a:effectRef>
-          <a:fontRef idx="minor">
-            <a:schemeClr val="lt1"/>
-          </a:fontRef>
-        </p:style>
-        <p:txBody>
-          <a:bodyPr rtlCol="0" anchor="ctr" wrap="square"/>
-          <a:lstStyle/>
-          <a:p>
-            <a:pPr algn="ctr">
-              <a:lnSpc>
-                <a:spcPct val="100000"/>
-              </a:lnSpc>
-            </a:pPr>
-            <a:r>
-              <a:rPr sz="1100" b="0" i="0">
-                <a:solidFill>
-                  <a:srgbClr val="E7AC51"/>
-                </a:solidFill>
-                <a:latin typeface="Consolas"/>
-              </a:rPr>
-              <a:t>COSTOCHONDRAL CALCIFICATION</a:t>
-            </a:r>
-          </a:p>
-          <a:p>
-            <a:pPr algn="ctr">
-              <a:lnSpc>
-                <a:spcPct val="100000"/>
-              </a:lnSpc>
-              <a:spcBef>
-                <a:spcPts val="300"/>
-              </a:spcBef>
-            </a:pPr>
-            <a:r>
-              <a:rPr sz="900" b="0" i="0">
-                <a:solidFill>
-                  <a:srgbClr val="5C6975"/>
-                </a:solidFill>
-                <a:latin typeface="Consolas"/>
-              </a:rPr>
-              <a:t>[ drop in — confirm reuse rights ]</a:t>
-            </a:r>
-          </a:p>
-        </p:txBody>
-      </p:sp>
-      <p:sp>
-        <p:nvSpPr>
-          <p:cNvPr id="19" name="TextBox 18"/>
-          <p:cNvSpPr txBox="1"/>
-          <p:nvPr/>
-        </p:nvSpPr>
-        <p:spPr>
-          <a:xfrm>
-            <a:off x="6858000" y="5852160"/>
-            <a:ext cx="4846320" cy="274320"/>
-          </a:xfrm>
-          <a:prstGeom prst="rect">
-            <a:avLst/>
-          </a:prstGeom>
-          <a:noFill/>
-        </p:spPr>
-        <p:txBody>
-          <a:bodyPr wrap="square" anchor="t" lIns="0" rIns="0" tIns="0" bIns="0">
-            <a:spAutoFit/>
-          </a:bodyPr>
-          <a:lstStyle/>
-          <a:p>
-            <a:pPr algn="ctr">
-              <a:lnSpc>
-                <a:spcPct val="100000"/>
-              </a:lnSpc>
-            </a:pPr>
-            <a:r>
-              <a:rPr sz="900" b="0" i="0">
-                <a:solidFill>
-                  <a:srgbClr val="5C6975"/>
-                </a:solidFill>
-                <a:latin typeface="Consolas"/>
-              </a:rPr>
-              <a:t>Illustrative. Source: Sarıyıldız et al., via ResearchGate.</a:t>
-            </a:r>
-          </a:p>
-        </p:txBody>
-      </p:sp>
+      <p:pic>
+        <p:nvPicPr>
+          <p:cNvPr id="9" name="Picture 8" descr="img_955cf64bac.jpg"/>
+          <p:cNvPicPr>
+            <a:picLocks noChangeAspect="1"/>
+          </p:cNvPicPr>
+          <p:nvPr/>
+        </p:nvPicPr>
+        <p:blipFill>
+          <a:blip r:embed="rId4"/>
+          <a:stretch>
+            <a:fillRect/>
+          </a:stretch>
+        </p:blipFill>
+        <p:spPr>
+          <a:xfrm>
+            <a:off x="6400800" y="2636285"/>
+            <a:ext cx="5394960" cy="1493988"/>
+          </a:xfrm>
+          <a:prstGeom prst="rect">
+            <a:avLst/>
+          </a:prstGeom>
+        </p:spPr>
+      </p:pic>
     </p:spTree>
   </p:cSld>
   <p:clrMapOvr>
@@ -9244,7 +9034,7 @@
                 </a:solidFill>
                 <a:latin typeface="Consolas"/>
               </a:rPr>
-              <a:t>ERA III · 2026</a:t>
+              <a:t>ERA III · 2026 → 2035</a:t>
             </a:r>
           </a:p>
         </p:txBody>
@@ -9257,8 +9047,8 @@
         </p:nvSpPr>
         <p:spPr>
           <a:xfrm>
-            <a:off x="777240" y="1005840"/>
-            <a:ext cx="5852160" cy="1280160"/>
+            <a:off x="777240" y="1463040"/>
+            <a:ext cx="10607040" cy="1280160"/>
           </a:xfrm>
           <a:prstGeom prst="rect">
             <a:avLst/>
@@ -9277,22 +9067,22 @@
               </a:lnSpc>
             </a:pPr>
             <a:r>
-              <a:rPr sz="2400" b="1" i="0">
+              <a:rPr sz="3000" b="1" i="0">
                 <a:solidFill>
                   <a:srgbClr val="ECEFF3"/>
                 </a:solidFill>
                 <a:latin typeface="Arial"/>
               </a:rPr>
-              <a:t>Closing the loop: the </a:t>
-            </a:r>
-            <a:r>
-              <a:rPr sz="2400" b="1" i="0">
+              <a:t>And we are on the verge of </a:t>
+            </a:r>
+            <a:r>
+              <a:rPr sz="3000" b="1" i="0">
                 <a:solidFill>
                   <a:srgbClr val="E7AC51"/>
                 </a:solidFill>
                 <a:latin typeface="Arial"/>
               </a:rPr>
-              <a:t>I-BAC pragmatic trial.</a:t>
+              <a:t>multimodal, multi-omics.</a:t>
             </a:r>
           </a:p>
         </p:txBody>
@@ -9305,8 +9095,8 @@
         </p:nvSpPr>
         <p:spPr>
           <a:xfrm>
-            <a:off x="777240" y="2468880"/>
-            <a:ext cx="5852160" cy="2743200"/>
+            <a:off x="777240" y="2926080"/>
+            <a:ext cx="10424160" cy="2560320"/>
           </a:xfrm>
           <a:prstGeom prst="rect">
             <a:avLst/>
@@ -9321,175 +9111,57 @@
           <a:p>
             <a:pPr algn="l">
               <a:lnSpc>
-                <a:spcPct val="140000"/>
+                <a:spcPct val="145000"/>
               </a:lnSpc>
             </a:pPr>
             <a:r>
-              <a:rPr sz="1350" b="0" i="0">
+              <a:rPr sz="1700" b="0" i="0">
                 <a:solidFill>
                   <a:srgbClr val="9DA9B5"/>
                 </a:solidFill>
                 <a:latin typeface="Arial"/>
               </a:rPr>
-              <a:t>The gap: </a:t>
-            </a:r>
-            <a:r>
-              <a:rPr sz="1350" b="1" i="0">
+              <a:t>Everything so far is still </a:t>
+            </a:r>
+            <a:r>
+              <a:rPr sz="1700" b="1" i="0">
                 <a:solidFill>
                   <a:srgbClr val="ECEFF3"/>
                 </a:solidFill>
                 <a:latin typeface="Arial"/>
               </a:rPr>
-              <a:t>&lt;7% (Emory) / 15% (Mayo)</a:t>
-            </a:r>
-            <a:r>
-              <a:rPr sz="1350" b="0" i="0">
+              <a:t>one model, one modality</a:t>
+            </a:r>
+            <a:r>
+              <a:rPr sz="1700" b="0" i="0">
                 <a:solidFill>
                   <a:srgbClr val="9DA9B5"/>
                 </a:solidFill>
                 <a:latin typeface="Arial"/>
               </a:rPr>
-              <a:t> of women had the chart data to even compute a PREVENT/ASCVD score. </a:t>
-            </a:r>
-            <a:r>
-              <a:rPr sz="1350" b="1" i="0">
+              <a:t> — the image, or the calcium, or the tissue, read separately. The frontier is to combine them — </a:t>
+            </a:r>
+            <a:r>
+              <a:rPr sz="1700" b="1" i="0">
                 <a:solidFill>
                   <a:srgbClr val="E7AC51"/>
                 </a:solidFill>
                 <a:latin typeface="Arial"/>
               </a:rPr>
-              <a:t>I-BAC</a:t>
-            </a:r>
-            <a:r>
-              <a:rPr sz="1350" b="0" i="0">
+              <a:t>imaging + pathology + genomics + the clinical record</a:t>
+            </a:r>
+            <a:r>
+              <a:rPr sz="1700" b="0" i="0">
                 <a:solidFill>
                   <a:srgbClr val="9DA9B5"/>
                 </a:solidFill>
                 <a:latin typeface="Arial"/>
               </a:rPr>
-              <a:t> (R01HL167811) is a Hybrid Type 1 pragmatic RCT across Emory + Mayo AZ. Primary endpoint: 6-mo composite of </a:t>
-            </a:r>
-            <a:r>
-              <a:rPr sz="1350" b="1" i="0">
-                <a:solidFill>
-                  <a:srgbClr val="ECEFF3"/>
-                </a:solidFill>
-                <a:latin typeface="Arial"/>
-              </a:rPr>
-              <a:t>lipid panel · preventive-med change · CAC testing.</a:t>
-            </a:r>
-          </a:p>
-        </p:txBody>
-      </p:sp>
-      <p:sp>
-        <p:nvSpPr>
-          <p:cNvPr id="7" name="TextBox 6"/>
-          <p:cNvSpPr txBox="1"/>
-          <p:nvPr/>
-        </p:nvSpPr>
-        <p:spPr>
-          <a:xfrm>
-            <a:off x="777240" y="5943600"/>
-            <a:ext cx="5852160" cy="457200"/>
-          </a:xfrm>
-          <a:prstGeom prst="rect">
-            <a:avLst/>
-          </a:prstGeom>
-          <a:noFill/>
-        </p:spPr>
-        <p:txBody>
-          <a:bodyPr wrap="square" anchor="t" lIns="0" rIns="0" tIns="0" bIns="0">
-            <a:spAutoFit/>
-          </a:bodyPr>
-          <a:lstStyle/>
-          <a:p>
-            <a:pPr algn="l">
-              <a:lnSpc>
-                <a:spcPct val="130000"/>
-              </a:lnSpc>
-            </a:pPr>
-            <a:r>
-              <a:rPr sz="950" b="0" i="0">
-                <a:solidFill>
-                  <a:srgbClr val="5C6975"/>
-                </a:solidFill>
-                <a:latin typeface="Consolas"/>
-              </a:rPr>
-              <a:t>Deployment + pragmatic-trial structure (Aim 2). Precedent: NOTIFY-PICTURE — BAC has no guideline yet.</a:t>
-            </a:r>
-          </a:p>
-        </p:txBody>
-      </p:sp>
-      <p:sp>
-        <p:nvSpPr>
-          <p:cNvPr id="8" name="Rounded Rectangle 7"/>
-          <p:cNvSpPr/>
-          <p:nvPr/>
-        </p:nvSpPr>
-        <p:spPr>
-          <a:xfrm>
-            <a:off x="6309360" y="2544845"/>
-            <a:ext cx="5577840" cy="1676868"/>
-          </a:xfrm>
-          <a:prstGeom prst="roundRect">
-            <a:avLst/>
-          </a:prstGeom>
-          <a:solidFill>
-            <a:srgbClr val="FFFFFF"/>
-          </a:solidFill>
-          <a:ln w="9525">
-            <a:solidFill>
-              <a:srgbClr val="C98A2E"/>
-            </a:solidFill>
-          </a:ln>
-          <a:effectLst/>
-        </p:spPr>
-        <p:style>
-          <a:lnRef idx="1">
-            <a:schemeClr val="accent1"/>
-          </a:lnRef>
-          <a:fillRef idx="3">
-            <a:schemeClr val="accent1"/>
-          </a:fillRef>
-          <a:effectRef idx="2">
-            <a:schemeClr val="accent1"/>
-          </a:effectRef>
-          <a:fontRef idx="minor">
-            <a:schemeClr val="lt1"/>
-          </a:fontRef>
-        </p:style>
-        <p:txBody>
-          <a:bodyPr rtlCol="0" anchor="ctr"/>
-          <a:lstStyle/>
-          <a:p>
-            <a:pPr algn="ctr"/>
-          </a:p>
-        </p:txBody>
-      </p:sp>
-      <p:pic>
-        <p:nvPicPr>
-          <p:cNvPr id="9" name="Picture 8" descr="img_955cf64bac.jpg"/>
-          <p:cNvPicPr>
-            <a:picLocks noChangeAspect="1"/>
-          </p:cNvPicPr>
-          <p:nvPr/>
-        </p:nvPicPr>
-        <p:blipFill>
-          <a:blip r:embed="rId4"/>
-          <a:stretch>
-            <a:fillRect/>
-          </a:stretch>
-        </p:blipFill>
-        <p:spPr>
-          <a:xfrm>
-            <a:off x="6400800" y="2636285"/>
-            <a:ext cx="5394960" cy="1493988"/>
-          </a:xfrm>
-          <a:prstGeom prst="rect">
-            <a:avLst/>
-          </a:prstGeom>
-        </p:spPr>
-      </p:pic>
+              <a:t> — into a single model of the patient. To see where that goes, we have to leave 2026.</a:t>
+            </a:r>
+          </a:p>
+        </p:txBody>
+      </p:sp>
     </p:spTree>
   </p:cSld>
   <p:clrMapOvr>
@@ -10191,262 +9863,6 @@
 </file>
 
 <file path=ppt/slides/slide20.xml><?xml version="1.0" encoding="utf-8"?>
-<p:sld xmlns:a="http://schemas.openxmlformats.org/drawingml/2006/main" xmlns:p="http://schemas.openxmlformats.org/presentationml/2006/main" xmlns:r="http://schemas.openxmlformats.org/officeDocument/2006/relationships">
-  <p:cSld>
-    <p:bg>
-      <p:bgPr>
-        <a:solidFill>
-          <a:srgbClr val="0F141A"/>
-        </a:solidFill>
-        <a:effectLst/>
-      </p:bgPr>
-    </p:bg>
-    <p:spTree>
-      <p:nvGrpSpPr>
-        <p:cNvPr id="1" name=""/>
-        <p:cNvGrpSpPr/>
-        <p:nvPr/>
-      </p:nvGrpSpPr>
-      <p:grpSpPr/>
-      <p:pic>
-        <p:nvPicPr>
-          <p:cNvPr id="2" name="Picture 1" descr="bg_motif.png"/>
-          <p:cNvPicPr>
-            <a:picLocks noChangeAspect="1"/>
-          </p:cNvPicPr>
-          <p:nvPr/>
-        </p:nvPicPr>
-        <p:blipFill>
-          <a:blip r:embed="rId2"/>
-          <a:stretch>
-            <a:fillRect/>
-          </a:stretch>
-        </p:blipFill>
-        <p:spPr>
-          <a:xfrm>
-            <a:off x="0" y="0"/>
-            <a:ext cx="12191695" cy="6858000"/>
-          </a:xfrm>
-          <a:prstGeom prst="rect">
-            <a:avLst/>
-          </a:prstGeom>
-        </p:spPr>
-      </p:pic>
-      <p:sp>
-        <p:nvSpPr>
-          <p:cNvPr id="3" name="Rectangle 2"/>
-          <p:cNvSpPr/>
-          <p:nvPr/>
-        </p:nvSpPr>
-        <p:spPr>
-          <a:xfrm>
-            <a:off x="0" y="0"/>
-            <a:ext cx="5486400" cy="38100"/>
-          </a:xfrm>
-          <a:prstGeom prst="rect">
-            <a:avLst/>
-          </a:prstGeom>
-          <a:solidFill>
-            <a:srgbClr val="E7AC51"/>
-          </a:solidFill>
-          <a:ln>
-            <a:noFill/>
-          </a:ln>
-          <a:effectLst/>
-        </p:spPr>
-        <p:style>
-          <a:lnRef idx="1">
-            <a:schemeClr val="accent1"/>
-          </a:lnRef>
-          <a:fillRef idx="3">
-            <a:schemeClr val="accent1"/>
-          </a:fillRef>
-          <a:effectRef idx="2">
-            <a:schemeClr val="accent1"/>
-          </a:effectRef>
-          <a:fontRef idx="minor">
-            <a:schemeClr val="lt1"/>
-          </a:fontRef>
-        </p:style>
-        <p:txBody>
-          <a:bodyPr rtlCol="0" anchor="ctr"/>
-          <a:lstStyle/>
-          <a:p>
-            <a:pPr algn="ctr"/>
-          </a:p>
-        </p:txBody>
-      </p:sp>
-      <p:sp>
-        <p:nvSpPr>
-          <p:cNvPr id="4" name="TextBox 3"/>
-          <p:cNvSpPr txBox="1"/>
-          <p:nvPr/>
-        </p:nvSpPr>
-        <p:spPr>
-          <a:xfrm>
-            <a:off x="777240" y="502920"/>
-            <a:ext cx="8229600" cy="320040"/>
-          </a:xfrm>
-          <a:prstGeom prst="rect">
-            <a:avLst/>
-          </a:prstGeom>
-          <a:noFill/>
-        </p:spPr>
-        <p:txBody>
-          <a:bodyPr wrap="square" anchor="t" lIns="0" rIns="0" tIns="0" bIns="0">
-            <a:spAutoFit/>
-          </a:bodyPr>
-          <a:lstStyle/>
-          <a:p>
-            <a:pPr algn="l">
-              <a:lnSpc>
-                <a:spcPct val="100000"/>
-              </a:lnSpc>
-            </a:pPr>
-            <a:r>
-              <a:rPr sz="1100" b="1" i="0">
-                <a:solidFill>
-                  <a:srgbClr val="E7AC51"/>
-                </a:solidFill>
-                <a:latin typeface="Consolas"/>
-              </a:rPr>
-              <a:t>ERA III · 2026 → 2035</a:t>
-            </a:r>
-          </a:p>
-        </p:txBody>
-      </p:sp>
-      <p:sp>
-        <p:nvSpPr>
-          <p:cNvPr id="5" name="TextBox 4"/>
-          <p:cNvSpPr txBox="1"/>
-          <p:nvPr/>
-        </p:nvSpPr>
-        <p:spPr>
-          <a:xfrm>
-            <a:off x="777240" y="1463040"/>
-            <a:ext cx="10607040" cy="1280160"/>
-          </a:xfrm>
-          <a:prstGeom prst="rect">
-            <a:avLst/>
-          </a:prstGeom>
-          <a:noFill/>
-        </p:spPr>
-        <p:txBody>
-          <a:bodyPr wrap="square" anchor="t" lIns="0" rIns="0" tIns="0" bIns="0">
-            <a:spAutoFit/>
-          </a:bodyPr>
-          <a:lstStyle/>
-          <a:p>
-            <a:pPr algn="l">
-              <a:lnSpc>
-                <a:spcPct val="112000"/>
-              </a:lnSpc>
-            </a:pPr>
-            <a:r>
-              <a:rPr sz="3000" b="1" i="0">
-                <a:solidFill>
-                  <a:srgbClr val="ECEFF3"/>
-                </a:solidFill>
-                <a:latin typeface="Arial"/>
-              </a:rPr>
-              <a:t>And we are on the verge of </a:t>
-            </a:r>
-            <a:r>
-              <a:rPr sz="3000" b="1" i="0">
-                <a:solidFill>
-                  <a:srgbClr val="E7AC51"/>
-                </a:solidFill>
-                <a:latin typeface="Arial"/>
-              </a:rPr>
-              <a:t>multimodal, multi-omics.</a:t>
-            </a:r>
-          </a:p>
-        </p:txBody>
-      </p:sp>
-      <p:sp>
-        <p:nvSpPr>
-          <p:cNvPr id="6" name="TextBox 5"/>
-          <p:cNvSpPr txBox="1"/>
-          <p:nvPr/>
-        </p:nvSpPr>
-        <p:spPr>
-          <a:xfrm>
-            <a:off x="777240" y="2926080"/>
-            <a:ext cx="10424160" cy="2560320"/>
-          </a:xfrm>
-          <a:prstGeom prst="rect">
-            <a:avLst/>
-          </a:prstGeom>
-          <a:noFill/>
-        </p:spPr>
-        <p:txBody>
-          <a:bodyPr wrap="square" anchor="t" lIns="0" rIns="0" tIns="0" bIns="0">
-            <a:spAutoFit/>
-          </a:bodyPr>
-          <a:lstStyle/>
-          <a:p>
-            <a:pPr algn="l">
-              <a:lnSpc>
-                <a:spcPct val="145000"/>
-              </a:lnSpc>
-            </a:pPr>
-            <a:r>
-              <a:rPr sz="1700" b="0" i="0">
-                <a:solidFill>
-                  <a:srgbClr val="9DA9B5"/>
-                </a:solidFill>
-                <a:latin typeface="Arial"/>
-              </a:rPr>
-              <a:t>Everything so far is still </a:t>
-            </a:r>
-            <a:r>
-              <a:rPr sz="1700" b="1" i="0">
-                <a:solidFill>
-                  <a:srgbClr val="ECEFF3"/>
-                </a:solidFill>
-                <a:latin typeface="Arial"/>
-              </a:rPr>
-              <a:t>one model, one modality</a:t>
-            </a:r>
-            <a:r>
-              <a:rPr sz="1700" b="0" i="0">
-                <a:solidFill>
-                  <a:srgbClr val="9DA9B5"/>
-                </a:solidFill>
-                <a:latin typeface="Arial"/>
-              </a:rPr>
-              <a:t> — the image, or the calcium, or the tissue, read separately. The frontier is to combine them — </a:t>
-            </a:r>
-            <a:r>
-              <a:rPr sz="1700" b="1" i="0">
-                <a:solidFill>
-                  <a:srgbClr val="E7AC51"/>
-                </a:solidFill>
-                <a:latin typeface="Arial"/>
-              </a:rPr>
-              <a:t>imaging + pathology + genomics + the clinical record</a:t>
-            </a:r>
-            <a:r>
-              <a:rPr sz="1700" b="0" i="0">
-                <a:solidFill>
-                  <a:srgbClr val="9DA9B5"/>
-                </a:solidFill>
-                <a:latin typeface="Arial"/>
-              </a:rPr>
-              <a:t> — into a single model of the patient. To see where that goes, we have to leave 2026.</a:t>
-            </a:r>
-          </a:p>
-        </p:txBody>
-      </p:sp>
-    </p:spTree>
-  </p:cSld>
-  <p:clrMapOvr>
-    <a:masterClrMapping/>
-  </p:clrMapOvr>
-</p:sld>
-</file>
-
-<file path=ppt/slides/slide21.xml><?xml version="1.0" encoding="utf-8"?>
 <p:sld xmlns:a="http://schemas.openxmlformats.org/drawingml/2006/main" xmlns:p="http://schemas.openxmlformats.org/presentationml/2006/main" xmlns:r="http://schemas.openxmlformats.org/officeDocument/2006/relationships">
   <p:cSld>
     <p:bg>
@@ -11916,8 +11332,8 @@
         </p:nvSpPr>
         <p:spPr>
           <a:xfrm>
-            <a:off x="777240" y="1371600"/>
-            <a:ext cx="5852160" cy="1280160"/>
+            <a:off x="777240" y="960120"/>
+            <a:ext cx="10607040" cy="1280160"/>
           </a:xfrm>
           <a:prstGeom prst="rect">
             <a:avLst/>
@@ -11942,7 +11358,7 @@
                 </a:solidFill>
                 <a:latin typeface="Arial"/>
               </a:rPr>
-              <a:t>Head CT: </a:t>
+              <a:t>The same fragility — </a:t>
             </a:r>
             <a:r>
               <a:rPr sz="2600" b="1" i="0">
@@ -11951,7 +11367,7 @@
                 </a:solidFill>
                 <a:latin typeface="Arial"/>
               </a:rPr>
-              <a:t>intracranial hemorrhage.</a:t>
+              <a:t>beyond breast.</a:t>
             </a:r>
           </a:p>
         </p:txBody>
@@ -11964,8 +11380,8 @@
         </p:nvSpPr>
         <p:spPr>
           <a:xfrm>
-            <a:off x="777240" y="2468880"/>
-            <a:ext cx="5486400" cy="1097280"/>
+            <a:off x="777240" y="2103120"/>
+            <a:ext cx="10607040" cy="640080"/>
           </a:xfrm>
           <a:prstGeom prst="rect">
             <a:avLst/>
@@ -11990,7 +11406,7 @@
                 </a:solidFill>
                 <a:latin typeface="Arial"/>
               </a:rPr>
-              <a:t>A commercial ICH detector looked strong overall — but sensitivity </a:t>
+              <a:t>Two FDA-relevant tools, two organs: overall sensitivity looks strong — then it </a:t>
             </a:r>
             <a:r>
               <a:rPr sz="1400" b="1" i="0">
@@ -11999,34 +11415,7 @@
                 </a:solidFill>
                 <a:latin typeface="Arial"/>
               </a:rPr>
-              <a:t>collapsed for subacute and chronic</a:t>
-            </a:r>
-            <a:r>
-              <a:rPr sz="1400" b="0" i="0">
-                <a:solidFill>
-                  <a:srgbClr val="9DA9B5"/>
-                </a:solidFill>
-                <a:latin typeface="Arial"/>
-              </a:rPr>
-              <a:t> bleeds, and fell in the </a:t>
-            </a:r>
-            <a:r>
-              <a:rPr sz="1400" b="1" i="0">
-                <a:solidFill>
-                  <a:srgbClr val="ECEFF3"/>
-                </a:solidFill>
-                <a:latin typeface="Arial"/>
-              </a:rPr>
-              <a:t>outpatient</a:t>
-            </a:r>
-            <a:r>
-              <a:rPr sz="1400" b="0" i="0">
-                <a:solidFill>
-                  <a:srgbClr val="9DA9B5"/>
-                </a:solidFill>
-                <a:latin typeface="Arial"/>
-              </a:rPr>
-              <a:t> setting.</a:t>
+              <a:t>collapses in the hard subgroups.</a:t>
             </a:r>
           </a:p>
         </p:txBody>
@@ -12039,8 +11428,8 @@
         </p:nvSpPr>
         <p:spPr>
           <a:xfrm>
-            <a:off x="777240" y="3794760"/>
-            <a:ext cx="5852160" cy="457200"/>
+            <a:off x="777240" y="2926080"/>
+            <a:ext cx="5303520" cy="274320"/>
           </a:xfrm>
           <a:prstGeom prst="rect">
             <a:avLst/>
@@ -12048,7 +11437,7 @@
           <a:noFill/>
         </p:spPr>
         <p:txBody>
-          <a:bodyPr wrap="square" anchor="ctr" lIns="0" rIns="0" tIns="0" bIns="0">
+          <a:bodyPr wrap="square" anchor="t" lIns="0" rIns="0" tIns="0" bIns="0">
             <a:spAutoFit/>
           </a:bodyPr>
           <a:lstStyle/>
@@ -12059,22 +11448,13 @@
               </a:lnSpc>
             </a:pPr>
             <a:r>
-              <a:rPr sz="2400" b="1" i="0">
+              <a:rPr sz="1000" b="0" i="0">
                 <a:solidFill>
                   <a:srgbClr val="E7AC51"/>
                 </a:solidFill>
-                <a:latin typeface="Arial"/>
-              </a:rPr>
-              <a:t>82.2%</a:t>
-            </a:r>
-            <a:r>
-              <a:rPr sz="1300" b="0" i="0">
-                <a:solidFill>
-                  <a:srgbClr val="9DA9B5"/>
-                </a:solidFill>
-                <a:latin typeface="Arial"/>
-              </a:rPr>
-              <a:t>   Overall sensitivity</a:t>
+                <a:latin typeface="Consolas"/>
+              </a:rPr>
+              <a:t>HEAD CT · INTRACRANIAL HEMORRHAGE</a:t>
             </a:r>
           </a:p>
         </p:txBody>
@@ -12087,8 +11467,8 @@
         </p:nvSpPr>
         <p:spPr>
           <a:xfrm>
-            <a:off x="777240" y="4361688"/>
-            <a:ext cx="5852160" cy="457200"/>
+            <a:off x="6263640" y="2926080"/>
+            <a:ext cx="5303520" cy="274320"/>
           </a:xfrm>
           <a:prstGeom prst="rect">
             <a:avLst/>
@@ -12096,7 +11476,7 @@
           <a:noFill/>
         </p:spPr>
         <p:txBody>
-          <a:bodyPr wrap="square" anchor="ctr" lIns="0" rIns="0" tIns="0" bIns="0">
+          <a:bodyPr wrap="square" anchor="t" lIns="0" rIns="0" tIns="0" bIns="0">
             <a:spAutoFit/>
           </a:bodyPr>
           <a:lstStyle/>
@@ -12107,122 +11487,65 @@
               </a:lnSpc>
             </a:pPr>
             <a:r>
-              <a:rPr sz="2400" b="1" i="0">
-                <a:solidFill>
-                  <a:srgbClr val="D9785B"/>
-                </a:solidFill>
-                <a:latin typeface="Arial"/>
-              </a:rPr>
-              <a:t>45.5%</a:t>
-            </a:r>
-            <a:r>
-              <a:rPr sz="1300" b="0" i="0">
-                <a:solidFill>
-                  <a:srgbClr val="9DA9B5"/>
-                </a:solidFill>
-                <a:latin typeface="Arial"/>
-              </a:rPr>
-              <a:t>   Subacute bleeds</a:t>
-            </a:r>
-          </a:p>
-        </p:txBody>
-      </p:sp>
-      <p:sp>
-        <p:nvSpPr>
-          <p:cNvPr id="9" name="TextBox 8"/>
-          <p:cNvSpPr txBox="1"/>
-          <p:nvPr/>
-        </p:nvSpPr>
-        <p:spPr>
-          <a:xfrm>
-            <a:off x="777240" y="4928616"/>
-            <a:ext cx="5852160" cy="457200"/>
-          </a:xfrm>
-          <a:prstGeom prst="rect">
-            <a:avLst/>
-          </a:prstGeom>
-          <a:noFill/>
-        </p:spPr>
-        <p:txBody>
-          <a:bodyPr wrap="square" anchor="ctr" lIns="0" rIns="0" tIns="0" bIns="0">
-            <a:spAutoFit/>
-          </a:bodyPr>
-          <a:lstStyle/>
-          <a:p>
-            <a:pPr algn="l">
-              <a:lnSpc>
-                <a:spcPct val="100000"/>
-              </a:lnSpc>
-            </a:pPr>
-            <a:r>
-              <a:rPr sz="2400" b="1" i="0">
-                <a:solidFill>
-                  <a:srgbClr val="D9785B"/>
-                </a:solidFill>
-                <a:latin typeface="Arial"/>
-              </a:rPr>
-              <a:t>54.8%</a:t>
-            </a:r>
-            <a:r>
-              <a:rPr sz="1300" b="0" i="0">
-                <a:solidFill>
-                  <a:srgbClr val="9DA9B5"/>
-                </a:solidFill>
-                <a:latin typeface="Arial"/>
-              </a:rPr>
-              <a:t>   Chronic bleeds</a:t>
-            </a:r>
-          </a:p>
-        </p:txBody>
-      </p:sp>
-      <p:sp>
-        <p:nvSpPr>
-          <p:cNvPr id="10" name="TextBox 9"/>
-          <p:cNvSpPr txBox="1"/>
-          <p:nvPr/>
-        </p:nvSpPr>
-        <p:spPr>
-          <a:xfrm>
-            <a:off x="777240" y="5495544"/>
-            <a:ext cx="5852160" cy="457200"/>
-          </a:xfrm>
-          <a:prstGeom prst="rect">
-            <a:avLst/>
-          </a:prstGeom>
-          <a:noFill/>
-        </p:spPr>
-        <p:txBody>
-          <a:bodyPr wrap="square" anchor="ctr" lIns="0" rIns="0" tIns="0" bIns="0">
-            <a:spAutoFit/>
-          </a:bodyPr>
-          <a:lstStyle/>
-          <a:p>
-            <a:pPr algn="l">
-              <a:lnSpc>
-                <a:spcPct val="100000"/>
-              </a:lnSpc>
-            </a:pPr>
-            <a:r>
-              <a:rPr sz="2400" b="1" i="0">
-                <a:solidFill>
-                  <a:srgbClr val="5FB7C9"/>
-                </a:solidFill>
-                <a:latin typeface="Arial"/>
-              </a:rPr>
-              <a:t>72.2%</a:t>
-            </a:r>
-            <a:r>
-              <a:rPr sz="1300" b="0" i="0">
-                <a:solidFill>
-                  <a:srgbClr val="9DA9B5"/>
-                </a:solidFill>
-                <a:latin typeface="Arial"/>
-              </a:rPr>
-              <a:t>   Outpatient setting</a:t>
-            </a:r>
-          </a:p>
-        </p:txBody>
-      </p:sp>
+              <a:rPr sz="1000" b="0" i="0">
+                <a:solidFill>
+                  <a:srgbClr val="E7AC51"/>
+                </a:solidFill>
+                <a:latin typeface="Consolas"/>
+              </a:rPr>
+              <a:t>CHEST CT · PULMONARY EMBOLISM</a:t>
+            </a:r>
+          </a:p>
+        </p:txBody>
+      </p:sp>
+      <p:pic>
+        <p:nvPicPr>
+          <p:cNvPr id="9" name="Picture 8" descr="svg_6bc7266e59.png"/>
+          <p:cNvPicPr>
+            <a:picLocks noChangeAspect="1"/>
+          </p:cNvPicPr>
+          <p:nvPr/>
+        </p:nvPicPr>
+        <p:blipFill>
+          <a:blip r:embed="rId4"/>
+          <a:stretch>
+            <a:fillRect/>
+          </a:stretch>
+        </p:blipFill>
+        <p:spPr>
+          <a:xfrm>
+            <a:off x="956462" y="3337560"/>
+            <a:ext cx="4945075" cy="2377440"/>
+          </a:xfrm>
+          <a:prstGeom prst="rect">
+            <a:avLst/>
+          </a:prstGeom>
+        </p:spPr>
+      </p:pic>
+      <p:pic>
+        <p:nvPicPr>
+          <p:cNvPr id="10" name="Picture 9" descr="svg_f751375401.png"/>
+          <p:cNvPicPr>
+            <a:picLocks noChangeAspect="1"/>
+          </p:cNvPicPr>
+          <p:nvPr/>
+        </p:nvPicPr>
+        <p:blipFill>
+          <a:blip r:embed="rId5"/>
+          <a:stretch>
+            <a:fillRect/>
+          </a:stretch>
+        </p:blipFill>
+        <p:spPr>
+          <a:xfrm>
+            <a:off x="6263640" y="3457021"/>
+            <a:ext cx="5303520" cy="2138516"/>
+          </a:xfrm>
+          <a:prstGeom prst="rect">
+            <a:avLst/>
+          </a:prstGeom>
+        </p:spPr>
+      </p:pic>
       <p:sp>
         <p:nvSpPr>
           <p:cNvPr id="11" name="TextBox 10"/>
@@ -12231,8 +11554,8 @@
         </p:nvSpPr>
         <p:spPr>
           <a:xfrm>
-            <a:off x="777240" y="6172200"/>
-            <a:ext cx="5486400" cy="457200"/>
+            <a:off x="777240" y="5989320"/>
+            <a:ext cx="10607040" cy="457200"/>
           </a:xfrm>
           <a:prstGeom prst="rect">
             <a:avLst/>
@@ -12257,84 +11580,7 @@
                 </a:solidFill>
                 <a:latin typeface="Consolas"/>
               </a:rPr>
-              <a:t>[your group], npj Digital Medicine 2025.</a:t>
-            </a:r>
-          </a:p>
-        </p:txBody>
-      </p:sp>
-      <p:sp>
-        <p:nvSpPr>
-          <p:cNvPr id="12" name="Rounded Rectangle 11"/>
-          <p:cNvSpPr/>
-          <p:nvPr/>
-        </p:nvSpPr>
-        <p:spPr>
-          <a:xfrm>
-            <a:off x="6583680" y="1188720"/>
-            <a:ext cx="5120640" cy="4754880"/>
-          </a:xfrm>
-          <a:prstGeom prst="roundRect">
-            <a:avLst/>
-          </a:prstGeom>
-          <a:noFill/>
-          <a:ln w="12700">
-            <a:solidFill>
-              <a:srgbClr val="C98A2E"/>
-            </a:solidFill>
-            <a:prstDash val="dash"/>
-          </a:ln>
-          <a:effectLst/>
-        </p:spPr>
-        <p:style>
-          <a:lnRef idx="1">
-            <a:schemeClr val="accent1"/>
-          </a:lnRef>
-          <a:fillRef idx="3">
-            <a:schemeClr val="accent1"/>
-          </a:fillRef>
-          <a:effectRef idx="2">
-            <a:schemeClr val="accent1"/>
-          </a:effectRef>
-          <a:fontRef idx="minor">
-            <a:schemeClr val="lt1"/>
-          </a:fontRef>
-        </p:style>
-        <p:txBody>
-          <a:bodyPr rtlCol="0" anchor="ctr" wrap="square"/>
-          <a:lstStyle/>
-          <a:p>
-            <a:pPr algn="ctr">
-              <a:lnSpc>
-                <a:spcPct val="100000"/>
-              </a:lnSpc>
-            </a:pPr>
-            <a:r>
-              <a:rPr sz="1100" b="0" i="0">
-                <a:solidFill>
-                  <a:srgbClr val="E7AC51"/>
-                </a:solidFill>
-                <a:latin typeface="Consolas"/>
-              </a:rPr>
-              <a:t>GIF</a:t>
-            </a:r>
-          </a:p>
-          <a:p>
-            <a:pPr algn="ctr">
-              <a:lnSpc>
-                <a:spcPct val="100000"/>
-              </a:lnSpc>
-              <a:spcBef>
-                <a:spcPts val="300"/>
-              </a:spcBef>
-            </a:pPr>
-            <a:r>
-              <a:rPr sz="900" b="0" i="0">
-                <a:solidFill>
-                  <a:srgbClr val="5C6975"/>
-                </a:solidFill>
-                <a:latin typeface="Consolas"/>
-              </a:rPr>
-              <a:t>[ to be added ]</a:t>
+              <a:t>ICH: [your group], npj Digital Medicine 2025 · PE: [your group], unpublished (Aidoc PE/iPE, 30,678 CTPA).</a:t>
             </a:r>
           </a:p>
         </p:txBody>
@@ -12467,7 +11713,7 @@
                 </a:solidFill>
                 <a:latin typeface="Consolas"/>
               </a:rPr>
-              <a:t>ERA II · 2026 · NOT ONLY BREAST</a:t>
+              <a:t>ERA II · 2026 · OPEN DATA</a:t>
             </a:r>
           </a:p>
         </p:txBody>
@@ -12506,7 +11752,7 @@
                 </a:solidFill>
                 <a:latin typeface="Arial"/>
               </a:rPr>
-              <a:t>Chest CT: </a:t>
+              <a:t>Emory Breast Imaging Dataset </a:t>
             </a:r>
             <a:r>
               <a:rPr sz="2600" b="1" i="0">
@@ -12515,7 +11761,7 @@
                 </a:solidFill>
                 <a:latin typeface="Arial"/>
               </a:rPr>
-              <a:t>pulmonary embolism.</a:t>
+              <a:t>(EMBED).</a:t>
             </a:r>
           </a:p>
         </p:txBody>
@@ -12528,8 +11774,8 @@
         </p:nvSpPr>
         <p:spPr>
           <a:xfrm>
-            <a:off x="777240" y="2377440"/>
-            <a:ext cx="5852160" cy="2194560"/>
+            <a:off x="777240" y="2103120"/>
+            <a:ext cx="5669280" cy="640080"/>
           </a:xfrm>
           <a:prstGeom prst="rect">
             <a:avLst/>
@@ -12548,67 +11794,22 @@
               </a:lnSpc>
             </a:pPr>
             <a:r>
-              <a:rPr sz="1450" b="0" i="0">
+              <a:rPr sz="1500" b="0" i="0">
                 <a:solidFill>
                   <a:srgbClr val="9DA9B5"/>
                 </a:solidFill>
                 <a:latin typeface="Arial"/>
               </a:rPr>
-              <a:t>An FDA-cleared model (</a:t>
-            </a:r>
-            <a:r>
-              <a:rPr sz="1450" b="1" i="0">
+              <a:t>Free to researchers through the </a:t>
+            </a:r>
+            <a:r>
+              <a:rPr sz="1500" b="1" i="0">
                 <a:solidFill>
                   <a:srgbClr val="ECEFF3"/>
                 </a:solidFill>
                 <a:latin typeface="Arial"/>
               </a:rPr>
-              <a:t>510(k): 94.9% sens</a:t>
-            </a:r>
-            <a:r>
-              <a:rPr sz="1450" b="0" i="0">
-                <a:solidFill>
-                  <a:srgbClr val="9DA9B5"/>
-                </a:solidFill>
-                <a:latin typeface="Arial"/>
-              </a:rPr>
-              <a:t>) on two years of real-world CTPA: </a:t>
-            </a:r>
-            <a:r>
-              <a:rPr sz="1450" b="1" i="0">
-                <a:solidFill>
-                  <a:srgbClr val="E7AC51"/>
-                </a:solidFill>
-                <a:latin typeface="Arial"/>
-              </a:rPr>
-              <a:t>86.8%</a:t>
-            </a:r>
-            <a:r>
-              <a:rPr sz="1450" b="0" i="0">
-                <a:solidFill>
-                  <a:srgbClr val="9DA9B5"/>
-                </a:solidFill>
-                <a:latin typeface="Arial"/>
-              </a:rPr>
-              <a:t> overall — but far lower for non-acute, small (subsegmental), left-sided, and </a:t>
-            </a:r>
-            <a:r>
-              <a:rPr sz="1450" b="1" i="0">
-                <a:solidFill>
-                  <a:srgbClr val="ECEFF3"/>
-                </a:solidFill>
-                <a:latin typeface="Arial"/>
-              </a:rPr>
-              <a:t>incidental</a:t>
-            </a:r>
-            <a:r>
-              <a:rPr sz="1450" b="0" i="0">
-                <a:solidFill>
-                  <a:srgbClr val="9DA9B5"/>
-                </a:solidFill>
-                <a:latin typeface="Arial"/>
-              </a:rPr>
-              <a:t> clots.</a:t>
+              <a:t>AWS Open Data Program.</a:t>
             </a:r>
           </a:p>
         </p:txBody>
@@ -12621,7 +11822,615 @@
         </p:nvSpPr>
         <p:spPr>
           <a:xfrm>
-            <a:off x="777240" y="5943600"/>
+            <a:off x="777240" y="2788920"/>
+            <a:ext cx="5852160" cy="320040"/>
+          </a:xfrm>
+          <a:prstGeom prst="rect">
+            <a:avLst/>
+          </a:prstGeom>
+          <a:noFill/>
+        </p:spPr>
+        <p:txBody>
+          <a:bodyPr wrap="square" anchor="t" lIns="0" rIns="0" tIns="0" bIns="0">
+            <a:spAutoFit/>
+          </a:bodyPr>
+          <a:lstStyle/>
+          <a:p>
+            <a:pPr algn="l">
+              <a:lnSpc>
+                <a:spcPct val="100000"/>
+              </a:lnSpc>
+            </a:pPr>
+            <a:r>
+              <a:rPr sz="1150" b="1" i="0">
+                <a:solidFill>
+                  <a:srgbClr val="E7AC51"/>
+                </a:solidFill>
+                <a:latin typeface="Consolas"/>
+              </a:rPr>
+              <a:t>EMBED V2 — IN PROGRESS</a:t>
+            </a:r>
+          </a:p>
+        </p:txBody>
+      </p:sp>
+      <p:sp>
+        <p:nvSpPr>
+          <p:cNvPr id="8" name="Rounded Rectangle 7"/>
+          <p:cNvSpPr/>
+          <p:nvPr/>
+        </p:nvSpPr>
+        <p:spPr>
+          <a:xfrm>
+            <a:off x="777240" y="3246120"/>
+            <a:ext cx="1722455" cy="384048"/>
+          </a:xfrm>
+          <a:prstGeom prst="roundRect">
+            <a:avLst/>
+          </a:prstGeom>
+          <a:solidFill>
+            <a:srgbClr val="1B232D"/>
+          </a:solidFill>
+          <a:ln w="9525">
+            <a:solidFill>
+              <a:srgbClr val="2A333D"/>
+            </a:solidFill>
+          </a:ln>
+          <a:effectLst/>
+        </p:spPr>
+        <p:style>
+          <a:lnRef idx="1">
+            <a:schemeClr val="accent1"/>
+          </a:lnRef>
+          <a:fillRef idx="3">
+            <a:schemeClr val="accent1"/>
+          </a:fillRef>
+          <a:effectRef idx="2">
+            <a:schemeClr val="accent1"/>
+          </a:effectRef>
+          <a:fontRef idx="minor">
+            <a:schemeClr val="lt1"/>
+          </a:fontRef>
+        </p:style>
+        <p:txBody>
+          <a:bodyPr rtlCol="0" anchor="ctr" wrap="none" lIns="137160" tIns="0" bIns="0"/>
+          <a:lstStyle/>
+          <a:p>
+            <a:pPr algn="l">
+              <a:lnSpc>
+                <a:spcPct val="100000"/>
+              </a:lnSpc>
+            </a:pPr>
+            <a:r>
+              <a:rPr sz="1050" b="0" i="0">
+                <a:solidFill>
+                  <a:srgbClr val="ECEFF3"/>
+                </a:solidFill>
+                <a:latin typeface="Consolas"/>
+              </a:rPr>
+              <a:t>~300,000 </a:t>
+            </a:r>
+            <a:r>
+              <a:rPr sz="1050" b="1" i="0">
+                <a:solidFill>
+                  <a:srgbClr val="5FB7C9"/>
+                </a:solidFill>
+                <a:latin typeface="Consolas"/>
+              </a:rPr>
+              <a:t>patients</a:t>
+            </a:r>
+          </a:p>
+        </p:txBody>
+      </p:sp>
+      <p:sp>
+        <p:nvSpPr>
+          <p:cNvPr id="9" name="Rectangle 8"/>
+          <p:cNvSpPr/>
+          <p:nvPr/>
+        </p:nvSpPr>
+        <p:spPr>
+          <a:xfrm>
+            <a:off x="777240" y="3246120"/>
+            <a:ext cx="41148" cy="384048"/>
+          </a:xfrm>
+          <a:prstGeom prst="rect">
+            <a:avLst/>
+          </a:prstGeom>
+          <a:solidFill>
+            <a:srgbClr val="5FB7C9"/>
+          </a:solidFill>
+          <a:ln>
+            <a:noFill/>
+          </a:ln>
+          <a:effectLst/>
+        </p:spPr>
+        <p:style>
+          <a:lnRef idx="1">
+            <a:schemeClr val="accent1"/>
+          </a:lnRef>
+          <a:fillRef idx="3">
+            <a:schemeClr val="accent1"/>
+          </a:fillRef>
+          <a:effectRef idx="2">
+            <a:schemeClr val="accent1"/>
+          </a:effectRef>
+          <a:fontRef idx="minor">
+            <a:schemeClr val="lt1"/>
+          </a:fontRef>
+        </p:style>
+        <p:txBody>
+          <a:bodyPr rtlCol="0" anchor="ctr"/>
+          <a:lstStyle/>
+          <a:p>
+            <a:pPr algn="ctr"/>
+          </a:p>
+        </p:txBody>
+      </p:sp>
+      <p:sp>
+        <p:nvSpPr>
+          <p:cNvPr id="10" name="Rounded Rectangle 9"/>
+          <p:cNvSpPr/>
+          <p:nvPr/>
+        </p:nvSpPr>
+        <p:spPr>
+          <a:xfrm>
+            <a:off x="2645999" y="3246120"/>
+            <a:ext cx="2824673" cy="384048"/>
+          </a:xfrm>
+          <a:prstGeom prst="roundRect">
+            <a:avLst/>
+          </a:prstGeom>
+          <a:solidFill>
+            <a:srgbClr val="1B232D"/>
+          </a:solidFill>
+          <a:ln w="9525">
+            <a:solidFill>
+              <a:srgbClr val="2A333D"/>
+            </a:solidFill>
+          </a:ln>
+          <a:effectLst/>
+        </p:spPr>
+        <p:style>
+          <a:lnRef idx="1">
+            <a:schemeClr val="accent1"/>
+          </a:lnRef>
+          <a:fillRef idx="3">
+            <a:schemeClr val="accent1"/>
+          </a:fillRef>
+          <a:effectRef idx="2">
+            <a:schemeClr val="accent1"/>
+          </a:effectRef>
+          <a:fontRef idx="minor">
+            <a:schemeClr val="lt1"/>
+          </a:fontRef>
+        </p:style>
+        <p:txBody>
+          <a:bodyPr rtlCol="0" anchor="ctr" wrap="none" lIns="137160" tIns="0" bIns="0"/>
+          <a:lstStyle/>
+          <a:p>
+            <a:pPr algn="l">
+              <a:lnSpc>
+                <a:spcPct val="100000"/>
+              </a:lnSpc>
+            </a:pPr>
+            <a:r>
+              <a:rPr sz="1050" b="0" i="0">
+                <a:solidFill>
+                  <a:srgbClr val="ECEFF3"/>
+                </a:solidFill>
+                <a:latin typeface="Consolas"/>
+              </a:rPr>
+              <a:t>~1M </a:t>
+            </a:r>
+            <a:r>
+              <a:rPr sz="1050" b="1" i="0">
+                <a:solidFill>
+                  <a:srgbClr val="5FB7C9"/>
+                </a:solidFill>
+                <a:latin typeface="Consolas"/>
+              </a:rPr>
+              <a:t>exams</a:t>
+            </a:r>
+            <a:r>
+              <a:rPr sz="1050" b="0" i="0">
+                <a:solidFill>
+                  <a:srgbClr val="ECEFF3"/>
+                </a:solidFill>
+                <a:latin typeface="Consolas"/>
+              </a:rPr>
+              <a:t> (2D · DBT · US · MRI)</a:t>
+            </a:r>
+          </a:p>
+        </p:txBody>
+      </p:sp>
+      <p:sp>
+        <p:nvSpPr>
+          <p:cNvPr id="11" name="Rectangle 10"/>
+          <p:cNvSpPr/>
+          <p:nvPr/>
+        </p:nvSpPr>
+        <p:spPr>
+          <a:xfrm>
+            <a:off x="2645999" y="3246120"/>
+            <a:ext cx="41148" cy="384048"/>
+          </a:xfrm>
+          <a:prstGeom prst="rect">
+            <a:avLst/>
+          </a:prstGeom>
+          <a:solidFill>
+            <a:srgbClr val="5FB7C9"/>
+          </a:solidFill>
+          <a:ln>
+            <a:noFill/>
+          </a:ln>
+          <a:effectLst/>
+        </p:spPr>
+        <p:style>
+          <a:lnRef idx="1">
+            <a:schemeClr val="accent1"/>
+          </a:lnRef>
+          <a:fillRef idx="3">
+            <a:schemeClr val="accent1"/>
+          </a:fillRef>
+          <a:effectRef idx="2">
+            <a:schemeClr val="accent1"/>
+          </a:effectRef>
+          <a:fontRef idx="minor">
+            <a:schemeClr val="lt1"/>
+          </a:fontRef>
+        </p:style>
+        <p:txBody>
+          <a:bodyPr rtlCol="0" anchor="ctr"/>
+          <a:lstStyle/>
+          <a:p>
+            <a:pPr algn="ctr"/>
+          </a:p>
+        </p:txBody>
+      </p:sp>
+      <p:sp>
+        <p:nvSpPr>
+          <p:cNvPr id="12" name="Rounded Rectangle 11"/>
+          <p:cNvSpPr/>
+          <p:nvPr/>
+        </p:nvSpPr>
+        <p:spPr>
+          <a:xfrm>
+            <a:off x="777240" y="3749039"/>
+            <a:ext cx="1722455" cy="384048"/>
+          </a:xfrm>
+          <a:prstGeom prst="roundRect">
+            <a:avLst/>
+          </a:prstGeom>
+          <a:solidFill>
+            <a:srgbClr val="1B232D"/>
+          </a:solidFill>
+          <a:ln w="9525">
+            <a:solidFill>
+              <a:srgbClr val="2A333D"/>
+            </a:solidFill>
+          </a:ln>
+          <a:effectLst/>
+        </p:spPr>
+        <p:style>
+          <a:lnRef idx="1">
+            <a:schemeClr val="accent1"/>
+          </a:lnRef>
+          <a:fillRef idx="3">
+            <a:schemeClr val="accent1"/>
+          </a:fillRef>
+          <a:effectRef idx="2">
+            <a:schemeClr val="accent1"/>
+          </a:effectRef>
+          <a:fontRef idx="minor">
+            <a:schemeClr val="lt1"/>
+          </a:fontRef>
+        </p:style>
+        <p:txBody>
+          <a:bodyPr rtlCol="0" anchor="ctr" wrap="none" lIns="137160" tIns="0" bIns="0"/>
+          <a:lstStyle/>
+          <a:p>
+            <a:pPr algn="l">
+              <a:lnSpc>
+                <a:spcPct val="100000"/>
+              </a:lnSpc>
+            </a:pPr>
+            <a:r>
+              <a:rPr sz="1050" b="0" i="0">
+                <a:solidFill>
+                  <a:srgbClr val="ECEFF3"/>
+                </a:solidFill>
+                <a:latin typeface="Consolas"/>
+              </a:rPr>
+              <a:t>Free-text </a:t>
+            </a:r>
+            <a:r>
+              <a:rPr sz="1050" b="1" i="0">
+                <a:solidFill>
+                  <a:srgbClr val="5FB7C9"/>
+                </a:solidFill>
+                <a:latin typeface="Consolas"/>
+              </a:rPr>
+              <a:t>reports</a:t>
+            </a:r>
+          </a:p>
+        </p:txBody>
+      </p:sp>
+      <p:sp>
+        <p:nvSpPr>
+          <p:cNvPr id="13" name="Rectangle 12"/>
+          <p:cNvSpPr/>
+          <p:nvPr/>
+        </p:nvSpPr>
+        <p:spPr>
+          <a:xfrm>
+            <a:off x="777240" y="3749039"/>
+            <a:ext cx="41148" cy="384048"/>
+          </a:xfrm>
+          <a:prstGeom prst="rect">
+            <a:avLst/>
+          </a:prstGeom>
+          <a:solidFill>
+            <a:srgbClr val="5FB7C9"/>
+          </a:solidFill>
+          <a:ln>
+            <a:noFill/>
+          </a:ln>
+          <a:effectLst/>
+        </p:spPr>
+        <p:style>
+          <a:lnRef idx="1">
+            <a:schemeClr val="accent1"/>
+          </a:lnRef>
+          <a:fillRef idx="3">
+            <a:schemeClr val="accent1"/>
+          </a:fillRef>
+          <a:effectRef idx="2">
+            <a:schemeClr val="accent1"/>
+          </a:effectRef>
+          <a:fontRef idx="minor">
+            <a:schemeClr val="lt1"/>
+          </a:fontRef>
+        </p:style>
+        <p:txBody>
+          <a:bodyPr rtlCol="0" anchor="ctr"/>
+          <a:lstStyle/>
+          <a:p>
+            <a:pPr algn="ctr"/>
+          </a:p>
+        </p:txBody>
+      </p:sp>
+      <p:sp>
+        <p:nvSpPr>
+          <p:cNvPr id="14" name="Rounded Rectangle 13"/>
+          <p:cNvSpPr/>
+          <p:nvPr/>
+        </p:nvSpPr>
+        <p:spPr>
+          <a:xfrm>
+            <a:off x="2645999" y="3749039"/>
+            <a:ext cx="1722455" cy="384048"/>
+          </a:xfrm>
+          <a:prstGeom prst="roundRect">
+            <a:avLst/>
+          </a:prstGeom>
+          <a:solidFill>
+            <a:srgbClr val="1B232D"/>
+          </a:solidFill>
+          <a:ln w="9525">
+            <a:solidFill>
+              <a:srgbClr val="2A333D"/>
+            </a:solidFill>
+          </a:ln>
+          <a:effectLst/>
+        </p:spPr>
+        <p:style>
+          <a:lnRef idx="1">
+            <a:schemeClr val="accent1"/>
+          </a:lnRef>
+          <a:fillRef idx="3">
+            <a:schemeClr val="accent1"/>
+          </a:fillRef>
+          <a:effectRef idx="2">
+            <a:schemeClr val="accent1"/>
+          </a:effectRef>
+          <a:fontRef idx="minor">
+            <a:schemeClr val="lt1"/>
+          </a:fontRef>
+        </p:style>
+        <p:txBody>
+          <a:bodyPr rtlCol="0" anchor="ctr" wrap="none" lIns="137160" tIns="0" bIns="0"/>
+          <a:lstStyle/>
+          <a:p>
+            <a:pPr algn="l">
+              <a:lnSpc>
+                <a:spcPct val="100000"/>
+              </a:lnSpc>
+            </a:pPr>
+            <a:r>
+              <a:rPr sz="1050" b="0" i="0">
+                <a:solidFill>
+                  <a:srgbClr val="ECEFF3"/>
+                </a:solidFill>
+                <a:latin typeface="Consolas"/>
+              </a:rPr>
+              <a:t>Patient </a:t>
+            </a:r>
+            <a:r>
+              <a:rPr sz="1050" b="1" i="0">
+                <a:solidFill>
+                  <a:srgbClr val="5FB7C9"/>
+                </a:solidFill>
+                <a:latin typeface="Consolas"/>
+              </a:rPr>
+              <a:t>risk data</a:t>
+            </a:r>
+          </a:p>
+        </p:txBody>
+      </p:sp>
+      <p:sp>
+        <p:nvSpPr>
+          <p:cNvPr id="15" name="Rectangle 14"/>
+          <p:cNvSpPr/>
+          <p:nvPr/>
+        </p:nvSpPr>
+        <p:spPr>
+          <a:xfrm>
+            <a:off x="2645999" y="3749039"/>
+            <a:ext cx="41148" cy="384048"/>
+          </a:xfrm>
+          <a:prstGeom prst="rect">
+            <a:avLst/>
+          </a:prstGeom>
+          <a:solidFill>
+            <a:srgbClr val="5FB7C9"/>
+          </a:solidFill>
+          <a:ln>
+            <a:noFill/>
+          </a:ln>
+          <a:effectLst/>
+        </p:spPr>
+        <p:style>
+          <a:lnRef idx="1">
+            <a:schemeClr val="accent1"/>
+          </a:lnRef>
+          <a:fillRef idx="3">
+            <a:schemeClr val="accent1"/>
+          </a:fillRef>
+          <a:effectRef idx="2">
+            <a:schemeClr val="accent1"/>
+          </a:effectRef>
+          <a:fontRef idx="minor">
+            <a:schemeClr val="lt1"/>
+          </a:fontRef>
+        </p:style>
+        <p:txBody>
+          <a:bodyPr rtlCol="0" anchor="ctr"/>
+          <a:lstStyle/>
+          <a:p>
+            <a:pPr algn="ctr"/>
+          </a:p>
+        </p:txBody>
+      </p:sp>
+      <p:sp>
+        <p:nvSpPr>
+          <p:cNvPr id="16" name="Rounded Rectangle 15"/>
+          <p:cNvSpPr/>
+          <p:nvPr/>
+        </p:nvSpPr>
+        <p:spPr>
+          <a:xfrm>
+            <a:off x="777240" y="4251959"/>
+            <a:ext cx="2588483" cy="384048"/>
+          </a:xfrm>
+          <a:prstGeom prst="roundRect">
+            <a:avLst/>
+          </a:prstGeom>
+          <a:solidFill>
+            <a:srgbClr val="1B232D"/>
+          </a:solidFill>
+          <a:ln w="9525">
+            <a:solidFill>
+              <a:srgbClr val="2A333D"/>
+            </a:solidFill>
+          </a:ln>
+          <a:effectLst/>
+        </p:spPr>
+        <p:style>
+          <a:lnRef idx="1">
+            <a:schemeClr val="accent1"/>
+          </a:lnRef>
+          <a:fillRef idx="3">
+            <a:schemeClr val="accent1"/>
+          </a:fillRef>
+          <a:effectRef idx="2">
+            <a:schemeClr val="accent1"/>
+          </a:effectRef>
+          <a:fontRef idx="minor">
+            <a:schemeClr val="lt1"/>
+          </a:fontRef>
+        </p:style>
+        <p:txBody>
+          <a:bodyPr rtlCol="0" anchor="ctr" wrap="none" lIns="137160" tIns="0" bIns="0"/>
+          <a:lstStyle/>
+          <a:p>
+            <a:pPr algn="l">
+              <a:lnSpc>
+                <a:spcPct val="100000"/>
+              </a:lnSpc>
+            </a:pPr>
+            <a:r>
+              <a:rPr sz="1050" b="0" i="0">
+                <a:solidFill>
+                  <a:srgbClr val="ECEFF3"/>
+                </a:solidFill>
+                <a:latin typeface="Consolas"/>
+              </a:rPr>
+              <a:t>Outcomes </a:t>
+            </a:r>
+            <a:r>
+              <a:rPr sz="1050" b="1" i="0">
+                <a:solidFill>
+                  <a:srgbClr val="5FB7C9"/>
+                </a:solidFill>
+                <a:latin typeface="Consolas"/>
+              </a:rPr>
+              <a:t>registry-harmonized</a:t>
+            </a:r>
+          </a:p>
+        </p:txBody>
+      </p:sp>
+      <p:sp>
+        <p:nvSpPr>
+          <p:cNvPr id="17" name="Rectangle 16"/>
+          <p:cNvSpPr/>
+          <p:nvPr/>
+        </p:nvSpPr>
+        <p:spPr>
+          <a:xfrm>
+            <a:off x="777240" y="4251959"/>
+            <a:ext cx="41148" cy="384048"/>
+          </a:xfrm>
+          <a:prstGeom prst="rect">
+            <a:avLst/>
+          </a:prstGeom>
+          <a:solidFill>
+            <a:srgbClr val="5FB7C9"/>
+          </a:solidFill>
+          <a:ln>
+            <a:noFill/>
+          </a:ln>
+          <a:effectLst/>
+        </p:spPr>
+        <p:style>
+          <a:lnRef idx="1">
+            <a:schemeClr val="accent1"/>
+          </a:lnRef>
+          <a:fillRef idx="3">
+            <a:schemeClr val="accent1"/>
+          </a:fillRef>
+          <a:effectRef idx="2">
+            <a:schemeClr val="accent1"/>
+          </a:effectRef>
+          <a:fontRef idx="minor">
+            <a:schemeClr val="lt1"/>
+          </a:fontRef>
+        </p:style>
+        <p:txBody>
+          <a:bodyPr rtlCol="0" anchor="ctr"/>
+          <a:lstStyle/>
+          <a:p>
+            <a:pPr algn="ctr"/>
+          </a:p>
+        </p:txBody>
+      </p:sp>
+      <p:sp>
+        <p:nvSpPr>
+          <p:cNvPr id="18" name="TextBox 17"/>
+          <p:cNvSpPr txBox="1"/>
+          <p:nvPr/>
+        </p:nvSpPr>
+        <p:spPr>
+          <a:xfrm>
+            <a:off x="777240" y="5897880"/>
             <a:ext cx="5852160" cy="457200"/>
           </a:xfrm>
           <a:prstGeom prst="rect">
@@ -12647,35 +12456,127 @@
                 </a:solidFill>
                 <a:latin typeface="Consolas"/>
               </a:rPr>
-              <a:t>[your group], unpublished — Aidoc PE / iPE triage, 30,678 CTPA + 37,272 routine CT (2023–2025).</a:t>
-            </a:r>
-          </a:p>
-        </p:txBody>
-      </p:sp>
-      <p:pic>
-        <p:nvPicPr>
-          <p:cNvPr id="8" name="Picture 7" descr="svg_f751375401.png"/>
-          <p:cNvPicPr>
-            <a:picLocks noChangeAspect="1"/>
-          </p:cNvPicPr>
-          <p:nvPr/>
-        </p:nvPicPr>
-        <p:blipFill>
-          <a:blip r:embed="rId4"/>
-          <a:stretch>
-            <a:fillRect/>
-          </a:stretch>
-        </p:blipFill>
-        <p:spPr>
-          <a:xfrm>
-            <a:off x="6400800" y="2405461"/>
-            <a:ext cx="5303520" cy="2138516"/>
-          </a:xfrm>
-          <a:prstGeom prst="rect">
-            <a:avLst/>
-          </a:prstGeom>
-        </p:spPr>
-      </p:pic>
+              <a:t>v1: [your group], Radiology: Artificial Intelligence 2023 (Fig. 1) · aws.amazon.com/opendata</a:t>
+            </a:r>
+          </a:p>
+        </p:txBody>
+      </p:sp>
+      <p:sp>
+        <p:nvSpPr>
+          <p:cNvPr id="19" name="Rounded Rectangle 18"/>
+          <p:cNvSpPr/>
+          <p:nvPr/>
+        </p:nvSpPr>
+        <p:spPr>
+          <a:xfrm>
+            <a:off x="6583680" y="1188720"/>
+            <a:ext cx="5120640" cy="4480560"/>
+          </a:xfrm>
+          <a:prstGeom prst="roundRect">
+            <a:avLst/>
+          </a:prstGeom>
+          <a:noFill/>
+          <a:ln w="12700">
+            <a:solidFill>
+              <a:srgbClr val="C98A2E"/>
+            </a:solidFill>
+            <a:prstDash val="dash"/>
+          </a:ln>
+          <a:effectLst/>
+        </p:spPr>
+        <p:style>
+          <a:lnRef idx="1">
+            <a:schemeClr val="accent1"/>
+          </a:lnRef>
+          <a:fillRef idx="3">
+            <a:schemeClr val="accent1"/>
+          </a:fillRef>
+          <a:effectRef idx="2">
+            <a:schemeClr val="accent1"/>
+          </a:effectRef>
+          <a:fontRef idx="minor">
+            <a:schemeClr val="lt1"/>
+          </a:fontRef>
+        </p:style>
+        <p:txBody>
+          <a:bodyPr rtlCol="0" anchor="ctr" wrap="square"/>
+          <a:lstStyle/>
+          <a:p>
+            <a:pPr algn="ctr">
+              <a:lnSpc>
+                <a:spcPct val="100000"/>
+              </a:lnSpc>
+            </a:pPr>
+            <a:r>
+              <a:rPr sz="1100" b="0" i="0">
+                <a:solidFill>
+                  <a:srgbClr val="E7AC51"/>
+                </a:solidFill>
+                <a:latin typeface="Consolas"/>
+              </a:rPr>
+              <a:t>MAP — EMBED USERS BY COUNTRY</a:t>
+            </a:r>
+          </a:p>
+          <a:p>
+            <a:pPr algn="ctr">
+              <a:lnSpc>
+                <a:spcPct val="100000"/>
+              </a:lnSpc>
+              <a:spcBef>
+                <a:spcPts val="300"/>
+              </a:spcBef>
+            </a:pPr>
+            <a:r>
+              <a:rPr sz="900" b="0" i="0">
+                <a:solidFill>
+                  <a:srgbClr val="5C6975"/>
+                </a:solidFill>
+                <a:latin typeface="Consolas"/>
+              </a:rPr>
+              <a:t>[ drop in PNG ]</a:t>
+            </a:r>
+          </a:p>
+        </p:txBody>
+      </p:sp>
+      <p:sp>
+        <p:nvSpPr>
+          <p:cNvPr id="20" name="TextBox 19"/>
+          <p:cNvSpPr txBox="1"/>
+          <p:nvPr/>
+        </p:nvSpPr>
+        <p:spPr>
+          <a:xfrm>
+            <a:off x="6583680" y="5760720"/>
+            <a:ext cx="5120640" cy="274320"/>
+          </a:xfrm>
+          <a:prstGeom prst="rect">
+            <a:avLst/>
+          </a:prstGeom>
+          <a:noFill/>
+        </p:spPr>
+        <p:txBody>
+          <a:bodyPr wrap="square" anchor="t" lIns="0" rIns="0" tIns="0" bIns="0">
+            <a:spAutoFit/>
+          </a:bodyPr>
+          <a:lstStyle/>
+          <a:p>
+            <a:pPr algn="ctr">
+              <a:lnSpc>
+                <a:spcPct val="100000"/>
+              </a:lnSpc>
+            </a:pPr>
+            <a:r>
+              <a:rPr sz="900" b="0" i="0">
+                <a:solidFill>
+                  <a:srgbClr val="5C6975"/>
+                </a:solidFill>
+                <a:latin typeface="Consolas"/>
+              </a:rPr>
+              <a:t>opt: EMBED v1 schematic — Radiology: AI, Fig. 1</a:t>
+            </a:r>
+          </a:p>
+        </p:txBody>
+      </p:sp>
     </p:spTree>
   </p:cSld>
   <p:clrMapOvr>
@@ -12804,7 +12705,7 @@
                 </a:solidFill>
                 <a:latin typeface="Consolas"/>
               </a:rPr>
-              <a:t>ERA II · 2026 · OPEN DATA</a:t>
+              <a:t>ERA II · 2026 → ERA III</a:t>
             </a:r>
           </a:p>
         </p:txBody>
@@ -12817,8 +12718,8 @@
         </p:nvSpPr>
         <p:spPr>
           <a:xfrm>
-            <a:off x="777240" y="1005840"/>
-            <a:ext cx="5852160" cy="1280160"/>
+            <a:off x="777240" y="1463040"/>
+            <a:ext cx="10607040" cy="1280160"/>
           </a:xfrm>
           <a:prstGeom prst="rect">
             <a:avLst/>
@@ -12837,22 +12738,22 @@
               </a:lnSpc>
             </a:pPr>
             <a:r>
-              <a:rPr sz="2600" b="1" i="0">
+              <a:rPr sz="3200" b="1" i="0">
                 <a:solidFill>
                   <a:srgbClr val="ECEFF3"/>
                 </a:solidFill>
                 <a:latin typeface="Arial"/>
               </a:rPr>
-              <a:t>Emory Breast Imaging Dataset </a:t>
-            </a:r>
-            <a:r>
-              <a:rPr sz="2600" b="1" i="0">
+              <a:t>We are at the </a:t>
+            </a:r>
+            <a:r>
+              <a:rPr sz="3200" b="1" i="0">
                 <a:solidFill>
                   <a:srgbClr val="E7AC51"/>
                 </a:solidFill>
                 <a:latin typeface="Arial"/>
               </a:rPr>
-              <a:t>(EMBED).</a:t>
+              <a:t>brink of Era III.</a:t>
             </a:r>
           </a:p>
         </p:txBody>
@@ -12865,8 +12766,8 @@
         </p:nvSpPr>
         <p:spPr>
           <a:xfrm>
-            <a:off x="777240" y="2103120"/>
-            <a:ext cx="5669280" cy="640080"/>
+            <a:off x="777240" y="2926080"/>
+            <a:ext cx="10424160" cy="2743200"/>
           </a:xfrm>
           <a:prstGeom prst="rect">
             <a:avLst/>
@@ -12881,789 +12782,98 @@
           <a:p>
             <a:pPr algn="l">
               <a:lnSpc>
-                <a:spcPct val="140000"/>
+                <a:spcPct val="145000"/>
               </a:lnSpc>
             </a:pPr>
             <a:r>
-              <a:rPr sz="1500" b="0" i="0">
+              <a:rPr sz="1700" b="0" i="0">
                 <a:solidFill>
                   <a:srgbClr val="9DA9B5"/>
                 </a:solidFill>
                 <a:latin typeface="Arial"/>
               </a:rPr>
-              <a:t>Free to researchers through the </a:t>
-            </a:r>
-            <a:r>
-              <a:rPr sz="1500" b="1" i="0">
+              <a:t>Detection is proven. But the same 2026 image — and the tissue that follows it — already tells us more than </a:t>
+            </a:r>
+            <a:r>
+              <a:rPr sz="1700" b="1" i="0">
                 <a:solidFill>
                   <a:srgbClr val="ECEFF3"/>
                 </a:solidFill>
                 <a:latin typeface="Arial"/>
               </a:rPr>
-              <a:t>AWS Open Data Program.</a:t>
-            </a:r>
-          </a:p>
-        </p:txBody>
-      </p:sp>
-      <p:sp>
-        <p:nvSpPr>
-          <p:cNvPr id="7" name="TextBox 6"/>
-          <p:cNvSpPr txBox="1"/>
-          <p:nvPr/>
-        </p:nvSpPr>
-        <p:spPr>
-          <a:xfrm>
-            <a:off x="777240" y="2788920"/>
-            <a:ext cx="5852160" cy="320040"/>
-          </a:xfrm>
-          <a:prstGeom prst="rect">
-            <a:avLst/>
-          </a:prstGeom>
-          <a:noFill/>
-        </p:spPr>
-        <p:txBody>
-          <a:bodyPr wrap="square" anchor="t" lIns="0" rIns="0" tIns="0" bIns="0">
-            <a:spAutoFit/>
-          </a:bodyPr>
-          <a:lstStyle/>
-          <a:p>
-            <a:pPr algn="l">
-              <a:lnSpc>
-                <a:spcPct val="100000"/>
-              </a:lnSpc>
-            </a:pPr>
-            <a:r>
-              <a:rPr sz="1150" b="1" i="0">
+              <a:t>“is there cancer today?”</a:t>
+            </a:r>
+            <a:r>
+              <a:rPr sz="1700" b="0" i="0">
+                <a:solidFill>
+                  <a:srgbClr val="9DA9B5"/>
+                </a:solidFill>
+                <a:latin typeface="Arial"/>
+              </a:rPr>
+              <a:t> From one screening mammogram and its biopsy: a </a:t>
+            </a:r>
+            <a:r>
+              <a:rPr sz="1700" b="1" i="0">
                 <a:solidFill>
                   <a:srgbClr val="E7AC51"/>
                 </a:solidFill>
-                <a:latin typeface="Consolas"/>
-              </a:rPr>
-              <a:t>EMBED V2 — IN PROGRESS</a:t>
-            </a:r>
-          </a:p>
-        </p:txBody>
-      </p:sp>
-      <p:sp>
-        <p:nvSpPr>
-          <p:cNvPr id="8" name="Rounded Rectangle 7"/>
-          <p:cNvSpPr/>
-          <p:nvPr/>
-        </p:nvSpPr>
-        <p:spPr>
-          <a:xfrm>
-            <a:off x="777240" y="3246120"/>
-            <a:ext cx="1722455" cy="384048"/>
-          </a:xfrm>
-          <a:prstGeom prst="roundRect">
-            <a:avLst/>
-          </a:prstGeom>
-          <a:solidFill>
-            <a:srgbClr val="1B232D"/>
-          </a:solidFill>
-          <a:ln w="9525">
-            <a:solidFill>
-              <a:srgbClr val="2A333D"/>
-            </a:solidFill>
-          </a:ln>
-          <a:effectLst/>
-        </p:spPr>
-        <p:style>
-          <a:lnRef idx="1">
-            <a:schemeClr val="accent1"/>
-          </a:lnRef>
-          <a:fillRef idx="3">
-            <a:schemeClr val="accent1"/>
-          </a:fillRef>
-          <a:effectRef idx="2">
-            <a:schemeClr val="accent1"/>
-          </a:effectRef>
-          <a:fontRef idx="minor">
-            <a:schemeClr val="lt1"/>
-          </a:fontRef>
-        </p:style>
-        <p:txBody>
-          <a:bodyPr rtlCol="0" anchor="ctr" wrap="none" lIns="137160" tIns="0" bIns="0"/>
-          <a:lstStyle/>
-          <a:p>
-            <a:pPr algn="l">
-              <a:lnSpc>
-                <a:spcPct val="100000"/>
-              </a:lnSpc>
-            </a:pPr>
-            <a:r>
-              <a:rPr sz="1050" b="0" i="0">
+                <a:latin typeface="Arial"/>
+              </a:rPr>
+              <a:t>future-risk</a:t>
+            </a:r>
+            <a:r>
+              <a:rPr sz="1700" b="0" i="0">
+                <a:solidFill>
+                  <a:srgbClr val="9DA9B5"/>
+                </a:solidFill>
+                <a:latin typeface="Arial"/>
+              </a:rPr>
+              <a:t> estimate, a </a:t>
+            </a:r>
+            <a:r>
+              <a:rPr sz="1700" b="1" i="0">
+                <a:solidFill>
+                  <a:srgbClr val="E7AC51"/>
+                </a:solidFill>
+                <a:latin typeface="Arial"/>
+              </a:rPr>
+              <a:t>cardiovascular</a:t>
+            </a:r>
+            <a:r>
+              <a:rPr sz="1700" b="0" i="0">
+                <a:solidFill>
+                  <a:srgbClr val="9DA9B5"/>
+                </a:solidFill>
+                <a:latin typeface="Arial"/>
+              </a:rPr>
+              <a:t> signal, and a </a:t>
+            </a:r>
+            <a:r>
+              <a:rPr sz="1700" b="1" i="0">
+                <a:solidFill>
+                  <a:srgbClr val="E7AC51"/>
+                </a:solidFill>
+                <a:latin typeface="Arial"/>
+              </a:rPr>
+              <a:t>molecular recurrence</a:t>
+            </a:r>
+            <a:r>
+              <a:rPr sz="1700" b="0" i="0">
+                <a:solidFill>
+                  <a:srgbClr val="9DA9B5"/>
+                </a:solidFill>
+                <a:latin typeface="Arial"/>
+              </a:rPr>
+              <a:t> score — the shift from finding the lesion to </a:t>
+            </a:r>
+            <a:r>
+              <a:rPr sz="1700" b="1" i="0">
                 <a:solidFill>
                   <a:srgbClr val="ECEFF3"/>
                 </a:solidFill>
-                <a:latin typeface="Consolas"/>
-              </a:rPr>
-              <a:t>~300,000 </a:t>
-            </a:r>
-            <a:r>
-              <a:rPr sz="1050" b="1" i="0">
-                <a:solidFill>
-                  <a:srgbClr val="5FB7C9"/>
-                </a:solidFill>
-                <a:latin typeface="Consolas"/>
-              </a:rPr>
-              <a:t>patients</a:t>
-            </a:r>
-          </a:p>
-        </p:txBody>
-      </p:sp>
-      <p:sp>
-        <p:nvSpPr>
-          <p:cNvPr id="9" name="Rectangle 8"/>
-          <p:cNvSpPr/>
-          <p:nvPr/>
-        </p:nvSpPr>
-        <p:spPr>
-          <a:xfrm>
-            <a:off x="777240" y="3246120"/>
-            <a:ext cx="41148" cy="384048"/>
-          </a:xfrm>
-          <a:prstGeom prst="rect">
-            <a:avLst/>
-          </a:prstGeom>
-          <a:solidFill>
-            <a:srgbClr val="5FB7C9"/>
-          </a:solidFill>
-          <a:ln>
-            <a:noFill/>
-          </a:ln>
-          <a:effectLst/>
-        </p:spPr>
-        <p:style>
-          <a:lnRef idx="1">
-            <a:schemeClr val="accent1"/>
-          </a:lnRef>
-          <a:fillRef idx="3">
-            <a:schemeClr val="accent1"/>
-          </a:fillRef>
-          <a:effectRef idx="2">
-            <a:schemeClr val="accent1"/>
-          </a:effectRef>
-          <a:fontRef idx="minor">
-            <a:schemeClr val="lt1"/>
-          </a:fontRef>
-        </p:style>
-        <p:txBody>
-          <a:bodyPr rtlCol="0" anchor="ctr"/>
-          <a:lstStyle/>
-          <a:p>
-            <a:pPr algn="ctr"/>
-          </a:p>
-        </p:txBody>
-      </p:sp>
-      <p:sp>
-        <p:nvSpPr>
-          <p:cNvPr id="10" name="Rounded Rectangle 9"/>
-          <p:cNvSpPr/>
-          <p:nvPr/>
-        </p:nvSpPr>
-        <p:spPr>
-          <a:xfrm>
-            <a:off x="2645999" y="3246120"/>
-            <a:ext cx="2824673" cy="384048"/>
-          </a:xfrm>
-          <a:prstGeom prst="roundRect">
-            <a:avLst/>
-          </a:prstGeom>
-          <a:solidFill>
-            <a:srgbClr val="1B232D"/>
-          </a:solidFill>
-          <a:ln w="9525">
-            <a:solidFill>
-              <a:srgbClr val="2A333D"/>
-            </a:solidFill>
-          </a:ln>
-          <a:effectLst/>
-        </p:spPr>
-        <p:style>
-          <a:lnRef idx="1">
-            <a:schemeClr val="accent1"/>
-          </a:lnRef>
-          <a:fillRef idx="3">
-            <a:schemeClr val="accent1"/>
-          </a:fillRef>
-          <a:effectRef idx="2">
-            <a:schemeClr val="accent1"/>
-          </a:effectRef>
-          <a:fontRef idx="minor">
-            <a:schemeClr val="lt1"/>
-          </a:fontRef>
-        </p:style>
-        <p:txBody>
-          <a:bodyPr rtlCol="0" anchor="ctr" wrap="none" lIns="137160" tIns="0" bIns="0"/>
-          <a:lstStyle/>
-          <a:p>
-            <a:pPr algn="l">
-              <a:lnSpc>
-                <a:spcPct val="100000"/>
-              </a:lnSpc>
-            </a:pPr>
-            <a:r>
-              <a:rPr sz="1050" b="0" i="0">
-                <a:solidFill>
-                  <a:srgbClr val="ECEFF3"/>
-                </a:solidFill>
-                <a:latin typeface="Consolas"/>
-              </a:rPr>
-              <a:t>~1M </a:t>
-            </a:r>
-            <a:r>
-              <a:rPr sz="1050" b="1" i="0">
-                <a:solidFill>
-                  <a:srgbClr val="5FB7C9"/>
-                </a:solidFill>
-                <a:latin typeface="Consolas"/>
-              </a:rPr>
-              <a:t>exams</a:t>
-            </a:r>
-            <a:r>
-              <a:rPr sz="1050" b="0" i="0">
-                <a:solidFill>
-                  <a:srgbClr val="ECEFF3"/>
-                </a:solidFill>
-                <a:latin typeface="Consolas"/>
-              </a:rPr>
-              <a:t> (2D · DBT · US · MRI)</a:t>
-            </a:r>
-          </a:p>
-        </p:txBody>
-      </p:sp>
-      <p:sp>
-        <p:nvSpPr>
-          <p:cNvPr id="11" name="Rectangle 10"/>
-          <p:cNvSpPr/>
-          <p:nvPr/>
-        </p:nvSpPr>
-        <p:spPr>
-          <a:xfrm>
-            <a:off x="2645999" y="3246120"/>
-            <a:ext cx="41148" cy="384048"/>
-          </a:xfrm>
-          <a:prstGeom prst="rect">
-            <a:avLst/>
-          </a:prstGeom>
-          <a:solidFill>
-            <a:srgbClr val="5FB7C9"/>
-          </a:solidFill>
-          <a:ln>
-            <a:noFill/>
-          </a:ln>
-          <a:effectLst/>
-        </p:spPr>
-        <p:style>
-          <a:lnRef idx="1">
-            <a:schemeClr val="accent1"/>
-          </a:lnRef>
-          <a:fillRef idx="3">
-            <a:schemeClr val="accent1"/>
-          </a:fillRef>
-          <a:effectRef idx="2">
-            <a:schemeClr val="accent1"/>
-          </a:effectRef>
-          <a:fontRef idx="minor">
-            <a:schemeClr val="lt1"/>
-          </a:fontRef>
-        </p:style>
-        <p:txBody>
-          <a:bodyPr rtlCol="0" anchor="ctr"/>
-          <a:lstStyle/>
-          <a:p>
-            <a:pPr algn="ctr"/>
-          </a:p>
-        </p:txBody>
-      </p:sp>
-      <p:sp>
-        <p:nvSpPr>
-          <p:cNvPr id="12" name="Rounded Rectangle 11"/>
-          <p:cNvSpPr/>
-          <p:nvPr/>
-        </p:nvSpPr>
-        <p:spPr>
-          <a:xfrm>
-            <a:off x="777240" y="3749039"/>
-            <a:ext cx="1722455" cy="384048"/>
-          </a:xfrm>
-          <a:prstGeom prst="roundRect">
-            <a:avLst/>
-          </a:prstGeom>
-          <a:solidFill>
-            <a:srgbClr val="1B232D"/>
-          </a:solidFill>
-          <a:ln w="9525">
-            <a:solidFill>
-              <a:srgbClr val="2A333D"/>
-            </a:solidFill>
-          </a:ln>
-          <a:effectLst/>
-        </p:spPr>
-        <p:style>
-          <a:lnRef idx="1">
-            <a:schemeClr val="accent1"/>
-          </a:lnRef>
-          <a:fillRef idx="3">
-            <a:schemeClr val="accent1"/>
-          </a:fillRef>
-          <a:effectRef idx="2">
-            <a:schemeClr val="accent1"/>
-          </a:effectRef>
-          <a:fontRef idx="minor">
-            <a:schemeClr val="lt1"/>
-          </a:fontRef>
-        </p:style>
-        <p:txBody>
-          <a:bodyPr rtlCol="0" anchor="ctr" wrap="none" lIns="137160" tIns="0" bIns="0"/>
-          <a:lstStyle/>
-          <a:p>
-            <a:pPr algn="l">
-              <a:lnSpc>
-                <a:spcPct val="100000"/>
-              </a:lnSpc>
-            </a:pPr>
-            <a:r>
-              <a:rPr sz="1050" b="0" i="0">
-                <a:solidFill>
-                  <a:srgbClr val="ECEFF3"/>
-                </a:solidFill>
-                <a:latin typeface="Consolas"/>
-              </a:rPr>
-              <a:t>Free-text </a:t>
-            </a:r>
-            <a:r>
-              <a:rPr sz="1050" b="1" i="0">
-                <a:solidFill>
-                  <a:srgbClr val="5FB7C9"/>
-                </a:solidFill>
-                <a:latin typeface="Consolas"/>
-              </a:rPr>
-              <a:t>reports</a:t>
-            </a:r>
-          </a:p>
-        </p:txBody>
-      </p:sp>
-      <p:sp>
-        <p:nvSpPr>
-          <p:cNvPr id="13" name="Rectangle 12"/>
-          <p:cNvSpPr/>
-          <p:nvPr/>
-        </p:nvSpPr>
-        <p:spPr>
-          <a:xfrm>
-            <a:off x="777240" y="3749039"/>
-            <a:ext cx="41148" cy="384048"/>
-          </a:xfrm>
-          <a:prstGeom prst="rect">
-            <a:avLst/>
-          </a:prstGeom>
-          <a:solidFill>
-            <a:srgbClr val="5FB7C9"/>
-          </a:solidFill>
-          <a:ln>
-            <a:noFill/>
-          </a:ln>
-          <a:effectLst/>
-        </p:spPr>
-        <p:style>
-          <a:lnRef idx="1">
-            <a:schemeClr val="accent1"/>
-          </a:lnRef>
-          <a:fillRef idx="3">
-            <a:schemeClr val="accent1"/>
-          </a:fillRef>
-          <a:effectRef idx="2">
-            <a:schemeClr val="accent1"/>
-          </a:effectRef>
-          <a:fontRef idx="minor">
-            <a:schemeClr val="lt1"/>
-          </a:fontRef>
-        </p:style>
-        <p:txBody>
-          <a:bodyPr rtlCol="0" anchor="ctr"/>
-          <a:lstStyle/>
-          <a:p>
-            <a:pPr algn="ctr"/>
-          </a:p>
-        </p:txBody>
-      </p:sp>
-      <p:sp>
-        <p:nvSpPr>
-          <p:cNvPr id="14" name="Rounded Rectangle 13"/>
-          <p:cNvSpPr/>
-          <p:nvPr/>
-        </p:nvSpPr>
-        <p:spPr>
-          <a:xfrm>
-            <a:off x="2645999" y="3749039"/>
-            <a:ext cx="1722455" cy="384048"/>
-          </a:xfrm>
-          <a:prstGeom prst="roundRect">
-            <a:avLst/>
-          </a:prstGeom>
-          <a:solidFill>
-            <a:srgbClr val="1B232D"/>
-          </a:solidFill>
-          <a:ln w="9525">
-            <a:solidFill>
-              <a:srgbClr val="2A333D"/>
-            </a:solidFill>
-          </a:ln>
-          <a:effectLst/>
-        </p:spPr>
-        <p:style>
-          <a:lnRef idx="1">
-            <a:schemeClr val="accent1"/>
-          </a:lnRef>
-          <a:fillRef idx="3">
-            <a:schemeClr val="accent1"/>
-          </a:fillRef>
-          <a:effectRef idx="2">
-            <a:schemeClr val="accent1"/>
-          </a:effectRef>
-          <a:fontRef idx="minor">
-            <a:schemeClr val="lt1"/>
-          </a:fontRef>
-        </p:style>
-        <p:txBody>
-          <a:bodyPr rtlCol="0" anchor="ctr" wrap="none" lIns="137160" tIns="0" bIns="0"/>
-          <a:lstStyle/>
-          <a:p>
-            <a:pPr algn="l">
-              <a:lnSpc>
-                <a:spcPct val="100000"/>
-              </a:lnSpc>
-            </a:pPr>
-            <a:r>
-              <a:rPr sz="1050" b="0" i="0">
-                <a:solidFill>
-                  <a:srgbClr val="ECEFF3"/>
-                </a:solidFill>
-                <a:latin typeface="Consolas"/>
-              </a:rPr>
-              <a:t>Patient </a:t>
-            </a:r>
-            <a:r>
-              <a:rPr sz="1050" b="1" i="0">
-                <a:solidFill>
-                  <a:srgbClr val="5FB7C9"/>
-                </a:solidFill>
-                <a:latin typeface="Consolas"/>
-              </a:rPr>
-              <a:t>risk data</a:t>
-            </a:r>
-          </a:p>
-        </p:txBody>
-      </p:sp>
-      <p:sp>
-        <p:nvSpPr>
-          <p:cNvPr id="15" name="Rectangle 14"/>
-          <p:cNvSpPr/>
-          <p:nvPr/>
-        </p:nvSpPr>
-        <p:spPr>
-          <a:xfrm>
-            <a:off x="2645999" y="3749039"/>
-            <a:ext cx="41148" cy="384048"/>
-          </a:xfrm>
-          <a:prstGeom prst="rect">
-            <a:avLst/>
-          </a:prstGeom>
-          <a:solidFill>
-            <a:srgbClr val="5FB7C9"/>
-          </a:solidFill>
-          <a:ln>
-            <a:noFill/>
-          </a:ln>
-          <a:effectLst/>
-        </p:spPr>
-        <p:style>
-          <a:lnRef idx="1">
-            <a:schemeClr val="accent1"/>
-          </a:lnRef>
-          <a:fillRef idx="3">
-            <a:schemeClr val="accent1"/>
-          </a:fillRef>
-          <a:effectRef idx="2">
-            <a:schemeClr val="accent1"/>
-          </a:effectRef>
-          <a:fontRef idx="minor">
-            <a:schemeClr val="lt1"/>
-          </a:fontRef>
-        </p:style>
-        <p:txBody>
-          <a:bodyPr rtlCol="0" anchor="ctr"/>
-          <a:lstStyle/>
-          <a:p>
-            <a:pPr algn="ctr"/>
-          </a:p>
-        </p:txBody>
-      </p:sp>
-      <p:sp>
-        <p:nvSpPr>
-          <p:cNvPr id="16" name="Rounded Rectangle 15"/>
-          <p:cNvSpPr/>
-          <p:nvPr/>
-        </p:nvSpPr>
-        <p:spPr>
-          <a:xfrm>
-            <a:off x="777240" y="4251959"/>
-            <a:ext cx="2588483" cy="384048"/>
-          </a:xfrm>
-          <a:prstGeom prst="roundRect">
-            <a:avLst/>
-          </a:prstGeom>
-          <a:solidFill>
-            <a:srgbClr val="1B232D"/>
-          </a:solidFill>
-          <a:ln w="9525">
-            <a:solidFill>
-              <a:srgbClr val="2A333D"/>
-            </a:solidFill>
-          </a:ln>
-          <a:effectLst/>
-        </p:spPr>
-        <p:style>
-          <a:lnRef idx="1">
-            <a:schemeClr val="accent1"/>
-          </a:lnRef>
-          <a:fillRef idx="3">
-            <a:schemeClr val="accent1"/>
-          </a:fillRef>
-          <a:effectRef idx="2">
-            <a:schemeClr val="accent1"/>
-          </a:effectRef>
-          <a:fontRef idx="minor">
-            <a:schemeClr val="lt1"/>
-          </a:fontRef>
-        </p:style>
-        <p:txBody>
-          <a:bodyPr rtlCol="0" anchor="ctr" wrap="none" lIns="137160" tIns="0" bIns="0"/>
-          <a:lstStyle/>
-          <a:p>
-            <a:pPr algn="l">
-              <a:lnSpc>
-                <a:spcPct val="100000"/>
-              </a:lnSpc>
-            </a:pPr>
-            <a:r>
-              <a:rPr sz="1050" b="0" i="0">
-                <a:solidFill>
-                  <a:srgbClr val="ECEFF3"/>
-                </a:solidFill>
-                <a:latin typeface="Consolas"/>
-              </a:rPr>
-              <a:t>Outcomes </a:t>
-            </a:r>
-            <a:r>
-              <a:rPr sz="1050" b="1" i="0">
-                <a:solidFill>
-                  <a:srgbClr val="5FB7C9"/>
-                </a:solidFill>
-                <a:latin typeface="Consolas"/>
-              </a:rPr>
-              <a:t>registry-harmonized</a:t>
-            </a:r>
-          </a:p>
-        </p:txBody>
-      </p:sp>
-      <p:sp>
-        <p:nvSpPr>
-          <p:cNvPr id="17" name="Rectangle 16"/>
-          <p:cNvSpPr/>
-          <p:nvPr/>
-        </p:nvSpPr>
-        <p:spPr>
-          <a:xfrm>
-            <a:off x="777240" y="4251959"/>
-            <a:ext cx="41148" cy="384048"/>
-          </a:xfrm>
-          <a:prstGeom prst="rect">
-            <a:avLst/>
-          </a:prstGeom>
-          <a:solidFill>
-            <a:srgbClr val="5FB7C9"/>
-          </a:solidFill>
-          <a:ln>
-            <a:noFill/>
-          </a:ln>
-          <a:effectLst/>
-        </p:spPr>
-        <p:style>
-          <a:lnRef idx="1">
-            <a:schemeClr val="accent1"/>
-          </a:lnRef>
-          <a:fillRef idx="3">
-            <a:schemeClr val="accent1"/>
-          </a:fillRef>
-          <a:effectRef idx="2">
-            <a:schemeClr val="accent1"/>
-          </a:effectRef>
-          <a:fontRef idx="minor">
-            <a:schemeClr val="lt1"/>
-          </a:fontRef>
-        </p:style>
-        <p:txBody>
-          <a:bodyPr rtlCol="0" anchor="ctr"/>
-          <a:lstStyle/>
-          <a:p>
-            <a:pPr algn="ctr"/>
-          </a:p>
-        </p:txBody>
-      </p:sp>
-      <p:sp>
-        <p:nvSpPr>
-          <p:cNvPr id="18" name="TextBox 17"/>
-          <p:cNvSpPr txBox="1"/>
-          <p:nvPr/>
-        </p:nvSpPr>
-        <p:spPr>
-          <a:xfrm>
-            <a:off x="777240" y="5897880"/>
-            <a:ext cx="5852160" cy="457200"/>
-          </a:xfrm>
-          <a:prstGeom prst="rect">
-            <a:avLst/>
-          </a:prstGeom>
-          <a:noFill/>
-        </p:spPr>
-        <p:txBody>
-          <a:bodyPr wrap="square" anchor="t" lIns="0" rIns="0" tIns="0" bIns="0">
-            <a:spAutoFit/>
-          </a:bodyPr>
-          <a:lstStyle/>
-          <a:p>
-            <a:pPr algn="l">
-              <a:lnSpc>
-                <a:spcPct val="130000"/>
-              </a:lnSpc>
-            </a:pPr>
-            <a:r>
-              <a:rPr sz="950" b="0" i="0">
-                <a:solidFill>
-                  <a:srgbClr val="5C6975"/>
-                </a:solidFill>
-                <a:latin typeface="Consolas"/>
-              </a:rPr>
-              <a:t>v1: [your group], Radiology: Artificial Intelligence 2023 (Fig. 1) · aws.amazon.com/opendata</a:t>
-            </a:r>
-          </a:p>
-        </p:txBody>
-      </p:sp>
-      <p:sp>
-        <p:nvSpPr>
-          <p:cNvPr id="19" name="Rounded Rectangle 18"/>
-          <p:cNvSpPr/>
-          <p:nvPr/>
-        </p:nvSpPr>
-        <p:spPr>
-          <a:xfrm>
-            <a:off x="6583680" y="1188720"/>
-            <a:ext cx="5120640" cy="4480560"/>
-          </a:xfrm>
-          <a:prstGeom prst="roundRect">
-            <a:avLst/>
-          </a:prstGeom>
-          <a:noFill/>
-          <a:ln w="12700">
-            <a:solidFill>
-              <a:srgbClr val="C98A2E"/>
-            </a:solidFill>
-            <a:prstDash val="dash"/>
-          </a:ln>
-          <a:effectLst/>
-        </p:spPr>
-        <p:style>
-          <a:lnRef idx="1">
-            <a:schemeClr val="accent1"/>
-          </a:lnRef>
-          <a:fillRef idx="3">
-            <a:schemeClr val="accent1"/>
-          </a:fillRef>
-          <a:effectRef idx="2">
-            <a:schemeClr val="accent1"/>
-          </a:effectRef>
-          <a:fontRef idx="minor">
-            <a:schemeClr val="lt1"/>
-          </a:fontRef>
-        </p:style>
-        <p:txBody>
-          <a:bodyPr rtlCol="0" anchor="ctr" wrap="square"/>
-          <a:lstStyle/>
-          <a:p>
-            <a:pPr algn="ctr">
-              <a:lnSpc>
-                <a:spcPct val="100000"/>
-              </a:lnSpc>
-            </a:pPr>
-            <a:r>
-              <a:rPr sz="1100" b="0" i="0">
-                <a:solidFill>
-                  <a:srgbClr val="E7AC51"/>
-                </a:solidFill>
-                <a:latin typeface="Consolas"/>
-              </a:rPr>
-              <a:t>MAP — EMBED USERS BY COUNTRY</a:t>
-            </a:r>
-          </a:p>
-          <a:p>
-            <a:pPr algn="ctr">
-              <a:lnSpc>
-                <a:spcPct val="100000"/>
-              </a:lnSpc>
-              <a:spcBef>
-                <a:spcPts val="300"/>
-              </a:spcBef>
-            </a:pPr>
-            <a:r>
-              <a:rPr sz="900" b="0" i="0">
-                <a:solidFill>
-                  <a:srgbClr val="5C6975"/>
-                </a:solidFill>
-                <a:latin typeface="Consolas"/>
-              </a:rPr>
-              <a:t>[ drop in PNG ]</a:t>
-            </a:r>
-          </a:p>
-        </p:txBody>
-      </p:sp>
-      <p:sp>
-        <p:nvSpPr>
-          <p:cNvPr id="20" name="TextBox 19"/>
-          <p:cNvSpPr txBox="1"/>
-          <p:nvPr/>
-        </p:nvSpPr>
-        <p:spPr>
-          <a:xfrm>
-            <a:off x="6583680" y="5760720"/>
-            <a:ext cx="5120640" cy="274320"/>
-          </a:xfrm>
-          <a:prstGeom prst="rect">
-            <a:avLst/>
-          </a:prstGeom>
-          <a:noFill/>
-        </p:spPr>
-        <p:txBody>
-          <a:bodyPr wrap="square" anchor="t" lIns="0" rIns="0" tIns="0" bIns="0">
-            <a:spAutoFit/>
-          </a:bodyPr>
-          <a:lstStyle/>
-          <a:p>
-            <a:pPr algn="ctr">
-              <a:lnSpc>
-                <a:spcPct val="100000"/>
-              </a:lnSpc>
-            </a:pPr>
-            <a:r>
-              <a:rPr sz="900" b="0" i="0">
-                <a:solidFill>
-                  <a:srgbClr val="5C6975"/>
-                </a:solidFill>
-                <a:latin typeface="Consolas"/>
-              </a:rPr>
-              <a:t>opt: EMBED v1 schematic — Radiology: AI, Fig. 1</a:t>
+                <a:latin typeface="Arial"/>
+              </a:rPr>
+              <a:t>characterizing the patient.</a:t>
             </a:r>
           </a:p>
         </p:txBody>
@@ -13796,7 +13006,7 @@
                 </a:solidFill>
                 <a:latin typeface="Consolas"/>
               </a:rPr>
-              <a:t>ERA II · 2026 → ERA III</a:t>
+              <a:t>ERA III · 2026</a:t>
             </a:r>
           </a:p>
         </p:txBody>
@@ -13809,8 +13019,8 @@
         </p:nvSpPr>
         <p:spPr>
           <a:xfrm>
-            <a:off x="777240" y="1463040"/>
-            <a:ext cx="10607040" cy="1280160"/>
+            <a:off x="777240" y="1828800"/>
+            <a:ext cx="6126480" cy="2926080"/>
           </a:xfrm>
           <a:prstGeom prst="rect">
             <a:avLst/>
@@ -13825,26 +13035,71 @@
           <a:p>
             <a:pPr algn="l">
               <a:lnSpc>
-                <a:spcPct val="112000"/>
+                <a:spcPct val="132000"/>
               </a:lnSpc>
             </a:pPr>
             <a:r>
-              <a:rPr sz="3200" b="1" i="0">
-                <a:solidFill>
-                  <a:srgbClr val="ECEFF3"/>
-                </a:solidFill>
-                <a:latin typeface="Arial"/>
-              </a:rPr>
-              <a:t>We are at the </a:t>
-            </a:r>
-            <a:r>
-              <a:rPr sz="3200" b="1" i="0">
+              <a:rPr sz="2400" b="0" i="0">
+                <a:solidFill>
+                  <a:srgbClr val="9DA9B5"/>
+                </a:solidFill>
+                <a:latin typeface="Arial"/>
+              </a:rPr>
+              <a:t>For 40 years, the only risk signal we could read off the image was </a:t>
+            </a:r>
+            <a:r>
+              <a:rPr sz="2400" b="0" i="0">
                 <a:solidFill>
                   <a:srgbClr val="E7AC51"/>
                 </a:solidFill>
                 <a:latin typeface="Arial"/>
               </a:rPr>
-              <a:t>brink of Era III.</a:t>
+              <a:t>density</a:t>
+            </a:r>
+            <a:r>
+              <a:rPr sz="2400" b="0" i="0">
+                <a:solidFill>
+                  <a:srgbClr val="9DA9B5"/>
+                </a:solidFill>
+                <a:latin typeface="Arial"/>
+              </a:rPr>
+              <a:t>. The clinical models layered on top — </a:t>
+            </a:r>
+            <a:r>
+              <a:rPr sz="2400" b="0" i="0">
+                <a:solidFill>
+                  <a:srgbClr val="E7AC51"/>
+                </a:solidFill>
+                <a:latin typeface="Arial"/>
+              </a:rPr>
+              <a:t>Gail</a:t>
+            </a:r>
+            <a:r>
+              <a:rPr sz="2400" b="0" i="0">
+                <a:solidFill>
+                  <a:srgbClr val="9DA9B5"/>
+                </a:solidFill>
+                <a:latin typeface="Arial"/>
+              </a:rPr>
+              <a:t> and </a:t>
+            </a:r>
+            <a:r>
+              <a:rPr sz="2400" b="0" i="0">
+                <a:solidFill>
+                  <a:srgbClr val="E7AC51"/>
+                </a:solidFill>
+                <a:latin typeface="Arial"/>
+              </a:rPr>
+              <a:t>Tyrer-Cuzick</a:t>
+            </a:r>
+            <a:r>
+              <a:rPr sz="2400" b="0" i="0">
+                <a:solidFill>
+                  <a:srgbClr val="9DA9B5"/>
+                </a:solidFill>
+                <a:latin typeface="Arial"/>
+              </a:rPr>
+              <a:t> — were hardly better than a coin flip.</a:t>
             </a:r>
           </a:p>
         </p:txBody>
@@ -13857,8 +13112,8 @@
         </p:nvSpPr>
         <p:spPr>
           <a:xfrm>
-            <a:off x="777240" y="2926080"/>
-            <a:ext cx="10424160" cy="2743200"/>
+            <a:off x="777240" y="5120640"/>
+            <a:ext cx="6126480" cy="457200"/>
           </a:xfrm>
           <a:prstGeom prst="rect">
             <a:avLst/>
@@ -13873,98 +13128,265 @@
           <a:p>
             <a:pPr algn="l">
               <a:lnSpc>
-                <a:spcPct val="145000"/>
+                <a:spcPct val="130000"/>
               </a:lnSpc>
             </a:pPr>
             <a:r>
-              <a:rPr sz="1700" b="0" i="0">
+              <a:rPr sz="950" b="0" i="0">
+                <a:solidFill>
+                  <a:srgbClr val="5C6975"/>
+                </a:solidFill>
+                <a:latin typeface="Consolas"/>
+              </a:rPr>
+              <a:t>Gail · Tyrer-Cuzick · BCSC — questionnaire + density models</a:t>
+            </a:r>
+          </a:p>
+        </p:txBody>
+      </p:sp>
+      <p:sp>
+        <p:nvSpPr>
+          <p:cNvPr id="7" name="Rectangle 6"/>
+          <p:cNvSpPr/>
+          <p:nvPr/>
+        </p:nvSpPr>
+        <p:spPr>
+          <a:xfrm>
+            <a:off x="7315200" y="2011680"/>
+            <a:ext cx="12700" cy="2194560"/>
+          </a:xfrm>
+          <a:prstGeom prst="rect">
+            <a:avLst/>
+          </a:prstGeom>
+          <a:solidFill>
+            <a:srgbClr val="2A333D"/>
+          </a:solidFill>
+          <a:ln>
+            <a:noFill/>
+          </a:ln>
+          <a:effectLst/>
+        </p:spPr>
+        <p:style>
+          <a:lnRef idx="1">
+            <a:schemeClr val="accent1"/>
+          </a:lnRef>
+          <a:fillRef idx="3">
+            <a:schemeClr val="accent1"/>
+          </a:fillRef>
+          <a:effectRef idx="2">
+            <a:schemeClr val="accent1"/>
+          </a:effectRef>
+          <a:fontRef idx="minor">
+            <a:schemeClr val="lt1"/>
+          </a:fontRef>
+        </p:style>
+        <p:txBody>
+          <a:bodyPr rtlCol="0" anchor="ctr"/>
+          <a:lstStyle/>
+          <a:p>
+            <a:pPr algn="ctr"/>
+          </a:p>
+        </p:txBody>
+      </p:sp>
+      <p:sp>
+        <p:nvSpPr>
+          <p:cNvPr id="8" name="TextBox 7"/>
+          <p:cNvSpPr txBox="1"/>
+          <p:nvPr/>
+        </p:nvSpPr>
+        <p:spPr>
+          <a:xfrm>
+            <a:off x="7680960" y="2148840"/>
+            <a:ext cx="4206240" cy="502920"/>
+          </a:xfrm>
+          <a:prstGeom prst="rect">
+            <a:avLst/>
+          </a:prstGeom>
+          <a:noFill/>
+        </p:spPr>
+        <p:txBody>
+          <a:bodyPr wrap="square" anchor="t" lIns="0" rIns="0" tIns="0" bIns="0">
+            <a:spAutoFit/>
+          </a:bodyPr>
+          <a:lstStyle/>
+          <a:p>
+            <a:pPr algn="l">
+              <a:lnSpc>
+                <a:spcPct val="100000"/>
+              </a:lnSpc>
+            </a:pPr>
+            <a:r>
+              <a:rPr sz="2200" b="1" i="0">
+                <a:solidFill>
+                  <a:srgbClr val="ECEFF3"/>
+                </a:solidFill>
+                <a:latin typeface="Arial"/>
+              </a:rPr>
+              <a:t>~0.62</a:t>
+            </a:r>
+          </a:p>
+        </p:txBody>
+      </p:sp>
+      <p:sp>
+        <p:nvSpPr>
+          <p:cNvPr id="9" name="TextBox 8"/>
+          <p:cNvSpPr txBox="1"/>
+          <p:nvPr/>
+        </p:nvSpPr>
+        <p:spPr>
+          <a:xfrm>
+            <a:off x="7680960" y="2441448"/>
+            <a:ext cx="4206240" cy="548640"/>
+          </a:xfrm>
+          <a:prstGeom prst="rect">
+            <a:avLst/>
+          </a:prstGeom>
+          <a:noFill/>
+        </p:spPr>
+        <p:txBody>
+          <a:bodyPr wrap="square" anchor="t" lIns="0" rIns="0" tIns="0" bIns="0">
+            <a:spAutoFit/>
+          </a:bodyPr>
+          <a:lstStyle/>
+          <a:p>
+            <a:pPr algn="l">
+              <a:lnSpc>
+                <a:spcPct val="120000"/>
+              </a:lnSpc>
+            </a:pPr>
+            <a:r>
+              <a:rPr sz="1100" b="0" i="0">
                 <a:solidFill>
                   <a:srgbClr val="9DA9B5"/>
                 </a:solidFill>
-                <a:latin typeface="Arial"/>
-              </a:rPr>
-              <a:t>Detection is proven. But the same 2026 image — and the tissue that follows it — already tells us more than </a:t>
-            </a:r>
-            <a:r>
-              <a:rPr sz="1700" b="1" i="0">
+                <a:latin typeface="Consolas"/>
+              </a:rPr>
+              <a:t>Tyrer-Cuzick v8 · 5-yr AUC</a:t>
+            </a:r>
+          </a:p>
+        </p:txBody>
+      </p:sp>
+      <p:sp>
+        <p:nvSpPr>
+          <p:cNvPr id="10" name="TextBox 9"/>
+          <p:cNvSpPr txBox="1"/>
+          <p:nvPr/>
+        </p:nvSpPr>
+        <p:spPr>
+          <a:xfrm>
+            <a:off x="7680960" y="2971800"/>
+            <a:ext cx="4206240" cy="502920"/>
+          </a:xfrm>
+          <a:prstGeom prst="rect">
+            <a:avLst/>
+          </a:prstGeom>
+          <a:noFill/>
+        </p:spPr>
+        <p:txBody>
+          <a:bodyPr wrap="square" anchor="t" lIns="0" rIns="0" tIns="0" bIns="0">
+            <a:spAutoFit/>
+          </a:bodyPr>
+          <a:lstStyle/>
+          <a:p>
+            <a:pPr algn="l">
+              <a:lnSpc>
+                <a:spcPct val="100000"/>
+              </a:lnSpc>
+            </a:pPr>
+            <a:r>
+              <a:rPr sz="2200" b="1" i="0">
                 <a:solidFill>
                   <a:srgbClr val="ECEFF3"/>
                 </a:solidFill>
                 <a:latin typeface="Arial"/>
               </a:rPr>
-              <a:t>“is there cancer today?”</a:t>
-            </a:r>
-            <a:r>
-              <a:rPr sz="1700" b="0" i="0">
+              <a:t>~0.55–0.58</a:t>
+            </a:r>
+          </a:p>
+        </p:txBody>
+      </p:sp>
+      <p:sp>
+        <p:nvSpPr>
+          <p:cNvPr id="11" name="TextBox 10"/>
+          <p:cNvSpPr txBox="1"/>
+          <p:nvPr/>
+        </p:nvSpPr>
+        <p:spPr>
+          <a:xfrm>
+            <a:off x="7680960" y="3264408"/>
+            <a:ext cx="4206240" cy="548640"/>
+          </a:xfrm>
+          <a:prstGeom prst="rect">
+            <a:avLst/>
+          </a:prstGeom>
+          <a:noFill/>
+        </p:spPr>
+        <p:txBody>
+          <a:bodyPr wrap="square" anchor="t" lIns="0" rIns="0" tIns="0" bIns="0">
+            <a:spAutoFit/>
+          </a:bodyPr>
+          <a:lstStyle/>
+          <a:p>
+            <a:pPr algn="l">
+              <a:lnSpc>
+                <a:spcPct val="120000"/>
+              </a:lnSpc>
+            </a:pPr>
+            <a:r>
+              <a:rPr sz="1100" b="0" i="0">
                 <a:solidFill>
                   <a:srgbClr val="9DA9B5"/>
                 </a:solidFill>
-                <a:latin typeface="Arial"/>
-              </a:rPr>
-              <a:t> From one screening mammogram and its biopsy: a </a:t>
-            </a:r>
-            <a:r>
-              <a:rPr sz="1700" b="1" i="0">
-                <a:solidFill>
-                  <a:srgbClr val="E7AC51"/>
-                </a:solidFill>
-                <a:latin typeface="Arial"/>
-              </a:rPr>
-              <a:t>future-risk</a:t>
-            </a:r>
-            <a:r>
-              <a:rPr sz="1700" b="0" i="0">
+                <a:latin typeface="Consolas"/>
+              </a:rPr>
+              <a:t>Gail model · 5-yr AUC</a:t>
+            </a:r>
+          </a:p>
+        </p:txBody>
+      </p:sp>
+      <p:sp>
+        <p:nvSpPr>
+          <p:cNvPr id="12" name="TextBox 11"/>
+          <p:cNvSpPr txBox="1"/>
+          <p:nvPr/>
+        </p:nvSpPr>
+        <p:spPr>
+          <a:xfrm>
+            <a:off x="7680960" y="3886200"/>
+            <a:ext cx="4206240" cy="822960"/>
+          </a:xfrm>
+          <a:prstGeom prst="rect">
+            <a:avLst/>
+          </a:prstGeom>
+          <a:noFill/>
+        </p:spPr>
+        <p:txBody>
+          <a:bodyPr wrap="square" anchor="t" lIns="0" rIns="0" tIns="0" bIns="0">
+            <a:spAutoFit/>
+          </a:bodyPr>
+          <a:lstStyle/>
+          <a:p>
+            <a:pPr algn="l">
+              <a:lnSpc>
+                <a:spcPct val="135000"/>
+              </a:lnSpc>
+            </a:pPr>
+            <a:r>
+              <a:rPr sz="1300" b="0" i="0">
+                <a:solidFill>
+                  <a:srgbClr val="ECEFF3"/>
+                </a:solidFill>
+                <a:latin typeface="Arial"/>
+              </a:rPr>
+              <a:t>Coin flip is 0.50. </a:t>
+            </a:r>
+            <a:r>
+              <a:rPr sz="1300" b="0" i="0">
                 <a:solidFill>
                   <a:srgbClr val="9DA9B5"/>
                 </a:solidFill>
                 <a:latin typeface="Arial"/>
               </a:rPr>
-              <a:t> estimate, a </a:t>
-            </a:r>
-            <a:r>
-              <a:rPr sz="1700" b="1" i="0">
-                <a:solidFill>
-                  <a:srgbClr val="E7AC51"/>
-                </a:solidFill>
-                <a:latin typeface="Arial"/>
-              </a:rPr>
-              <a:t>cardiovascular</a:t>
-            </a:r>
-            <a:r>
-              <a:rPr sz="1700" b="0" i="0">
-                <a:solidFill>
-                  <a:srgbClr val="9DA9B5"/>
-                </a:solidFill>
-                <a:latin typeface="Arial"/>
-              </a:rPr>
-              <a:t> signal, and a </a:t>
-            </a:r>
-            <a:r>
-              <a:rPr sz="1700" b="1" i="0">
-                <a:solidFill>
-                  <a:srgbClr val="E7AC51"/>
-                </a:solidFill>
-                <a:latin typeface="Arial"/>
-              </a:rPr>
-              <a:t>molecular recurrence</a:t>
-            </a:r>
-            <a:r>
-              <a:rPr sz="1700" b="0" i="0">
-                <a:solidFill>
-                  <a:srgbClr val="9DA9B5"/>
-                </a:solidFill>
-                <a:latin typeface="Arial"/>
-              </a:rPr>
-              <a:t> score — the shift from finding the lesion to </a:t>
-            </a:r>
-            <a:r>
-              <a:rPr sz="1700" b="1" i="0">
-                <a:solidFill>
-                  <a:srgbClr val="ECEFF3"/>
-                </a:solidFill>
-                <a:latin typeface="Arial"/>
-              </a:rPr>
-              <a:t>characterizing the patient.</a:t>
+              <a:t>For the woman in front of you, barely above it.</a:t>
             </a:r>
           </a:p>
         </p:txBody>
